--- a/docs/MHT - Case Study.pptx
+++ b/docs/MHT - Case Study.pptx
@@ -35,21 +35,22 @@
     <p:sldId id="280" r:id="rId30"/>
     <p:sldId id="281" r:id="rId31"/>
     <p:sldId id="282" r:id="rId32"/>
+    <p:sldId id="283" r:id="rId33"/>
   </p:sldIdLst>
   <p:sldSz cy="5143500" cx="9144000"/>
   <p:notesSz cx="6858000" cy="9144000"/>
   <p:embeddedFontLst>
     <p:embeddedFont>
       <p:font typeface="PT Sans Narrow"/>
-      <p:regular r:id="rId33"/>
-      <p:bold r:id="rId34"/>
+      <p:regular r:id="rId34"/>
+      <p:bold r:id="rId35"/>
     </p:embeddedFont>
     <p:embeddedFont>
       <p:font typeface="Open Sans"/>
-      <p:regular r:id="rId35"/>
-      <p:bold r:id="rId36"/>
-      <p:italic r:id="rId37"/>
-      <p:boldItalic r:id="rId38"/>
+      <p:regular r:id="rId36"/>
+      <p:bold r:id="rId37"/>
+      <p:italic r:id="rId38"/>
+      <p:boldItalic r:id="rId39"/>
     </p:embeddedFont>
   </p:embeddedFontLst>
   <p:defaultTextStyle>
@@ -1636,7 +1637,7 @@
       </p:grpSpPr>
       <p:sp>
         <p:nvSpPr>
-          <p:cNvPr id="178" name="Google Shape;178;g3fbe8c1ba05_0_812:notes"/>
+          <p:cNvPr id="178" name="Google Shape;178;g3fbe8c1ba05_0_670:notes"/>
           <p:cNvSpPr/>
           <p:nvPr>
             <p:ph idx="2" type="sldImg"/>
@@ -1671,7 +1672,7 @@
       </p:sp>
       <p:sp>
         <p:nvSpPr>
-          <p:cNvPr id="179" name="Google Shape;179;g3fbe8c1ba05_0_812:notes"/>
+          <p:cNvPr id="179" name="Google Shape;179;g3fbe8c1ba05_0_670:notes"/>
           <p:cNvSpPr txBox="1"/>
           <p:nvPr>
             <p:ph idx="1" type="body"/>
@@ -1735,7 +1736,7 @@
       </p:grpSpPr>
       <p:sp>
         <p:nvSpPr>
-          <p:cNvPr id="184" name="Google Shape;184;g3fbe8c1ba05_0_670:notes"/>
+          <p:cNvPr id="184" name="Google Shape;184;g3fbe8c1ba05_0_675:notes"/>
           <p:cNvSpPr/>
           <p:nvPr>
             <p:ph idx="2" type="sldImg"/>
@@ -1770,7 +1771,7 @@
       </p:sp>
       <p:sp>
         <p:nvSpPr>
-          <p:cNvPr id="185" name="Google Shape;185;g3fbe8c1ba05_0_670:notes"/>
+          <p:cNvPr id="185" name="Google Shape;185;g3fbe8c1ba05_0_675:notes"/>
           <p:cNvSpPr txBox="1"/>
           <p:nvPr>
             <p:ph idx="1" type="body"/>
@@ -1933,7 +1934,7 @@
       </p:grpSpPr>
       <p:sp>
         <p:nvSpPr>
-          <p:cNvPr id="190" name="Google Shape;190;g3fbe8c1ba05_0_675:notes"/>
+          <p:cNvPr id="190" name="Google Shape;190;g3fbe8c1ba05_0_650:notes"/>
           <p:cNvSpPr/>
           <p:nvPr>
             <p:ph idx="2" type="sldImg"/>
@@ -1968,7 +1969,7 @@
       </p:sp>
       <p:sp>
         <p:nvSpPr>
-          <p:cNvPr id="191" name="Google Shape;191;g3fbe8c1ba05_0_675:notes"/>
+          <p:cNvPr id="191" name="Google Shape;191;g3fbe8c1ba05_0_650:notes"/>
           <p:cNvSpPr txBox="1"/>
           <p:nvPr>
             <p:ph idx="1" type="body"/>
@@ -2018,7 +2019,7 @@
   <p:cSld>
     <p:spTree>
       <p:nvGrpSpPr>
-        <p:cNvPr id="195" name="Shape 195"/>
+        <p:cNvPr id="194" name="Shape 194"/>
         <p:cNvGrpSpPr/>
         <p:nvPr/>
       </p:nvGrpSpPr>
@@ -2032,7 +2033,7 @@
       </p:grpSpPr>
       <p:sp>
         <p:nvSpPr>
-          <p:cNvPr id="196" name="Google Shape;196;g3fbe8c1ba05_0_650:notes"/>
+          <p:cNvPr id="195" name="Google Shape;195;g3fbe8c1ba05_0_766:notes"/>
           <p:cNvSpPr/>
           <p:nvPr>
             <p:ph idx="2" type="sldImg"/>
@@ -2067,7 +2068,7 @@
       </p:sp>
       <p:sp>
         <p:nvSpPr>
-          <p:cNvPr id="197" name="Google Shape;197;g3fbe8c1ba05_0_650:notes"/>
+          <p:cNvPr id="196" name="Google Shape;196;g3fbe8c1ba05_0_766:notes"/>
           <p:cNvSpPr txBox="1"/>
           <p:nvPr>
             <p:ph idx="1" type="body"/>
@@ -2117,7 +2118,7 @@
   <p:cSld>
     <p:spTree>
       <p:nvGrpSpPr>
-        <p:cNvPr id="201" name="Shape 201"/>
+        <p:cNvPr id="200" name="Shape 200"/>
         <p:cNvGrpSpPr/>
         <p:nvPr/>
       </p:nvGrpSpPr>
@@ -2131,7 +2132,7 @@
       </p:grpSpPr>
       <p:sp>
         <p:nvSpPr>
-          <p:cNvPr id="202" name="Google Shape;202;g3fbe8c1ba05_0_766:notes"/>
+          <p:cNvPr id="201" name="Google Shape;201;g3fbe8c1ba05_0_833:notes"/>
           <p:cNvSpPr/>
           <p:nvPr>
             <p:ph idx="2" type="sldImg"/>
@@ -2166,7 +2167,7 @@
       </p:sp>
       <p:sp>
         <p:nvSpPr>
-          <p:cNvPr id="203" name="Google Shape;203;g3fbe8c1ba05_0_766:notes"/>
+          <p:cNvPr id="202" name="Google Shape;202;g3fbe8c1ba05_0_833:notes"/>
           <p:cNvSpPr txBox="1"/>
           <p:nvPr>
             <p:ph idx="1" type="body"/>
@@ -2216,7 +2217,7 @@
   <p:cSld>
     <p:spTree>
       <p:nvGrpSpPr>
-        <p:cNvPr id="207" name="Shape 207"/>
+        <p:cNvPr id="206" name="Shape 206"/>
         <p:cNvGrpSpPr/>
         <p:nvPr/>
       </p:nvGrpSpPr>
@@ -2230,7 +2231,7 @@
       </p:grpSpPr>
       <p:sp>
         <p:nvSpPr>
-          <p:cNvPr id="208" name="Google Shape;208;g3fbe8c1ba05_0_833:notes"/>
+          <p:cNvPr id="207" name="Google Shape;207;g3fbe8c1ba05_0_792:notes"/>
           <p:cNvSpPr/>
           <p:nvPr>
             <p:ph idx="2" type="sldImg"/>
@@ -2265,7 +2266,7 @@
       </p:sp>
       <p:sp>
         <p:nvSpPr>
-          <p:cNvPr id="209" name="Google Shape;209;g3fbe8c1ba05_0_833:notes"/>
+          <p:cNvPr id="208" name="Google Shape;208;g3fbe8c1ba05_0_792:notes"/>
           <p:cNvSpPr txBox="1"/>
           <p:nvPr>
             <p:ph idx="1" type="body"/>
@@ -2315,7 +2316,7 @@
   <p:cSld>
     <p:spTree>
       <p:nvGrpSpPr>
-        <p:cNvPr id="213" name="Shape 213"/>
+        <p:cNvPr id="212" name="Shape 212"/>
         <p:cNvGrpSpPr/>
         <p:nvPr/>
       </p:nvGrpSpPr>
@@ -2329,7 +2330,7 @@
       </p:grpSpPr>
       <p:sp>
         <p:nvSpPr>
-          <p:cNvPr id="214" name="Google Shape;214;g3fbe8c1ba05_0_792:notes"/>
+          <p:cNvPr id="213" name="Google Shape;213;g3fbe8c1ba05_0_722:notes"/>
           <p:cNvSpPr/>
           <p:nvPr>
             <p:ph idx="2" type="sldImg"/>
@@ -2364,7 +2365,7 @@
       </p:sp>
       <p:sp>
         <p:nvSpPr>
-          <p:cNvPr id="215" name="Google Shape;215;g3fbe8c1ba05_0_792:notes"/>
+          <p:cNvPr id="214" name="Google Shape;214;g3fbe8c1ba05_0_722:notes"/>
           <p:cNvSpPr txBox="1"/>
           <p:nvPr>
             <p:ph idx="1" type="body"/>
@@ -2428,7 +2429,7 @@
       </p:grpSpPr>
       <p:sp>
         <p:nvSpPr>
-          <p:cNvPr id="220" name="Google Shape;220;g3fbe8c1ba05_0_722:notes"/>
+          <p:cNvPr id="220" name="Google Shape;220;g3fbe8c1ba05_0_660:notes"/>
           <p:cNvSpPr/>
           <p:nvPr>
             <p:ph idx="2" type="sldImg"/>
@@ -2463,7 +2464,7 @@
       </p:sp>
       <p:sp>
         <p:nvSpPr>
-          <p:cNvPr id="221" name="Google Shape;221;g3fbe8c1ba05_0_722:notes"/>
+          <p:cNvPr id="221" name="Google Shape;221;g3fbe8c1ba05_0_660:notes"/>
           <p:cNvSpPr txBox="1"/>
           <p:nvPr>
             <p:ph idx="1" type="body"/>
@@ -2527,7 +2528,7 @@
       </p:grpSpPr>
       <p:sp>
         <p:nvSpPr>
-          <p:cNvPr id="227" name="Google Shape;227;g3fbe8c1ba05_0_660:notes"/>
+          <p:cNvPr id="227" name="Google Shape;227;g3fbe8c1ba05_0_1417:notes"/>
           <p:cNvSpPr/>
           <p:nvPr>
             <p:ph idx="2" type="sldImg"/>
@@ -2562,7 +2563,7 @@
       </p:sp>
       <p:sp>
         <p:nvSpPr>
-          <p:cNvPr id="228" name="Google Shape;228;g3fbe8c1ba05_0_660:notes"/>
+          <p:cNvPr id="228" name="Google Shape;228;g3fbe8c1ba05_0_1417:notes"/>
           <p:cNvSpPr txBox="1"/>
           <p:nvPr>
             <p:ph idx="1" type="body"/>
@@ -2612,7 +2613,7 @@
   <p:cSld>
     <p:spTree>
       <p:nvGrpSpPr>
-        <p:cNvPr id="233" name="Shape 233"/>
+        <p:cNvPr id="231" name="Shape 231"/>
         <p:cNvGrpSpPr/>
         <p:nvPr/>
       </p:nvGrpSpPr>
@@ -2626,7 +2627,7 @@
       </p:grpSpPr>
       <p:sp>
         <p:nvSpPr>
-          <p:cNvPr id="234" name="Google Shape;234;g3fbe8c1ba05_0_1417:notes"/>
+          <p:cNvPr id="232" name="Google Shape;232;g3fbe8c1ba05_0_1448:notes"/>
           <p:cNvSpPr/>
           <p:nvPr>
             <p:ph idx="2" type="sldImg"/>
@@ -2661,7 +2662,106 @@
       </p:sp>
       <p:sp>
         <p:nvSpPr>
-          <p:cNvPr id="235" name="Google Shape;235;g3fbe8c1ba05_0_1417:notes"/>
+          <p:cNvPr id="233" name="Google Shape;233;g3fbe8c1ba05_0_1448:notes"/>
+          <p:cNvSpPr txBox="1"/>
+          <p:nvPr>
+            <p:ph idx="1" type="body"/>
+          </p:nvPr>
+        </p:nvSpPr>
+        <p:spPr>
+          <a:xfrm>
+            <a:off x="685800" y="4343400"/>
+            <a:ext cx="5486400" cy="4114800"/>
+          </a:xfrm>
+          <a:prstGeom prst="rect">
+            <a:avLst/>
+          </a:prstGeom>
+        </p:spPr>
+        <p:txBody>
+          <a:bodyPr anchorCtr="0" anchor="t" bIns="91425" lIns="91425" spcFirstLastPara="1" rIns="91425" wrap="square" tIns="91425">
+            <a:noAutofit/>
+          </a:bodyPr>
+          <a:lstStyle/>
+          <a:p>
+            <a:pPr indent="0" lvl="0" marL="0" rtl="0" algn="l">
+              <a:spcBef>
+                <a:spcPts val="0"/>
+              </a:spcBef>
+              <a:spcAft>
+                <a:spcPts val="0"/>
+              </a:spcAft>
+              <a:buNone/>
+            </a:pPr>
+            <a:r>
+              <a:t/>
+            </a:r>
+            <a:endParaRPr/>
+          </a:p>
+        </p:txBody>
+      </p:sp>
+    </p:spTree>
+  </p:cSld>
+  <p:clrMapOvr>
+    <a:masterClrMapping/>
+  </p:clrMapOvr>
+</p:notes>
+</file>
+
+<file path=ppt/notesSlides/notesSlide28.xml><?xml version="1.0" encoding="utf-8"?>
+<p:notes xmlns:a="http://schemas.openxmlformats.org/drawingml/2006/main" xmlns:r="http://schemas.openxmlformats.org/officeDocument/2006/relationships" xmlns:mc="http://schemas.openxmlformats.org/markup-compatibility/2006" xmlns:mv="urn:schemas-microsoft-com:mac:vml" xmlns:p="http://schemas.openxmlformats.org/presentationml/2006/main" xmlns:c="http://schemas.openxmlformats.org/drawingml/2006/chart" xmlns:dgm="http://schemas.openxmlformats.org/drawingml/2006/diagram" xmlns:o="urn:schemas-microsoft-com:office:office" xmlns:v="urn:schemas-microsoft-com:vml" xmlns:pvml="urn:schemas-microsoft-com:office:powerpoint" xmlns:com="http://schemas.openxmlformats.org/drawingml/2006/compatibility" xmlns:p14="http://schemas.microsoft.com/office/powerpoint/2010/main" xmlns:p15="http://schemas.microsoft.com/office/powerpoint/2012/main" xmlns:ahyp="http://schemas.microsoft.com/office/drawing/2018/hyperlinkcolor" showMasterPhAnim="0" showMasterSp="0">
+  <p:cSld>
+    <p:spTree>
+      <p:nvGrpSpPr>
+        <p:cNvPr id="236" name="Shape 236"/>
+        <p:cNvGrpSpPr/>
+        <p:nvPr/>
+      </p:nvGrpSpPr>
+      <p:grpSpPr>
+        <a:xfrm>
+          <a:off x="0" y="0"/>
+          <a:ext cx="0" cy="0"/>
+          <a:chOff x="0" y="0"/>
+          <a:chExt cx="0" cy="0"/>
+        </a:xfrm>
+      </p:grpSpPr>
+      <p:sp>
+        <p:nvSpPr>
+          <p:cNvPr id="237" name="Google Shape;237;g3fbe8c1ba05_0_812:notes"/>
+          <p:cNvSpPr/>
+          <p:nvPr>
+            <p:ph idx="2" type="sldImg"/>
+          </p:nvPr>
+        </p:nvSpPr>
+        <p:spPr>
+          <a:xfrm>
+            <a:off x="381300" y="685800"/>
+            <a:ext cx="6096000" cy="3429000"/>
+          </a:xfrm>
+          <a:custGeom>
+            <a:rect b="b" l="l" r="r" t="t"/>
+            <a:pathLst>
+              <a:path extrusionOk="0" h="120000" w="120000">
+                <a:moveTo>
+                  <a:pt x="0" y="0"/>
+                </a:moveTo>
+                <a:lnTo>
+                  <a:pt x="120000" y="0"/>
+                </a:lnTo>
+                <a:lnTo>
+                  <a:pt x="120000" y="120000"/>
+                </a:lnTo>
+                <a:lnTo>
+                  <a:pt x="0" y="120000"/>
+                </a:lnTo>
+                <a:close/>
+              </a:path>
+            </a:pathLst>
+          </a:custGeom>
+        </p:spPr>
+      </p:sp>
+      <p:sp>
+        <p:nvSpPr>
+          <p:cNvPr id="238" name="Google Shape;238;g3fbe8c1ba05_0_812:notes"/>
           <p:cNvSpPr txBox="1"/>
           <p:nvPr>
             <p:ph idx="1" type="body"/>
@@ -8990,7 +9090,7 @@
             </a:pPr>
             <a:r>
               <a:rPr lang="en"/>
-              <a:t>Who is the MHT Menopause - Climara Patient Community?</a:t>
+              <a:t>What is the Climara Patient Community experience?</a:t>
             </a:r>
             <a:endParaRPr/>
           </a:p>
@@ -10132,7 +10232,7 @@
         </p:nvSpPr>
         <p:spPr>
           <a:xfrm>
-            <a:off x="311700" y="137300"/>
+            <a:off x="311700" y="445025"/>
             <a:ext cx="8520600" cy="707400"/>
           </a:xfrm>
           <a:prstGeom prst="rect">
@@ -10156,46 +10256,256 @@
             </a:pPr>
             <a:r>
               <a:rPr lang="en"/>
-              <a:t>Insights and Findings</a:t>
+              <a:t>Additional Considerations &amp; Next Steps</a:t>
             </a:r>
             <a:endParaRPr/>
           </a:p>
         </p:txBody>
       </p:sp>
-      <p:pic>
-        <p:nvPicPr>
+      <p:sp>
+        <p:nvSpPr>
           <p:cNvPr id="182" name="Google Shape;182;p30"/>
-          <p:cNvPicPr preferRelativeResize="0"/>
-          <p:nvPr/>
-        </p:nvPicPr>
-        <p:blipFill>
-          <a:blip r:embed="rId3">
-            <a:alphaModFix/>
-          </a:blip>
-          <a:stretch>
-            <a:fillRect/>
-          </a:stretch>
-        </p:blipFill>
-        <p:spPr>
-          <a:xfrm>
-            <a:off x="1391400" y="734400"/>
-            <a:ext cx="6402624" cy="4306525"/>
+          <p:cNvSpPr txBox="1"/>
+          <p:nvPr>
+            <p:ph idx="1" type="body"/>
+          </p:nvPr>
+        </p:nvSpPr>
+        <p:spPr>
+          <a:xfrm>
+            <a:off x="311700" y="1266325"/>
+            <a:ext cx="8520600" cy="3672300"/>
           </a:xfrm>
           <a:prstGeom prst="rect">
             <a:avLst/>
           </a:prstGeom>
-          <a:noFill/>
-          <a:ln cap="flat" cmpd="sng" w="9525">
-            <a:solidFill>
-              <a:schemeClr val="dk2"/>
-            </a:solidFill>
-            <a:prstDash val="solid"/>
-            <a:round/>
-            <a:headEnd len="sm" w="sm" type="none"/>
-            <a:tailEnd len="sm" w="sm" type="none"/>
-          </a:ln>
-        </p:spPr>
-      </p:pic>
+        </p:spPr>
+        <p:txBody>
+          <a:bodyPr anchorCtr="0" anchor="t" bIns="91425" lIns="91425" spcFirstLastPara="1" rIns="91425" wrap="square" tIns="91425">
+            <a:normAutofit lnSpcReduction="10000"/>
+          </a:bodyPr>
+          <a:lstStyle/>
+          <a:p>
+            <a:pPr indent="-342900" lvl="0" marL="457200" rtl="0" algn="l">
+              <a:spcBef>
+                <a:spcPts val="0"/>
+              </a:spcBef>
+              <a:spcAft>
+                <a:spcPts val="0"/>
+              </a:spcAft>
+              <a:buSzPts val="1800"/>
+              <a:buChar char="●"/>
+            </a:pPr>
+            <a:r>
+              <a:rPr lang="en"/>
+              <a:t>Scaling for Production</a:t>
+            </a:r>
+            <a:endParaRPr/>
+          </a:p>
+          <a:p>
+            <a:pPr indent="-317500" lvl="1" marL="914400" rtl="0" algn="l">
+              <a:spcBef>
+                <a:spcPts val="0"/>
+              </a:spcBef>
+              <a:spcAft>
+                <a:spcPts val="0"/>
+              </a:spcAft>
+              <a:buSzPts val="1400"/>
+              <a:buChar char="○"/>
+            </a:pPr>
+            <a:r>
+              <a:rPr lang="en"/>
+              <a:t>Keep as LLM/agent-based → vLLM on cloud compute ⇒ 37 million posts for &lt; ~$5,000, ~3-8 days</a:t>
+            </a:r>
+            <a:endParaRPr/>
+          </a:p>
+          <a:p>
+            <a:pPr indent="-342900" lvl="0" marL="457200" rtl="0" algn="l">
+              <a:spcBef>
+                <a:spcPts val="1000"/>
+              </a:spcBef>
+              <a:spcAft>
+                <a:spcPts val="0"/>
+              </a:spcAft>
+              <a:buSzPts val="1800"/>
+              <a:buChar char="●"/>
+            </a:pPr>
+            <a:r>
+              <a:rPr lang="en"/>
+              <a:t>Validation</a:t>
+            </a:r>
+            <a:endParaRPr/>
+          </a:p>
+          <a:p>
+            <a:pPr indent="-317500" lvl="1" marL="914400" rtl="0" algn="l">
+              <a:spcBef>
+                <a:spcPts val="0"/>
+              </a:spcBef>
+              <a:spcAft>
+                <a:spcPts val="0"/>
+              </a:spcAft>
+              <a:buSzPts val="1400"/>
+              <a:buChar char="○"/>
+            </a:pPr>
+            <a:r>
+              <a:rPr lang="en"/>
+              <a:t>More human review if given more time</a:t>
+            </a:r>
+            <a:endParaRPr/>
+          </a:p>
+          <a:p>
+            <a:pPr indent="-317500" lvl="1" marL="914400" rtl="0" algn="l">
+              <a:spcBef>
+                <a:spcPts val="0"/>
+              </a:spcBef>
+              <a:spcAft>
+                <a:spcPts val="0"/>
+              </a:spcAft>
+              <a:buSzPts val="1400"/>
+              <a:buChar char="○"/>
+            </a:pPr>
+            <a:r>
+              <a:rPr lang="en"/>
+              <a:t>“lexicon” configuration vs. MHT Medical Ontology Reference database</a:t>
+            </a:r>
+            <a:endParaRPr/>
+          </a:p>
+          <a:p>
+            <a:pPr indent="-317500" lvl="1" marL="914400" rtl="0" algn="l">
+              <a:spcBef>
+                <a:spcPts val="0"/>
+              </a:spcBef>
+              <a:spcAft>
+                <a:spcPts val="0"/>
+              </a:spcAft>
+              <a:buSzPts val="1400"/>
+              <a:buChar char="○"/>
+            </a:pPr>
+            <a:r>
+              <a:rPr lang="en"/>
+              <a:t>“</a:t>
+            </a:r>
+            <a:r>
+              <a:rPr lang="en"/>
+              <a:t>d</a:t>
+            </a:r>
+            <a:r>
+              <a:rPr lang="en"/>
+              <a:t>omain” configuration vs. MHT internal knowledge reference(s)</a:t>
+            </a:r>
+            <a:endParaRPr/>
+          </a:p>
+          <a:p>
+            <a:pPr indent="-342900" lvl="0" marL="457200" rtl="0" algn="l">
+              <a:spcBef>
+                <a:spcPts val="1000"/>
+              </a:spcBef>
+              <a:spcAft>
+                <a:spcPts val="0"/>
+              </a:spcAft>
+              <a:buSzPts val="1800"/>
+              <a:buChar char="●"/>
+            </a:pPr>
+            <a:r>
+              <a:rPr lang="en"/>
+              <a:t>Analytical Data Products</a:t>
+            </a:r>
+            <a:endParaRPr/>
+          </a:p>
+          <a:p>
+            <a:pPr indent="-317500" lvl="1" marL="914400" rtl="0" algn="l">
+              <a:spcBef>
+                <a:spcPts val="0"/>
+              </a:spcBef>
+              <a:spcAft>
+                <a:spcPts val="0"/>
+              </a:spcAft>
+              <a:buSzPts val="1400"/>
+              <a:buChar char="○"/>
+            </a:pPr>
+            <a:r>
+              <a:rPr lang="en"/>
+              <a:t>Switch Events - Refine prompt; more quality measures/tests</a:t>
+            </a:r>
+            <a:endParaRPr/>
+          </a:p>
+          <a:p>
+            <a:pPr indent="-317500" lvl="1" marL="914400" rtl="0" algn="l">
+              <a:spcBef>
+                <a:spcPts val="0"/>
+              </a:spcBef>
+              <a:spcAft>
+                <a:spcPts val="0"/>
+              </a:spcAft>
+              <a:buSzPts val="1400"/>
+              <a:buChar char="○"/>
+            </a:pPr>
+            <a:r>
+              <a:rPr lang="en"/>
+              <a:t>Enrichment - </a:t>
+            </a:r>
+            <a:r>
+              <a:rPr lang="en"/>
+              <a:t>Try to extract additional output</a:t>
+            </a:r>
+            <a:r>
+              <a:rPr lang="en"/>
+              <a:t>: </a:t>
+            </a:r>
+            <a:endParaRPr/>
+          </a:p>
+          <a:p>
+            <a:pPr indent="-317500" lvl="2" marL="1371600" rtl="0" algn="l">
+              <a:spcBef>
+                <a:spcPts val="0"/>
+              </a:spcBef>
+              <a:spcAft>
+                <a:spcPts val="0"/>
+              </a:spcAft>
+              <a:buSzPts val="1400"/>
+              <a:buChar char="■"/>
+            </a:pPr>
+            <a:r>
+              <a:rPr lang="en"/>
+              <a:t>Efficacy </a:t>
+            </a:r>
+            <a:endParaRPr/>
+          </a:p>
+          <a:p>
+            <a:pPr indent="-317500" lvl="2" marL="1371600" rtl="0" algn="l">
+              <a:spcBef>
+                <a:spcPts val="0"/>
+              </a:spcBef>
+              <a:spcAft>
+                <a:spcPts val="0"/>
+              </a:spcAft>
+              <a:buSzPts val="1400"/>
+              <a:buChar char="■"/>
+            </a:pPr>
+            <a:r>
+              <a:rPr lang="en"/>
+              <a:t>Dosage</a:t>
+            </a:r>
+            <a:endParaRPr/>
+          </a:p>
+          <a:p>
+            <a:pPr indent="-317500" lvl="1" marL="914400" rtl="0" algn="l">
+              <a:spcBef>
+                <a:spcPts val="0"/>
+              </a:spcBef>
+              <a:spcAft>
+                <a:spcPts val="0"/>
+              </a:spcAft>
+              <a:buSzPts val="1400"/>
+              <a:buChar char="○"/>
+            </a:pPr>
+            <a:r>
+              <a:rPr lang="en"/>
+              <a:t>Ontology mappings</a:t>
+            </a:r>
+            <a:endParaRPr/>
+          </a:p>
+        </p:txBody>
+      </p:sp>
     </p:spTree>
   </p:cSld>
   <p:clrMapOvr>
@@ -10255,7 +10565,7 @@
             </a:pPr>
             <a:r>
               <a:rPr lang="en"/>
-              <a:t>Additional Considerations &amp; Next Steps</a:t>
+              <a:t>Q &amp; A</a:t>
             </a:r>
             <a:endParaRPr/>
           </a:p>
@@ -10284,174 +10594,26 @@
           </a:bodyPr>
           <a:lstStyle/>
           <a:p>
-            <a:pPr indent="-342900" lvl="0" marL="457200" rtl="0" algn="l">
-              <a:spcBef>
-                <a:spcPts val="0"/>
-              </a:spcBef>
-              <a:spcAft>
-                <a:spcPts val="0"/>
-              </a:spcAft>
-              <a:buSzPts val="1800"/>
-              <a:buChar char="●"/>
+            <a:pPr indent="0" lvl="0" marL="0" rtl="0" algn="l">
+              <a:spcBef>
+                <a:spcPts val="0"/>
+              </a:spcBef>
+              <a:spcAft>
+                <a:spcPts val="1200"/>
+              </a:spcAft>
+              <a:buNone/>
             </a:pPr>
             <a:r>
               <a:rPr lang="en"/>
-              <a:t>Scaling for Production</a:t>
-            </a:r>
-            <a:endParaRPr/>
-          </a:p>
-          <a:p>
-            <a:pPr indent="-317500" lvl="1" marL="914400" rtl="0" algn="l">
-              <a:spcBef>
-                <a:spcPts val="0"/>
-              </a:spcBef>
-              <a:spcAft>
-                <a:spcPts val="0"/>
-              </a:spcAft>
-              <a:buSzPts val="1400"/>
-              <a:buChar char="○"/>
-            </a:pPr>
+              <a:t>Thank you for your time! What </a:t>
+            </a:r>
             <a:r>
               <a:rPr lang="en"/>
-              <a:t>Keep as LLM/agent-based → vLLM on cloud compute ⇒ </a:t>
-            </a:r>
-            <a:r>
-              <a:rPr lang="en">
-                <a:highlight>
-                  <a:srgbClr val="FFFF00"/>
-                </a:highlight>
-              </a:rPr>
-              <a:t>37 million posts for &lt; ~$5,000</a:t>
-            </a:r>
-            <a:endParaRPr>
-              <a:highlight>
-                <a:srgbClr val="FFFF00"/>
-              </a:highlight>
-            </a:endParaRPr>
-          </a:p>
-          <a:p>
-            <a:pPr indent="-342900" lvl="0" marL="457200" rtl="0" algn="l">
-              <a:spcBef>
-                <a:spcPts val="0"/>
-              </a:spcBef>
-              <a:spcAft>
-                <a:spcPts val="0"/>
-              </a:spcAft>
-              <a:buSzPts val="1800"/>
-              <a:buChar char="●"/>
-            </a:pPr>
+              <a:t>questions</a:t>
+            </a:r>
             <a:r>
               <a:rPr lang="en"/>
-              <a:t>Validation</a:t>
-            </a:r>
-            <a:endParaRPr/>
-          </a:p>
-          <a:p>
-            <a:pPr indent="-317500" lvl="1" marL="914400" rtl="0" algn="l">
-              <a:spcBef>
-                <a:spcPts val="0"/>
-              </a:spcBef>
-              <a:spcAft>
-                <a:spcPts val="0"/>
-              </a:spcAft>
-              <a:buSzPts val="1400"/>
-              <a:buChar char="○"/>
-            </a:pPr>
-            <a:r>
-              <a:rPr lang="en"/>
-              <a:t>More human review if given more time</a:t>
-            </a:r>
-            <a:endParaRPr/>
-          </a:p>
-          <a:p>
-            <a:pPr indent="-317500" lvl="1" marL="914400" rtl="0" algn="l">
-              <a:spcBef>
-                <a:spcPts val="0"/>
-              </a:spcBef>
-              <a:spcAft>
-                <a:spcPts val="0"/>
-              </a:spcAft>
-              <a:buSzPts val="1400"/>
-              <a:buChar char="○"/>
-            </a:pPr>
-            <a:r>
-              <a:rPr lang="en"/>
-              <a:t>“lexicon” configuration vs. MHT Medical Ontology Reference database</a:t>
-            </a:r>
-            <a:endParaRPr/>
-          </a:p>
-          <a:p>
-            <a:pPr indent="-317500" lvl="1" marL="914400" rtl="0" algn="l">
-              <a:spcBef>
-                <a:spcPts val="0"/>
-              </a:spcBef>
-              <a:spcAft>
-                <a:spcPts val="0"/>
-              </a:spcAft>
-              <a:buSzPts val="1400"/>
-              <a:buChar char="○"/>
-            </a:pPr>
-            <a:r>
-              <a:rPr lang="en"/>
-              <a:t>“</a:t>
-            </a:r>
-            <a:r>
-              <a:rPr lang="en"/>
-              <a:t>d</a:t>
-            </a:r>
-            <a:r>
-              <a:rPr lang="en"/>
-              <a:t>omain” configuration vs. MHT internal knowledge reference(s)</a:t>
-            </a:r>
-            <a:endParaRPr/>
-          </a:p>
-          <a:p>
-            <a:pPr indent="-342900" lvl="0" marL="457200" rtl="0" algn="l">
-              <a:spcBef>
-                <a:spcPts val="0"/>
-              </a:spcBef>
-              <a:spcAft>
-                <a:spcPts val="0"/>
-              </a:spcAft>
-              <a:buSzPts val="1800"/>
-              <a:buChar char="●"/>
-            </a:pPr>
-            <a:r>
-              <a:rPr lang="en"/>
-              <a:t>Analytical Data Products</a:t>
-            </a:r>
-            <a:endParaRPr/>
-          </a:p>
-          <a:p>
-            <a:pPr indent="-317500" lvl="1" marL="914400" rtl="0" algn="l">
-              <a:spcBef>
-                <a:spcPts val="0"/>
-              </a:spcBef>
-              <a:spcAft>
-                <a:spcPts val="0"/>
-              </a:spcAft>
-              <a:buSzPts val="1400"/>
-              <a:buChar char="○"/>
-            </a:pPr>
-            <a:r>
-              <a:rPr lang="en"/>
-              <a:t>Switch Events - Refine prompt; more quality measures/tests</a:t>
-            </a:r>
-            <a:endParaRPr/>
-          </a:p>
-          <a:p>
-            <a:pPr indent="-317500" lvl="1" marL="914400" rtl="0" algn="l">
-              <a:spcBef>
-                <a:spcPts val="0"/>
-              </a:spcBef>
-              <a:spcAft>
-                <a:spcPts val="0"/>
-              </a:spcAft>
-              <a:buSzPts val="1400"/>
-              <a:buChar char="○"/>
-            </a:pPr>
-            <a:r>
-              <a:t/>
+              <a:t> do we have?</a:t>
             </a:r>
             <a:endParaRPr/>
           </a:p>
@@ -10707,55 +10869,7 @@
             </a:pPr>
             <a:r>
               <a:rPr lang="en"/>
-              <a:t>Q &amp; A</a:t>
-            </a:r>
-            <a:endParaRPr/>
-          </a:p>
-        </p:txBody>
-      </p:sp>
-      <p:sp>
-        <p:nvSpPr>
-          <p:cNvPr id="194" name="Google Shape;194;p32"/>
-          <p:cNvSpPr txBox="1"/>
-          <p:nvPr>
-            <p:ph idx="1" type="body"/>
-          </p:nvPr>
-        </p:nvSpPr>
-        <p:spPr>
-          <a:xfrm>
-            <a:off x="311700" y="1266325"/>
-            <a:ext cx="8520600" cy="3302700"/>
-          </a:xfrm>
-          <a:prstGeom prst="rect">
-            <a:avLst/>
-          </a:prstGeom>
-        </p:spPr>
-        <p:txBody>
-          <a:bodyPr anchorCtr="0" anchor="t" bIns="91425" lIns="91425" spcFirstLastPara="1" rIns="91425" wrap="square" tIns="91425">
-            <a:normAutofit/>
-          </a:bodyPr>
-          <a:lstStyle/>
-          <a:p>
-            <a:pPr indent="0" lvl="0" marL="0" rtl="0" algn="l">
-              <a:spcBef>
-                <a:spcPts val="0"/>
-              </a:spcBef>
-              <a:spcAft>
-                <a:spcPts val="1200"/>
-              </a:spcAft>
-              <a:buNone/>
-            </a:pPr>
-            <a:r>
-              <a:rPr lang="en"/>
-              <a:t>Thank you for your time! What </a:t>
-            </a:r>
-            <a:r>
-              <a:rPr lang="en"/>
-              <a:t>questions</a:t>
-            </a:r>
-            <a:r>
-              <a:rPr lang="en"/>
-              <a:t> do we have?</a:t>
+              <a:t>APPENDIX</a:t>
             </a:r>
             <a:endParaRPr/>
           </a:p>
@@ -10774,7 +10888,7 @@
   <p:cSld>
     <p:spTree>
       <p:nvGrpSpPr>
-        <p:cNvPr id="198" name="Shape 198"/>
+        <p:cNvPr id="197" name="Shape 197"/>
         <p:cNvGrpSpPr/>
         <p:nvPr/>
       </p:nvGrpSpPr>
@@ -10788,7 +10902,7 @@
       </p:grpSpPr>
       <p:sp>
         <p:nvSpPr>
-          <p:cNvPr id="199" name="Google Shape;199;p33"/>
+          <p:cNvPr id="198" name="Google Shape;198;p33"/>
           <p:cNvSpPr txBox="1"/>
           <p:nvPr>
             <p:ph type="title"/>
@@ -10820,7 +10934,7 @@
             </a:pPr>
             <a:r>
               <a:rPr lang="en"/>
-              <a:t>APPENDIX</a:t>
+              <a:t>Sentiment - Member Comments</a:t>
             </a:r>
             <a:endParaRPr/>
           </a:p>
@@ -10828,24 +10942,26 @@
       </p:sp>
       <p:sp>
         <p:nvSpPr>
-          <p:cNvPr id="200" name="Google Shape;200;p33"/>
+          <p:cNvPr id="199" name="Google Shape;199;p33"/>
           <p:cNvSpPr txBox="1"/>
-          <p:nvPr>
-            <p:ph idx="1" type="body"/>
-          </p:nvPr>
+          <p:nvPr/>
         </p:nvSpPr>
         <p:spPr>
           <a:xfrm>
-            <a:off x="311700" y="1266325"/>
-            <a:ext cx="8520600" cy="3302700"/>
+            <a:off x="0" y="1062400"/>
+            <a:ext cx="9078000" cy="4032900"/>
           </a:xfrm>
           <a:prstGeom prst="rect">
             <a:avLst/>
           </a:prstGeom>
+          <a:noFill/>
+          <a:ln>
+            <a:noFill/>
+          </a:ln>
         </p:spPr>
         <p:txBody>
           <a:bodyPr anchorCtr="0" anchor="t" bIns="91425" lIns="91425" spcFirstLastPara="1" rIns="91425" wrap="square" tIns="91425">
-            <a:normAutofit/>
+            <a:spAutoFit/>
           </a:bodyPr>
           <a:lstStyle/>
           <a:p>
@@ -10854,14 +10970,757 @@
                 <a:spcPts val="0"/>
               </a:spcBef>
               <a:spcAft>
-                <a:spcPts val="1200"/>
+                <a:spcPts val="0"/>
+              </a:spcAft>
+              <a:buNone/>
+            </a:pPr>
+            <a:r>
+              <a:rPr lang="en" sz="1000">
+                <a:highlight>
+                  <a:srgbClr val="FFFFFF"/>
+                </a:highlight>
+                <a:latin typeface="Courier New"/>
+                <a:ea typeface="Courier New"/>
+                <a:cs typeface="Courier New"/>
+                <a:sym typeface="Courier New"/>
+              </a:rPr>
+              <a:t>=== POSITIVE ===</a:t>
+            </a:r>
+            <a:endParaRPr sz="1000">
+              <a:highlight>
+                <a:srgbClr val="FFFFFF"/>
+              </a:highlight>
+              <a:latin typeface="Courier New"/>
+              <a:ea typeface="Courier New"/>
+              <a:cs typeface="Courier New"/>
+              <a:sym typeface="Courier New"/>
+            </a:endParaRPr>
+          </a:p>
+          <a:p>
+            <a:pPr indent="0" lvl="0" marL="0" rtl="0" algn="l">
+              <a:spcBef>
+                <a:spcPts val="0"/>
+              </a:spcBef>
+              <a:spcAft>
+                <a:spcPts val="0"/>
+              </a:spcAft>
+              <a:buNone/>
+            </a:pPr>
+            <a:r>
+              <a:rPr lang="en" sz="1000">
+                <a:highlight>
+                  <a:srgbClr val="FFFFFF"/>
+                </a:highlight>
+                <a:latin typeface="Courier New"/>
+                <a:ea typeface="Courier New"/>
+                <a:cs typeface="Courier New"/>
+                <a:sym typeface="Courier New"/>
+              </a:rPr>
+              <a:t>  · …I'm not going to offer anything except — yes. This is grief and it's real and it deserves</a:t>
+            </a:r>
+            <a:endParaRPr sz="1000">
+              <a:highlight>
+                <a:srgbClr val="FFFFFF"/>
+              </a:highlight>
+              <a:latin typeface="Courier New"/>
+              <a:ea typeface="Courier New"/>
+              <a:cs typeface="Courier New"/>
+              <a:sym typeface="Courier New"/>
+            </a:endParaRPr>
+          </a:p>
+          <a:p>
+            <a:pPr indent="0" lvl="0" marL="0" rtl="0" algn="l">
+              <a:spcBef>
+                <a:spcPts val="0"/>
+              </a:spcBef>
+              <a:spcAft>
+                <a:spcPts val="0"/>
+              </a:spcAft>
+              <a:buNone/>
+            </a:pPr>
+            <a:r>
+              <a:rPr lang="en" sz="1000">
+                <a:highlight>
+                  <a:srgbClr val="FFFFFF"/>
+                </a:highlight>
+                <a:latin typeface="Courier New"/>
+                <a:ea typeface="Courier New"/>
+                <a:cs typeface="Courier New"/>
+                <a:sym typeface="Courier New"/>
+              </a:rPr>
+              <a:t>    to be called what it is. I'm on the Climara patch now and it's helped the rage a bit but it</a:t>
+            </a:r>
+            <a:endParaRPr sz="1000">
+              <a:highlight>
+                <a:srgbClr val="FFFFFF"/>
+              </a:highlight>
+              <a:latin typeface="Courier New"/>
+              <a:ea typeface="Courier New"/>
+              <a:cs typeface="Courier New"/>
+              <a:sym typeface="Courier New"/>
+            </a:endParaRPr>
+          </a:p>
+          <a:p>
+            <a:pPr indent="0" lvl="0" marL="0" rtl="0" algn="l">
+              <a:spcBef>
+                <a:spcPts val="0"/>
+              </a:spcBef>
+              <a:spcAft>
+                <a:spcPts val="0"/>
+              </a:spcAft>
+              <a:buNone/>
+            </a:pPr>
+            <a:r>
+              <a:rPr lang="en" sz="1000">
+                <a:highlight>
+                  <a:srgbClr val="FFFFFF"/>
+                </a:highlight>
+                <a:latin typeface="Courier New"/>
+                <a:ea typeface="Courier New"/>
+                <a:cs typeface="Courier New"/>
+                <a:sym typeface="Courier New"/>
+              </a:rPr>
+              <a:t>    hasn't fixed the feeling of being a stranger to myself, so I know that part isn't just…</a:t>
+            </a:r>
+            <a:endParaRPr sz="1000">
+              <a:highlight>
+                <a:srgbClr val="FFFFFF"/>
+              </a:highlight>
+              <a:latin typeface="Courier New"/>
+              <a:ea typeface="Courier New"/>
+              <a:cs typeface="Courier New"/>
+              <a:sym typeface="Courier New"/>
+            </a:endParaRPr>
+          </a:p>
+          <a:p>
+            <a:pPr indent="0" lvl="0" marL="0" rtl="0" algn="l">
+              <a:spcBef>
+                <a:spcPts val="0"/>
+              </a:spcBef>
+              <a:spcAft>
+                <a:spcPts val="0"/>
               </a:spcAft>
               <a:buNone/>
             </a:pPr>
             <a:r>
               <a:t/>
             </a:r>
-            <a:endParaRPr/>
+            <a:endParaRPr sz="1000">
+              <a:highlight>
+                <a:srgbClr val="FFFFFF"/>
+              </a:highlight>
+              <a:latin typeface="Courier New"/>
+              <a:ea typeface="Courier New"/>
+              <a:cs typeface="Courier New"/>
+              <a:sym typeface="Courier New"/>
+            </a:endParaRPr>
+          </a:p>
+          <a:p>
+            <a:pPr indent="0" lvl="0" marL="0" rtl="0" algn="l">
+              <a:spcBef>
+                <a:spcPts val="0"/>
+              </a:spcBef>
+              <a:spcAft>
+                <a:spcPts val="0"/>
+              </a:spcAft>
+              <a:buNone/>
+            </a:pPr>
+            <a:r>
+              <a:rPr lang="en" sz="1000">
+                <a:highlight>
+                  <a:srgbClr val="FFFFFF"/>
+                </a:highlight>
+                <a:latin typeface="Courier New"/>
+                <a:ea typeface="Courier New"/>
+                <a:cs typeface="Courier New"/>
+                <a:sym typeface="Courier New"/>
+              </a:rPr>
+              <a:t>  · I made exactly this transition about two years ago — Vagifem plus added Climara patch, and</a:t>
+            </a:r>
+            <a:endParaRPr sz="1000">
+              <a:highlight>
+                <a:srgbClr val="FFFFFF"/>
+              </a:highlight>
+              <a:latin typeface="Courier New"/>
+              <a:ea typeface="Courier New"/>
+              <a:cs typeface="Courier New"/>
+              <a:sym typeface="Courier New"/>
+            </a:endParaRPr>
+          </a:p>
+          <a:p>
+            <a:pPr indent="0" lvl="0" marL="0" rtl="0" algn="l">
+              <a:spcBef>
+                <a:spcPts val="0"/>
+              </a:spcBef>
+              <a:spcAft>
+                <a:spcPts val="0"/>
+              </a:spcAft>
+              <a:buNone/>
+            </a:pPr>
+            <a:r>
+              <a:rPr lang="en" sz="1000">
+                <a:highlight>
+                  <a:srgbClr val="FFFFFF"/>
+                </a:highlight>
+                <a:latin typeface="Courier New"/>
+                <a:ea typeface="Courier New"/>
+                <a:cs typeface="Courier New"/>
+                <a:sym typeface="Courier New"/>
+              </a:rPr>
+              <a:t>    then Prometrium. First month: breast tenderness yes, quite noticeable, lasted roughly six</a:t>
+            </a:r>
+            <a:endParaRPr sz="1000">
+              <a:highlight>
+                <a:srgbClr val="FFFFFF"/>
+              </a:highlight>
+              <a:latin typeface="Courier New"/>
+              <a:ea typeface="Courier New"/>
+              <a:cs typeface="Courier New"/>
+              <a:sym typeface="Courier New"/>
+            </a:endParaRPr>
+          </a:p>
+          <a:p>
+            <a:pPr indent="0" lvl="0" marL="0" rtl="0" algn="l">
+              <a:spcBef>
+                <a:spcPts val="0"/>
+              </a:spcBef>
+              <a:spcAft>
+                <a:spcPts val="0"/>
+              </a:spcAft>
+              <a:buNone/>
+            </a:pPr>
+            <a:r>
+              <a:rPr lang="en" sz="1000">
+                <a:highlight>
+                  <a:srgbClr val="FFFFFF"/>
+                </a:highlight>
+                <a:latin typeface="Courier New"/>
+                <a:ea typeface="Courier New"/>
+                <a:cs typeface="Courier New"/>
+                <a:sym typeface="Courier New"/>
+              </a:rPr>
+              <a:t>    weeks for me. Bloating was a…</a:t>
+            </a:r>
+            <a:endParaRPr sz="1000">
+              <a:highlight>
+                <a:srgbClr val="FFFFFF"/>
+              </a:highlight>
+              <a:latin typeface="Courier New"/>
+              <a:ea typeface="Courier New"/>
+              <a:cs typeface="Courier New"/>
+              <a:sym typeface="Courier New"/>
+            </a:endParaRPr>
+          </a:p>
+          <a:p>
+            <a:pPr indent="0" lvl="0" marL="0" rtl="0" algn="l">
+              <a:spcBef>
+                <a:spcPts val="0"/>
+              </a:spcBef>
+              <a:spcAft>
+                <a:spcPts val="0"/>
+              </a:spcAft>
+              <a:buNone/>
+            </a:pPr>
+            <a:r>
+              <a:t/>
+            </a:r>
+            <a:endParaRPr sz="1000">
+              <a:highlight>
+                <a:srgbClr val="FFFFFF"/>
+              </a:highlight>
+              <a:latin typeface="Courier New"/>
+              <a:ea typeface="Courier New"/>
+              <a:cs typeface="Courier New"/>
+              <a:sym typeface="Courier New"/>
+            </a:endParaRPr>
+          </a:p>
+          <a:p>
+            <a:pPr indent="0" lvl="0" marL="0" rtl="0" algn="l">
+              <a:spcBef>
+                <a:spcPts val="0"/>
+              </a:spcBef>
+              <a:spcAft>
+                <a:spcPts val="0"/>
+              </a:spcAft>
+              <a:buNone/>
+            </a:pPr>
+            <a:r>
+              <a:rPr lang="en" sz="1000">
+                <a:highlight>
+                  <a:srgbClr val="FFFFFF"/>
+                </a:highlight>
+                <a:latin typeface="Courier New"/>
+                <a:ea typeface="Courier New"/>
+                <a:cs typeface="Courier New"/>
+                <a:sym typeface="Courier New"/>
+              </a:rPr>
+              <a:t>  · …me. Also did the iron supplementing cause any stomach issues? I'm already anxious about</a:t>
+            </a:r>
+            <a:endParaRPr sz="1000">
+              <a:highlight>
+                <a:srgbClr val="FFFFFF"/>
+              </a:highlight>
+              <a:latin typeface="Courier New"/>
+              <a:ea typeface="Courier New"/>
+              <a:cs typeface="Courier New"/>
+              <a:sym typeface="Courier New"/>
+            </a:endParaRPr>
+          </a:p>
+          <a:p>
+            <a:pPr indent="0" lvl="0" marL="0" rtl="0" algn="l">
+              <a:spcBef>
+                <a:spcPts val="0"/>
+              </a:spcBef>
+              <a:spcAft>
+                <a:spcPts val="0"/>
+              </a:spcAft>
+              <a:buNone/>
+            </a:pPr>
+            <a:r>
+              <a:rPr lang="en" sz="1000">
+                <a:highlight>
+                  <a:srgbClr val="FFFFFF"/>
+                </a:highlight>
+                <a:latin typeface="Courier New"/>
+                <a:ea typeface="Courier New"/>
+                <a:cs typeface="Courier New"/>
+                <a:sym typeface="Courier New"/>
+              </a:rPr>
+              <a:t>    adding anything new on top of the Climara. Really glad you found something that works</a:t>
+            </a:r>
+            <a:endParaRPr sz="1000">
+              <a:highlight>
+                <a:srgbClr val="FFFFFF"/>
+              </a:highlight>
+              <a:latin typeface="Courier New"/>
+              <a:ea typeface="Courier New"/>
+              <a:cs typeface="Courier New"/>
+              <a:sym typeface="Courier New"/>
+            </a:endParaRPr>
+          </a:p>
+          <a:p>
+            <a:pPr indent="0" lvl="0" marL="0" rtl="0" algn="l">
+              <a:spcBef>
+                <a:spcPts val="0"/>
+              </a:spcBef>
+              <a:spcAft>
+                <a:spcPts val="0"/>
+              </a:spcAft>
+              <a:buNone/>
+            </a:pPr>
+            <a:r>
+              <a:rPr lang="en" sz="1000">
+                <a:highlight>
+                  <a:srgbClr val="FFFFFF"/>
+                </a:highlight>
+                <a:latin typeface="Courier New"/>
+                <a:ea typeface="Courier New"/>
+                <a:cs typeface="Courier New"/>
+                <a:sym typeface="Courier New"/>
+              </a:rPr>
+              <a:t>    though, 1-2 nights vs 5-6 is massive.</a:t>
+            </a:r>
+            <a:endParaRPr sz="1000">
+              <a:highlight>
+                <a:srgbClr val="FFFFFF"/>
+              </a:highlight>
+              <a:latin typeface="Courier New"/>
+              <a:ea typeface="Courier New"/>
+              <a:cs typeface="Courier New"/>
+              <a:sym typeface="Courier New"/>
+            </a:endParaRPr>
+          </a:p>
+          <a:p>
+            <a:pPr indent="0" lvl="0" marL="0" rtl="0" algn="l">
+              <a:spcBef>
+                <a:spcPts val="0"/>
+              </a:spcBef>
+              <a:spcAft>
+                <a:spcPts val="0"/>
+              </a:spcAft>
+              <a:buNone/>
+            </a:pPr>
+            <a:r>
+              <a:t/>
+            </a:r>
+            <a:endParaRPr sz="1000">
+              <a:highlight>
+                <a:srgbClr val="FFFFFF"/>
+              </a:highlight>
+              <a:latin typeface="Courier New"/>
+              <a:ea typeface="Courier New"/>
+              <a:cs typeface="Courier New"/>
+              <a:sym typeface="Courier New"/>
+            </a:endParaRPr>
+          </a:p>
+          <a:p>
+            <a:pPr indent="0" lvl="0" marL="0" rtl="0" algn="l">
+              <a:spcBef>
+                <a:spcPts val="0"/>
+              </a:spcBef>
+              <a:spcAft>
+                <a:spcPts val="0"/>
+              </a:spcAft>
+              <a:buNone/>
+            </a:pPr>
+            <a:r>
+              <a:rPr lang="en" sz="1000">
+                <a:highlight>
+                  <a:srgbClr val="FFFFFF"/>
+                </a:highlight>
+                <a:latin typeface="Courier New"/>
+                <a:ea typeface="Courier New"/>
+                <a:cs typeface="Courier New"/>
+                <a:sym typeface="Courier New"/>
+              </a:rPr>
+              <a:t>=== NEGATIVE ===</a:t>
+            </a:r>
+            <a:endParaRPr sz="1000">
+              <a:highlight>
+                <a:srgbClr val="FFFFFF"/>
+              </a:highlight>
+              <a:latin typeface="Courier New"/>
+              <a:ea typeface="Courier New"/>
+              <a:cs typeface="Courier New"/>
+              <a:sym typeface="Courier New"/>
+            </a:endParaRPr>
+          </a:p>
+          <a:p>
+            <a:pPr indent="0" lvl="0" marL="0" rtl="0" algn="l">
+              <a:spcBef>
+                <a:spcPts val="0"/>
+              </a:spcBef>
+              <a:spcAft>
+                <a:spcPts val="0"/>
+              </a:spcAft>
+              <a:buNone/>
+            </a:pPr>
+            <a:r>
+              <a:rPr lang="en" sz="1000">
+                <a:highlight>
+                  <a:srgbClr val="FFFFFF"/>
+                </a:highlight>
+                <a:latin typeface="Courier New"/>
+                <a:ea typeface="Courier New"/>
+                <a:cs typeface="Courier New"/>
+                <a:sym typeface="Courier New"/>
+              </a:rPr>
+              <a:t>  · temple hair loss getting worse even on the patch — anyone else?? okay so i've been on the</a:t>
+            </a:r>
+            <a:endParaRPr sz="1000">
+              <a:highlight>
+                <a:srgbClr val="FFFFFF"/>
+              </a:highlight>
+              <a:latin typeface="Courier New"/>
+              <a:ea typeface="Courier New"/>
+              <a:cs typeface="Courier New"/>
+              <a:sym typeface="Courier New"/>
+            </a:endParaRPr>
+          </a:p>
+          <a:p>
+            <a:pPr indent="0" lvl="0" marL="0" rtl="0" algn="l">
+              <a:spcBef>
+                <a:spcPts val="0"/>
+              </a:spcBef>
+              <a:spcAft>
+                <a:spcPts val="0"/>
+              </a:spcAft>
+              <a:buNone/>
+            </a:pPr>
+            <a:r>
+              <a:rPr lang="en" sz="1000">
+                <a:highlight>
+                  <a:srgbClr val="FFFFFF"/>
+                </a:highlight>
+                <a:latin typeface="Courier New"/>
+                <a:ea typeface="Courier New"/>
+                <a:cs typeface="Courier New"/>
+                <a:sym typeface="Courier New"/>
+              </a:rPr>
+              <a:t>    Climara patch for almost 8 months now and i genuinely thought it would help slow down the</a:t>
+            </a:r>
+            <a:endParaRPr sz="1000">
+              <a:highlight>
+                <a:srgbClr val="FFFFFF"/>
+              </a:highlight>
+              <a:latin typeface="Courier New"/>
+              <a:ea typeface="Courier New"/>
+              <a:cs typeface="Courier New"/>
+              <a:sym typeface="Courier New"/>
+            </a:endParaRPr>
+          </a:p>
+          <a:p>
+            <a:pPr indent="0" lvl="0" marL="0" rtl="0" algn="l">
+              <a:spcBef>
+                <a:spcPts val="0"/>
+              </a:spcBef>
+              <a:spcAft>
+                <a:spcPts val="0"/>
+              </a:spcAft>
+              <a:buNone/>
+            </a:pPr>
+            <a:r>
+              <a:rPr lang="en" sz="1000">
+                <a:highlight>
+                  <a:srgbClr val="FFFFFF"/>
+                </a:highlight>
+                <a:latin typeface="Courier New"/>
+                <a:ea typeface="Courier New"/>
+                <a:cs typeface="Courier New"/>
+                <a:sym typeface="Courier New"/>
+              </a:rPr>
+              <a:t>    hair loss at my temples but honestly?? it seems like…</a:t>
+            </a:r>
+            <a:endParaRPr sz="1000">
+              <a:highlight>
+                <a:srgbClr val="FFFFFF"/>
+              </a:highlight>
+              <a:latin typeface="Courier New"/>
+              <a:ea typeface="Courier New"/>
+              <a:cs typeface="Courier New"/>
+              <a:sym typeface="Courier New"/>
+            </a:endParaRPr>
+          </a:p>
+          <a:p>
+            <a:pPr indent="0" lvl="0" marL="0" rtl="0" algn="l">
+              <a:spcBef>
+                <a:spcPts val="0"/>
+              </a:spcBef>
+              <a:spcAft>
+                <a:spcPts val="0"/>
+              </a:spcAft>
+              <a:buNone/>
+            </a:pPr>
+            <a:r>
+              <a:t/>
+            </a:r>
+            <a:endParaRPr sz="1000">
+              <a:highlight>
+                <a:srgbClr val="FFFFFF"/>
+              </a:highlight>
+              <a:latin typeface="Courier New"/>
+              <a:ea typeface="Courier New"/>
+              <a:cs typeface="Courier New"/>
+              <a:sym typeface="Courier New"/>
+            </a:endParaRPr>
+          </a:p>
+          <a:p>
+            <a:pPr indent="0" lvl="0" marL="0" rtl="0" algn="l">
+              <a:spcBef>
+                <a:spcPts val="0"/>
+              </a:spcBef>
+              <a:spcAft>
+                <a:spcPts val="0"/>
+              </a:spcAft>
+              <a:buNone/>
+            </a:pPr>
+            <a:r>
+              <a:rPr lang="en" sz="1000">
+                <a:highlight>
+                  <a:srgbClr val="FFFFFF"/>
+                </a:highlight>
+                <a:latin typeface="Courier New"/>
+                <a:ea typeface="Courier New"/>
+                <a:cs typeface="Courier New"/>
+                <a:sym typeface="Courier New"/>
+              </a:rPr>
+              <a:t>  · …exhausting, especially doing detailed design work through daily headaches 💛 I stopped</a:t>
+            </a:r>
+            <a:endParaRPr sz="1000">
+              <a:highlight>
+                <a:srgbClr val="FFFFFF"/>
+              </a:highlight>
+              <a:latin typeface="Courier New"/>
+              <a:ea typeface="Courier New"/>
+              <a:cs typeface="Courier New"/>
+              <a:sym typeface="Courier New"/>
+            </a:endParaRPr>
+          </a:p>
+          <a:p>
+            <a:pPr indent="0" lvl="0" marL="0" rtl="0" algn="l">
+              <a:spcBef>
+                <a:spcPts val="0"/>
+              </a:spcBef>
+              <a:spcAft>
+                <a:spcPts val="0"/>
+              </a:spcAft>
+              <a:buNone/>
+            </a:pPr>
+            <a:r>
+              <a:rPr lang="en" sz="1000">
+                <a:highlight>
+                  <a:srgbClr val="FFFFFF"/>
+                </a:highlight>
+                <a:latin typeface="Courier New"/>
+                <a:ea typeface="Courier New"/>
+                <a:cs typeface="Courier New"/>
+                <a:sym typeface="Courier New"/>
+              </a:rPr>
+              <a:t>    briefly about two years before starting my Climara patch and honestly the muscle aches were</a:t>
+            </a:r>
+            <a:endParaRPr sz="1000">
+              <a:highlight>
+                <a:srgbClr val="FFFFFF"/>
+              </a:highlight>
+              <a:latin typeface="Courier New"/>
+              <a:ea typeface="Courier New"/>
+              <a:cs typeface="Courier New"/>
+              <a:sym typeface="Courier New"/>
+            </a:endParaRPr>
+          </a:p>
+          <a:p>
+            <a:pPr indent="0" lvl="0" marL="0" rtl="0" algn="l">
+              <a:spcBef>
+                <a:spcPts val="0"/>
+              </a:spcBef>
+              <a:spcAft>
+                <a:spcPts val="0"/>
+              </a:spcAft>
+              <a:buNone/>
+            </a:pPr>
+            <a:r>
+              <a:rPr lang="en" sz="1000">
+                <a:highlight>
+                  <a:srgbClr val="FFFFFF"/>
+                </a:highlight>
+                <a:latin typeface="Courier New"/>
+                <a:ea typeface="Courier New"/>
+                <a:cs typeface="Courier New"/>
+                <a:sym typeface="Courier New"/>
+              </a:rPr>
+              <a:t>    the thing that surprised me most — I didn't even realize HRT had been helping with them</a:t>
+            </a:r>
+            <a:endParaRPr sz="1000">
+              <a:highlight>
+                <a:srgbClr val="FFFFFF"/>
+              </a:highlight>
+              <a:latin typeface="Courier New"/>
+              <a:ea typeface="Courier New"/>
+              <a:cs typeface="Courier New"/>
+              <a:sym typeface="Courier New"/>
+            </a:endParaRPr>
+          </a:p>
+          <a:p>
+            <a:pPr indent="0" lvl="0" marL="0" rtl="0" algn="l">
+              <a:spcBef>
+                <a:spcPts val="0"/>
+              </a:spcBef>
+              <a:spcAft>
+                <a:spcPts val="0"/>
+              </a:spcAft>
+              <a:buNone/>
+            </a:pPr>
+            <a:r>
+              <a:rPr lang="en" sz="1000">
+                <a:highlight>
+                  <a:srgbClr val="FFFFFF"/>
+                </a:highlight>
+                <a:latin typeface="Courier New"/>
+                <a:ea typeface="Courier New"/>
+                <a:cs typeface="Courier New"/>
+                <a:sym typeface="Courier New"/>
+              </a:rPr>
+              <a:t>    until…</a:t>
+            </a:r>
+            <a:endParaRPr sz="1000">
+              <a:highlight>
+                <a:srgbClr val="FFFFFF"/>
+              </a:highlight>
+              <a:latin typeface="Courier New"/>
+              <a:ea typeface="Courier New"/>
+              <a:cs typeface="Courier New"/>
+              <a:sym typeface="Courier New"/>
+            </a:endParaRPr>
+          </a:p>
+          <a:p>
+            <a:pPr indent="0" lvl="0" marL="0" rtl="0" algn="l">
+              <a:spcBef>
+                <a:spcPts val="0"/>
+              </a:spcBef>
+              <a:spcAft>
+                <a:spcPts val="0"/>
+              </a:spcAft>
+              <a:buNone/>
+            </a:pPr>
+            <a:r>
+              <a:t/>
+            </a:r>
+            <a:endParaRPr sz="1000">
+              <a:highlight>
+                <a:srgbClr val="FFFFFF"/>
+              </a:highlight>
+              <a:latin typeface="Courier New"/>
+              <a:ea typeface="Courier New"/>
+              <a:cs typeface="Courier New"/>
+              <a:sym typeface="Courier New"/>
+            </a:endParaRPr>
+          </a:p>
+          <a:p>
+            <a:pPr indent="0" lvl="0" marL="0" rtl="0" algn="l">
+              <a:spcBef>
+                <a:spcPts val="0"/>
+              </a:spcBef>
+              <a:spcAft>
+                <a:spcPts val="0"/>
+              </a:spcAft>
+              <a:buNone/>
+            </a:pPr>
+            <a:r>
+              <a:rPr lang="en" sz="1000">
+                <a:highlight>
+                  <a:srgbClr val="FFFFFF"/>
+                </a:highlight>
+                <a:latin typeface="Courier New"/>
+                <a:ea typeface="Courier New"/>
+                <a:cs typeface="Courier New"/>
+                <a:sym typeface="Courier New"/>
+              </a:rPr>
+              <a:t>  · …good evidence for meibomian gland dysfunction. I'm filing this away because my allergies</a:t>
+            </a:r>
+            <a:endParaRPr sz="1000">
+              <a:highlight>
+                <a:srgbClr val="FFFFFF"/>
+              </a:highlight>
+              <a:latin typeface="Courier New"/>
+              <a:ea typeface="Courier New"/>
+              <a:cs typeface="Courier New"/>
+              <a:sym typeface="Courier New"/>
+            </a:endParaRPr>
+          </a:p>
+          <a:p>
+            <a:pPr indent="0" lvl="0" marL="0" rtl="0" algn="l">
+              <a:lnSpc>
+                <a:spcPct val="130770"/>
+              </a:lnSpc>
+              <a:spcBef>
+                <a:spcPts val="0"/>
+              </a:spcBef>
+              <a:spcAft>
+                <a:spcPts val="0"/>
+              </a:spcAft>
+              <a:buNone/>
+            </a:pPr>
+            <a:r>
+              <a:rPr lang="en" sz="1000">
+                <a:highlight>
+                  <a:srgbClr val="FFFFFF"/>
+                </a:highlight>
+                <a:latin typeface="Courier New"/>
+                <a:ea typeface="Courier New"/>
+                <a:cs typeface="Courier New"/>
+                <a:sym typeface="Courier New"/>
+              </a:rPr>
+              <a:t>    have been flaring since starting the Climara patch and my eyes are part of it.</a:t>
+            </a:r>
+            <a:endParaRPr sz="1000">
+              <a:highlight>
+                <a:srgbClr val="FFFFFF"/>
+              </a:highlight>
+              <a:latin typeface="Courier New"/>
+              <a:ea typeface="Courier New"/>
+              <a:cs typeface="Courier New"/>
+              <a:sym typeface="Courier New"/>
+            </a:endParaRPr>
           </a:p>
         </p:txBody>
       </p:sp>
@@ -10878,7 +11737,7 @@
   <p:cSld>
     <p:spTree>
       <p:nvGrpSpPr>
-        <p:cNvPr id="204" name="Shape 204"/>
+        <p:cNvPr id="203" name="Shape 203"/>
         <p:cNvGrpSpPr/>
         <p:nvPr/>
       </p:nvGrpSpPr>
@@ -10892,7 +11751,7 @@
       </p:grpSpPr>
       <p:sp>
         <p:nvSpPr>
-          <p:cNvPr id="205" name="Google Shape;205;p34"/>
+          <p:cNvPr id="204" name="Google Shape;204;p34"/>
           <p:cNvSpPr txBox="1"/>
           <p:nvPr>
             <p:ph type="title"/>
@@ -10924,7 +11783,7 @@
             </a:pPr>
             <a:r>
               <a:rPr lang="en"/>
-              <a:t>Sentiment - Member Comments</a:t>
+              <a:t>Switch Events - Member Comments</a:t>
             </a:r>
             <a:endParaRPr/>
           </a:p>
@@ -10932,14 +11791,14 @@
       </p:sp>
       <p:sp>
         <p:nvSpPr>
-          <p:cNvPr id="206" name="Google Shape;206;p34"/>
+          <p:cNvPr id="205" name="Google Shape;205;p34"/>
           <p:cNvSpPr txBox="1"/>
           <p:nvPr/>
         </p:nvSpPr>
         <p:spPr>
           <a:xfrm>
             <a:off x="0" y="1062400"/>
-            <a:ext cx="9078000" cy="4032900"/>
+            <a:ext cx="9078000" cy="3961800"/>
           </a:xfrm>
           <a:prstGeom prst="rect">
             <a:avLst/>
@@ -10956,6 +11815,9 @@
           <a:lstStyle/>
           <a:p>
             <a:pPr indent="0" lvl="0" marL="0" rtl="0" algn="l">
+              <a:lnSpc>
+                <a:spcPct val="130770"/>
+              </a:lnSpc>
               <a:spcBef>
                 <a:spcPts val="0"/>
               </a:spcBef>
@@ -10974,7 +11836,7 @@
                 <a:cs typeface="Courier New"/>
                 <a:sym typeface="Courier New"/>
               </a:rPr>
-              <a:t>=== POSITIVE ===</a:t>
+              <a:t>22 of 338 switch events met the selection criteria; showing 5</a:t>
             </a:r>
             <a:endParaRPr sz="1000">
               <a:highlight>
@@ -10988,6 +11850,35 @@
           </a:p>
           <a:p>
             <a:pPr indent="0" lvl="0" marL="0" rtl="0" algn="l">
+              <a:lnSpc>
+                <a:spcPct val="130770"/>
+              </a:lnSpc>
+              <a:spcBef>
+                <a:spcPts val="0"/>
+              </a:spcBef>
+              <a:spcAft>
+                <a:spcPts val="0"/>
+              </a:spcAft>
+              <a:buNone/>
+            </a:pPr>
+            <a:r>
+              <a:t/>
+            </a:r>
+            <a:endParaRPr sz="1000">
+              <a:highlight>
+                <a:srgbClr val="FFFFFF"/>
+              </a:highlight>
+              <a:latin typeface="Courier New"/>
+              <a:ea typeface="Courier New"/>
+              <a:cs typeface="Courier New"/>
+              <a:sym typeface="Courier New"/>
+            </a:endParaRPr>
+          </a:p>
+          <a:p>
+            <a:pPr indent="0" lvl="0" marL="0" rtl="0" algn="l">
+              <a:lnSpc>
+                <a:spcPct val="130770"/>
+              </a:lnSpc>
               <a:spcBef>
                 <a:spcPts val="0"/>
               </a:spcBef>
@@ -11006,7 +11897,7 @@
                 <a:cs typeface="Courier New"/>
                 <a:sym typeface="Courier New"/>
               </a:rPr>
-              <a:t>  · …I'm not going to offer anything except — yes. This is grief and it's real and it deserves</a:t>
+              <a:t>SELECTION CRITERIA: Must carry a first-person movement construction, both endpoints must resolve to named products, and the surrounding text must not attribute the move to someone else</a:t>
             </a:r>
             <a:endParaRPr sz="1000">
               <a:highlight>
@@ -11020,6 +11911,35 @@
           </a:p>
           <a:p>
             <a:pPr indent="0" lvl="0" marL="0" rtl="0" algn="l">
+              <a:lnSpc>
+                <a:spcPct val="130770"/>
+              </a:lnSpc>
+              <a:spcBef>
+                <a:spcPts val="0"/>
+              </a:spcBef>
+              <a:spcAft>
+                <a:spcPts val="0"/>
+              </a:spcAft>
+              <a:buNone/>
+            </a:pPr>
+            <a:r>
+              <a:t/>
+            </a:r>
+            <a:endParaRPr sz="1000">
+              <a:highlight>
+                <a:srgbClr val="FFFFFF"/>
+              </a:highlight>
+              <a:latin typeface="Courier New"/>
+              <a:ea typeface="Courier New"/>
+              <a:cs typeface="Courier New"/>
+              <a:sym typeface="Courier New"/>
+            </a:endParaRPr>
+          </a:p>
+          <a:p>
+            <a:pPr indent="0" lvl="0" marL="0" rtl="0" algn="l">
+              <a:lnSpc>
+                <a:spcPct val="130770"/>
+              </a:lnSpc>
               <a:spcBef>
                 <a:spcPts val="0"/>
               </a:spcBef>
@@ -11038,7 +11958,31 @@
                 <a:cs typeface="Courier New"/>
                 <a:sym typeface="Courier New"/>
               </a:rPr>
-              <a:t>    to be called what it is. I'm on the Climara patch now and it's helped the rage a bit but it</a:t>
+              <a:t>  </a:t>
+            </a:r>
+            <a:r>
+              <a:rPr b="1" lang="en" sz="1000">
+                <a:highlight>
+                  <a:srgbClr val="FFFFFF"/>
+                </a:highlight>
+                <a:latin typeface="Courier New"/>
+                <a:ea typeface="Courier New"/>
+                <a:cs typeface="Courier New"/>
+                <a:sym typeface="Courier New"/>
+              </a:rPr>
+              <a:t>vagifem  →  imvexxy  </a:t>
+            </a:r>
+            <a:r>
+              <a:rPr lang="en" sz="1000">
+                <a:highlight>
+                  <a:srgbClr val="FFFFFF"/>
+                </a:highlight>
+                <a:latin typeface="Courier New"/>
+                <a:ea typeface="Courier New"/>
+                <a:cs typeface="Courier New"/>
+                <a:sym typeface="Courier New"/>
+              </a:rPr>
+              <a:t> [applicator faff]</a:t>
             </a:r>
             <a:endParaRPr sz="1000">
               <a:highlight>
@@ -11052,6 +11996,9 @@
           </a:p>
           <a:p>
             <a:pPr indent="0" lvl="0" marL="0" rtl="0" algn="l">
+              <a:lnSpc>
+                <a:spcPct val="130770"/>
+              </a:lnSpc>
               <a:spcBef>
                 <a:spcPts val="0"/>
               </a:spcBef>
@@ -11070,7 +12017,7 @@
                 <a:cs typeface="Courier New"/>
                 <a:sym typeface="Courier New"/>
               </a:rPr>
-              <a:t>    hasn't fixed the feeling of being a stranger to myself, so I know that part isn't just…</a:t>
+              <a:t>    “Switched from Vagifem to Imvexxy a while back mostly because of applicator faff tbh”</a:t>
             </a:r>
             <a:endParaRPr sz="1000">
               <a:highlight>
@@ -11084,6 +12031,9 @@
           </a:p>
           <a:p>
             <a:pPr indent="0" lvl="0" marL="0" rtl="0" algn="l">
+              <a:lnSpc>
+                <a:spcPct val="130770"/>
+              </a:lnSpc>
               <a:spcBef>
                 <a:spcPts val="0"/>
               </a:spcBef>
@@ -11107,6 +12057,9 @@
           </a:p>
           <a:p>
             <a:pPr indent="0" lvl="0" marL="0" rtl="0" algn="l">
+              <a:lnSpc>
+                <a:spcPct val="130770"/>
+              </a:lnSpc>
               <a:spcBef>
                 <a:spcPts val="0"/>
               </a:spcBef>
@@ -11125,7 +12078,31 @@
                 <a:cs typeface="Courier New"/>
                 <a:sym typeface="Courier New"/>
               </a:rPr>
-              <a:t>  · I made exactly this transition about two years ago — Vagifem plus added Climara patch, and</a:t>
+              <a:t>  </a:t>
+            </a:r>
+            <a:r>
+              <a:rPr b="1" lang="en" sz="1000">
+                <a:highlight>
+                  <a:srgbClr val="FFFFFF"/>
+                </a:highlight>
+                <a:latin typeface="Courier New"/>
+                <a:ea typeface="Courier New"/>
+                <a:cs typeface="Courier New"/>
+                <a:sym typeface="Courier New"/>
+              </a:rPr>
+              <a:t>activelle  →  climara  </a:t>
+            </a:r>
+            <a:r>
+              <a:rPr lang="en" sz="1000">
+                <a:highlight>
+                  <a:srgbClr val="FFFFFF"/>
+                </a:highlight>
+                <a:latin typeface="Courier New"/>
+                <a:ea typeface="Courier New"/>
+                <a:cs typeface="Courier New"/>
+                <a:sym typeface="Courier New"/>
+              </a:rPr>
+              <a:t> [reduce first-pass hepatic effects]</a:t>
             </a:r>
             <a:endParaRPr sz="1000">
               <a:highlight>
@@ -11139,6 +12116,9 @@
           </a:p>
           <a:p>
             <a:pPr indent="0" lvl="0" marL="0" rtl="0" algn="l">
+              <a:lnSpc>
+                <a:spcPct val="130770"/>
+              </a:lnSpc>
               <a:spcBef>
                 <a:spcPts val="0"/>
               </a:spcBef>
@@ -11157,7 +12137,7 @@
                 <a:cs typeface="Courier New"/>
                 <a:sym typeface="Courier New"/>
               </a:rPr>
-              <a:t>    then Prometrium. First month: breast tenderness yes, quite noticeable, lasted roughly six</a:t>
+              <a:t>    “switching from oral to transdermal estrogen”</a:t>
             </a:r>
             <a:endParaRPr sz="1000">
               <a:highlight>
@@ -11171,6 +12151,35 @@
           </a:p>
           <a:p>
             <a:pPr indent="0" lvl="0" marL="0" rtl="0" algn="l">
+              <a:lnSpc>
+                <a:spcPct val="130770"/>
+              </a:lnSpc>
+              <a:spcBef>
+                <a:spcPts val="0"/>
+              </a:spcBef>
+              <a:spcAft>
+                <a:spcPts val="0"/>
+              </a:spcAft>
+              <a:buNone/>
+            </a:pPr>
+            <a:r>
+              <a:t/>
+            </a:r>
+            <a:endParaRPr sz="1000">
+              <a:highlight>
+                <a:srgbClr val="FFFFFF"/>
+              </a:highlight>
+              <a:latin typeface="Courier New"/>
+              <a:ea typeface="Courier New"/>
+              <a:cs typeface="Courier New"/>
+              <a:sym typeface="Courier New"/>
+            </a:endParaRPr>
+          </a:p>
+          <a:p>
+            <a:pPr indent="0" lvl="0" marL="0" rtl="0" algn="l">
+              <a:lnSpc>
+                <a:spcPct val="130770"/>
+              </a:lnSpc>
               <a:spcBef>
                 <a:spcPts val="0"/>
               </a:spcBef>
@@ -11189,7 +12198,31 @@
                 <a:cs typeface="Courier New"/>
                 <a:sym typeface="Courier New"/>
               </a:rPr>
-              <a:t>    weeks for me. Bloating was a…</a:t>
+              <a:t>  </a:t>
+            </a:r>
+            <a:r>
+              <a:rPr b="1" lang="en" sz="1000">
+                <a:highlight>
+                  <a:srgbClr val="FFFFFF"/>
+                </a:highlight>
+                <a:latin typeface="Courier New"/>
+                <a:ea typeface="Courier New"/>
+                <a:cs typeface="Courier New"/>
+                <a:sym typeface="Courier New"/>
+              </a:rPr>
+              <a:t>estradot  →  estradiol gel generic </a:t>
+            </a:r>
+            <a:r>
+              <a:rPr lang="en" sz="1000">
+                <a:highlight>
+                  <a:srgbClr val="FFFFFF"/>
+                </a:highlight>
+                <a:latin typeface="Courier New"/>
+                <a:ea typeface="Courier New"/>
+                <a:cs typeface="Courier New"/>
+                <a:sym typeface="Courier New"/>
+              </a:rPr>
+              <a:t>  [thinking transdermal might be gentler]</a:t>
             </a:r>
             <a:endParaRPr sz="1000">
               <a:highlight>
@@ -11203,16 +12236,28 @@
           </a:p>
           <a:p>
             <a:pPr indent="0" lvl="0" marL="0" rtl="0" algn="l">
-              <a:spcBef>
-                <a:spcPts val="0"/>
-              </a:spcBef>
-              <a:spcAft>
-                <a:spcPts val="0"/>
-              </a:spcAft>
-              <a:buNone/>
-            </a:pPr>
-            <a:r>
-              <a:t/>
+              <a:lnSpc>
+                <a:spcPct val="130770"/>
+              </a:lnSpc>
+              <a:spcBef>
+                <a:spcPts val="0"/>
+              </a:spcBef>
+              <a:spcAft>
+                <a:spcPts val="0"/>
+              </a:spcAft>
+              <a:buNone/>
+            </a:pPr>
+            <a:r>
+              <a:rPr lang="en" sz="1000">
+                <a:highlight>
+                  <a:srgbClr val="FFFFFF"/>
+                </a:highlight>
+                <a:latin typeface="Courier New"/>
+                <a:ea typeface="Courier New"/>
+                <a:cs typeface="Courier New"/>
+                <a:sym typeface="Courier New"/>
+              </a:rPr>
+              <a:t>    “Switched to estrogen gel thinking transdermal might be gentler.”</a:t>
             </a:r>
             <a:endParaRPr sz="1000">
               <a:highlight>
@@ -11226,6 +12271,35 @@
           </a:p>
           <a:p>
             <a:pPr indent="0" lvl="0" marL="0" rtl="0" algn="l">
+              <a:lnSpc>
+                <a:spcPct val="130770"/>
+              </a:lnSpc>
+              <a:spcBef>
+                <a:spcPts val="0"/>
+              </a:spcBef>
+              <a:spcAft>
+                <a:spcPts val="0"/>
+              </a:spcAft>
+              <a:buNone/>
+            </a:pPr>
+            <a:r>
+              <a:t/>
+            </a:r>
+            <a:endParaRPr sz="1000">
+              <a:highlight>
+                <a:srgbClr val="FFFFFF"/>
+              </a:highlight>
+              <a:latin typeface="Courier New"/>
+              <a:ea typeface="Courier New"/>
+              <a:cs typeface="Courier New"/>
+              <a:sym typeface="Courier New"/>
+            </a:endParaRPr>
+          </a:p>
+          <a:p>
+            <a:pPr indent="0" lvl="0" marL="0" rtl="0" algn="l">
+              <a:lnSpc>
+                <a:spcPct val="130770"/>
+              </a:lnSpc>
               <a:spcBef>
                 <a:spcPts val="0"/>
               </a:spcBef>
@@ -11244,7 +12318,54 @@
                 <a:cs typeface="Courier New"/>
                 <a:sym typeface="Courier New"/>
               </a:rPr>
-              <a:t>  · …me. Also did the iron supplementing cause any stomach issues? I'm already anxious about</a:t>
+              <a:t> </a:t>
+            </a:r>
+            <a:r>
+              <a:rPr b="1" lang="en" sz="1000">
+                <a:highlight>
+                  <a:srgbClr val="FFFFFF"/>
+                </a:highlight>
+                <a:latin typeface="Courier New"/>
+                <a:ea typeface="Courier New"/>
+                <a:cs typeface="Courier New"/>
+                <a:sym typeface="Courier New"/>
+              </a:rPr>
+              <a:t> prometrium  →  mirena</a:t>
+            </a:r>
+            <a:endParaRPr b="1" sz="1000">
+              <a:highlight>
+                <a:srgbClr val="FFFFFF"/>
+              </a:highlight>
+              <a:latin typeface="Courier New"/>
+              <a:ea typeface="Courier New"/>
+              <a:cs typeface="Courier New"/>
+              <a:sym typeface="Courier New"/>
+            </a:endParaRPr>
+          </a:p>
+          <a:p>
+            <a:pPr indent="0" lvl="0" marL="0" rtl="0" algn="l">
+              <a:lnSpc>
+                <a:spcPct val="130770"/>
+              </a:lnSpc>
+              <a:spcBef>
+                <a:spcPts val="0"/>
+              </a:spcBef>
+              <a:spcAft>
+                <a:spcPts val="0"/>
+              </a:spcAft>
+              <a:buNone/>
+            </a:pPr>
+            <a:r>
+              <a:rPr lang="en" sz="1000">
+                <a:highlight>
+                  <a:srgbClr val="FFFFFF"/>
+                </a:highlight>
+                <a:latin typeface="Courier New"/>
+                <a:ea typeface="Courier New"/>
+                <a:cs typeface="Courier New"/>
+                <a:sym typeface="Courier New"/>
+              </a:rPr>
+              <a:t>    “switching to a Mirena IUD for the progestogen component”</a:t>
             </a:r>
             <a:endParaRPr sz="1000">
               <a:highlight>
@@ -11258,6 +12379,35 @@
           </a:p>
           <a:p>
             <a:pPr indent="0" lvl="0" marL="0" rtl="0" algn="l">
+              <a:lnSpc>
+                <a:spcPct val="130770"/>
+              </a:lnSpc>
+              <a:spcBef>
+                <a:spcPts val="0"/>
+              </a:spcBef>
+              <a:spcAft>
+                <a:spcPts val="0"/>
+              </a:spcAft>
+              <a:buNone/>
+            </a:pPr>
+            <a:r>
+              <a:t/>
+            </a:r>
+            <a:endParaRPr sz="1000">
+              <a:highlight>
+                <a:srgbClr val="FFFFFF"/>
+              </a:highlight>
+              <a:latin typeface="Courier New"/>
+              <a:ea typeface="Courier New"/>
+              <a:cs typeface="Courier New"/>
+              <a:sym typeface="Courier New"/>
+            </a:endParaRPr>
+          </a:p>
+          <a:p>
+            <a:pPr indent="0" lvl="0" marL="0" rtl="0" algn="l">
+              <a:lnSpc>
+                <a:spcPct val="130770"/>
+              </a:lnSpc>
               <a:spcBef>
                 <a:spcPts val="0"/>
               </a:spcBef>
@@ -11276,7 +12426,31 @@
                 <a:cs typeface="Courier New"/>
                 <a:sym typeface="Courier New"/>
               </a:rPr>
-              <a:t>    adding anything new on top of the Climara. Really glad you found something that works</a:t>
+              <a:t>  </a:t>
+            </a:r>
+            <a:r>
+              <a:rPr b="1" lang="en" sz="1000">
+                <a:highlight>
+                  <a:srgbClr val="FFFFFF"/>
+                </a:highlight>
+                <a:latin typeface="Courier New"/>
+                <a:ea typeface="Courier New"/>
+                <a:cs typeface="Courier New"/>
+                <a:sym typeface="Courier New"/>
+              </a:rPr>
+              <a:t>vagifem  →  intrarosa  </a:t>
+            </a:r>
+            <a:r>
+              <a:rPr lang="en" sz="1000">
+                <a:highlight>
+                  <a:srgbClr val="FFFFFF"/>
+                </a:highlight>
+                <a:latin typeface="Courier New"/>
+                <a:ea typeface="Courier New"/>
+                <a:cs typeface="Courier New"/>
+                <a:sym typeface="Courier New"/>
+              </a:rPr>
+              <a:t> [anecdotally the urgency did settle a bit more]</a:t>
             </a:r>
             <a:endParaRPr sz="1000">
               <a:highlight>
@@ -11290,6 +12464,9 @@
           </a:p>
           <a:p>
             <a:pPr indent="0" lvl="0" marL="0" rtl="0" algn="l">
+              <a:lnSpc>
+                <a:spcPct val="130770"/>
+              </a:lnSpc>
               <a:spcBef>
                 <a:spcPts val="0"/>
               </a:spcBef>
@@ -11308,399 +12485,7 @@
                 <a:cs typeface="Courier New"/>
                 <a:sym typeface="Courier New"/>
               </a:rPr>
-              <a:t>    though, 1-2 nights vs 5-6 is massive.</a:t>
-            </a:r>
-            <a:endParaRPr sz="1000">
-              <a:highlight>
-                <a:srgbClr val="FFFFFF"/>
-              </a:highlight>
-              <a:latin typeface="Courier New"/>
-              <a:ea typeface="Courier New"/>
-              <a:cs typeface="Courier New"/>
-              <a:sym typeface="Courier New"/>
-            </a:endParaRPr>
-          </a:p>
-          <a:p>
-            <a:pPr indent="0" lvl="0" marL="0" rtl="0" algn="l">
-              <a:spcBef>
-                <a:spcPts val="0"/>
-              </a:spcBef>
-              <a:spcAft>
-                <a:spcPts val="0"/>
-              </a:spcAft>
-              <a:buNone/>
-            </a:pPr>
-            <a:r>
-              <a:t/>
-            </a:r>
-            <a:endParaRPr sz="1000">
-              <a:highlight>
-                <a:srgbClr val="FFFFFF"/>
-              </a:highlight>
-              <a:latin typeface="Courier New"/>
-              <a:ea typeface="Courier New"/>
-              <a:cs typeface="Courier New"/>
-              <a:sym typeface="Courier New"/>
-            </a:endParaRPr>
-          </a:p>
-          <a:p>
-            <a:pPr indent="0" lvl="0" marL="0" rtl="0" algn="l">
-              <a:spcBef>
-                <a:spcPts val="0"/>
-              </a:spcBef>
-              <a:spcAft>
-                <a:spcPts val="0"/>
-              </a:spcAft>
-              <a:buNone/>
-            </a:pPr>
-            <a:r>
-              <a:rPr lang="en" sz="1000">
-                <a:highlight>
-                  <a:srgbClr val="FFFFFF"/>
-                </a:highlight>
-                <a:latin typeface="Courier New"/>
-                <a:ea typeface="Courier New"/>
-                <a:cs typeface="Courier New"/>
-                <a:sym typeface="Courier New"/>
-              </a:rPr>
-              <a:t>=== NEGATIVE ===</a:t>
-            </a:r>
-            <a:endParaRPr sz="1000">
-              <a:highlight>
-                <a:srgbClr val="FFFFFF"/>
-              </a:highlight>
-              <a:latin typeface="Courier New"/>
-              <a:ea typeface="Courier New"/>
-              <a:cs typeface="Courier New"/>
-              <a:sym typeface="Courier New"/>
-            </a:endParaRPr>
-          </a:p>
-          <a:p>
-            <a:pPr indent="0" lvl="0" marL="0" rtl="0" algn="l">
-              <a:spcBef>
-                <a:spcPts val="0"/>
-              </a:spcBef>
-              <a:spcAft>
-                <a:spcPts val="0"/>
-              </a:spcAft>
-              <a:buNone/>
-            </a:pPr>
-            <a:r>
-              <a:rPr lang="en" sz="1000">
-                <a:highlight>
-                  <a:srgbClr val="FFFFFF"/>
-                </a:highlight>
-                <a:latin typeface="Courier New"/>
-                <a:ea typeface="Courier New"/>
-                <a:cs typeface="Courier New"/>
-                <a:sym typeface="Courier New"/>
-              </a:rPr>
-              <a:t>  · temple hair loss getting worse even on the patch — anyone else?? okay so i've been on the</a:t>
-            </a:r>
-            <a:endParaRPr sz="1000">
-              <a:highlight>
-                <a:srgbClr val="FFFFFF"/>
-              </a:highlight>
-              <a:latin typeface="Courier New"/>
-              <a:ea typeface="Courier New"/>
-              <a:cs typeface="Courier New"/>
-              <a:sym typeface="Courier New"/>
-            </a:endParaRPr>
-          </a:p>
-          <a:p>
-            <a:pPr indent="0" lvl="0" marL="0" rtl="0" algn="l">
-              <a:spcBef>
-                <a:spcPts val="0"/>
-              </a:spcBef>
-              <a:spcAft>
-                <a:spcPts val="0"/>
-              </a:spcAft>
-              <a:buNone/>
-            </a:pPr>
-            <a:r>
-              <a:rPr lang="en" sz="1000">
-                <a:highlight>
-                  <a:srgbClr val="FFFFFF"/>
-                </a:highlight>
-                <a:latin typeface="Courier New"/>
-                <a:ea typeface="Courier New"/>
-                <a:cs typeface="Courier New"/>
-                <a:sym typeface="Courier New"/>
-              </a:rPr>
-              <a:t>    Climara patch for almost 8 months now and i genuinely thought it would help slow down the</a:t>
-            </a:r>
-            <a:endParaRPr sz="1000">
-              <a:highlight>
-                <a:srgbClr val="FFFFFF"/>
-              </a:highlight>
-              <a:latin typeface="Courier New"/>
-              <a:ea typeface="Courier New"/>
-              <a:cs typeface="Courier New"/>
-              <a:sym typeface="Courier New"/>
-            </a:endParaRPr>
-          </a:p>
-          <a:p>
-            <a:pPr indent="0" lvl="0" marL="0" rtl="0" algn="l">
-              <a:spcBef>
-                <a:spcPts val="0"/>
-              </a:spcBef>
-              <a:spcAft>
-                <a:spcPts val="0"/>
-              </a:spcAft>
-              <a:buNone/>
-            </a:pPr>
-            <a:r>
-              <a:rPr lang="en" sz="1000">
-                <a:highlight>
-                  <a:srgbClr val="FFFFFF"/>
-                </a:highlight>
-                <a:latin typeface="Courier New"/>
-                <a:ea typeface="Courier New"/>
-                <a:cs typeface="Courier New"/>
-                <a:sym typeface="Courier New"/>
-              </a:rPr>
-              <a:t>    hair loss at my temples but honestly?? it seems like…</a:t>
-            </a:r>
-            <a:endParaRPr sz="1000">
-              <a:highlight>
-                <a:srgbClr val="FFFFFF"/>
-              </a:highlight>
-              <a:latin typeface="Courier New"/>
-              <a:ea typeface="Courier New"/>
-              <a:cs typeface="Courier New"/>
-              <a:sym typeface="Courier New"/>
-            </a:endParaRPr>
-          </a:p>
-          <a:p>
-            <a:pPr indent="0" lvl="0" marL="0" rtl="0" algn="l">
-              <a:spcBef>
-                <a:spcPts val="0"/>
-              </a:spcBef>
-              <a:spcAft>
-                <a:spcPts val="0"/>
-              </a:spcAft>
-              <a:buNone/>
-            </a:pPr>
-            <a:r>
-              <a:t/>
-            </a:r>
-            <a:endParaRPr sz="1000">
-              <a:highlight>
-                <a:srgbClr val="FFFFFF"/>
-              </a:highlight>
-              <a:latin typeface="Courier New"/>
-              <a:ea typeface="Courier New"/>
-              <a:cs typeface="Courier New"/>
-              <a:sym typeface="Courier New"/>
-            </a:endParaRPr>
-          </a:p>
-          <a:p>
-            <a:pPr indent="0" lvl="0" marL="0" rtl="0" algn="l">
-              <a:spcBef>
-                <a:spcPts val="0"/>
-              </a:spcBef>
-              <a:spcAft>
-                <a:spcPts val="0"/>
-              </a:spcAft>
-              <a:buNone/>
-            </a:pPr>
-            <a:r>
-              <a:rPr lang="en" sz="1000">
-                <a:highlight>
-                  <a:srgbClr val="FFFFFF"/>
-                </a:highlight>
-                <a:latin typeface="Courier New"/>
-                <a:ea typeface="Courier New"/>
-                <a:cs typeface="Courier New"/>
-                <a:sym typeface="Courier New"/>
-              </a:rPr>
-              <a:t>  · …exhausting, especially doing detailed design work through daily headaches 💛 I stopped</a:t>
-            </a:r>
-            <a:endParaRPr sz="1000">
-              <a:highlight>
-                <a:srgbClr val="FFFFFF"/>
-              </a:highlight>
-              <a:latin typeface="Courier New"/>
-              <a:ea typeface="Courier New"/>
-              <a:cs typeface="Courier New"/>
-              <a:sym typeface="Courier New"/>
-            </a:endParaRPr>
-          </a:p>
-          <a:p>
-            <a:pPr indent="0" lvl="0" marL="0" rtl="0" algn="l">
-              <a:spcBef>
-                <a:spcPts val="0"/>
-              </a:spcBef>
-              <a:spcAft>
-                <a:spcPts val="0"/>
-              </a:spcAft>
-              <a:buNone/>
-            </a:pPr>
-            <a:r>
-              <a:rPr lang="en" sz="1000">
-                <a:highlight>
-                  <a:srgbClr val="FFFFFF"/>
-                </a:highlight>
-                <a:latin typeface="Courier New"/>
-                <a:ea typeface="Courier New"/>
-                <a:cs typeface="Courier New"/>
-                <a:sym typeface="Courier New"/>
-              </a:rPr>
-              <a:t>    briefly about two years before starting my Climara patch and honestly the muscle aches were</a:t>
-            </a:r>
-            <a:endParaRPr sz="1000">
-              <a:highlight>
-                <a:srgbClr val="FFFFFF"/>
-              </a:highlight>
-              <a:latin typeface="Courier New"/>
-              <a:ea typeface="Courier New"/>
-              <a:cs typeface="Courier New"/>
-              <a:sym typeface="Courier New"/>
-            </a:endParaRPr>
-          </a:p>
-          <a:p>
-            <a:pPr indent="0" lvl="0" marL="0" rtl="0" algn="l">
-              <a:spcBef>
-                <a:spcPts val="0"/>
-              </a:spcBef>
-              <a:spcAft>
-                <a:spcPts val="0"/>
-              </a:spcAft>
-              <a:buNone/>
-            </a:pPr>
-            <a:r>
-              <a:rPr lang="en" sz="1000">
-                <a:highlight>
-                  <a:srgbClr val="FFFFFF"/>
-                </a:highlight>
-                <a:latin typeface="Courier New"/>
-                <a:ea typeface="Courier New"/>
-                <a:cs typeface="Courier New"/>
-                <a:sym typeface="Courier New"/>
-              </a:rPr>
-              <a:t>    the thing that surprised me most — I didn't even realize HRT had been helping with them</a:t>
-            </a:r>
-            <a:endParaRPr sz="1000">
-              <a:highlight>
-                <a:srgbClr val="FFFFFF"/>
-              </a:highlight>
-              <a:latin typeface="Courier New"/>
-              <a:ea typeface="Courier New"/>
-              <a:cs typeface="Courier New"/>
-              <a:sym typeface="Courier New"/>
-            </a:endParaRPr>
-          </a:p>
-          <a:p>
-            <a:pPr indent="0" lvl="0" marL="0" rtl="0" algn="l">
-              <a:spcBef>
-                <a:spcPts val="0"/>
-              </a:spcBef>
-              <a:spcAft>
-                <a:spcPts val="0"/>
-              </a:spcAft>
-              <a:buNone/>
-            </a:pPr>
-            <a:r>
-              <a:rPr lang="en" sz="1000">
-                <a:highlight>
-                  <a:srgbClr val="FFFFFF"/>
-                </a:highlight>
-                <a:latin typeface="Courier New"/>
-                <a:ea typeface="Courier New"/>
-                <a:cs typeface="Courier New"/>
-                <a:sym typeface="Courier New"/>
-              </a:rPr>
-              <a:t>    until…</a:t>
-            </a:r>
-            <a:endParaRPr sz="1000">
-              <a:highlight>
-                <a:srgbClr val="FFFFFF"/>
-              </a:highlight>
-              <a:latin typeface="Courier New"/>
-              <a:ea typeface="Courier New"/>
-              <a:cs typeface="Courier New"/>
-              <a:sym typeface="Courier New"/>
-            </a:endParaRPr>
-          </a:p>
-          <a:p>
-            <a:pPr indent="0" lvl="0" marL="0" rtl="0" algn="l">
-              <a:spcBef>
-                <a:spcPts val="0"/>
-              </a:spcBef>
-              <a:spcAft>
-                <a:spcPts val="0"/>
-              </a:spcAft>
-              <a:buNone/>
-            </a:pPr>
-            <a:r>
-              <a:t/>
-            </a:r>
-            <a:endParaRPr sz="1000">
-              <a:highlight>
-                <a:srgbClr val="FFFFFF"/>
-              </a:highlight>
-              <a:latin typeface="Courier New"/>
-              <a:ea typeface="Courier New"/>
-              <a:cs typeface="Courier New"/>
-              <a:sym typeface="Courier New"/>
-            </a:endParaRPr>
-          </a:p>
-          <a:p>
-            <a:pPr indent="0" lvl="0" marL="0" rtl="0" algn="l">
-              <a:spcBef>
-                <a:spcPts val="0"/>
-              </a:spcBef>
-              <a:spcAft>
-                <a:spcPts val="0"/>
-              </a:spcAft>
-              <a:buNone/>
-            </a:pPr>
-            <a:r>
-              <a:rPr lang="en" sz="1000">
-                <a:highlight>
-                  <a:srgbClr val="FFFFFF"/>
-                </a:highlight>
-                <a:latin typeface="Courier New"/>
-                <a:ea typeface="Courier New"/>
-                <a:cs typeface="Courier New"/>
-                <a:sym typeface="Courier New"/>
-              </a:rPr>
-              <a:t>  · …good evidence for meibomian gland dysfunction. I'm filing this away because my allergies</a:t>
-            </a:r>
-            <a:endParaRPr sz="1000">
-              <a:highlight>
-                <a:srgbClr val="FFFFFF"/>
-              </a:highlight>
-              <a:latin typeface="Courier New"/>
-              <a:ea typeface="Courier New"/>
-              <a:cs typeface="Courier New"/>
-              <a:sym typeface="Courier New"/>
-            </a:endParaRPr>
-          </a:p>
-          <a:p>
-            <a:pPr indent="0" lvl="0" marL="0" rtl="0" algn="l">
-              <a:lnSpc>
-                <a:spcPct val="130770"/>
-              </a:lnSpc>
-              <a:spcBef>
-                <a:spcPts val="0"/>
-              </a:spcBef>
-              <a:spcAft>
-                <a:spcPts val="0"/>
-              </a:spcAft>
-              <a:buNone/>
-            </a:pPr>
-            <a:r>
-              <a:rPr lang="en" sz="1000">
-                <a:highlight>
-                  <a:srgbClr val="FFFFFF"/>
-                </a:highlight>
-                <a:latin typeface="Courier New"/>
-                <a:ea typeface="Courier New"/>
-                <a:cs typeface="Courier New"/>
-                <a:sym typeface="Courier New"/>
-              </a:rPr>
-              <a:t>    have been flaring since starting the Climara patch and my eyes are part of it.</a:t>
+              <a:t>    “Switched to Intrarosa when my compounding clinic suggested it”</a:t>
             </a:r>
             <a:endParaRPr sz="1000">
               <a:highlight>
@@ -11727,7 +12512,7 @@
   <p:cSld>
     <p:spTree>
       <p:nvGrpSpPr>
-        <p:cNvPr id="210" name="Shape 210"/>
+        <p:cNvPr id="209" name="Shape 209"/>
         <p:cNvGrpSpPr/>
         <p:nvPr/>
       </p:nvGrpSpPr>
@@ -11741,7 +12526,7 @@
       </p:grpSpPr>
       <p:sp>
         <p:nvSpPr>
-          <p:cNvPr id="211" name="Google Shape;211;p35"/>
+          <p:cNvPr id="210" name="Google Shape;210;p35"/>
           <p:cNvSpPr txBox="1"/>
           <p:nvPr>
             <p:ph type="title"/>
@@ -11773,7 +12558,7 @@
             </a:pPr>
             <a:r>
               <a:rPr lang="en"/>
-              <a:t>Switch Events - Member Comments</a:t>
+              <a:t>User “switch event” - Reason Text Mapping</a:t>
             </a:r>
             <a:endParaRPr/>
           </a:p>
@@ -11781,14 +12566,14 @@
       </p:sp>
       <p:sp>
         <p:nvSpPr>
-          <p:cNvPr id="212" name="Google Shape;212;p35"/>
+          <p:cNvPr id="211" name="Google Shape;211;p35"/>
           <p:cNvSpPr txBox="1"/>
           <p:nvPr/>
         </p:nvSpPr>
         <p:spPr>
           <a:xfrm>
-            <a:off x="0" y="1062400"/>
-            <a:ext cx="9078000" cy="3961800"/>
+            <a:off x="62250" y="937850"/>
+            <a:ext cx="9019500" cy="3894300"/>
           </a:xfrm>
           <a:prstGeom prst="rect">
             <a:avLst/>
@@ -11805,44 +12590,156 @@
           <a:lstStyle/>
           <a:p>
             <a:pPr indent="0" lvl="0" marL="0" rtl="0" algn="l">
-              <a:lnSpc>
-                <a:spcPct val="130770"/>
-              </a:lnSpc>
-              <a:spcBef>
-                <a:spcPts val="0"/>
-              </a:spcBef>
-              <a:spcAft>
-                <a:spcPts val="0"/>
-              </a:spcAft>
-              <a:buNone/>
-            </a:pPr>
-            <a:r>
-              <a:rPr lang="en" sz="1000">
+              <a:spcBef>
+                <a:spcPts val="0"/>
+              </a:spcBef>
+              <a:spcAft>
+                <a:spcPts val="0"/>
+              </a:spcAft>
+              <a:buNone/>
+            </a:pPr>
+            <a:r>
+              <a:rPr lang="en" sz="1200">
+                <a:solidFill>
+                  <a:srgbClr val="00E0DC"/>
+                </a:solidFill>
                 <a:highlight>
-                  <a:srgbClr val="FFFFFF"/>
+                  <a:srgbClr val="EFEFEF"/>
                 </a:highlight>
-                <a:latin typeface="Courier New"/>
-                <a:ea typeface="Courier New"/>
-                <a:cs typeface="Courier New"/>
-                <a:sym typeface="Courier New"/>
               </a:rPr>
-              <a:t>22 of 338 switch events met the selection criteria; showing 5</a:t>
-            </a:r>
-            <a:endParaRPr sz="1000">
+              <a:t># The stated reasons, in members' own words. `reason` is free text with no</a:t>
+            </a:r>
+            <a:endParaRPr sz="1200">
+              <a:solidFill>
+                <a:srgbClr val="00E0DC"/>
+              </a:solidFill>
               <a:highlight>
-                <a:srgbClr val="FFFFFF"/>
+                <a:srgbClr val="EFEFEF"/>
               </a:highlight>
-              <a:latin typeface="Courier New"/>
-              <a:ea typeface="Courier New"/>
-              <a:cs typeface="Courier New"/>
-              <a:sym typeface="Courier New"/>
             </a:endParaRPr>
           </a:p>
           <a:p>
             <a:pPr indent="0" lvl="0" marL="0" rtl="0" algn="l">
-              <a:lnSpc>
-                <a:spcPct val="130770"/>
-              </a:lnSpc>
+              <a:spcBef>
+                <a:spcPts val="0"/>
+              </a:spcBef>
+              <a:spcAft>
+                <a:spcPts val="0"/>
+              </a:spcAft>
+              <a:buNone/>
+            </a:pPr>
+            <a:r>
+              <a:rPr lang="en" sz="1200">
+                <a:solidFill>
+                  <a:srgbClr val="00E0DC"/>
+                </a:solidFill>
+                <a:highlight>
+                  <a:srgbClr val="EFEFEF"/>
+                </a:highlight>
+              </a:rPr>
+              <a:t># canonical form - `adhesion issues` (47) and `adhesive issues` (6) are separate</a:t>
+            </a:r>
+            <a:endParaRPr sz="1200">
+              <a:solidFill>
+                <a:srgbClr val="00E0DC"/>
+              </a:solidFill>
+              <a:highlight>
+                <a:srgbClr val="EFEFEF"/>
+              </a:highlight>
+            </a:endParaRPr>
+          </a:p>
+          <a:p>
+            <a:pPr indent="0" lvl="0" marL="0" rtl="0" algn="l">
+              <a:spcBef>
+                <a:spcPts val="0"/>
+              </a:spcBef>
+              <a:spcAft>
+                <a:spcPts val="0"/>
+              </a:spcAft>
+              <a:buNone/>
+            </a:pPr>
+            <a:r>
+              <a:rPr lang="en" sz="1200">
+                <a:solidFill>
+                  <a:srgbClr val="00E0DC"/>
+                </a:solidFill>
+                <a:highlight>
+                  <a:srgbClr val="EFEFEF"/>
+                </a:highlight>
+              </a:rPr>
+              <a:t># strings - so it is bucketed by regex rather than grouped. The patterns were</a:t>
+            </a:r>
+            <a:endParaRPr sz="1200">
+              <a:solidFill>
+                <a:srgbClr val="00E0DC"/>
+              </a:solidFill>
+              <a:highlight>
+                <a:srgbClr val="EFEFEF"/>
+              </a:highlight>
+            </a:endParaRPr>
+          </a:p>
+          <a:p>
+            <a:pPr indent="0" lvl="0" marL="0" rtl="0" algn="l">
+              <a:spcBef>
+                <a:spcPts val="0"/>
+              </a:spcBef>
+              <a:spcAft>
+                <a:spcPts val="0"/>
+              </a:spcAft>
+              <a:buNone/>
+            </a:pPr>
+            <a:r>
+              <a:rPr lang="en" sz="1200">
+                <a:solidFill>
+                  <a:srgbClr val="00E0DC"/>
+                </a:solidFill>
+                <a:highlight>
+                  <a:srgbClr val="EFEFEF"/>
+                </a:highlight>
+              </a:rPr>
+              <a:t># widened against the actual unmatched values: efficacy is written as "breaking</a:t>
+            </a:r>
+            <a:endParaRPr sz="1200">
+              <a:solidFill>
+                <a:srgbClr val="00E0DC"/>
+              </a:solidFill>
+              <a:highlight>
+                <a:srgbClr val="EFEFEF"/>
+              </a:highlight>
+            </a:endParaRPr>
+          </a:p>
+          <a:p>
+            <a:pPr indent="0" lvl="0" marL="0" rtl="0" algn="l">
+              <a:spcBef>
+                <a:spcPts val="0"/>
+              </a:spcBef>
+              <a:spcAft>
+                <a:spcPts val="0"/>
+              </a:spcAft>
+              <a:buNone/>
+            </a:pPr>
+            <a:r>
+              <a:rPr lang="en" sz="1200">
+                <a:solidFill>
+                  <a:srgbClr val="00E0DC"/>
+                </a:solidFill>
+                <a:highlight>
+                  <a:srgbClr val="EFEFEF"/>
+                </a:highlight>
+              </a:rPr>
+              <a:t># through", "not responding" and "wasn't resolving", never as "not working".</a:t>
+            </a:r>
+            <a:endParaRPr sz="1200">
+              <a:solidFill>
+                <a:srgbClr val="00E0DC"/>
+              </a:solidFill>
+              <a:highlight>
+                <a:srgbClr val="EFEFEF"/>
+              </a:highlight>
+            </a:endParaRPr>
+          </a:p>
+          <a:p>
+            <a:pPr indent="0" lvl="0" marL="0" rtl="0" algn="l">
               <a:spcBef>
                 <a:spcPts val="0"/>
               </a:spcBef>
@@ -11854,638 +12751,422 @@
             <a:r>
               <a:t/>
             </a:r>
-            <a:endParaRPr sz="1000">
+            <a:endParaRPr sz="1200">
+              <a:solidFill>
+                <a:srgbClr val="00E0DC"/>
+              </a:solidFill>
               <a:highlight>
-                <a:srgbClr val="FFFFFF"/>
+                <a:srgbClr val="EFEFEF"/>
               </a:highlight>
-              <a:latin typeface="Courier New"/>
-              <a:ea typeface="Courier New"/>
-              <a:cs typeface="Courier New"/>
-              <a:sym typeface="Courier New"/>
             </a:endParaRPr>
           </a:p>
           <a:p>
             <a:pPr indent="0" lvl="0" marL="0" rtl="0" algn="l">
-              <a:lnSpc>
-                <a:spcPct val="130770"/>
-              </a:lnSpc>
-              <a:spcBef>
-                <a:spcPts val="0"/>
-              </a:spcBef>
-              <a:spcAft>
-                <a:spcPts val="0"/>
-              </a:spcAft>
-              <a:buNone/>
-            </a:pPr>
-            <a:r>
-              <a:rPr lang="en" sz="1000">
-                <a:highlight>
-                  <a:srgbClr val="FFFFFF"/>
-                </a:highlight>
-                <a:latin typeface="Courier New"/>
-                <a:ea typeface="Courier New"/>
-                <a:cs typeface="Courier New"/>
-                <a:sym typeface="Courier New"/>
+              <a:spcBef>
+                <a:spcPts val="0"/>
+              </a:spcBef>
+              <a:spcAft>
+                <a:spcPts val="0"/>
+              </a:spcAft>
+              <a:buNone/>
+            </a:pPr>
+            <a:r>
+              <a:rPr lang="en" sz="1300"/>
+              <a:t>BUCKETS = </a:t>
+            </a:r>
+            <a:r>
+              <a:rPr lang="en" sz="1300">
+                <a:solidFill>
+                  <a:srgbClr val="CCCCCC"/>
+                </a:solidFill>
               </a:rPr>
-              <a:t>SELECTION CRITERIA: Must carry a first-person movement construction, both endpoints must resolve to named products, and the surrounding text must not attribute the move to someone else</a:t>
-            </a:r>
-            <a:endParaRPr sz="1000">
-              <a:highlight>
-                <a:srgbClr val="FFFFFF"/>
-              </a:highlight>
-              <a:latin typeface="Courier New"/>
-              <a:ea typeface="Courier New"/>
-              <a:cs typeface="Courier New"/>
-              <a:sym typeface="Courier New"/>
+              <a:t>{</a:t>
+            </a:r>
+            <a:endParaRPr sz="1300">
+              <a:solidFill>
+                <a:srgbClr val="CCCCCC"/>
+              </a:solidFill>
             </a:endParaRPr>
           </a:p>
           <a:p>
             <a:pPr indent="0" lvl="0" marL="0" rtl="0" algn="l">
-              <a:lnSpc>
-                <a:spcPct val="130770"/>
-              </a:lnSpc>
-              <a:spcBef>
-                <a:spcPts val="0"/>
-              </a:spcBef>
-              <a:spcAft>
-                <a:spcPts val="0"/>
-              </a:spcAft>
-              <a:buNone/>
-            </a:pPr>
-            <a:r>
-              <a:t/>
-            </a:r>
-            <a:endParaRPr sz="1000">
-              <a:highlight>
-                <a:srgbClr val="FFFFFF"/>
-              </a:highlight>
-              <a:latin typeface="Courier New"/>
-              <a:ea typeface="Courier New"/>
-              <a:cs typeface="Courier New"/>
-              <a:sym typeface="Courier New"/>
+              <a:spcBef>
+                <a:spcPts val="0"/>
+              </a:spcBef>
+              <a:spcAft>
+                <a:spcPts val="0"/>
+              </a:spcAft>
+              <a:buNone/>
+            </a:pPr>
+            <a:r>
+              <a:rPr lang="en" sz="1300"/>
+              <a:t>   </a:t>
+            </a:r>
+            <a:r>
+              <a:rPr lang="en" sz="1300">
+                <a:solidFill>
+                  <a:srgbClr val="CC0000"/>
+                </a:solidFill>
+              </a:rPr>
+              <a:t> 'side effects</a:t>
+            </a:r>
+            <a:r>
+              <a:rPr lang="en" sz="1300"/>
+              <a:t>': (</a:t>
+            </a:r>
+            <a:r>
+              <a:rPr lang="en" sz="1300">
+                <a:solidFill>
+                  <a:srgbClr val="CC0000"/>
+                </a:solidFill>
+              </a:rPr>
+              <a:t>r'tender|bleed|migraine|headache|nausea|bloat|irritat|rash|mood'</a:t>
+            </a:r>
+            <a:endParaRPr sz="1300">
+              <a:solidFill>
+                <a:srgbClr val="CC0000"/>
+              </a:solidFill>
             </a:endParaRPr>
           </a:p>
           <a:p>
             <a:pPr indent="0" lvl="0" marL="0" rtl="0" algn="l">
-              <a:lnSpc>
-                <a:spcPct val="130770"/>
-              </a:lnSpc>
-              <a:spcBef>
-                <a:spcPts val="0"/>
-              </a:spcBef>
-              <a:spcAft>
-                <a:spcPts val="0"/>
-              </a:spcAft>
-              <a:buNone/>
-            </a:pPr>
-            <a:r>
-              <a:rPr lang="en" sz="1000">
-                <a:highlight>
-                  <a:srgbClr val="FFFFFF"/>
-                </a:highlight>
-                <a:latin typeface="Courier New"/>
-                <a:ea typeface="Courier New"/>
-                <a:cs typeface="Courier New"/>
-                <a:sym typeface="Courier New"/>
+              <a:spcBef>
+                <a:spcPts val="0"/>
+              </a:spcBef>
+              <a:spcAft>
+                <a:spcPts val="0"/>
+              </a:spcAft>
+              <a:buNone/>
+            </a:pPr>
+            <a:r>
+              <a:rPr lang="en" sz="1300">
+                <a:solidFill>
+                  <a:srgbClr val="CC0000"/>
+                </a:solidFill>
               </a:rPr>
-              <a:t>  </a:t>
-            </a:r>
-            <a:r>
-              <a:rPr b="1" lang="en" sz="1000">
-                <a:highlight>
-                  <a:srgbClr val="FFFFFF"/>
-                </a:highlight>
-                <a:latin typeface="Courier New"/>
-                <a:ea typeface="Courier New"/>
-                <a:cs typeface="Courier New"/>
-                <a:sym typeface="Courier New"/>
+              <a:t>                     r'|adverse|side effect|ache|hair</a:t>
+            </a:r>
+            <a:r>
+              <a:rPr lang="en" sz="1300"/>
+              <a:t>'),</a:t>
+            </a:r>
+            <a:endParaRPr sz="1300"/>
+          </a:p>
+          <a:p>
+            <a:pPr indent="0" lvl="0" marL="0" rtl="0" algn="l">
+              <a:spcBef>
+                <a:spcPts val="0"/>
+              </a:spcBef>
+              <a:spcAft>
+                <a:spcPts val="0"/>
+              </a:spcAft>
+              <a:buNone/>
+            </a:pPr>
+            <a:r>
+              <a:rPr lang="en" sz="1300"/>
+              <a:t>    </a:t>
+            </a:r>
+            <a:r>
+              <a:rPr lang="en" sz="1300">
+                <a:solidFill>
+                  <a:srgbClr val="CC0000"/>
+                </a:solidFill>
               </a:rPr>
-              <a:t>vagifem  →  imvexxy  </a:t>
-            </a:r>
-            <a:r>
-              <a:rPr lang="en" sz="1000">
-                <a:highlight>
-                  <a:srgbClr val="FFFFFF"/>
-                </a:highlight>
-                <a:latin typeface="Courier New"/>
-                <a:ea typeface="Courier New"/>
-                <a:cs typeface="Courier New"/>
-                <a:sym typeface="Courier New"/>
+              <a:t>'adhesion / it fell off'</a:t>
+            </a:r>
+            <a:r>
+              <a:rPr lang="en" sz="1300"/>
+              <a:t>:</a:t>
+            </a:r>
+            <a:r>
+              <a:rPr lang="en" sz="1300">
+                <a:solidFill>
+                  <a:srgbClr val="CC0000"/>
+                </a:solidFill>
               </a:rPr>
-              <a:t> [applicator faff]</a:t>
-            </a:r>
-            <a:endParaRPr sz="1000">
-              <a:highlight>
-                <a:srgbClr val="FFFFFF"/>
-              </a:highlight>
-              <a:latin typeface="Courier New"/>
-              <a:ea typeface="Courier New"/>
-              <a:cs typeface="Courier New"/>
-              <a:sym typeface="Courier New"/>
+              <a:t> r'adhes|stick|peel|fall|fell off|came off|applicator'</a:t>
+            </a:r>
+            <a:r>
+              <a:rPr lang="en" sz="1300"/>
+              <a:t>,</a:t>
+            </a:r>
+            <a:endParaRPr sz="1300"/>
+          </a:p>
+          <a:p>
+            <a:pPr indent="0" lvl="0" marL="0" rtl="0" algn="l">
+              <a:spcBef>
+                <a:spcPts val="0"/>
+              </a:spcBef>
+              <a:spcAft>
+                <a:spcPts val="0"/>
+              </a:spcAft>
+              <a:buNone/>
+            </a:pPr>
+            <a:r>
+              <a:rPr lang="en" sz="1300"/>
+              <a:t>   </a:t>
+            </a:r>
+            <a:r>
+              <a:rPr lang="en" sz="1300">
+                <a:solidFill>
+                  <a:srgbClr val="CC0000"/>
+                </a:solidFill>
+              </a:rPr>
+              <a:t> 'dose / absorption / route'</a:t>
+            </a:r>
+            <a:r>
+              <a:rPr lang="en" sz="1300"/>
+              <a:t>: (</a:t>
+            </a:r>
+            <a:r>
+              <a:rPr lang="en" sz="1300">
+                <a:solidFill>
+                  <a:srgbClr val="CC0000"/>
+                </a:solidFill>
+              </a:rPr>
+              <a:t>r'dose|absor|level|consistenc|strength|titrat|route'</a:t>
+            </a:r>
+            <a:endParaRPr sz="1300">
+              <a:solidFill>
+                <a:srgbClr val="CC0000"/>
+              </a:solidFill>
             </a:endParaRPr>
           </a:p>
           <a:p>
             <a:pPr indent="0" lvl="0" marL="0" rtl="0" algn="l">
-              <a:lnSpc>
-                <a:spcPct val="130770"/>
-              </a:lnSpc>
-              <a:spcBef>
-                <a:spcPts val="0"/>
-              </a:spcBef>
-              <a:spcAft>
-                <a:spcPts val="0"/>
-              </a:spcAft>
-              <a:buNone/>
-            </a:pPr>
-            <a:r>
-              <a:rPr lang="en" sz="1000">
-                <a:highlight>
-                  <a:srgbClr val="FFFFFF"/>
-                </a:highlight>
-                <a:latin typeface="Courier New"/>
-                <a:ea typeface="Courier New"/>
-                <a:cs typeface="Courier New"/>
-                <a:sym typeface="Courier New"/>
+              <a:spcBef>
+                <a:spcPts val="0"/>
+              </a:spcBef>
+              <a:spcAft>
+                <a:spcPts val="0"/>
+              </a:spcAft>
+              <a:buNone/>
+            </a:pPr>
+            <a:r>
+              <a:rPr lang="en" sz="1300">
+                <a:solidFill>
+                  <a:srgbClr val="CC0000"/>
+                </a:solidFill>
               </a:rPr>
-              <a:t>    “Switched from Vagifem to Imvexxy a while back mostly because of applicator faff tbh”</a:t>
-            </a:r>
-            <a:endParaRPr sz="1000">
-              <a:highlight>
-                <a:srgbClr val="FFFFFF"/>
-              </a:highlight>
-              <a:latin typeface="Courier New"/>
-              <a:ea typeface="Courier New"/>
-              <a:cs typeface="Courier New"/>
-              <a:sym typeface="Courier New"/>
+              <a:t>                                  r'|transdermal|systemic|peak|trough|hepatic'</a:t>
+            </a:r>
+            <a:r>
+              <a:rPr lang="en" sz="1300"/>
+              <a:t>),</a:t>
+            </a:r>
+            <a:endParaRPr sz="1300"/>
+          </a:p>
+          <a:p>
+            <a:pPr indent="0" lvl="0" marL="0" rtl="0" algn="l">
+              <a:spcBef>
+                <a:spcPts val="0"/>
+              </a:spcBef>
+              <a:spcAft>
+                <a:spcPts val="0"/>
+              </a:spcAft>
+              <a:buNone/>
+            </a:pPr>
+            <a:r>
+              <a:rPr lang="en" sz="1300"/>
+              <a:t>   </a:t>
+            </a:r>
+            <a:r>
+              <a:rPr lang="en" sz="1300">
+                <a:solidFill>
+                  <a:srgbClr val="CC0000"/>
+                </a:solidFill>
+              </a:rPr>
+              <a:t> 'clinician advice'</a:t>
+            </a:r>
+            <a:r>
+              <a:rPr lang="en" sz="1300"/>
+              <a:t>: </a:t>
+            </a:r>
+            <a:r>
+              <a:rPr lang="en" sz="1300">
+                <a:solidFill>
+                  <a:srgbClr val="CC0000"/>
+                </a:solidFill>
+              </a:rPr>
+              <a:t>r'doctor|gp|specialist|consultant|provider|nams|advice'</a:t>
+            </a:r>
+            <a:r>
+              <a:rPr lang="en" sz="1300"/>
+              <a:t>,</a:t>
+            </a:r>
+            <a:endParaRPr sz="1300"/>
+          </a:p>
+          <a:p>
+            <a:pPr indent="0" lvl="0" marL="0" rtl="0" algn="l">
+              <a:spcBef>
+                <a:spcPts val="0"/>
+              </a:spcBef>
+              <a:spcAft>
+                <a:spcPts val="0"/>
+              </a:spcAft>
+              <a:buNone/>
+            </a:pPr>
+            <a:r>
+              <a:rPr lang="en" sz="1300"/>
+              <a:t>   </a:t>
+            </a:r>
+            <a:r>
+              <a:rPr lang="en" sz="1300">
+                <a:solidFill>
+                  <a:srgbClr val="CC0000"/>
+                </a:solidFill>
+              </a:rPr>
+              <a:t> 'cost / access</a:t>
+            </a:r>
+            <a:r>
+              <a:rPr lang="en" sz="1300"/>
+              <a:t>': </a:t>
+            </a:r>
+            <a:r>
+              <a:rPr lang="en" sz="1300">
+                <a:solidFill>
+                  <a:srgbClr val="CC0000"/>
+                </a:solidFill>
+              </a:rPr>
+              <a:t>r'cost|price|insur|cover|afford|supply|shortage</a:t>
+            </a:r>
+            <a:r>
+              <a:rPr lang="en" sz="1300"/>
+              <a:t>',</a:t>
+            </a:r>
+            <a:endParaRPr sz="1300"/>
+          </a:p>
+          <a:p>
+            <a:pPr indent="0" lvl="0" marL="0" rtl="0" algn="l">
+              <a:spcBef>
+                <a:spcPts val="0"/>
+              </a:spcBef>
+              <a:spcAft>
+                <a:spcPts val="0"/>
+              </a:spcAft>
+              <a:buNone/>
+            </a:pPr>
+            <a:r>
+              <a:rPr lang="en" sz="1300"/>
+              <a:t>    </a:t>
+            </a:r>
+            <a:r>
+              <a:rPr lang="en" sz="1300">
+                <a:solidFill>
+                  <a:srgbClr val="CC0000"/>
+                </a:solidFill>
+              </a:rPr>
+              <a:t>'symptoms not controlled'</a:t>
+            </a:r>
+            <a:r>
+              <a:rPr lang="en" sz="1300"/>
+              <a:t>: (</a:t>
+            </a:r>
+            <a:r>
+              <a:rPr lang="en" sz="1300">
+                <a:solidFill>
+                  <a:srgbClr val="CC0000"/>
+                </a:solidFill>
+              </a:rPr>
+              <a:t>r'not work|didn.t work|wasn.t work|no relief|ineffect'</a:t>
+            </a:r>
+            <a:endParaRPr sz="1300">
+              <a:solidFill>
+                <a:srgbClr val="CC0000"/>
+              </a:solidFill>
             </a:endParaRPr>
           </a:p>
           <a:p>
             <a:pPr indent="0" lvl="0" marL="0" rtl="0" algn="l">
-              <a:lnSpc>
-                <a:spcPct val="130770"/>
-              </a:lnSpc>
-              <a:spcBef>
-                <a:spcPts val="0"/>
-              </a:spcBef>
-              <a:spcAft>
-                <a:spcPts val="0"/>
-              </a:spcAft>
-              <a:buNone/>
-            </a:pPr>
-            <a:r>
-              <a:t/>
-            </a:r>
-            <a:endParaRPr sz="1000">
-              <a:highlight>
-                <a:srgbClr val="FFFFFF"/>
-              </a:highlight>
-              <a:latin typeface="Courier New"/>
-              <a:ea typeface="Courier New"/>
-              <a:cs typeface="Courier New"/>
-              <a:sym typeface="Courier New"/>
+              <a:spcBef>
+                <a:spcPts val="0"/>
+              </a:spcBef>
+              <a:spcAft>
+                <a:spcPts val="0"/>
+              </a:spcAft>
+              <a:buNone/>
+            </a:pPr>
+            <a:r>
+              <a:rPr lang="en" sz="1300">
+                <a:solidFill>
+                  <a:srgbClr val="CC0000"/>
+                </a:solidFill>
+              </a:rPr>
+              <a:t>                                r'|stopped work|nothing|breaking through|not respond'</a:t>
+            </a:r>
+            <a:endParaRPr sz="1300">
+              <a:solidFill>
+                <a:srgbClr val="CC0000"/>
+              </a:solidFill>
             </a:endParaRPr>
           </a:p>
           <a:p>
             <a:pPr indent="0" lvl="0" marL="0" rtl="0" algn="l">
-              <a:lnSpc>
-                <a:spcPct val="130770"/>
-              </a:lnSpc>
-              <a:spcBef>
-                <a:spcPts val="0"/>
-              </a:spcBef>
-              <a:spcAft>
-                <a:spcPts val="0"/>
-              </a:spcAft>
-              <a:buNone/>
-            </a:pPr>
-            <a:r>
-              <a:rPr lang="en" sz="1000">
-                <a:highlight>
-                  <a:srgbClr val="FFFFFF"/>
-                </a:highlight>
-                <a:latin typeface="Courier New"/>
-                <a:ea typeface="Courier New"/>
-                <a:cs typeface="Courier New"/>
-                <a:sym typeface="Courier New"/>
+              <a:spcBef>
+                <a:spcPts val="0"/>
+              </a:spcBef>
+              <a:spcAft>
+                <a:spcPts val="0"/>
+              </a:spcAft>
+              <a:buNone/>
+            </a:pPr>
+            <a:r>
+              <a:rPr lang="en" sz="1300">
+                <a:solidFill>
+                  <a:srgbClr val="CC0000"/>
+                </a:solidFill>
               </a:rPr>
-              <a:t>  </a:t>
-            </a:r>
-            <a:r>
-              <a:rPr b="1" lang="en" sz="1000">
-                <a:highlight>
-                  <a:srgbClr val="FFFFFF"/>
-                </a:highlight>
-                <a:latin typeface="Courier New"/>
-                <a:ea typeface="Courier New"/>
-                <a:cs typeface="Courier New"/>
-                <a:sym typeface="Courier New"/>
+              <a:t>                                r'|wasn.t respond|weren.t resolv|wasn.t resolv|got worse'</a:t>
+            </a:r>
+            <a:endParaRPr sz="1300">
+              <a:solidFill>
+                <a:srgbClr val="CC0000"/>
+              </a:solidFill>
+            </a:endParaRPr>
+          </a:p>
+          <a:p>
+            <a:pPr indent="0" lvl="0" marL="0" rtl="0" algn="l">
+              <a:spcBef>
+                <a:spcPts val="0"/>
+              </a:spcBef>
+              <a:spcAft>
+                <a:spcPts val="0"/>
+              </a:spcAft>
+              <a:buNone/>
+            </a:pPr>
+            <a:r>
+              <a:rPr lang="en" sz="1300">
+                <a:solidFill>
+                  <a:srgbClr val="CC0000"/>
+                </a:solidFill>
               </a:rPr>
-              <a:t>activelle  →  climara  </a:t>
-            </a:r>
-            <a:r>
-              <a:rPr lang="en" sz="1000">
-                <a:highlight>
-                  <a:srgbClr val="FFFFFF"/>
-                </a:highlight>
-                <a:latin typeface="Courier New"/>
-                <a:ea typeface="Courier New"/>
-                <a:cs typeface="Courier New"/>
-                <a:sym typeface="Courier New"/>
+              <a:t>                                r'|unsustainable|wasn.t right'</a:t>
+            </a:r>
+            <a:r>
+              <a:rPr lang="en" sz="1300"/>
+              <a:t>),</a:t>
+            </a:r>
+            <a:endParaRPr sz="1300"/>
+          </a:p>
+          <a:p>
+            <a:pPr indent="0" lvl="0" marL="0" rtl="0" algn="l">
+              <a:spcBef>
+                <a:spcPts val="0"/>
+              </a:spcBef>
+              <a:spcAft>
+                <a:spcPts val="0"/>
+              </a:spcAft>
+              <a:buNone/>
+            </a:pPr>
+            <a:r>
+              <a:rPr lang="en" sz="1300">
+                <a:solidFill>
+                  <a:srgbClr val="B7B7B7"/>
+                </a:solidFill>
               </a:rPr>
-              <a:t> [reduce first-pass hepatic effects]</a:t>
-            </a:r>
-            <a:endParaRPr sz="1000">
-              <a:highlight>
-                <a:srgbClr val="FFFFFF"/>
-              </a:highlight>
-              <a:latin typeface="Courier New"/>
-              <a:ea typeface="Courier New"/>
-              <a:cs typeface="Courier New"/>
-              <a:sym typeface="Courier New"/>
-            </a:endParaRPr>
-          </a:p>
-          <a:p>
-            <a:pPr indent="0" lvl="0" marL="0" rtl="0" algn="l">
-              <a:lnSpc>
-                <a:spcPct val="130770"/>
-              </a:lnSpc>
-              <a:spcBef>
-                <a:spcPts val="0"/>
-              </a:spcBef>
-              <a:spcAft>
-                <a:spcPts val="0"/>
-              </a:spcAft>
-              <a:buNone/>
-            </a:pPr>
-            <a:r>
-              <a:rPr lang="en" sz="1000">
-                <a:highlight>
-                  <a:srgbClr val="FFFFFF"/>
-                </a:highlight>
-                <a:latin typeface="Courier New"/>
-                <a:ea typeface="Courier New"/>
-                <a:cs typeface="Courier New"/>
-                <a:sym typeface="Courier New"/>
-              </a:rPr>
-              <a:t>    “switching from oral to transdermal estrogen”</a:t>
-            </a:r>
-            <a:endParaRPr sz="1000">
-              <a:highlight>
-                <a:srgbClr val="FFFFFF"/>
-              </a:highlight>
-              <a:latin typeface="Courier New"/>
-              <a:ea typeface="Courier New"/>
-              <a:cs typeface="Courier New"/>
-              <a:sym typeface="Courier New"/>
-            </a:endParaRPr>
-          </a:p>
-          <a:p>
-            <a:pPr indent="0" lvl="0" marL="0" rtl="0" algn="l">
-              <a:lnSpc>
-                <a:spcPct val="130770"/>
-              </a:lnSpc>
-              <a:spcBef>
-                <a:spcPts val="0"/>
-              </a:spcBef>
-              <a:spcAft>
-                <a:spcPts val="0"/>
-              </a:spcAft>
-              <a:buNone/>
-            </a:pPr>
-            <a:r>
-              <a:t/>
-            </a:r>
-            <a:endParaRPr sz="1000">
-              <a:highlight>
-                <a:srgbClr val="FFFFFF"/>
-              </a:highlight>
-              <a:latin typeface="Courier New"/>
-              <a:ea typeface="Courier New"/>
-              <a:cs typeface="Courier New"/>
-              <a:sym typeface="Courier New"/>
-            </a:endParaRPr>
-          </a:p>
-          <a:p>
-            <a:pPr indent="0" lvl="0" marL="0" rtl="0" algn="l">
-              <a:lnSpc>
-                <a:spcPct val="130770"/>
-              </a:lnSpc>
-              <a:spcBef>
-                <a:spcPts val="0"/>
-              </a:spcBef>
-              <a:spcAft>
-                <a:spcPts val="0"/>
-              </a:spcAft>
-              <a:buNone/>
-            </a:pPr>
-            <a:r>
-              <a:rPr lang="en" sz="1000">
-                <a:highlight>
-                  <a:srgbClr val="FFFFFF"/>
-                </a:highlight>
-                <a:latin typeface="Courier New"/>
-                <a:ea typeface="Courier New"/>
-                <a:cs typeface="Courier New"/>
-                <a:sym typeface="Courier New"/>
-              </a:rPr>
-              <a:t>  </a:t>
-            </a:r>
-            <a:r>
-              <a:rPr b="1" lang="en" sz="1000">
-                <a:highlight>
-                  <a:srgbClr val="FFFFFF"/>
-                </a:highlight>
-                <a:latin typeface="Courier New"/>
-                <a:ea typeface="Courier New"/>
-                <a:cs typeface="Courier New"/>
-                <a:sym typeface="Courier New"/>
-              </a:rPr>
-              <a:t>estradot  →  estradiol gel generic </a:t>
-            </a:r>
-            <a:r>
-              <a:rPr lang="en" sz="1000">
-                <a:highlight>
-                  <a:srgbClr val="FFFFFF"/>
-                </a:highlight>
-                <a:latin typeface="Courier New"/>
-                <a:ea typeface="Courier New"/>
-                <a:cs typeface="Courier New"/>
-                <a:sym typeface="Courier New"/>
-              </a:rPr>
-              <a:t>  [thinking transdermal might be gentler]</a:t>
-            </a:r>
-            <a:endParaRPr sz="1000">
-              <a:highlight>
-                <a:srgbClr val="FFFFFF"/>
-              </a:highlight>
-              <a:latin typeface="Courier New"/>
-              <a:ea typeface="Courier New"/>
-              <a:cs typeface="Courier New"/>
-              <a:sym typeface="Courier New"/>
-            </a:endParaRPr>
-          </a:p>
-          <a:p>
-            <a:pPr indent="0" lvl="0" marL="0" rtl="0" algn="l">
-              <a:lnSpc>
-                <a:spcPct val="130770"/>
-              </a:lnSpc>
-              <a:spcBef>
-                <a:spcPts val="0"/>
-              </a:spcBef>
-              <a:spcAft>
-                <a:spcPts val="0"/>
-              </a:spcAft>
-              <a:buNone/>
-            </a:pPr>
-            <a:r>
-              <a:rPr lang="en" sz="1000">
-                <a:highlight>
-                  <a:srgbClr val="FFFFFF"/>
-                </a:highlight>
-                <a:latin typeface="Courier New"/>
-                <a:ea typeface="Courier New"/>
-                <a:cs typeface="Courier New"/>
-                <a:sym typeface="Courier New"/>
-              </a:rPr>
-              <a:t>    “Switched to estrogen gel thinking transdermal might be gentler.”</a:t>
-            </a:r>
-            <a:endParaRPr sz="1000">
-              <a:highlight>
-                <a:srgbClr val="FFFFFF"/>
-              </a:highlight>
-              <a:latin typeface="Courier New"/>
-              <a:ea typeface="Courier New"/>
-              <a:cs typeface="Courier New"/>
-              <a:sym typeface="Courier New"/>
-            </a:endParaRPr>
-          </a:p>
-          <a:p>
-            <a:pPr indent="0" lvl="0" marL="0" rtl="0" algn="l">
-              <a:lnSpc>
-                <a:spcPct val="130770"/>
-              </a:lnSpc>
-              <a:spcBef>
-                <a:spcPts val="0"/>
-              </a:spcBef>
-              <a:spcAft>
-                <a:spcPts val="0"/>
-              </a:spcAft>
-              <a:buNone/>
-            </a:pPr>
-            <a:r>
-              <a:t/>
-            </a:r>
-            <a:endParaRPr sz="1000">
-              <a:highlight>
-                <a:srgbClr val="FFFFFF"/>
-              </a:highlight>
-              <a:latin typeface="Courier New"/>
-              <a:ea typeface="Courier New"/>
-              <a:cs typeface="Courier New"/>
-              <a:sym typeface="Courier New"/>
-            </a:endParaRPr>
-          </a:p>
-          <a:p>
-            <a:pPr indent="0" lvl="0" marL="0" rtl="0" algn="l">
-              <a:lnSpc>
-                <a:spcPct val="130770"/>
-              </a:lnSpc>
-              <a:spcBef>
-                <a:spcPts val="0"/>
-              </a:spcBef>
-              <a:spcAft>
-                <a:spcPts val="0"/>
-              </a:spcAft>
-              <a:buNone/>
-            </a:pPr>
-            <a:r>
-              <a:rPr lang="en" sz="1000">
-                <a:highlight>
-                  <a:srgbClr val="FFFFFF"/>
-                </a:highlight>
-                <a:latin typeface="Courier New"/>
-                <a:ea typeface="Courier New"/>
-                <a:cs typeface="Courier New"/>
-                <a:sym typeface="Courier New"/>
-              </a:rPr>
-              <a:t> </a:t>
-            </a:r>
-            <a:r>
-              <a:rPr b="1" lang="en" sz="1000">
-                <a:highlight>
-                  <a:srgbClr val="FFFFFF"/>
-                </a:highlight>
-                <a:latin typeface="Courier New"/>
-                <a:ea typeface="Courier New"/>
-                <a:cs typeface="Courier New"/>
-                <a:sym typeface="Courier New"/>
-              </a:rPr>
-              <a:t> prometrium  →  mirena</a:t>
-            </a:r>
-            <a:endParaRPr b="1" sz="1000">
-              <a:highlight>
-                <a:srgbClr val="FFFFFF"/>
-              </a:highlight>
-              <a:latin typeface="Courier New"/>
-              <a:ea typeface="Courier New"/>
-              <a:cs typeface="Courier New"/>
-              <a:sym typeface="Courier New"/>
-            </a:endParaRPr>
-          </a:p>
-          <a:p>
-            <a:pPr indent="0" lvl="0" marL="0" rtl="0" algn="l">
-              <a:lnSpc>
-                <a:spcPct val="130770"/>
-              </a:lnSpc>
-              <a:spcBef>
-                <a:spcPts val="0"/>
-              </a:spcBef>
-              <a:spcAft>
-                <a:spcPts val="0"/>
-              </a:spcAft>
-              <a:buNone/>
-            </a:pPr>
-            <a:r>
-              <a:rPr lang="en" sz="1000">
-                <a:highlight>
-                  <a:srgbClr val="FFFFFF"/>
-                </a:highlight>
-                <a:latin typeface="Courier New"/>
-                <a:ea typeface="Courier New"/>
-                <a:cs typeface="Courier New"/>
-                <a:sym typeface="Courier New"/>
-              </a:rPr>
-              <a:t>    “switching to a Mirena IUD for the progestogen component”</a:t>
-            </a:r>
-            <a:endParaRPr sz="1000">
-              <a:highlight>
-                <a:srgbClr val="FFFFFF"/>
-              </a:highlight>
-              <a:latin typeface="Courier New"/>
-              <a:ea typeface="Courier New"/>
-              <a:cs typeface="Courier New"/>
-              <a:sym typeface="Courier New"/>
-            </a:endParaRPr>
-          </a:p>
-          <a:p>
-            <a:pPr indent="0" lvl="0" marL="0" rtl="0" algn="l">
-              <a:lnSpc>
-                <a:spcPct val="130770"/>
-              </a:lnSpc>
-              <a:spcBef>
-                <a:spcPts val="0"/>
-              </a:spcBef>
-              <a:spcAft>
-                <a:spcPts val="0"/>
-              </a:spcAft>
-              <a:buNone/>
-            </a:pPr>
-            <a:r>
-              <a:t/>
-            </a:r>
-            <a:endParaRPr sz="1000">
-              <a:highlight>
-                <a:srgbClr val="FFFFFF"/>
-              </a:highlight>
-              <a:latin typeface="Courier New"/>
-              <a:ea typeface="Courier New"/>
-              <a:cs typeface="Courier New"/>
-              <a:sym typeface="Courier New"/>
-            </a:endParaRPr>
-          </a:p>
-          <a:p>
-            <a:pPr indent="0" lvl="0" marL="0" rtl="0" algn="l">
-              <a:lnSpc>
-                <a:spcPct val="130770"/>
-              </a:lnSpc>
-              <a:spcBef>
-                <a:spcPts val="0"/>
-              </a:spcBef>
-              <a:spcAft>
-                <a:spcPts val="0"/>
-              </a:spcAft>
-              <a:buNone/>
-            </a:pPr>
-            <a:r>
-              <a:rPr lang="en" sz="1000">
-                <a:highlight>
-                  <a:srgbClr val="FFFFFF"/>
-                </a:highlight>
-                <a:latin typeface="Courier New"/>
-                <a:ea typeface="Courier New"/>
-                <a:cs typeface="Courier New"/>
-                <a:sym typeface="Courier New"/>
-              </a:rPr>
-              <a:t>  </a:t>
-            </a:r>
-            <a:r>
-              <a:rPr b="1" lang="en" sz="1000">
-                <a:highlight>
-                  <a:srgbClr val="FFFFFF"/>
-                </a:highlight>
-                <a:latin typeface="Courier New"/>
-                <a:ea typeface="Courier New"/>
-                <a:cs typeface="Courier New"/>
-                <a:sym typeface="Courier New"/>
-              </a:rPr>
-              <a:t>vagifem  →  intrarosa  </a:t>
-            </a:r>
-            <a:r>
-              <a:rPr lang="en" sz="1000">
-                <a:highlight>
-                  <a:srgbClr val="FFFFFF"/>
-                </a:highlight>
-                <a:latin typeface="Courier New"/>
-                <a:ea typeface="Courier New"/>
-                <a:cs typeface="Courier New"/>
-                <a:sym typeface="Courier New"/>
-              </a:rPr>
-              <a:t> [anecdotally the urgency did settle a bit more]</a:t>
-            </a:r>
-            <a:endParaRPr sz="1000">
-              <a:highlight>
-                <a:srgbClr val="FFFFFF"/>
-              </a:highlight>
-              <a:latin typeface="Courier New"/>
-              <a:ea typeface="Courier New"/>
-              <a:cs typeface="Courier New"/>
-              <a:sym typeface="Courier New"/>
-            </a:endParaRPr>
-          </a:p>
-          <a:p>
-            <a:pPr indent="0" lvl="0" marL="0" rtl="0" algn="l">
-              <a:lnSpc>
-                <a:spcPct val="130770"/>
-              </a:lnSpc>
-              <a:spcBef>
-                <a:spcPts val="0"/>
-              </a:spcBef>
-              <a:spcAft>
-                <a:spcPts val="0"/>
-              </a:spcAft>
-              <a:buNone/>
-            </a:pPr>
-            <a:r>
-              <a:rPr lang="en" sz="1000">
-                <a:highlight>
-                  <a:srgbClr val="FFFFFF"/>
-                </a:highlight>
-                <a:latin typeface="Courier New"/>
-                <a:ea typeface="Courier New"/>
-                <a:cs typeface="Courier New"/>
-                <a:sym typeface="Courier New"/>
-              </a:rPr>
-              <a:t>    “Switched to Intrarosa when my compounding clinic suggested it”</a:t>
-            </a:r>
-            <a:endParaRPr sz="1000">
-              <a:highlight>
-                <a:srgbClr val="FFFFFF"/>
-              </a:highlight>
-              <a:latin typeface="Courier New"/>
-              <a:ea typeface="Courier New"/>
-              <a:cs typeface="Courier New"/>
-              <a:sym typeface="Courier New"/>
-            </a:endParaRPr>
+              <a:t>}</a:t>
+            </a:r>
+            <a:endParaRPr sz="1300"/>
           </a:p>
         </p:txBody>
       </p:sp>
@@ -12502,7 +13183,7 @@
   <p:cSld>
     <p:spTree>
       <p:nvGrpSpPr>
-        <p:cNvPr id="216" name="Shape 216"/>
+        <p:cNvPr id="215" name="Shape 215"/>
         <p:cNvGrpSpPr/>
         <p:nvPr/>
       </p:nvGrpSpPr>
@@ -12516,7 +13197,7 @@
       </p:grpSpPr>
       <p:sp>
         <p:nvSpPr>
-          <p:cNvPr id="217" name="Google Shape;217;p36"/>
+          <p:cNvPr id="216" name="Google Shape;216;p36"/>
           <p:cNvSpPr txBox="1"/>
           <p:nvPr>
             <p:ph type="title"/>
@@ -12524,7 +13205,7 @@
         </p:nvSpPr>
         <p:spPr>
           <a:xfrm>
-            <a:off x="311700" y="445025"/>
+            <a:off x="311700" y="137300"/>
             <a:ext cx="8520600" cy="707400"/>
           </a:xfrm>
           <a:prstGeom prst="rect">
@@ -12548,7 +13229,7 @@
             </a:pPr>
             <a:r>
               <a:rPr lang="en"/>
-              <a:t>User “switch event” - Reason Text Mapping</a:t>
+              <a:t>Insights and Findings</a:t>
             </a:r>
             <a:endParaRPr/>
           </a:p>
@@ -12556,14 +13237,63 @@
       </p:sp>
       <p:sp>
         <p:nvSpPr>
+          <p:cNvPr id="217" name="Google Shape;217;p36"/>
+          <p:cNvSpPr txBox="1"/>
+          <p:nvPr>
+            <p:ph idx="1" type="body"/>
+          </p:nvPr>
+        </p:nvSpPr>
+        <p:spPr>
+          <a:xfrm>
+            <a:off x="311700" y="844700"/>
+            <a:ext cx="8520600" cy="488700"/>
+          </a:xfrm>
+          <a:prstGeom prst="rect">
+            <a:avLst/>
+          </a:prstGeom>
+        </p:spPr>
+        <p:txBody>
+          <a:bodyPr anchorCtr="0" anchor="t" bIns="91425" lIns="91425" spcFirstLastPara="1" rIns="91425" wrap="square" tIns="91425">
+            <a:noAutofit/>
+          </a:bodyPr>
+          <a:lstStyle/>
+          <a:p>
+            <a:pPr indent="-342900" lvl="0" marL="457200" rtl="0" algn="l">
+              <a:spcBef>
+                <a:spcPts val="0"/>
+              </a:spcBef>
+              <a:spcAft>
+                <a:spcPts val="0"/>
+              </a:spcAft>
+              <a:buSzPts val="1800"/>
+              <a:buChar char="●"/>
+            </a:pPr>
+            <a:r>
+              <a:rPr lang="en"/>
+              <a:t>Who is the MHT Menopause Patient Community?</a:t>
+            </a:r>
+            <a:endParaRPr/>
+          </a:p>
+        </p:txBody>
+      </p:sp>
+      <p:pic>
+        <p:nvPicPr>
           <p:cNvPr id="218" name="Google Shape;218;p36"/>
-          <p:cNvSpPr txBox="1"/>
+          <p:cNvPicPr preferRelativeResize="0"/>
           <p:nvPr/>
-        </p:nvSpPr>
-        <p:spPr>
-          <a:xfrm>
-            <a:off x="62250" y="937850"/>
-            <a:ext cx="9019500" cy="3894300"/>
+        </p:nvPicPr>
+        <p:blipFill>
+          <a:blip r:embed="rId3">
+            <a:alphaModFix/>
+          </a:blip>
+          <a:stretch>
+            <a:fillRect/>
+          </a:stretch>
+        </p:blipFill>
+        <p:spPr>
+          <a:xfrm>
+            <a:off x="152400" y="1485800"/>
+            <a:ext cx="8839197" cy="3029027"/>
           </a:xfrm>
           <a:prstGeom prst="rect">
             <a:avLst/>
@@ -12573,593 +13303,7 @@
             <a:noFill/>
           </a:ln>
         </p:spPr>
-        <p:txBody>
-          <a:bodyPr anchorCtr="0" anchor="t" bIns="91425" lIns="91425" spcFirstLastPara="1" rIns="91425" wrap="square" tIns="91425">
-            <a:spAutoFit/>
-          </a:bodyPr>
-          <a:lstStyle/>
-          <a:p>
-            <a:pPr indent="0" lvl="0" marL="0" rtl="0" algn="l">
-              <a:spcBef>
-                <a:spcPts val="0"/>
-              </a:spcBef>
-              <a:spcAft>
-                <a:spcPts val="0"/>
-              </a:spcAft>
-              <a:buNone/>
-            </a:pPr>
-            <a:r>
-              <a:rPr lang="en" sz="1200">
-                <a:solidFill>
-                  <a:srgbClr val="00E0DC"/>
-                </a:solidFill>
-                <a:highlight>
-                  <a:srgbClr val="EFEFEF"/>
-                </a:highlight>
-              </a:rPr>
-              <a:t># The stated reasons, in members' own words. `reason` is free text with no</a:t>
-            </a:r>
-            <a:endParaRPr sz="1200">
-              <a:solidFill>
-                <a:srgbClr val="00E0DC"/>
-              </a:solidFill>
-              <a:highlight>
-                <a:srgbClr val="EFEFEF"/>
-              </a:highlight>
-            </a:endParaRPr>
-          </a:p>
-          <a:p>
-            <a:pPr indent="0" lvl="0" marL="0" rtl="0" algn="l">
-              <a:spcBef>
-                <a:spcPts val="0"/>
-              </a:spcBef>
-              <a:spcAft>
-                <a:spcPts val="0"/>
-              </a:spcAft>
-              <a:buNone/>
-            </a:pPr>
-            <a:r>
-              <a:rPr lang="en" sz="1200">
-                <a:solidFill>
-                  <a:srgbClr val="00E0DC"/>
-                </a:solidFill>
-                <a:highlight>
-                  <a:srgbClr val="EFEFEF"/>
-                </a:highlight>
-              </a:rPr>
-              <a:t># canonical form - `adhesion issues` (47) and `adhesive issues` (6) are separate</a:t>
-            </a:r>
-            <a:endParaRPr sz="1200">
-              <a:solidFill>
-                <a:srgbClr val="00E0DC"/>
-              </a:solidFill>
-              <a:highlight>
-                <a:srgbClr val="EFEFEF"/>
-              </a:highlight>
-            </a:endParaRPr>
-          </a:p>
-          <a:p>
-            <a:pPr indent="0" lvl="0" marL="0" rtl="0" algn="l">
-              <a:spcBef>
-                <a:spcPts val="0"/>
-              </a:spcBef>
-              <a:spcAft>
-                <a:spcPts val="0"/>
-              </a:spcAft>
-              <a:buNone/>
-            </a:pPr>
-            <a:r>
-              <a:rPr lang="en" sz="1200">
-                <a:solidFill>
-                  <a:srgbClr val="00E0DC"/>
-                </a:solidFill>
-                <a:highlight>
-                  <a:srgbClr val="EFEFEF"/>
-                </a:highlight>
-              </a:rPr>
-              <a:t># strings - so it is bucketed by regex rather than grouped. The patterns were</a:t>
-            </a:r>
-            <a:endParaRPr sz="1200">
-              <a:solidFill>
-                <a:srgbClr val="00E0DC"/>
-              </a:solidFill>
-              <a:highlight>
-                <a:srgbClr val="EFEFEF"/>
-              </a:highlight>
-            </a:endParaRPr>
-          </a:p>
-          <a:p>
-            <a:pPr indent="0" lvl="0" marL="0" rtl="0" algn="l">
-              <a:spcBef>
-                <a:spcPts val="0"/>
-              </a:spcBef>
-              <a:spcAft>
-                <a:spcPts val="0"/>
-              </a:spcAft>
-              <a:buNone/>
-            </a:pPr>
-            <a:r>
-              <a:rPr lang="en" sz="1200">
-                <a:solidFill>
-                  <a:srgbClr val="00E0DC"/>
-                </a:solidFill>
-                <a:highlight>
-                  <a:srgbClr val="EFEFEF"/>
-                </a:highlight>
-              </a:rPr>
-              <a:t># widened against the actual unmatched values: efficacy is written as "breaking</a:t>
-            </a:r>
-            <a:endParaRPr sz="1200">
-              <a:solidFill>
-                <a:srgbClr val="00E0DC"/>
-              </a:solidFill>
-              <a:highlight>
-                <a:srgbClr val="EFEFEF"/>
-              </a:highlight>
-            </a:endParaRPr>
-          </a:p>
-          <a:p>
-            <a:pPr indent="0" lvl="0" marL="0" rtl="0" algn="l">
-              <a:spcBef>
-                <a:spcPts val="0"/>
-              </a:spcBef>
-              <a:spcAft>
-                <a:spcPts val="0"/>
-              </a:spcAft>
-              <a:buNone/>
-            </a:pPr>
-            <a:r>
-              <a:rPr lang="en" sz="1200">
-                <a:solidFill>
-                  <a:srgbClr val="00E0DC"/>
-                </a:solidFill>
-                <a:highlight>
-                  <a:srgbClr val="EFEFEF"/>
-                </a:highlight>
-              </a:rPr>
-              <a:t># through", "not responding" and "wasn't resolving", never as "not working".</a:t>
-            </a:r>
-            <a:endParaRPr sz="1200">
-              <a:solidFill>
-                <a:srgbClr val="00E0DC"/>
-              </a:solidFill>
-              <a:highlight>
-                <a:srgbClr val="EFEFEF"/>
-              </a:highlight>
-            </a:endParaRPr>
-          </a:p>
-          <a:p>
-            <a:pPr indent="0" lvl="0" marL="0" rtl="0" algn="l">
-              <a:spcBef>
-                <a:spcPts val="0"/>
-              </a:spcBef>
-              <a:spcAft>
-                <a:spcPts val="0"/>
-              </a:spcAft>
-              <a:buNone/>
-            </a:pPr>
-            <a:r>
-              <a:t/>
-            </a:r>
-            <a:endParaRPr sz="1200">
-              <a:solidFill>
-                <a:srgbClr val="00E0DC"/>
-              </a:solidFill>
-              <a:highlight>
-                <a:srgbClr val="EFEFEF"/>
-              </a:highlight>
-            </a:endParaRPr>
-          </a:p>
-          <a:p>
-            <a:pPr indent="0" lvl="0" marL="0" rtl="0" algn="l">
-              <a:spcBef>
-                <a:spcPts val="0"/>
-              </a:spcBef>
-              <a:spcAft>
-                <a:spcPts val="0"/>
-              </a:spcAft>
-              <a:buNone/>
-            </a:pPr>
-            <a:r>
-              <a:rPr lang="en" sz="1300"/>
-              <a:t>BUCKETS = </a:t>
-            </a:r>
-            <a:r>
-              <a:rPr lang="en" sz="1300">
-                <a:solidFill>
-                  <a:srgbClr val="CCCCCC"/>
-                </a:solidFill>
-              </a:rPr>
-              <a:t>{</a:t>
-            </a:r>
-            <a:endParaRPr sz="1300">
-              <a:solidFill>
-                <a:srgbClr val="CCCCCC"/>
-              </a:solidFill>
-            </a:endParaRPr>
-          </a:p>
-          <a:p>
-            <a:pPr indent="0" lvl="0" marL="0" rtl="0" algn="l">
-              <a:spcBef>
-                <a:spcPts val="0"/>
-              </a:spcBef>
-              <a:spcAft>
-                <a:spcPts val="0"/>
-              </a:spcAft>
-              <a:buNone/>
-            </a:pPr>
-            <a:r>
-              <a:rPr lang="en" sz="1300"/>
-              <a:t>   </a:t>
-            </a:r>
-            <a:r>
-              <a:rPr lang="en" sz="1300">
-                <a:solidFill>
-                  <a:srgbClr val="CC0000"/>
-                </a:solidFill>
-              </a:rPr>
-              <a:t> 'side effects</a:t>
-            </a:r>
-            <a:r>
-              <a:rPr lang="en" sz="1300"/>
-              <a:t>': (</a:t>
-            </a:r>
-            <a:r>
-              <a:rPr lang="en" sz="1300">
-                <a:solidFill>
-                  <a:srgbClr val="CC0000"/>
-                </a:solidFill>
-              </a:rPr>
-              <a:t>r'tender|bleed|migraine|headache|nausea|bloat|irritat|rash|mood'</a:t>
-            </a:r>
-            <a:endParaRPr sz="1300">
-              <a:solidFill>
-                <a:srgbClr val="CC0000"/>
-              </a:solidFill>
-            </a:endParaRPr>
-          </a:p>
-          <a:p>
-            <a:pPr indent="0" lvl="0" marL="0" rtl="0" algn="l">
-              <a:spcBef>
-                <a:spcPts val="0"/>
-              </a:spcBef>
-              <a:spcAft>
-                <a:spcPts val="0"/>
-              </a:spcAft>
-              <a:buNone/>
-            </a:pPr>
-            <a:r>
-              <a:rPr lang="en" sz="1300">
-                <a:solidFill>
-                  <a:srgbClr val="CC0000"/>
-                </a:solidFill>
-              </a:rPr>
-              <a:t>                     r'|adverse|side effect|ache|hair</a:t>
-            </a:r>
-            <a:r>
-              <a:rPr lang="en" sz="1300"/>
-              <a:t>'),</a:t>
-            </a:r>
-            <a:endParaRPr sz="1300"/>
-          </a:p>
-          <a:p>
-            <a:pPr indent="0" lvl="0" marL="0" rtl="0" algn="l">
-              <a:spcBef>
-                <a:spcPts val="0"/>
-              </a:spcBef>
-              <a:spcAft>
-                <a:spcPts val="0"/>
-              </a:spcAft>
-              <a:buNone/>
-            </a:pPr>
-            <a:r>
-              <a:rPr lang="en" sz="1300"/>
-              <a:t>    </a:t>
-            </a:r>
-            <a:r>
-              <a:rPr lang="en" sz="1300">
-                <a:solidFill>
-                  <a:srgbClr val="CC0000"/>
-                </a:solidFill>
-              </a:rPr>
-              <a:t>'adhesion / it fell off'</a:t>
-            </a:r>
-            <a:r>
-              <a:rPr lang="en" sz="1300"/>
-              <a:t>:</a:t>
-            </a:r>
-            <a:r>
-              <a:rPr lang="en" sz="1300">
-                <a:solidFill>
-                  <a:srgbClr val="CC0000"/>
-                </a:solidFill>
-              </a:rPr>
-              <a:t> r'adhes|stick|peel|fall|fell off|came off|applicator'</a:t>
-            </a:r>
-            <a:r>
-              <a:rPr lang="en" sz="1300"/>
-              <a:t>,</a:t>
-            </a:r>
-            <a:endParaRPr sz="1300"/>
-          </a:p>
-          <a:p>
-            <a:pPr indent="0" lvl="0" marL="0" rtl="0" algn="l">
-              <a:spcBef>
-                <a:spcPts val="0"/>
-              </a:spcBef>
-              <a:spcAft>
-                <a:spcPts val="0"/>
-              </a:spcAft>
-              <a:buNone/>
-            </a:pPr>
-            <a:r>
-              <a:rPr lang="en" sz="1300"/>
-              <a:t>   </a:t>
-            </a:r>
-            <a:r>
-              <a:rPr lang="en" sz="1300">
-                <a:solidFill>
-                  <a:srgbClr val="CC0000"/>
-                </a:solidFill>
-              </a:rPr>
-              <a:t> 'dose / absorption / route'</a:t>
-            </a:r>
-            <a:r>
-              <a:rPr lang="en" sz="1300"/>
-              <a:t>: (</a:t>
-            </a:r>
-            <a:r>
-              <a:rPr lang="en" sz="1300">
-                <a:solidFill>
-                  <a:srgbClr val="CC0000"/>
-                </a:solidFill>
-              </a:rPr>
-              <a:t>r'dose|absor|level|consistenc|strength|titrat|route'</a:t>
-            </a:r>
-            <a:endParaRPr sz="1300">
-              <a:solidFill>
-                <a:srgbClr val="CC0000"/>
-              </a:solidFill>
-            </a:endParaRPr>
-          </a:p>
-          <a:p>
-            <a:pPr indent="0" lvl="0" marL="0" rtl="0" algn="l">
-              <a:spcBef>
-                <a:spcPts val="0"/>
-              </a:spcBef>
-              <a:spcAft>
-                <a:spcPts val="0"/>
-              </a:spcAft>
-              <a:buNone/>
-            </a:pPr>
-            <a:r>
-              <a:rPr lang="en" sz="1300">
-                <a:solidFill>
-                  <a:srgbClr val="CC0000"/>
-                </a:solidFill>
-              </a:rPr>
-              <a:t>                                  r'|transdermal|systemic|peak|trough|hepatic'</a:t>
-            </a:r>
-            <a:r>
-              <a:rPr lang="en" sz="1300"/>
-              <a:t>),</a:t>
-            </a:r>
-            <a:endParaRPr sz="1300"/>
-          </a:p>
-          <a:p>
-            <a:pPr indent="0" lvl="0" marL="0" rtl="0" algn="l">
-              <a:spcBef>
-                <a:spcPts val="0"/>
-              </a:spcBef>
-              <a:spcAft>
-                <a:spcPts val="0"/>
-              </a:spcAft>
-              <a:buNone/>
-            </a:pPr>
-            <a:r>
-              <a:rPr lang="en" sz="1300"/>
-              <a:t>   </a:t>
-            </a:r>
-            <a:r>
-              <a:rPr lang="en" sz="1300">
-                <a:solidFill>
-                  <a:srgbClr val="CC0000"/>
-                </a:solidFill>
-              </a:rPr>
-              <a:t> 'clinician advice'</a:t>
-            </a:r>
-            <a:r>
-              <a:rPr lang="en" sz="1300"/>
-              <a:t>: </a:t>
-            </a:r>
-            <a:r>
-              <a:rPr lang="en" sz="1300">
-                <a:solidFill>
-                  <a:srgbClr val="CC0000"/>
-                </a:solidFill>
-              </a:rPr>
-              <a:t>r'doctor|gp|specialist|consultant|provider|nams|advice'</a:t>
-            </a:r>
-            <a:r>
-              <a:rPr lang="en" sz="1300"/>
-              <a:t>,</a:t>
-            </a:r>
-            <a:endParaRPr sz="1300"/>
-          </a:p>
-          <a:p>
-            <a:pPr indent="0" lvl="0" marL="0" rtl="0" algn="l">
-              <a:spcBef>
-                <a:spcPts val="0"/>
-              </a:spcBef>
-              <a:spcAft>
-                <a:spcPts val="0"/>
-              </a:spcAft>
-              <a:buNone/>
-            </a:pPr>
-            <a:r>
-              <a:rPr lang="en" sz="1300"/>
-              <a:t>   </a:t>
-            </a:r>
-            <a:r>
-              <a:rPr lang="en" sz="1300">
-                <a:solidFill>
-                  <a:srgbClr val="CC0000"/>
-                </a:solidFill>
-              </a:rPr>
-              <a:t> 'cost / access</a:t>
-            </a:r>
-            <a:r>
-              <a:rPr lang="en" sz="1300"/>
-              <a:t>': </a:t>
-            </a:r>
-            <a:r>
-              <a:rPr lang="en" sz="1300">
-                <a:solidFill>
-                  <a:srgbClr val="CC0000"/>
-                </a:solidFill>
-              </a:rPr>
-              <a:t>r'cost|price|insur|cover|afford|supply|shortage</a:t>
-            </a:r>
-            <a:r>
-              <a:rPr lang="en" sz="1300"/>
-              <a:t>',</a:t>
-            </a:r>
-            <a:endParaRPr sz="1300"/>
-          </a:p>
-          <a:p>
-            <a:pPr indent="0" lvl="0" marL="0" rtl="0" algn="l">
-              <a:spcBef>
-                <a:spcPts val="0"/>
-              </a:spcBef>
-              <a:spcAft>
-                <a:spcPts val="0"/>
-              </a:spcAft>
-              <a:buNone/>
-            </a:pPr>
-            <a:r>
-              <a:rPr lang="en" sz="1300"/>
-              <a:t>    </a:t>
-            </a:r>
-            <a:r>
-              <a:rPr lang="en" sz="1300">
-                <a:solidFill>
-                  <a:srgbClr val="CC0000"/>
-                </a:solidFill>
-              </a:rPr>
-              <a:t>'symptoms not controlled'</a:t>
-            </a:r>
-            <a:r>
-              <a:rPr lang="en" sz="1300"/>
-              <a:t>: (</a:t>
-            </a:r>
-            <a:r>
-              <a:rPr lang="en" sz="1300">
-                <a:solidFill>
-                  <a:srgbClr val="CC0000"/>
-                </a:solidFill>
-              </a:rPr>
-              <a:t>r'not work|didn.t work|wasn.t work|no relief|ineffect'</a:t>
-            </a:r>
-            <a:endParaRPr sz="1300">
-              <a:solidFill>
-                <a:srgbClr val="CC0000"/>
-              </a:solidFill>
-            </a:endParaRPr>
-          </a:p>
-          <a:p>
-            <a:pPr indent="0" lvl="0" marL="0" rtl="0" algn="l">
-              <a:spcBef>
-                <a:spcPts val="0"/>
-              </a:spcBef>
-              <a:spcAft>
-                <a:spcPts val="0"/>
-              </a:spcAft>
-              <a:buNone/>
-            </a:pPr>
-            <a:r>
-              <a:rPr lang="en" sz="1300">
-                <a:solidFill>
-                  <a:srgbClr val="CC0000"/>
-                </a:solidFill>
-              </a:rPr>
-              <a:t>                                r'|stopped work|nothing|breaking through|not respond'</a:t>
-            </a:r>
-            <a:endParaRPr sz="1300">
-              <a:solidFill>
-                <a:srgbClr val="CC0000"/>
-              </a:solidFill>
-            </a:endParaRPr>
-          </a:p>
-          <a:p>
-            <a:pPr indent="0" lvl="0" marL="0" rtl="0" algn="l">
-              <a:spcBef>
-                <a:spcPts val="0"/>
-              </a:spcBef>
-              <a:spcAft>
-                <a:spcPts val="0"/>
-              </a:spcAft>
-              <a:buNone/>
-            </a:pPr>
-            <a:r>
-              <a:rPr lang="en" sz="1300">
-                <a:solidFill>
-                  <a:srgbClr val="CC0000"/>
-                </a:solidFill>
-              </a:rPr>
-              <a:t>                                r'|wasn.t respond|weren.t resolv|wasn.t resolv|got worse'</a:t>
-            </a:r>
-            <a:endParaRPr sz="1300">
-              <a:solidFill>
-                <a:srgbClr val="CC0000"/>
-              </a:solidFill>
-            </a:endParaRPr>
-          </a:p>
-          <a:p>
-            <a:pPr indent="0" lvl="0" marL="0" rtl="0" algn="l">
-              <a:spcBef>
-                <a:spcPts val="0"/>
-              </a:spcBef>
-              <a:spcAft>
-                <a:spcPts val="0"/>
-              </a:spcAft>
-              <a:buNone/>
-            </a:pPr>
-            <a:r>
-              <a:rPr lang="en" sz="1300">
-                <a:solidFill>
-                  <a:srgbClr val="CC0000"/>
-                </a:solidFill>
-              </a:rPr>
-              <a:t>                                r'|unsustainable|wasn.t right'</a:t>
-            </a:r>
-            <a:r>
-              <a:rPr lang="en" sz="1300"/>
-              <a:t>),</a:t>
-            </a:r>
-            <a:endParaRPr sz="1300"/>
-          </a:p>
-          <a:p>
-            <a:pPr indent="0" lvl="0" marL="0" rtl="0" algn="l">
-              <a:spcBef>
-                <a:spcPts val="0"/>
-              </a:spcBef>
-              <a:spcAft>
-                <a:spcPts val="0"/>
-              </a:spcAft>
-              <a:buNone/>
-            </a:pPr>
-            <a:r>
-              <a:rPr lang="en" sz="1300">
-                <a:solidFill>
-                  <a:srgbClr val="B7B7B7"/>
-                </a:solidFill>
-              </a:rPr>
-              <a:t>}</a:t>
-            </a:r>
-            <a:endParaRPr sz="1300"/>
-          </a:p>
-        </p:txBody>
-      </p:sp>
+      </p:pic>
     </p:spTree>
   </p:cSld>
   <p:clrMapOvr>
@@ -13283,7 +13427,7 @@
         <p:spPr>
           <a:xfrm>
             <a:off x="152400" y="1485800"/>
-            <a:ext cx="8839197" cy="3029027"/>
+            <a:ext cx="8839200" cy="2952293"/>
           </a:xfrm>
           <a:prstGeom prst="rect">
             <a:avLst/>
@@ -13319,90 +13463,9 @@
           <a:chExt cx="0" cy="0"/>
         </a:xfrm>
       </p:grpSpPr>
-      <p:sp>
-        <p:nvSpPr>
-          <p:cNvPr id="230" name="Google Shape;230;p38"/>
-          <p:cNvSpPr txBox="1"/>
-          <p:nvPr>
-            <p:ph type="title"/>
-          </p:nvPr>
-        </p:nvSpPr>
-        <p:spPr>
-          <a:xfrm>
-            <a:off x="311700" y="137300"/>
-            <a:ext cx="8520600" cy="707400"/>
-          </a:xfrm>
-          <a:prstGeom prst="rect">
-            <a:avLst/>
-          </a:prstGeom>
-        </p:spPr>
-        <p:txBody>
-          <a:bodyPr anchorCtr="0" anchor="t" bIns="91425" lIns="91425" spcFirstLastPara="1" rIns="91425" wrap="square" tIns="91425">
-            <a:normAutofit fontScale="90000"/>
-          </a:bodyPr>
-          <a:lstStyle/>
-          <a:p>
-            <a:pPr indent="0" lvl="0" marL="0" rtl="0" algn="l">
-              <a:spcBef>
-                <a:spcPts val="0"/>
-              </a:spcBef>
-              <a:spcAft>
-                <a:spcPts val="0"/>
-              </a:spcAft>
-              <a:buNone/>
-            </a:pPr>
-            <a:r>
-              <a:rPr lang="en"/>
-              <a:t>Insights and Findings</a:t>
-            </a:r>
-            <a:endParaRPr/>
-          </a:p>
-        </p:txBody>
-      </p:sp>
-      <p:sp>
-        <p:nvSpPr>
-          <p:cNvPr id="231" name="Google Shape;231;p38"/>
-          <p:cNvSpPr txBox="1"/>
-          <p:nvPr>
-            <p:ph idx="1" type="body"/>
-          </p:nvPr>
-        </p:nvSpPr>
-        <p:spPr>
-          <a:xfrm>
-            <a:off x="311700" y="844700"/>
-            <a:ext cx="8520600" cy="488700"/>
-          </a:xfrm>
-          <a:prstGeom prst="rect">
-            <a:avLst/>
-          </a:prstGeom>
-        </p:spPr>
-        <p:txBody>
-          <a:bodyPr anchorCtr="0" anchor="t" bIns="91425" lIns="91425" spcFirstLastPara="1" rIns="91425" wrap="square" tIns="91425">
-            <a:noAutofit/>
-          </a:bodyPr>
-          <a:lstStyle/>
-          <a:p>
-            <a:pPr indent="-342900" lvl="0" marL="457200" rtl="0" algn="l">
-              <a:spcBef>
-                <a:spcPts val="0"/>
-              </a:spcBef>
-              <a:spcAft>
-                <a:spcPts val="0"/>
-              </a:spcAft>
-              <a:buSzPts val="1800"/>
-              <a:buChar char="●"/>
-            </a:pPr>
-            <a:r>
-              <a:rPr lang="en"/>
-              <a:t>Who is the MHT Menopause Patient Community?</a:t>
-            </a:r>
-            <a:endParaRPr/>
-          </a:p>
-        </p:txBody>
-      </p:sp>
       <p:pic>
         <p:nvPicPr>
-          <p:cNvPr id="232" name="Google Shape;232;p38"/>
+          <p:cNvPr id="230" name="Google Shape;230;p38" title="accuracy.png"/>
           <p:cNvPicPr preferRelativeResize="0"/>
           <p:nvPr/>
         </p:nvPicPr>
@@ -13416,15 +13479,21 @@
         </p:blipFill>
         <p:spPr>
           <a:xfrm>
-            <a:off x="152400" y="1485800"/>
-            <a:ext cx="8839200" cy="2952293"/>
+            <a:off x="888113" y="152400"/>
+            <a:ext cx="7367772" cy="4838698"/>
           </a:xfrm>
           <a:prstGeom prst="rect">
             <a:avLst/>
           </a:prstGeom>
           <a:noFill/>
-          <a:ln>
-            <a:noFill/>
+          <a:ln cap="flat" cmpd="sng" w="9525">
+            <a:solidFill>
+              <a:schemeClr val="dk2"/>
+            </a:solidFill>
+            <a:prstDash val="solid"/>
+            <a:round/>
+            <a:headEnd len="sm" w="sm" type="none"/>
+            <a:tailEnd len="sm" w="sm" type="none"/>
           </a:ln>
         </p:spPr>
       </p:pic>
@@ -13441,7 +13510,7 @@
   <p:cSld>
     <p:spTree>
       <p:nvGrpSpPr>
-        <p:cNvPr id="236" name="Shape 236"/>
+        <p:cNvPr id="234" name="Shape 234"/>
         <p:cNvGrpSpPr/>
         <p:nvPr/>
       </p:nvGrpSpPr>
@@ -13455,7 +13524,7 @@
       </p:grpSpPr>
       <p:pic>
         <p:nvPicPr>
-          <p:cNvPr id="237" name="Google Shape;237;p39" title="accuracy.png"/>
+          <p:cNvPr id="235" name="Google Shape;235;p39" title="Screenshot 2026-09-23 at 4.16.53 PM.png"/>
           <p:cNvPicPr preferRelativeResize="0"/>
           <p:nvPr/>
         </p:nvPicPr>
@@ -13469,8 +13538,101 @@
         </p:blipFill>
         <p:spPr>
           <a:xfrm>
-            <a:off x="888113" y="152400"/>
-            <a:ext cx="7367772" cy="4838698"/>
+            <a:off x="152400" y="152400"/>
+            <a:ext cx="4573830" cy="4838699"/>
+          </a:xfrm>
+          <a:prstGeom prst="rect">
+            <a:avLst/>
+          </a:prstGeom>
+          <a:noFill/>
+          <a:ln>
+            <a:noFill/>
+          </a:ln>
+        </p:spPr>
+      </p:pic>
+    </p:spTree>
+  </p:cSld>
+  <p:clrMapOvr>
+    <a:masterClrMapping/>
+  </p:clrMapOvr>
+</p:sld>
+</file>
+
+<file path=ppt/slides/slide28.xml><?xml version="1.0" encoding="utf-8"?>
+<p:sld xmlns:a="http://schemas.openxmlformats.org/drawingml/2006/main" xmlns:r="http://schemas.openxmlformats.org/officeDocument/2006/relationships" xmlns:mc="http://schemas.openxmlformats.org/markup-compatibility/2006" xmlns:mv="urn:schemas-microsoft-com:mac:vml" xmlns:p="http://schemas.openxmlformats.org/presentationml/2006/main" xmlns:c="http://schemas.openxmlformats.org/drawingml/2006/chart" xmlns:dgm="http://schemas.openxmlformats.org/drawingml/2006/diagram" xmlns:o="urn:schemas-microsoft-com:office:office" xmlns:v="urn:schemas-microsoft-com:vml" xmlns:pvml="urn:schemas-microsoft-com:office:powerpoint" xmlns:com="http://schemas.openxmlformats.org/drawingml/2006/compatibility" xmlns:p14="http://schemas.microsoft.com/office/powerpoint/2010/main" xmlns:p15="http://schemas.microsoft.com/office/powerpoint/2012/main" xmlns:ahyp="http://schemas.microsoft.com/office/drawing/2018/hyperlinkcolor">
+  <p:cSld>
+    <p:spTree>
+      <p:nvGrpSpPr>
+        <p:cNvPr id="239" name="Shape 239"/>
+        <p:cNvGrpSpPr/>
+        <p:nvPr/>
+      </p:nvGrpSpPr>
+      <p:grpSpPr>
+        <a:xfrm>
+          <a:off x="0" y="0"/>
+          <a:ext cx="0" cy="0"/>
+          <a:chOff x="0" y="0"/>
+          <a:chExt cx="0" cy="0"/>
+        </a:xfrm>
+      </p:grpSpPr>
+      <p:sp>
+        <p:nvSpPr>
+          <p:cNvPr id="240" name="Google Shape;240;p40"/>
+          <p:cNvSpPr txBox="1"/>
+          <p:nvPr>
+            <p:ph type="title"/>
+          </p:nvPr>
+        </p:nvSpPr>
+        <p:spPr>
+          <a:xfrm>
+            <a:off x="311700" y="137300"/>
+            <a:ext cx="8520600" cy="707400"/>
+          </a:xfrm>
+          <a:prstGeom prst="rect">
+            <a:avLst/>
+          </a:prstGeom>
+        </p:spPr>
+        <p:txBody>
+          <a:bodyPr anchorCtr="0" anchor="t" bIns="91425" lIns="91425" spcFirstLastPara="1" rIns="91425" wrap="square" tIns="91425">
+            <a:normAutofit fontScale="90000"/>
+          </a:bodyPr>
+          <a:lstStyle/>
+          <a:p>
+            <a:pPr indent="0" lvl="0" marL="0" rtl="0" algn="l">
+              <a:spcBef>
+                <a:spcPts val="0"/>
+              </a:spcBef>
+              <a:spcAft>
+                <a:spcPts val="0"/>
+              </a:spcAft>
+              <a:buNone/>
+            </a:pPr>
+            <a:r>
+              <a:rPr lang="en"/>
+              <a:t>Insights and Findings</a:t>
+            </a:r>
+            <a:endParaRPr/>
+          </a:p>
+        </p:txBody>
+      </p:sp>
+      <p:pic>
+        <p:nvPicPr>
+          <p:cNvPr id="241" name="Google Shape;241;p40"/>
+          <p:cNvPicPr preferRelativeResize="0"/>
+          <p:nvPr/>
+        </p:nvPicPr>
+        <p:blipFill>
+          <a:blip r:embed="rId3">
+            <a:alphaModFix/>
+          </a:blip>
+          <a:stretch>
+            <a:fillRect/>
+          </a:stretch>
+        </p:blipFill>
+        <p:spPr>
+          <a:xfrm>
+            <a:off x="1391400" y="734400"/>
+            <a:ext cx="6402624" cy="4306525"/>
           </a:xfrm>
           <a:prstGeom prst="rect">
             <a:avLst/>

--- a/docs/MHT - Case Study.pptx
+++ b/docs/MHT - Case Study.pptx
@@ -36,21 +36,24 @@
     <p:sldId id="281" r:id="rId31"/>
     <p:sldId id="282" r:id="rId32"/>
     <p:sldId id="283" r:id="rId33"/>
+    <p:sldId id="284" r:id="rId34"/>
+    <p:sldId id="285" r:id="rId35"/>
+    <p:sldId id="286" r:id="rId36"/>
   </p:sldIdLst>
   <p:sldSz cy="5143500" cx="9144000"/>
   <p:notesSz cx="6858000" cy="9144000"/>
   <p:embeddedFontLst>
     <p:embeddedFont>
       <p:font typeface="PT Sans Narrow"/>
-      <p:regular r:id="rId34"/>
-      <p:bold r:id="rId35"/>
+      <p:regular r:id="rId37"/>
+      <p:bold r:id="rId38"/>
     </p:embeddedFont>
     <p:embeddedFont>
       <p:font typeface="Open Sans"/>
-      <p:regular r:id="rId36"/>
-      <p:bold r:id="rId37"/>
-      <p:italic r:id="rId38"/>
-      <p:boldItalic r:id="rId39"/>
+      <p:regular r:id="rId39"/>
+      <p:bold r:id="rId40"/>
+      <p:italic r:id="rId41"/>
+      <p:boldItalic r:id="rId42"/>
     </p:embeddedFont>
   </p:embeddedFontLst>
   <p:defaultTextStyle>
@@ -831,7 +834,7 @@
   <p:cSld>
     <p:spTree>
       <p:nvGrpSpPr>
-        <p:cNvPr id="120" name="Shape 120"/>
+        <p:cNvPr id="119" name="Shape 119"/>
         <p:cNvGrpSpPr/>
         <p:nvPr/>
       </p:nvGrpSpPr>
@@ -845,7 +848,7 @@
       </p:grpSpPr>
       <p:sp>
         <p:nvSpPr>
-          <p:cNvPr id="121" name="Google Shape;121;g3fbe8c1ba05_0_744:notes"/>
+          <p:cNvPr id="120" name="Google Shape;120;g3fbe8c1ba05_0_715:notes"/>
           <p:cNvSpPr/>
           <p:nvPr>
             <p:ph idx="2" type="sldImg"/>
@@ -880,7 +883,7 @@
       </p:sp>
       <p:sp>
         <p:nvSpPr>
-          <p:cNvPr id="122" name="Google Shape;122;g3fbe8c1ba05_0_744:notes"/>
+          <p:cNvPr id="121" name="Google Shape;121;g3fbe8c1ba05_0_715:notes"/>
           <p:cNvSpPr txBox="1"/>
           <p:nvPr>
             <p:ph idx="1" type="body"/>
@@ -930,7 +933,7 @@
   <p:cSld>
     <p:spTree>
       <p:nvGrpSpPr>
-        <p:cNvPr id="128" name="Shape 128"/>
+        <p:cNvPr id="126" name="Shape 126"/>
         <p:cNvGrpSpPr/>
         <p:nvPr/>
       </p:nvGrpSpPr>
@@ -944,7 +947,7 @@
       </p:grpSpPr>
       <p:sp>
         <p:nvSpPr>
-          <p:cNvPr id="129" name="Google Shape;129;g3fbe8c1ba05_0_729:notes"/>
+          <p:cNvPr id="127" name="Google Shape;127;g3fbe8c1ba05_0_744:notes"/>
           <p:cNvSpPr/>
           <p:nvPr>
             <p:ph idx="2" type="sldImg"/>
@@ -979,7 +982,7 @@
       </p:sp>
       <p:sp>
         <p:nvSpPr>
-          <p:cNvPr id="130" name="Google Shape;130;g3fbe8c1ba05_0_729:notes"/>
+          <p:cNvPr id="128" name="Google Shape;128;g3fbe8c1ba05_0_744:notes"/>
           <p:cNvSpPr txBox="1"/>
           <p:nvPr>
             <p:ph idx="1" type="body"/>
@@ -1029,7 +1032,7 @@
   <p:cSld>
     <p:spTree>
       <p:nvGrpSpPr>
-        <p:cNvPr id="135" name="Shape 135"/>
+        <p:cNvPr id="134" name="Shape 134"/>
         <p:cNvGrpSpPr/>
         <p:nvPr/>
       </p:nvGrpSpPr>
@@ -1043,7 +1046,7 @@
       </p:grpSpPr>
       <p:sp>
         <p:nvSpPr>
-          <p:cNvPr id="136" name="Google Shape;136;g3fbe8c1ba05_0_736:notes"/>
+          <p:cNvPr id="135" name="Google Shape;135;g3fbe8c1ba05_0_729:notes"/>
           <p:cNvSpPr/>
           <p:nvPr>
             <p:ph idx="2" type="sldImg"/>
@@ -1078,7 +1081,7 @@
       </p:sp>
       <p:sp>
         <p:nvSpPr>
-          <p:cNvPr id="137" name="Google Shape;137;g3fbe8c1ba05_0_736:notes"/>
+          <p:cNvPr id="136" name="Google Shape;136;g3fbe8c1ba05_0_729:notes"/>
           <p:cNvSpPr txBox="1"/>
           <p:nvPr>
             <p:ph idx="1" type="body"/>
@@ -1128,7 +1131,7 @@
   <p:cSld>
     <p:spTree>
       <p:nvGrpSpPr>
-        <p:cNvPr id="143" name="Shape 143"/>
+        <p:cNvPr id="141" name="Shape 141"/>
         <p:cNvGrpSpPr/>
         <p:nvPr/>
       </p:nvGrpSpPr>
@@ -1142,7 +1145,7 @@
       </p:grpSpPr>
       <p:sp>
         <p:nvSpPr>
-          <p:cNvPr id="144" name="Google Shape;144;g3fbe8c1ba05_0_753:notes"/>
+          <p:cNvPr id="142" name="Google Shape;142;g3fbe8c1ba05_0_736:notes"/>
           <p:cNvSpPr/>
           <p:nvPr>
             <p:ph idx="2" type="sldImg"/>
@@ -1177,7 +1180,7 @@
       </p:sp>
       <p:sp>
         <p:nvSpPr>
-          <p:cNvPr id="145" name="Google Shape;145;g3fbe8c1ba05_0_753:notes"/>
+          <p:cNvPr id="143" name="Google Shape;143;g3fbe8c1ba05_0_736:notes"/>
           <p:cNvSpPr txBox="1"/>
           <p:nvPr>
             <p:ph idx="1" type="body"/>
@@ -1241,7 +1244,7 @@
       </p:grpSpPr>
       <p:sp>
         <p:nvSpPr>
-          <p:cNvPr id="150" name="Google Shape;150;g3fbe8c1ba05_0_819:notes"/>
+          <p:cNvPr id="150" name="Google Shape;150;g3fbe8c1ba05_0_753:notes"/>
           <p:cNvSpPr/>
           <p:nvPr>
             <p:ph idx="2" type="sldImg"/>
@@ -1276,7 +1279,7 @@
       </p:sp>
       <p:sp>
         <p:nvSpPr>
-          <p:cNvPr id="151" name="Google Shape;151;g3fbe8c1ba05_0_819:notes"/>
+          <p:cNvPr id="151" name="Google Shape;151;g3fbe8c1ba05_0_753:notes"/>
           <p:cNvSpPr txBox="1"/>
           <p:nvPr>
             <p:ph idx="1" type="body"/>
@@ -1326,7 +1329,7 @@
   <p:cSld>
     <p:spTree>
       <p:nvGrpSpPr>
-        <p:cNvPr id="156" name="Shape 156"/>
+        <p:cNvPr id="155" name="Shape 155"/>
         <p:cNvGrpSpPr/>
         <p:nvPr/>
       </p:nvGrpSpPr>
@@ -1340,7 +1343,7 @@
       </p:grpSpPr>
       <p:sp>
         <p:nvSpPr>
-          <p:cNvPr id="157" name="Google Shape;157;g3fbe8c1ba05_0_826:notes"/>
+          <p:cNvPr id="156" name="Google Shape;156;g3fbe8c1ba05_0_819:notes"/>
           <p:cNvSpPr/>
           <p:nvPr>
             <p:ph idx="2" type="sldImg"/>
@@ -1375,7 +1378,7 @@
       </p:sp>
       <p:sp>
         <p:nvSpPr>
-          <p:cNvPr id="158" name="Google Shape;158;g3fbe8c1ba05_0_826:notes"/>
+          <p:cNvPr id="157" name="Google Shape;157;g3fbe8c1ba05_0_819:notes"/>
           <p:cNvSpPr txBox="1"/>
           <p:nvPr>
             <p:ph idx="1" type="body"/>
@@ -1425,7 +1428,7 @@
   <p:cSld>
     <p:spTree>
       <p:nvGrpSpPr>
-        <p:cNvPr id="163" name="Shape 163"/>
+        <p:cNvPr id="162" name="Shape 162"/>
         <p:cNvGrpSpPr/>
         <p:nvPr/>
       </p:nvGrpSpPr>
@@ -1439,7 +1442,7 @@
       </p:grpSpPr>
       <p:sp>
         <p:nvSpPr>
-          <p:cNvPr id="164" name="Google Shape;164;g3fbe8c1ba05_0_841:notes"/>
+          <p:cNvPr id="163" name="Google Shape;163;g3fbe8c1ba05_0_826:notes"/>
           <p:cNvSpPr/>
           <p:nvPr>
             <p:ph idx="2" type="sldImg"/>
@@ -1474,7 +1477,7 @@
       </p:sp>
       <p:sp>
         <p:nvSpPr>
-          <p:cNvPr id="165" name="Google Shape;165;g3fbe8c1ba05_0_841:notes"/>
+          <p:cNvPr id="164" name="Google Shape;164;g3fbe8c1ba05_0_826:notes"/>
           <p:cNvSpPr txBox="1"/>
           <p:nvPr>
             <p:ph idx="1" type="body"/>
@@ -1524,7 +1527,7 @@
   <p:cSld>
     <p:spTree>
       <p:nvGrpSpPr>
-        <p:cNvPr id="170" name="Shape 170"/>
+        <p:cNvPr id="169" name="Shape 169"/>
         <p:cNvGrpSpPr/>
         <p:nvPr/>
       </p:nvGrpSpPr>
@@ -1538,7 +1541,7 @@
       </p:grpSpPr>
       <p:sp>
         <p:nvSpPr>
-          <p:cNvPr id="171" name="Google Shape;171;g3fbe8c1ba05_0_805:notes"/>
+          <p:cNvPr id="170" name="Google Shape;170;g3fbe8c1ba05_0_841:notes"/>
           <p:cNvSpPr/>
           <p:nvPr>
             <p:ph idx="2" type="sldImg"/>
@@ -1573,7 +1576,7 @@
       </p:sp>
       <p:sp>
         <p:nvSpPr>
-          <p:cNvPr id="172" name="Google Shape;172;g3fbe8c1ba05_0_805:notes"/>
+          <p:cNvPr id="171" name="Google Shape;171;g3fbe8c1ba05_0_841:notes"/>
           <p:cNvSpPr txBox="1"/>
           <p:nvPr>
             <p:ph idx="1" type="body"/>
@@ -1623,7 +1626,7 @@
   <p:cSld>
     <p:spTree>
       <p:nvGrpSpPr>
-        <p:cNvPr id="177" name="Shape 177"/>
+        <p:cNvPr id="176" name="Shape 176"/>
         <p:cNvGrpSpPr/>
         <p:nvPr/>
       </p:nvGrpSpPr>
@@ -1637,7 +1640,7 @@
       </p:grpSpPr>
       <p:sp>
         <p:nvSpPr>
-          <p:cNvPr id="178" name="Google Shape;178;g3fbe8c1ba05_0_670:notes"/>
+          <p:cNvPr id="177" name="Google Shape;177;g3fbe8c1ba05_0_805:notes"/>
           <p:cNvSpPr/>
           <p:nvPr>
             <p:ph idx="2" type="sldImg"/>
@@ -1672,7 +1675,7 @@
       </p:sp>
       <p:sp>
         <p:nvSpPr>
-          <p:cNvPr id="179" name="Google Shape;179;g3fbe8c1ba05_0_670:notes"/>
+          <p:cNvPr id="178" name="Google Shape;178;g3fbe8c1ba05_0_805:notes"/>
           <p:cNvSpPr txBox="1"/>
           <p:nvPr>
             <p:ph idx="1" type="body"/>
@@ -1736,7 +1739,7 @@
       </p:grpSpPr>
       <p:sp>
         <p:nvSpPr>
-          <p:cNvPr id="184" name="Google Shape;184;g3fbe8c1ba05_0_675:notes"/>
+          <p:cNvPr id="184" name="Google Shape;184;h5a7fe17a1b0da5ba_0_25:notes"/>
           <p:cNvSpPr/>
           <p:nvPr>
             <p:ph idx="2" type="sldImg"/>
@@ -1771,7 +1774,7 @@
       </p:sp>
       <p:sp>
         <p:nvSpPr>
-          <p:cNvPr id="185" name="Google Shape;185;g3fbe8c1ba05_0_675:notes"/>
+          <p:cNvPr id="185" name="Google Shape;185;h5a7fe17a1b0da5ba_0_25:notes"/>
           <p:cNvSpPr txBox="1"/>
           <p:nvPr>
             <p:ph idx="1" type="body"/>
@@ -1920,7 +1923,7 @@
   <p:cSld>
     <p:spTree>
       <p:nvGrpSpPr>
-        <p:cNvPr id="189" name="Shape 189"/>
+        <p:cNvPr id="190" name="Shape 190"/>
         <p:cNvGrpSpPr/>
         <p:nvPr/>
       </p:nvGrpSpPr>
@@ -1934,7 +1937,7 @@
       </p:grpSpPr>
       <p:sp>
         <p:nvSpPr>
-          <p:cNvPr id="190" name="Google Shape;190;g3fbe8c1ba05_0_650:notes"/>
+          <p:cNvPr id="191" name="Google Shape;191;g3fbe8c1ba05_0_670:notes"/>
           <p:cNvSpPr/>
           <p:nvPr>
             <p:ph idx="2" type="sldImg"/>
@@ -1969,7 +1972,7 @@
       </p:sp>
       <p:sp>
         <p:nvSpPr>
-          <p:cNvPr id="191" name="Google Shape;191;g3fbe8c1ba05_0_650:notes"/>
+          <p:cNvPr id="192" name="Google Shape;192;g3fbe8c1ba05_0_670:notes"/>
           <p:cNvSpPr txBox="1"/>
           <p:nvPr>
             <p:ph idx="1" type="body"/>
@@ -2019,7 +2022,7 @@
   <p:cSld>
     <p:spTree>
       <p:nvGrpSpPr>
-        <p:cNvPr id="194" name="Shape 194"/>
+        <p:cNvPr id="196" name="Shape 196"/>
         <p:cNvGrpSpPr/>
         <p:nvPr/>
       </p:nvGrpSpPr>
@@ -2033,7 +2036,7 @@
       </p:grpSpPr>
       <p:sp>
         <p:nvSpPr>
-          <p:cNvPr id="195" name="Google Shape;195;g3fbe8c1ba05_0_766:notes"/>
+          <p:cNvPr id="197" name="Google Shape;197;g3fbe8c1ba05_0_675:notes"/>
           <p:cNvSpPr/>
           <p:nvPr>
             <p:ph idx="2" type="sldImg"/>
@@ -2068,7 +2071,7 @@
       </p:sp>
       <p:sp>
         <p:nvSpPr>
-          <p:cNvPr id="196" name="Google Shape;196;g3fbe8c1ba05_0_766:notes"/>
+          <p:cNvPr id="198" name="Google Shape;198;g3fbe8c1ba05_0_675:notes"/>
           <p:cNvSpPr txBox="1"/>
           <p:nvPr>
             <p:ph idx="1" type="body"/>
@@ -2118,7 +2121,7 @@
   <p:cSld>
     <p:spTree>
       <p:nvGrpSpPr>
-        <p:cNvPr id="200" name="Shape 200"/>
+        <p:cNvPr id="202" name="Shape 202"/>
         <p:cNvGrpSpPr/>
         <p:nvPr/>
       </p:nvGrpSpPr>
@@ -2132,7 +2135,7 @@
       </p:grpSpPr>
       <p:sp>
         <p:nvSpPr>
-          <p:cNvPr id="201" name="Google Shape;201;g3fbe8c1ba05_0_833:notes"/>
+          <p:cNvPr id="203" name="Google Shape;203;g3fbe8c1ba05_0_650:notes"/>
           <p:cNvSpPr/>
           <p:nvPr>
             <p:ph idx="2" type="sldImg"/>
@@ -2167,7 +2170,7 @@
       </p:sp>
       <p:sp>
         <p:nvSpPr>
-          <p:cNvPr id="202" name="Google Shape;202;g3fbe8c1ba05_0_833:notes"/>
+          <p:cNvPr id="204" name="Google Shape;204;g3fbe8c1ba05_0_650:notes"/>
           <p:cNvSpPr txBox="1"/>
           <p:nvPr>
             <p:ph idx="1" type="body"/>
@@ -2217,7 +2220,7 @@
   <p:cSld>
     <p:spTree>
       <p:nvGrpSpPr>
-        <p:cNvPr id="206" name="Shape 206"/>
+        <p:cNvPr id="207" name="Shape 207"/>
         <p:cNvGrpSpPr/>
         <p:nvPr/>
       </p:nvGrpSpPr>
@@ -2231,7 +2234,7 @@
       </p:grpSpPr>
       <p:sp>
         <p:nvSpPr>
-          <p:cNvPr id="207" name="Google Shape;207;g3fbe8c1ba05_0_792:notes"/>
+          <p:cNvPr id="208" name="Google Shape;208;g3fbe8c1ba05_0_766:notes"/>
           <p:cNvSpPr/>
           <p:nvPr>
             <p:ph idx="2" type="sldImg"/>
@@ -2266,7 +2269,7 @@
       </p:sp>
       <p:sp>
         <p:nvSpPr>
-          <p:cNvPr id="208" name="Google Shape;208;g3fbe8c1ba05_0_792:notes"/>
+          <p:cNvPr id="209" name="Google Shape;209;g3fbe8c1ba05_0_766:notes"/>
           <p:cNvSpPr txBox="1"/>
           <p:nvPr>
             <p:ph idx="1" type="body"/>
@@ -2316,7 +2319,7 @@
   <p:cSld>
     <p:spTree>
       <p:nvGrpSpPr>
-        <p:cNvPr id="212" name="Shape 212"/>
+        <p:cNvPr id="213" name="Shape 213"/>
         <p:cNvGrpSpPr/>
         <p:nvPr/>
       </p:nvGrpSpPr>
@@ -2330,7 +2333,7 @@
       </p:grpSpPr>
       <p:sp>
         <p:nvSpPr>
-          <p:cNvPr id="213" name="Google Shape;213;g3fbe8c1ba05_0_722:notes"/>
+          <p:cNvPr id="214" name="Google Shape;214;g3fbe8c1ba05_0_833:notes"/>
           <p:cNvSpPr/>
           <p:nvPr>
             <p:ph idx="2" type="sldImg"/>
@@ -2365,7 +2368,7 @@
       </p:sp>
       <p:sp>
         <p:nvSpPr>
-          <p:cNvPr id="214" name="Google Shape;214;g3fbe8c1ba05_0_722:notes"/>
+          <p:cNvPr id="215" name="Google Shape;215;g3fbe8c1ba05_0_833:notes"/>
           <p:cNvSpPr txBox="1"/>
           <p:nvPr>
             <p:ph idx="1" type="body"/>
@@ -2429,7 +2432,7 @@
       </p:grpSpPr>
       <p:sp>
         <p:nvSpPr>
-          <p:cNvPr id="220" name="Google Shape;220;g3fbe8c1ba05_0_660:notes"/>
+          <p:cNvPr id="220" name="Google Shape;220;g3fbe8c1ba05_0_792:notes"/>
           <p:cNvSpPr/>
           <p:nvPr>
             <p:ph idx="2" type="sldImg"/>
@@ -2464,7 +2467,7 @@
       </p:sp>
       <p:sp>
         <p:nvSpPr>
-          <p:cNvPr id="221" name="Google Shape;221;g3fbe8c1ba05_0_660:notes"/>
+          <p:cNvPr id="221" name="Google Shape;221;g3fbe8c1ba05_0_792:notes"/>
           <p:cNvSpPr txBox="1"/>
           <p:nvPr>
             <p:ph idx="1" type="body"/>
@@ -2514,7 +2517,7 @@
   <p:cSld>
     <p:spTree>
       <p:nvGrpSpPr>
-        <p:cNvPr id="226" name="Shape 226"/>
+        <p:cNvPr id="225" name="Shape 225"/>
         <p:cNvGrpSpPr/>
         <p:nvPr/>
       </p:nvGrpSpPr>
@@ -2528,7 +2531,7 @@
       </p:grpSpPr>
       <p:sp>
         <p:nvSpPr>
-          <p:cNvPr id="227" name="Google Shape;227;g3fbe8c1ba05_0_1417:notes"/>
+          <p:cNvPr id="226" name="Google Shape;226;g3fbe8c1ba05_0_722:notes"/>
           <p:cNvSpPr/>
           <p:nvPr>
             <p:ph idx="2" type="sldImg"/>
@@ -2563,7 +2566,7 @@
       </p:sp>
       <p:sp>
         <p:nvSpPr>
-          <p:cNvPr id="228" name="Google Shape;228;g3fbe8c1ba05_0_1417:notes"/>
+          <p:cNvPr id="227" name="Google Shape;227;g3fbe8c1ba05_0_722:notes"/>
           <p:cNvSpPr txBox="1"/>
           <p:nvPr>
             <p:ph idx="1" type="body"/>
@@ -2613,7 +2616,7 @@
   <p:cSld>
     <p:spTree>
       <p:nvGrpSpPr>
-        <p:cNvPr id="231" name="Shape 231"/>
+        <p:cNvPr id="232" name="Shape 232"/>
         <p:cNvGrpSpPr/>
         <p:nvPr/>
       </p:nvGrpSpPr>
@@ -2627,7 +2630,7 @@
       </p:grpSpPr>
       <p:sp>
         <p:nvSpPr>
-          <p:cNvPr id="232" name="Google Shape;232;g3fbe8c1ba05_0_1448:notes"/>
+          <p:cNvPr id="233" name="Google Shape;233;g3fbe8c1ba05_0_660:notes"/>
           <p:cNvSpPr/>
           <p:nvPr>
             <p:ph idx="2" type="sldImg"/>
@@ -2662,7 +2665,7 @@
       </p:sp>
       <p:sp>
         <p:nvSpPr>
-          <p:cNvPr id="233" name="Google Shape;233;g3fbe8c1ba05_0_1448:notes"/>
+          <p:cNvPr id="234" name="Google Shape;234;g3fbe8c1ba05_0_660:notes"/>
           <p:cNvSpPr txBox="1"/>
           <p:nvPr>
             <p:ph idx="1" type="body"/>
@@ -2712,7 +2715,7 @@
   <p:cSld>
     <p:spTree>
       <p:nvGrpSpPr>
-        <p:cNvPr id="236" name="Shape 236"/>
+        <p:cNvPr id="239" name="Shape 239"/>
         <p:cNvGrpSpPr/>
         <p:nvPr/>
       </p:nvGrpSpPr>
@@ -2726,7 +2729,7 @@
       </p:grpSpPr>
       <p:sp>
         <p:nvSpPr>
-          <p:cNvPr id="237" name="Google Shape;237;g3fbe8c1ba05_0_812:notes"/>
+          <p:cNvPr id="240" name="Google Shape;240;g3fbe8c1ba05_0_1417:notes"/>
           <p:cNvSpPr/>
           <p:nvPr>
             <p:ph idx="2" type="sldImg"/>
@@ -2761,7 +2764,106 @@
       </p:sp>
       <p:sp>
         <p:nvSpPr>
-          <p:cNvPr id="238" name="Google Shape;238;g3fbe8c1ba05_0_812:notes"/>
+          <p:cNvPr id="241" name="Google Shape;241;g3fbe8c1ba05_0_1417:notes"/>
+          <p:cNvSpPr txBox="1"/>
+          <p:nvPr>
+            <p:ph idx="1" type="body"/>
+          </p:nvPr>
+        </p:nvSpPr>
+        <p:spPr>
+          <a:xfrm>
+            <a:off x="685800" y="4343400"/>
+            <a:ext cx="5486400" cy="4114800"/>
+          </a:xfrm>
+          <a:prstGeom prst="rect">
+            <a:avLst/>
+          </a:prstGeom>
+        </p:spPr>
+        <p:txBody>
+          <a:bodyPr anchorCtr="0" anchor="t" bIns="91425" lIns="91425" spcFirstLastPara="1" rIns="91425" wrap="square" tIns="91425">
+            <a:noAutofit/>
+          </a:bodyPr>
+          <a:lstStyle/>
+          <a:p>
+            <a:pPr indent="0" lvl="0" marL="0" rtl="0" algn="l">
+              <a:spcBef>
+                <a:spcPts val="0"/>
+              </a:spcBef>
+              <a:spcAft>
+                <a:spcPts val="0"/>
+              </a:spcAft>
+              <a:buNone/>
+            </a:pPr>
+            <a:r>
+              <a:t/>
+            </a:r>
+            <a:endParaRPr/>
+          </a:p>
+        </p:txBody>
+      </p:sp>
+    </p:spTree>
+  </p:cSld>
+  <p:clrMapOvr>
+    <a:masterClrMapping/>
+  </p:clrMapOvr>
+</p:notes>
+</file>
+
+<file path=ppt/notesSlides/notesSlide29.xml><?xml version="1.0" encoding="utf-8"?>
+<p:notes xmlns:a="http://schemas.openxmlformats.org/drawingml/2006/main" xmlns:r="http://schemas.openxmlformats.org/officeDocument/2006/relationships" xmlns:mc="http://schemas.openxmlformats.org/markup-compatibility/2006" xmlns:mv="urn:schemas-microsoft-com:mac:vml" xmlns:p="http://schemas.openxmlformats.org/presentationml/2006/main" xmlns:c="http://schemas.openxmlformats.org/drawingml/2006/chart" xmlns:dgm="http://schemas.openxmlformats.org/drawingml/2006/diagram" xmlns:o="urn:schemas-microsoft-com:office:office" xmlns:v="urn:schemas-microsoft-com:vml" xmlns:pvml="urn:schemas-microsoft-com:office:powerpoint" xmlns:com="http://schemas.openxmlformats.org/drawingml/2006/compatibility" xmlns:p14="http://schemas.microsoft.com/office/powerpoint/2010/main" xmlns:p15="http://schemas.microsoft.com/office/powerpoint/2012/main" xmlns:ahyp="http://schemas.microsoft.com/office/drawing/2018/hyperlinkcolor" showMasterPhAnim="0" showMasterSp="0">
+  <p:cSld>
+    <p:spTree>
+      <p:nvGrpSpPr>
+        <p:cNvPr id="244" name="Shape 244"/>
+        <p:cNvGrpSpPr/>
+        <p:nvPr/>
+      </p:nvGrpSpPr>
+      <p:grpSpPr>
+        <a:xfrm>
+          <a:off x="0" y="0"/>
+          <a:ext cx="0" cy="0"/>
+          <a:chOff x="0" y="0"/>
+          <a:chExt cx="0" cy="0"/>
+        </a:xfrm>
+      </p:grpSpPr>
+      <p:sp>
+        <p:nvSpPr>
+          <p:cNvPr id="245" name="Google Shape;245;h5a7fe17a1b0da5ba_0_20:notes"/>
+          <p:cNvSpPr/>
+          <p:nvPr>
+            <p:ph idx="2" type="sldImg"/>
+          </p:nvPr>
+        </p:nvSpPr>
+        <p:spPr>
+          <a:xfrm>
+            <a:off x="381300" y="685800"/>
+            <a:ext cx="6096000" cy="3429000"/>
+          </a:xfrm>
+          <a:custGeom>
+            <a:rect b="b" l="l" r="r" t="t"/>
+            <a:pathLst>
+              <a:path extrusionOk="0" h="120000" w="120000">
+                <a:moveTo>
+                  <a:pt x="0" y="0"/>
+                </a:moveTo>
+                <a:lnTo>
+                  <a:pt x="120000" y="0"/>
+                </a:lnTo>
+                <a:lnTo>
+                  <a:pt x="120000" y="120000"/>
+                </a:lnTo>
+                <a:lnTo>
+                  <a:pt x="0" y="120000"/>
+                </a:lnTo>
+                <a:close/>
+              </a:path>
+            </a:pathLst>
+          </a:custGeom>
+        </p:spPr>
+      </p:sp>
+      <p:sp>
+        <p:nvSpPr>
+          <p:cNvPr id="246" name="Google Shape;246;h5a7fe17a1b0da5ba_0_20:notes"/>
           <p:cNvSpPr txBox="1"/>
           <p:nvPr>
             <p:ph idx="1" type="body"/>
@@ -2905,6 +3007,204 @@
 </p:notes>
 </file>
 
+<file path=ppt/notesSlides/notesSlide30.xml><?xml version="1.0" encoding="utf-8"?>
+<p:notes xmlns:a="http://schemas.openxmlformats.org/drawingml/2006/main" xmlns:r="http://schemas.openxmlformats.org/officeDocument/2006/relationships" xmlns:mc="http://schemas.openxmlformats.org/markup-compatibility/2006" xmlns:mv="urn:schemas-microsoft-com:mac:vml" xmlns:p="http://schemas.openxmlformats.org/presentationml/2006/main" xmlns:c="http://schemas.openxmlformats.org/drawingml/2006/chart" xmlns:dgm="http://schemas.openxmlformats.org/drawingml/2006/diagram" xmlns:o="urn:schemas-microsoft-com:office:office" xmlns:v="urn:schemas-microsoft-com:vml" xmlns:pvml="urn:schemas-microsoft-com:office:powerpoint" xmlns:com="http://schemas.openxmlformats.org/drawingml/2006/compatibility" xmlns:p14="http://schemas.microsoft.com/office/powerpoint/2010/main" xmlns:p15="http://schemas.microsoft.com/office/powerpoint/2012/main" xmlns:ahyp="http://schemas.microsoft.com/office/drawing/2018/hyperlinkcolor" showMasterPhAnim="0" showMasterSp="0">
+  <p:cSld>
+    <p:spTree>
+      <p:nvGrpSpPr>
+        <p:cNvPr id="249" name="Shape 249"/>
+        <p:cNvGrpSpPr/>
+        <p:nvPr/>
+      </p:nvGrpSpPr>
+      <p:grpSpPr>
+        <a:xfrm>
+          <a:off x="0" y="0"/>
+          <a:ext cx="0" cy="0"/>
+          <a:chOff x="0" y="0"/>
+          <a:chExt cx="0" cy="0"/>
+        </a:xfrm>
+      </p:grpSpPr>
+      <p:sp>
+        <p:nvSpPr>
+          <p:cNvPr id="250" name="Google Shape;250;g3fbe8c1ba05_0_1448:notes"/>
+          <p:cNvSpPr/>
+          <p:nvPr>
+            <p:ph idx="2" type="sldImg"/>
+          </p:nvPr>
+        </p:nvSpPr>
+        <p:spPr>
+          <a:xfrm>
+            <a:off x="381300" y="685800"/>
+            <a:ext cx="6096000" cy="3429000"/>
+          </a:xfrm>
+          <a:custGeom>
+            <a:rect b="b" l="l" r="r" t="t"/>
+            <a:pathLst>
+              <a:path extrusionOk="0" h="120000" w="120000">
+                <a:moveTo>
+                  <a:pt x="0" y="0"/>
+                </a:moveTo>
+                <a:lnTo>
+                  <a:pt x="120000" y="0"/>
+                </a:lnTo>
+                <a:lnTo>
+                  <a:pt x="120000" y="120000"/>
+                </a:lnTo>
+                <a:lnTo>
+                  <a:pt x="0" y="120000"/>
+                </a:lnTo>
+                <a:close/>
+              </a:path>
+            </a:pathLst>
+          </a:custGeom>
+        </p:spPr>
+      </p:sp>
+      <p:sp>
+        <p:nvSpPr>
+          <p:cNvPr id="251" name="Google Shape;251;g3fbe8c1ba05_0_1448:notes"/>
+          <p:cNvSpPr txBox="1"/>
+          <p:nvPr>
+            <p:ph idx="1" type="body"/>
+          </p:nvPr>
+        </p:nvSpPr>
+        <p:spPr>
+          <a:xfrm>
+            <a:off x="685800" y="4343400"/>
+            <a:ext cx="5486400" cy="4114800"/>
+          </a:xfrm>
+          <a:prstGeom prst="rect">
+            <a:avLst/>
+          </a:prstGeom>
+        </p:spPr>
+        <p:txBody>
+          <a:bodyPr anchorCtr="0" anchor="t" bIns="91425" lIns="91425" spcFirstLastPara="1" rIns="91425" wrap="square" tIns="91425">
+            <a:noAutofit/>
+          </a:bodyPr>
+          <a:lstStyle/>
+          <a:p>
+            <a:pPr indent="0" lvl="0" marL="0" rtl="0" algn="l">
+              <a:spcBef>
+                <a:spcPts val="0"/>
+              </a:spcBef>
+              <a:spcAft>
+                <a:spcPts val="0"/>
+              </a:spcAft>
+              <a:buNone/>
+            </a:pPr>
+            <a:r>
+              <a:t/>
+            </a:r>
+            <a:endParaRPr/>
+          </a:p>
+        </p:txBody>
+      </p:sp>
+    </p:spTree>
+  </p:cSld>
+  <p:clrMapOvr>
+    <a:masterClrMapping/>
+  </p:clrMapOvr>
+</p:notes>
+</file>
+
+<file path=ppt/notesSlides/notesSlide31.xml><?xml version="1.0" encoding="utf-8"?>
+<p:notes xmlns:a="http://schemas.openxmlformats.org/drawingml/2006/main" xmlns:r="http://schemas.openxmlformats.org/officeDocument/2006/relationships" xmlns:mc="http://schemas.openxmlformats.org/markup-compatibility/2006" xmlns:mv="urn:schemas-microsoft-com:mac:vml" xmlns:p="http://schemas.openxmlformats.org/presentationml/2006/main" xmlns:c="http://schemas.openxmlformats.org/drawingml/2006/chart" xmlns:dgm="http://schemas.openxmlformats.org/drawingml/2006/diagram" xmlns:o="urn:schemas-microsoft-com:office:office" xmlns:v="urn:schemas-microsoft-com:vml" xmlns:pvml="urn:schemas-microsoft-com:office:powerpoint" xmlns:com="http://schemas.openxmlformats.org/drawingml/2006/compatibility" xmlns:p14="http://schemas.microsoft.com/office/powerpoint/2010/main" xmlns:p15="http://schemas.microsoft.com/office/powerpoint/2012/main" xmlns:ahyp="http://schemas.microsoft.com/office/drawing/2018/hyperlinkcolor" showMasterPhAnim="0" showMasterSp="0">
+  <p:cSld>
+    <p:spTree>
+      <p:nvGrpSpPr>
+        <p:cNvPr id="254" name="Shape 254"/>
+        <p:cNvGrpSpPr/>
+        <p:nvPr/>
+      </p:nvGrpSpPr>
+      <p:grpSpPr>
+        <a:xfrm>
+          <a:off x="0" y="0"/>
+          <a:ext cx="0" cy="0"/>
+          <a:chOff x="0" y="0"/>
+          <a:chExt cx="0" cy="0"/>
+        </a:xfrm>
+      </p:grpSpPr>
+      <p:sp>
+        <p:nvSpPr>
+          <p:cNvPr id="255" name="Google Shape;255;g3fbe8c1ba05_0_812:notes"/>
+          <p:cNvSpPr/>
+          <p:nvPr>
+            <p:ph idx="2" type="sldImg"/>
+          </p:nvPr>
+        </p:nvSpPr>
+        <p:spPr>
+          <a:xfrm>
+            <a:off x="381300" y="685800"/>
+            <a:ext cx="6096000" cy="3429000"/>
+          </a:xfrm>
+          <a:custGeom>
+            <a:rect b="b" l="l" r="r" t="t"/>
+            <a:pathLst>
+              <a:path extrusionOk="0" h="120000" w="120000">
+                <a:moveTo>
+                  <a:pt x="0" y="0"/>
+                </a:moveTo>
+                <a:lnTo>
+                  <a:pt x="120000" y="0"/>
+                </a:lnTo>
+                <a:lnTo>
+                  <a:pt x="120000" y="120000"/>
+                </a:lnTo>
+                <a:lnTo>
+                  <a:pt x="0" y="120000"/>
+                </a:lnTo>
+                <a:close/>
+              </a:path>
+            </a:pathLst>
+          </a:custGeom>
+        </p:spPr>
+      </p:sp>
+      <p:sp>
+        <p:nvSpPr>
+          <p:cNvPr id="256" name="Google Shape;256;g3fbe8c1ba05_0_812:notes"/>
+          <p:cNvSpPr txBox="1"/>
+          <p:nvPr>
+            <p:ph idx="1" type="body"/>
+          </p:nvPr>
+        </p:nvSpPr>
+        <p:spPr>
+          <a:xfrm>
+            <a:off x="685800" y="4343400"/>
+            <a:ext cx="5486400" cy="4114800"/>
+          </a:xfrm>
+          <a:prstGeom prst="rect">
+            <a:avLst/>
+          </a:prstGeom>
+        </p:spPr>
+        <p:txBody>
+          <a:bodyPr anchorCtr="0" anchor="t" bIns="91425" lIns="91425" spcFirstLastPara="1" rIns="91425" wrap="square" tIns="91425">
+            <a:noAutofit/>
+          </a:bodyPr>
+          <a:lstStyle/>
+          <a:p>
+            <a:pPr indent="0" lvl="0" marL="0" rtl="0" algn="l">
+              <a:spcBef>
+                <a:spcPts val="0"/>
+              </a:spcBef>
+              <a:spcAft>
+                <a:spcPts val="0"/>
+              </a:spcAft>
+              <a:buNone/>
+            </a:pPr>
+            <a:r>
+              <a:t/>
+            </a:r>
+            <a:endParaRPr/>
+          </a:p>
+        </p:txBody>
+      </p:sp>
+    </p:spTree>
+  </p:cSld>
+  <p:clrMapOvr>
+    <a:masterClrMapping/>
+  </p:clrMapOvr>
+</p:notes>
+</file>
+
 <file path=ppt/notesSlides/notesSlide4.xml><?xml version="1.0" encoding="utf-8"?>
 <p:notes xmlns:a="http://schemas.openxmlformats.org/drawingml/2006/main" xmlns:r="http://schemas.openxmlformats.org/officeDocument/2006/relationships" xmlns:mc="http://schemas.openxmlformats.org/markup-compatibility/2006" xmlns:mv="urn:schemas-microsoft-com:mac:vml" xmlns:p="http://schemas.openxmlformats.org/presentationml/2006/main" xmlns:c="http://schemas.openxmlformats.org/drawingml/2006/chart" xmlns:dgm="http://schemas.openxmlformats.org/drawingml/2006/diagram" xmlns:o="urn:schemas-microsoft-com:office:office" xmlns:v="urn:schemas-microsoft-com:vml" xmlns:pvml="urn:schemas-microsoft-com:office:powerpoint" xmlns:com="http://schemas.openxmlformats.org/drawingml/2006/compatibility" xmlns:p14="http://schemas.microsoft.com/office/powerpoint/2010/main" xmlns:p15="http://schemas.microsoft.com/office/powerpoint/2012/main" xmlns:ahyp="http://schemas.microsoft.com/office/drawing/2018/hyperlinkcolor" showMasterPhAnim="0" showMasterSp="0">
   <p:cSld>
@@ -3122,7 +3422,7 @@
       </p:grpSpPr>
       <p:sp>
         <p:nvSpPr>
-          <p:cNvPr id="92" name="Google Shape;92;g3fbe8c1ba05_0_1439:notes"/>
+          <p:cNvPr id="92" name="Google Shape;92;h5a7fe17a1b0da5ba_0_6:notes"/>
           <p:cNvSpPr/>
           <p:nvPr>
             <p:ph idx="2" type="sldImg"/>
@@ -3157,7 +3457,7 @@
       </p:sp>
       <p:sp>
         <p:nvSpPr>
-          <p:cNvPr id="93" name="Google Shape;93;g3fbe8c1ba05_0_1439:notes"/>
+          <p:cNvPr id="93" name="Google Shape;93;h5a7fe17a1b0da5ba_0_6:notes"/>
           <p:cNvSpPr txBox="1"/>
           <p:nvPr>
             <p:ph idx="1" type="body"/>
@@ -3207,7 +3507,7 @@
   <p:cSld>
     <p:spTree>
       <p:nvGrpSpPr>
-        <p:cNvPr id="98" name="Shape 98"/>
+        <p:cNvPr id="97" name="Shape 97"/>
         <p:cNvGrpSpPr/>
         <p:nvPr/>
       </p:nvGrpSpPr>
@@ -3221,7 +3521,7 @@
       </p:grpSpPr>
       <p:sp>
         <p:nvSpPr>
-          <p:cNvPr id="99" name="Google Shape;99;g3fbe8c1ba05_0_1423:notes"/>
+          <p:cNvPr id="98" name="Google Shape;98;g3fbe8c1ba05_0_1423:notes"/>
           <p:cNvSpPr/>
           <p:nvPr>
             <p:ph idx="2" type="sldImg"/>
@@ -3256,7 +3556,7 @@
       </p:sp>
       <p:sp>
         <p:nvSpPr>
-          <p:cNvPr id="100" name="Google Shape;100;g3fbe8c1ba05_0_1423:notes"/>
+          <p:cNvPr id="99" name="Google Shape;99;g3fbe8c1ba05_0_1423:notes"/>
           <p:cNvSpPr txBox="1"/>
           <p:nvPr>
             <p:ph idx="1" type="body"/>
@@ -3306,7 +3606,7 @@
   <p:cSld>
     <p:spTree>
       <p:nvGrpSpPr>
-        <p:cNvPr id="106" name="Shape 106"/>
+        <p:cNvPr id="104" name="Shape 104"/>
         <p:cNvGrpSpPr/>
         <p:nvPr/>
       </p:nvGrpSpPr>
@@ -3320,7 +3620,7 @@
       </p:grpSpPr>
       <p:sp>
         <p:nvSpPr>
-          <p:cNvPr id="107" name="Google Shape;107;g3fbe8c1ba05_0_782:notes"/>
+          <p:cNvPr id="105" name="Google Shape;105;h5a7fe17a1b0da5ba_0_12:notes"/>
           <p:cNvSpPr/>
           <p:nvPr>
             <p:ph idx="2" type="sldImg"/>
@@ -3355,7 +3655,7 @@
       </p:sp>
       <p:sp>
         <p:nvSpPr>
-          <p:cNvPr id="108" name="Google Shape;108;g3fbe8c1ba05_0_782:notes"/>
+          <p:cNvPr id="106" name="Google Shape;106;h5a7fe17a1b0da5ba_0_12:notes"/>
           <p:cNvSpPr txBox="1"/>
           <p:nvPr>
             <p:ph idx="1" type="body"/>
@@ -3405,7 +3705,7 @@
   <p:cSld>
     <p:spTree>
       <p:nvGrpSpPr>
-        <p:cNvPr id="113" name="Shape 113"/>
+        <p:cNvPr id="112" name="Shape 112"/>
         <p:cNvGrpSpPr/>
         <p:nvPr/>
       </p:nvGrpSpPr>
@@ -3419,7 +3719,7 @@
       </p:grpSpPr>
       <p:sp>
         <p:nvSpPr>
-          <p:cNvPr id="114" name="Google Shape;114;g3fbe8c1ba05_0_715:notes"/>
+          <p:cNvPr id="113" name="Google Shape;113;g3fbe8c1ba05_0_782:notes"/>
           <p:cNvSpPr/>
           <p:nvPr>
             <p:ph idx="2" type="sldImg"/>
@@ -3454,7 +3754,7 @@
       </p:sp>
       <p:sp>
         <p:nvSpPr>
-          <p:cNvPr id="115" name="Google Shape;115;g3fbe8c1ba05_0_715:notes"/>
+          <p:cNvPr id="114" name="Google Shape;114;g3fbe8c1ba05_0_782:notes"/>
           <p:cNvSpPr txBox="1"/>
           <p:nvPr>
             <p:ph idx="1" type="body"/>
@@ -9003,7 +9303,7 @@
   <p:cSld>
     <p:spTree>
       <p:nvGrpSpPr>
-        <p:cNvPr id="123" name="Shape 123"/>
+        <p:cNvPr id="122" name="Shape 122"/>
         <p:cNvGrpSpPr/>
         <p:nvPr/>
       </p:nvGrpSpPr>
@@ -9017,7 +9317,7 @@
       </p:grpSpPr>
       <p:sp>
         <p:nvSpPr>
-          <p:cNvPr id="124" name="Google Shape;124;p22"/>
+          <p:cNvPr id="123" name="Google Shape;123;p22"/>
           <p:cNvSpPr txBox="1"/>
           <p:nvPr>
             <p:ph type="title"/>
@@ -9057,7 +9357,7 @@
       </p:sp>
       <p:sp>
         <p:nvSpPr>
-          <p:cNvPr id="125" name="Google Shape;125;p22"/>
+          <p:cNvPr id="124" name="Google Shape;124;p22"/>
           <p:cNvSpPr txBox="1"/>
           <p:nvPr>
             <p:ph idx="1" type="body"/>
@@ -9090,7 +9390,22 @@
             </a:pPr>
             <a:r>
               <a:rPr lang="en"/>
-              <a:t>What is the Climara Patient Community experience?</a:t>
+              <a:t>Who is the MHT Menopause Patient Community?</a:t>
+            </a:r>
+            <a:endParaRPr/>
+          </a:p>
+          <a:p>
+            <a:pPr indent="0" lvl="0" marL="457200" rtl="0" algn="l">
+              <a:spcBef>
+                <a:spcPts val="1200"/>
+              </a:spcBef>
+              <a:spcAft>
+                <a:spcPts val="1200"/>
+              </a:spcAft>
+              <a:buNone/>
+            </a:pPr>
+            <a:r>
+              <a:t/>
             </a:r>
             <a:endParaRPr/>
           </a:p>
@@ -9098,7 +9413,7 @@
       </p:sp>
       <p:pic>
         <p:nvPicPr>
-          <p:cNvPr id="126" name="Google Shape;126;p22"/>
+          <p:cNvPr id="125" name="Google Shape;125;p22"/>
           <p:cNvPicPr preferRelativeResize="0"/>
           <p:nvPr/>
         </p:nvPicPr>
@@ -9112,42 +9427,8 @@
         </p:blipFill>
         <p:spPr>
           <a:xfrm>
-            <a:off x="70438" y="1302600"/>
-            <a:ext cx="4504401" cy="3723649"/>
-          </a:xfrm>
-          <a:prstGeom prst="rect">
-            <a:avLst/>
-          </a:prstGeom>
-          <a:noFill/>
-          <a:ln cap="flat" cmpd="sng" w="9525">
-            <a:solidFill>
-              <a:schemeClr val="dk2"/>
-            </a:solidFill>
-            <a:prstDash val="solid"/>
-            <a:round/>
-            <a:headEnd len="sm" w="sm" type="none"/>
-            <a:tailEnd len="sm" w="sm" type="none"/>
-          </a:ln>
-        </p:spPr>
-      </p:pic>
-      <p:pic>
-        <p:nvPicPr>
-          <p:cNvPr id="127" name="Google Shape;127;p22"/>
-          <p:cNvPicPr preferRelativeResize="0"/>
-          <p:nvPr/>
-        </p:nvPicPr>
-        <p:blipFill>
-          <a:blip r:embed="rId4">
-            <a:alphaModFix/>
-          </a:blip>
-          <a:stretch>
-            <a:fillRect/>
-          </a:stretch>
-        </p:blipFill>
-        <p:spPr>
-          <a:xfrm>
-            <a:off x="4620438" y="1302600"/>
-            <a:ext cx="4453126" cy="3723649"/>
+            <a:off x="152400" y="1485800"/>
+            <a:ext cx="8839203" cy="3062545"/>
           </a:xfrm>
           <a:prstGeom prst="rect">
             <a:avLst/>
@@ -9177,7 +9458,7 @@
   <p:cSld>
     <p:spTree>
       <p:nvGrpSpPr>
-        <p:cNvPr id="131" name="Shape 131"/>
+        <p:cNvPr id="129" name="Shape 129"/>
         <p:cNvGrpSpPr/>
         <p:nvPr/>
       </p:nvGrpSpPr>
@@ -9191,7 +9472,7 @@
       </p:grpSpPr>
       <p:sp>
         <p:nvSpPr>
-          <p:cNvPr id="132" name="Google Shape;132;p23"/>
+          <p:cNvPr id="130" name="Google Shape;130;p23"/>
           <p:cNvSpPr txBox="1"/>
           <p:nvPr>
             <p:ph type="title"/>
@@ -9231,7 +9512,7 @@
       </p:sp>
       <p:sp>
         <p:nvSpPr>
-          <p:cNvPr id="133" name="Google Shape;133;p23"/>
+          <p:cNvPr id="131" name="Google Shape;131;p23"/>
           <p:cNvSpPr txBox="1"/>
           <p:nvPr>
             <p:ph idx="1" type="body"/>
@@ -9264,7 +9545,7 @@
             </a:pPr>
             <a:r>
               <a:rPr lang="en"/>
-              <a:t>How does the MHT Climara Patient Community feel about the treatment?</a:t>
+              <a:t>What is the Climara Patient Community experience?</a:t>
             </a:r>
             <a:endParaRPr/>
           </a:p>
@@ -9272,7 +9553,7 @@
       </p:sp>
       <p:pic>
         <p:nvPicPr>
-          <p:cNvPr id="134" name="Google Shape;134;p23"/>
+          <p:cNvPr id="132" name="Google Shape;132;p23"/>
           <p:cNvPicPr preferRelativeResize="0"/>
           <p:nvPr/>
         </p:nvPicPr>
@@ -9286,8 +9567,42 @@
         </p:blipFill>
         <p:spPr>
           <a:xfrm>
-            <a:off x="152400" y="1874125"/>
-            <a:ext cx="8572500" cy="1657350"/>
+            <a:off x="70438" y="1302600"/>
+            <a:ext cx="4504401" cy="3723649"/>
+          </a:xfrm>
+          <a:prstGeom prst="rect">
+            <a:avLst/>
+          </a:prstGeom>
+          <a:noFill/>
+          <a:ln cap="flat" cmpd="sng" w="9525">
+            <a:solidFill>
+              <a:schemeClr val="dk2"/>
+            </a:solidFill>
+            <a:prstDash val="solid"/>
+            <a:round/>
+            <a:headEnd len="sm" w="sm" type="none"/>
+            <a:tailEnd len="sm" w="sm" type="none"/>
+          </a:ln>
+        </p:spPr>
+      </p:pic>
+      <p:pic>
+        <p:nvPicPr>
+          <p:cNvPr id="133" name="Google Shape;133;p23"/>
+          <p:cNvPicPr preferRelativeResize="0"/>
+          <p:nvPr/>
+        </p:nvPicPr>
+        <p:blipFill>
+          <a:blip r:embed="rId4">
+            <a:alphaModFix/>
+          </a:blip>
+          <a:stretch>
+            <a:fillRect/>
+          </a:stretch>
+        </p:blipFill>
+        <p:spPr>
+          <a:xfrm>
+            <a:off x="4620438" y="1302600"/>
+            <a:ext cx="4453126" cy="3723649"/>
           </a:xfrm>
           <a:prstGeom prst="rect">
             <a:avLst/>
@@ -9317,7 +9632,7 @@
   <p:cSld>
     <p:spTree>
       <p:nvGrpSpPr>
-        <p:cNvPr id="138" name="Shape 138"/>
+        <p:cNvPr id="137" name="Shape 137"/>
         <p:cNvGrpSpPr/>
         <p:nvPr/>
       </p:nvGrpSpPr>
@@ -9331,7 +9646,7 @@
       </p:grpSpPr>
       <p:sp>
         <p:nvSpPr>
-          <p:cNvPr id="139" name="Google Shape;139;p24"/>
+          <p:cNvPr id="138" name="Google Shape;138;p24"/>
           <p:cNvSpPr txBox="1"/>
           <p:nvPr>
             <p:ph type="title"/>
@@ -9371,7 +9686,7 @@
       </p:sp>
       <p:sp>
         <p:nvSpPr>
-          <p:cNvPr id="140" name="Google Shape;140;p24"/>
+          <p:cNvPr id="139" name="Google Shape;139;p24"/>
           <p:cNvSpPr txBox="1"/>
           <p:nvPr>
             <p:ph idx="1" type="body"/>
@@ -9412,7 +9727,7 @@
       </p:sp>
       <p:pic>
         <p:nvPicPr>
-          <p:cNvPr id="141" name="Google Shape;141;p24"/>
+          <p:cNvPr id="140" name="Google Shape;140;p24"/>
           <p:cNvPicPr preferRelativeResize="0"/>
           <p:nvPr/>
         </p:nvPicPr>
@@ -9426,42 +9741,8 @@
         </p:blipFill>
         <p:spPr>
           <a:xfrm>
-            <a:off x="0" y="1643950"/>
-            <a:ext cx="4572001" cy="2563251"/>
-          </a:xfrm>
-          <a:prstGeom prst="rect">
-            <a:avLst/>
-          </a:prstGeom>
-          <a:noFill/>
-          <a:ln cap="flat" cmpd="sng" w="9525">
-            <a:solidFill>
-              <a:schemeClr val="dk2"/>
-            </a:solidFill>
-            <a:prstDash val="solid"/>
-            <a:round/>
-            <a:headEnd len="sm" w="sm" type="none"/>
-            <a:tailEnd len="sm" w="sm" type="none"/>
-          </a:ln>
-        </p:spPr>
-      </p:pic>
-      <p:pic>
-        <p:nvPicPr>
-          <p:cNvPr id="142" name="Google Shape;142;p24"/>
-          <p:cNvPicPr preferRelativeResize="0"/>
-          <p:nvPr/>
-        </p:nvPicPr>
-        <p:blipFill>
-          <a:blip r:embed="rId4">
-            <a:alphaModFix/>
-          </a:blip>
-          <a:stretch>
-            <a:fillRect/>
-          </a:stretch>
-        </p:blipFill>
-        <p:spPr>
-          <a:xfrm>
-            <a:off x="4645275" y="1643950"/>
-            <a:ext cx="4498725" cy="2563251"/>
+            <a:off x="152400" y="1874125"/>
+            <a:ext cx="8572500" cy="1657350"/>
           </a:xfrm>
           <a:prstGeom prst="rect">
             <a:avLst/>
@@ -9491,7 +9772,7 @@
   <p:cSld>
     <p:spTree>
       <p:nvGrpSpPr>
-        <p:cNvPr id="146" name="Shape 146"/>
+        <p:cNvPr id="144" name="Shape 144"/>
         <p:cNvGrpSpPr/>
         <p:nvPr/>
       </p:nvGrpSpPr>
@@ -9505,7 +9786,7 @@
       </p:grpSpPr>
       <p:sp>
         <p:nvSpPr>
-          <p:cNvPr id="147" name="Google Shape;147;p25"/>
+          <p:cNvPr id="145" name="Google Shape;145;p25"/>
           <p:cNvSpPr txBox="1"/>
           <p:nvPr>
             <p:ph type="title"/>
@@ -9543,9 +9824,50 @@
           </a:p>
         </p:txBody>
       </p:sp>
+      <p:sp>
+        <p:nvSpPr>
+          <p:cNvPr id="146" name="Google Shape;146;p25"/>
+          <p:cNvSpPr txBox="1"/>
+          <p:nvPr>
+            <p:ph idx="1" type="body"/>
+          </p:nvPr>
+        </p:nvSpPr>
+        <p:spPr>
+          <a:xfrm>
+            <a:off x="311700" y="844700"/>
+            <a:ext cx="8520600" cy="488700"/>
+          </a:xfrm>
+          <a:prstGeom prst="rect">
+            <a:avLst/>
+          </a:prstGeom>
+        </p:spPr>
+        <p:txBody>
+          <a:bodyPr anchorCtr="0" anchor="t" bIns="91425" lIns="91425" spcFirstLastPara="1" rIns="91425" wrap="square" tIns="91425">
+            <a:noAutofit/>
+          </a:bodyPr>
+          <a:lstStyle/>
+          <a:p>
+            <a:pPr indent="-342900" lvl="0" marL="457200" rtl="0" algn="l">
+              <a:spcBef>
+                <a:spcPts val="0"/>
+              </a:spcBef>
+              <a:spcAft>
+                <a:spcPts val="0"/>
+              </a:spcAft>
+              <a:buSzPts val="1800"/>
+              <a:buChar char="●"/>
+            </a:pPr>
+            <a:r>
+              <a:rPr lang="en"/>
+              <a:t>How does the MHT Climara Patient Community feel about the treatment?</a:t>
+            </a:r>
+            <a:endParaRPr/>
+          </a:p>
+        </p:txBody>
+      </p:sp>
       <p:pic>
         <p:nvPicPr>
-          <p:cNvPr id="148" name="Google Shape;148;p25"/>
+          <p:cNvPr id="147" name="Google Shape;147;p25"/>
           <p:cNvPicPr preferRelativeResize="0"/>
           <p:nvPr/>
         </p:nvPicPr>
@@ -9559,8 +9881,42 @@
         </p:blipFill>
         <p:spPr>
           <a:xfrm>
-            <a:off x="1377450" y="742575"/>
-            <a:ext cx="5487876" cy="4153275"/>
+            <a:off x="0" y="1643950"/>
+            <a:ext cx="4572001" cy="2563251"/>
+          </a:xfrm>
+          <a:prstGeom prst="rect">
+            <a:avLst/>
+          </a:prstGeom>
+          <a:noFill/>
+          <a:ln cap="flat" cmpd="sng" w="9525">
+            <a:solidFill>
+              <a:schemeClr val="dk2"/>
+            </a:solidFill>
+            <a:prstDash val="solid"/>
+            <a:round/>
+            <a:headEnd len="sm" w="sm" type="none"/>
+            <a:tailEnd len="sm" w="sm" type="none"/>
+          </a:ln>
+        </p:spPr>
+      </p:pic>
+      <p:pic>
+        <p:nvPicPr>
+          <p:cNvPr id="148" name="Google Shape;148;p25"/>
+          <p:cNvPicPr preferRelativeResize="0"/>
+          <p:nvPr/>
+        </p:nvPicPr>
+        <p:blipFill>
+          <a:blip r:embed="rId4">
+            <a:alphaModFix/>
+          </a:blip>
+          <a:stretch>
+            <a:fillRect/>
+          </a:stretch>
+        </p:blipFill>
+        <p:spPr>
+          <a:xfrm>
+            <a:off x="4645275" y="1643950"/>
+            <a:ext cx="4498725" cy="2563251"/>
           </a:xfrm>
           <a:prstGeom prst="rect">
             <a:avLst/>
@@ -9642,70 +9998,9 @@
           </a:p>
         </p:txBody>
       </p:sp>
-      <p:sp>
-        <p:nvSpPr>
-          <p:cNvPr id="154" name="Google Shape;154;p26"/>
-          <p:cNvSpPr txBox="1"/>
-          <p:nvPr>
-            <p:ph idx="1" type="body"/>
-          </p:nvPr>
-        </p:nvSpPr>
-        <p:spPr>
-          <a:xfrm>
-            <a:off x="311700" y="844700"/>
-            <a:ext cx="8520600" cy="488700"/>
-          </a:xfrm>
-          <a:prstGeom prst="rect">
-            <a:avLst/>
-          </a:prstGeom>
-        </p:spPr>
-        <p:txBody>
-          <a:bodyPr anchorCtr="0" anchor="t" bIns="91425" lIns="91425" spcFirstLastPara="1" rIns="91425" wrap="square" tIns="91425">
-            <a:noAutofit/>
-          </a:bodyPr>
-          <a:lstStyle/>
-          <a:p>
-            <a:pPr indent="-342900" lvl="0" marL="457200" rtl="0" algn="l">
-              <a:spcBef>
-                <a:spcPts val="0"/>
-              </a:spcBef>
-              <a:spcAft>
-                <a:spcPts val="0"/>
-              </a:spcAft>
-              <a:buSzPts val="1800"/>
-              <a:buChar char="●"/>
-            </a:pPr>
-            <a:r>
-              <a:rPr lang="en"/>
-              <a:t>What treatments do the</a:t>
-            </a:r>
-            <a:r>
-              <a:rPr lang="en"/>
-              <a:t> MHT Patient Community switch </a:t>
-            </a:r>
-            <a:r>
-              <a:rPr i="1" lang="en"/>
-              <a:t>TO</a:t>
-            </a:r>
-            <a:r>
-              <a:rPr lang="en"/>
-              <a:t> and </a:t>
-            </a:r>
-            <a:r>
-              <a:rPr i="1" lang="en"/>
-              <a:t>FROM</a:t>
-            </a:r>
-            <a:r>
-              <a:rPr lang="en"/>
-              <a:t>?</a:t>
-            </a:r>
-            <a:endParaRPr/>
-          </a:p>
-        </p:txBody>
-      </p:sp>
       <p:pic>
         <p:nvPicPr>
-          <p:cNvPr id="155" name="Google Shape;155;p26" title="Screenshot 2026-09-23 at 1.10.24 PM.png"/>
+          <p:cNvPr id="154" name="Google Shape;154;p26"/>
           <p:cNvPicPr preferRelativeResize="0"/>
           <p:nvPr/>
         </p:nvPicPr>
@@ -9719,8 +10014,8 @@
         </p:blipFill>
         <p:spPr>
           <a:xfrm>
-            <a:off x="552450" y="1690950"/>
-            <a:ext cx="8039100" cy="2476500"/>
+            <a:off x="1377450" y="742575"/>
+            <a:ext cx="5487876" cy="4153275"/>
           </a:xfrm>
           <a:prstGeom prst="rect">
             <a:avLst/>
@@ -9750,7 +10045,7 @@
   <p:cSld>
     <p:spTree>
       <p:nvGrpSpPr>
-        <p:cNvPr id="159" name="Shape 159"/>
+        <p:cNvPr id="158" name="Shape 158"/>
         <p:cNvGrpSpPr/>
         <p:nvPr/>
       </p:nvGrpSpPr>
@@ -9764,7 +10059,7 @@
       </p:grpSpPr>
       <p:sp>
         <p:nvSpPr>
-          <p:cNvPr id="160" name="Google Shape;160;p27"/>
+          <p:cNvPr id="159" name="Google Shape;159;p27"/>
           <p:cNvSpPr txBox="1"/>
           <p:nvPr>
             <p:ph type="title"/>
@@ -9804,7 +10099,7 @@
       </p:sp>
       <p:sp>
         <p:nvSpPr>
-          <p:cNvPr id="161" name="Google Shape;161;p27"/>
+          <p:cNvPr id="160" name="Google Shape;160;p27"/>
           <p:cNvSpPr txBox="1"/>
           <p:nvPr>
             <p:ph idx="1" type="body"/>
@@ -9813,7 +10108,7 @@
         <p:spPr>
           <a:xfrm>
             <a:off x="311700" y="844700"/>
-            <a:ext cx="8520600" cy="707400"/>
+            <a:ext cx="8520600" cy="488700"/>
           </a:xfrm>
           <a:prstGeom prst="rect">
             <a:avLst/>
@@ -9837,7 +10132,11 @@
             </a:pPr>
             <a:r>
               <a:rPr lang="en"/>
-              <a:t>What treatments do the MHT Climara Patient Community switch </a:t>
+              <a:t>What treatments do the</a:t>
+            </a:r>
+            <a:r>
+              <a:rPr lang="en"/>
+              <a:t> MHT Patient Community switch </a:t>
             </a:r>
             <a:r>
               <a:rPr i="1" lang="en"/>
@@ -9861,7 +10160,7 @@
       </p:sp>
       <p:pic>
         <p:nvPicPr>
-          <p:cNvPr id="162" name="Google Shape;162;p27" title="switching-into-and-out-of-climara-22-eve.png"/>
+          <p:cNvPr id="161" name="Google Shape;161;p27" title="Screenshot 2026-09-23 at 1.10.24 PM.png"/>
           <p:cNvPicPr preferRelativeResize="0"/>
           <p:nvPr/>
         </p:nvPicPr>
@@ -9875,8 +10174,8 @@
         </p:blipFill>
         <p:spPr>
           <a:xfrm>
-            <a:off x="123825" y="1619250"/>
-            <a:ext cx="8896348" cy="3363050"/>
+            <a:off x="552450" y="1690950"/>
+            <a:ext cx="8039100" cy="2476500"/>
           </a:xfrm>
           <a:prstGeom prst="rect">
             <a:avLst/>
@@ -9906,7 +10205,7 @@
   <p:cSld>
     <p:spTree>
       <p:nvGrpSpPr>
-        <p:cNvPr id="166" name="Shape 166"/>
+        <p:cNvPr id="165" name="Shape 165"/>
         <p:cNvGrpSpPr/>
         <p:nvPr/>
       </p:nvGrpSpPr>
@@ -9920,7 +10219,7 @@
       </p:grpSpPr>
       <p:sp>
         <p:nvSpPr>
-          <p:cNvPr id="167" name="Google Shape;167;p28"/>
+          <p:cNvPr id="166" name="Google Shape;166;p28"/>
           <p:cNvSpPr txBox="1"/>
           <p:nvPr>
             <p:ph type="title"/>
@@ -9960,7 +10259,7 @@
       </p:sp>
       <p:sp>
         <p:nvSpPr>
-          <p:cNvPr id="168" name="Google Shape;168;p28"/>
+          <p:cNvPr id="167" name="Google Shape;167;p28"/>
           <p:cNvSpPr txBox="1"/>
           <p:nvPr>
             <p:ph idx="1" type="body"/>
@@ -9968,8 +10267,8 @@
         </p:nvSpPr>
         <p:spPr>
           <a:xfrm>
-            <a:off x="311700" y="690825"/>
-            <a:ext cx="8520600" cy="642600"/>
+            <a:off x="311700" y="844700"/>
+            <a:ext cx="8520600" cy="707400"/>
           </a:xfrm>
           <a:prstGeom prst="rect">
             <a:avLst/>
@@ -10017,7 +10316,7 @@
       </p:sp>
       <p:pic>
         <p:nvPicPr>
-          <p:cNvPr id="169" name="Google Shape;169;p28" title="Screenshot 2026-09-23 at 1.30.08 PM.png"/>
+          <p:cNvPr id="168" name="Google Shape;168;p28" title="switching-into-and-out-of-climara-22-eve.png"/>
           <p:cNvPicPr preferRelativeResize="0"/>
           <p:nvPr/>
         </p:nvPicPr>
@@ -10031,8 +10330,8 @@
         </p:blipFill>
         <p:spPr>
           <a:xfrm>
-            <a:off x="2549400" y="1392125"/>
-            <a:ext cx="4045200" cy="3513150"/>
+            <a:off x="123825" y="1619250"/>
+            <a:ext cx="8896348" cy="3363050"/>
           </a:xfrm>
           <a:prstGeom prst="rect">
             <a:avLst/>
@@ -10062,7 +10361,7 @@
   <p:cSld>
     <p:spTree>
       <p:nvGrpSpPr>
-        <p:cNvPr id="173" name="Shape 173"/>
+        <p:cNvPr id="172" name="Shape 172"/>
         <p:cNvGrpSpPr/>
         <p:nvPr/>
       </p:nvGrpSpPr>
@@ -10076,7 +10375,7 @@
       </p:grpSpPr>
       <p:sp>
         <p:nvSpPr>
-          <p:cNvPr id="174" name="Google Shape;174;p29"/>
+          <p:cNvPr id="173" name="Google Shape;173;p29"/>
           <p:cNvSpPr txBox="1"/>
           <p:nvPr>
             <p:ph type="title"/>
@@ -10116,7 +10415,7 @@
       </p:sp>
       <p:sp>
         <p:nvSpPr>
-          <p:cNvPr id="175" name="Google Shape;175;p29"/>
+          <p:cNvPr id="174" name="Google Shape;174;p29"/>
           <p:cNvSpPr txBox="1"/>
           <p:nvPr>
             <p:ph idx="1" type="body"/>
@@ -10124,8 +10423,8 @@
         </p:nvSpPr>
         <p:spPr>
           <a:xfrm>
-            <a:off x="311700" y="844700"/>
-            <a:ext cx="8520600" cy="488700"/>
+            <a:off x="311700" y="690825"/>
+            <a:ext cx="8520600" cy="642600"/>
           </a:xfrm>
           <a:prstGeom prst="rect">
             <a:avLst/>
@@ -10149,15 +10448,23 @@
             </a:pPr>
             <a:r>
               <a:rPr lang="en"/>
-              <a:t>Why does the MHT Menopause</a:t>
+              <a:t>What treatments do the MHT Climara Patient Community switch </a:t>
+            </a:r>
+            <a:r>
+              <a:rPr i="1" lang="en"/>
+              <a:t>TO</a:t>
             </a:r>
             <a:r>
               <a:rPr lang="en"/>
-              <a:t> </a:t>
+              <a:t> and </a:t>
+            </a:r>
+            <a:r>
+              <a:rPr i="1" lang="en"/>
+              <a:t>FROM</a:t>
             </a:r>
             <a:r>
               <a:rPr lang="en"/>
-              <a:t>Patient Community switch treatments?</a:t>
+              <a:t>?</a:t>
             </a:r>
             <a:endParaRPr/>
           </a:p>
@@ -10165,7 +10472,7 @@
       </p:sp>
       <p:pic>
         <p:nvPicPr>
-          <p:cNvPr id="176" name="Google Shape;176;p29"/>
+          <p:cNvPr id="175" name="Google Shape;175;p29" title="Screenshot 2026-09-23 at 1.30.08 PM.png"/>
           <p:cNvPicPr preferRelativeResize="0"/>
           <p:nvPr/>
         </p:nvPicPr>
@@ -10179,8 +10486,8 @@
         </p:blipFill>
         <p:spPr>
           <a:xfrm>
-            <a:off x="1916475" y="1333400"/>
-            <a:ext cx="5311060" cy="3505299"/>
+            <a:off x="2549400" y="1392125"/>
+            <a:ext cx="4045200" cy="3513150"/>
           </a:xfrm>
           <a:prstGeom prst="rect">
             <a:avLst/>
@@ -10210,7 +10517,7 @@
   <p:cSld>
     <p:spTree>
       <p:nvGrpSpPr>
-        <p:cNvPr id="180" name="Shape 180"/>
+        <p:cNvPr id="179" name="Shape 179"/>
         <p:cNvGrpSpPr/>
         <p:nvPr/>
       </p:nvGrpSpPr>
@@ -10224,7 +10531,7 @@
       </p:grpSpPr>
       <p:sp>
         <p:nvSpPr>
-          <p:cNvPr id="181" name="Google Shape;181;p30"/>
+          <p:cNvPr id="180" name="Google Shape;180;p30"/>
           <p:cNvSpPr txBox="1"/>
           <p:nvPr>
             <p:ph type="title"/>
@@ -10232,7 +10539,7 @@
         </p:nvSpPr>
         <p:spPr>
           <a:xfrm>
-            <a:off x="311700" y="445025"/>
+            <a:off x="311700" y="137300"/>
             <a:ext cx="8520600" cy="707400"/>
           </a:xfrm>
           <a:prstGeom prst="rect">
@@ -10256,7 +10563,7 @@
             </a:pPr>
             <a:r>
               <a:rPr lang="en"/>
-              <a:t>Additional Considerations &amp; Next Steps</a:t>
+              <a:t>Insights and Findings</a:t>
             </a:r>
             <a:endParaRPr/>
           </a:p>
@@ -10264,7 +10571,7 @@
       </p:sp>
       <p:sp>
         <p:nvSpPr>
-          <p:cNvPr id="182" name="Google Shape;182;p30"/>
+          <p:cNvPr id="181" name="Google Shape;181;p30"/>
           <p:cNvSpPr txBox="1"/>
           <p:nvPr>
             <p:ph idx="1" type="body"/>
@@ -10272,8 +10579,8 @@
         </p:nvSpPr>
         <p:spPr>
           <a:xfrm>
-            <a:off x="311700" y="1266325"/>
-            <a:ext cx="8520600" cy="3672300"/>
+            <a:off x="311700" y="844700"/>
+            <a:ext cx="8520600" cy="488700"/>
           </a:xfrm>
           <a:prstGeom prst="rect">
             <a:avLst/>
@@ -10281,7 +10588,7 @@
         </p:spPr>
         <p:txBody>
           <a:bodyPr anchorCtr="0" anchor="t" bIns="91425" lIns="91425" spcFirstLastPara="1" rIns="91425" wrap="square" tIns="91425">
-            <a:normAutofit lnSpcReduction="10000"/>
+            <a:noAutofit/>
           </a:bodyPr>
           <a:lstStyle/>
           <a:p>
@@ -10297,215 +10604,54 @@
             </a:pPr>
             <a:r>
               <a:rPr lang="en"/>
-              <a:t>Scaling for Production</a:t>
-            </a:r>
-            <a:endParaRPr/>
-          </a:p>
-          <a:p>
-            <a:pPr indent="-317500" lvl="1" marL="914400" rtl="0" algn="l">
-              <a:spcBef>
-                <a:spcPts val="0"/>
-              </a:spcBef>
-              <a:spcAft>
-                <a:spcPts val="0"/>
-              </a:spcAft>
-              <a:buSzPts val="1400"/>
-              <a:buChar char="○"/>
-            </a:pPr>
+              <a:t>Why does the MHT Menopause</a:t>
+            </a:r>
             <a:r>
               <a:rPr lang="en"/>
-              <a:t>Keep as LLM/agent-based → vLLM on cloud compute ⇒ 37 million posts for &lt; ~$5,000, ~3-8 days</a:t>
-            </a:r>
-            <a:endParaRPr/>
-          </a:p>
-          <a:p>
-            <a:pPr indent="-342900" lvl="0" marL="457200" rtl="0" algn="l">
-              <a:spcBef>
-                <a:spcPts val="1000"/>
-              </a:spcBef>
-              <a:spcAft>
-                <a:spcPts val="0"/>
-              </a:spcAft>
-              <a:buSzPts val="1800"/>
-              <a:buChar char="●"/>
-            </a:pPr>
+              <a:t> </a:t>
+            </a:r>
             <a:r>
               <a:rPr lang="en"/>
-              <a:t>Validation</a:t>
-            </a:r>
-            <a:endParaRPr/>
-          </a:p>
-          <a:p>
-            <a:pPr indent="-317500" lvl="1" marL="914400" rtl="0" algn="l">
-              <a:spcBef>
-                <a:spcPts val="0"/>
-              </a:spcBef>
-              <a:spcAft>
-                <a:spcPts val="0"/>
-              </a:spcAft>
-              <a:buSzPts val="1400"/>
-              <a:buChar char="○"/>
-            </a:pPr>
-            <a:r>
-              <a:rPr lang="en"/>
-              <a:t>More human review if given more time</a:t>
-            </a:r>
-            <a:endParaRPr/>
-          </a:p>
-          <a:p>
-            <a:pPr indent="-317500" lvl="1" marL="914400" rtl="0" algn="l">
-              <a:spcBef>
-                <a:spcPts val="0"/>
-              </a:spcBef>
-              <a:spcAft>
-                <a:spcPts val="0"/>
-              </a:spcAft>
-              <a:buSzPts val="1400"/>
-              <a:buChar char="○"/>
-            </a:pPr>
-            <a:r>
-              <a:rPr lang="en"/>
-              <a:t>“lexicon” configuration vs. MHT Medical Ontology Reference database</a:t>
-            </a:r>
-            <a:endParaRPr/>
-          </a:p>
-          <a:p>
-            <a:pPr indent="-317500" lvl="1" marL="914400" rtl="0" algn="l">
-              <a:spcBef>
-                <a:spcPts val="0"/>
-              </a:spcBef>
-              <a:spcAft>
-                <a:spcPts val="0"/>
-              </a:spcAft>
-              <a:buSzPts val="1400"/>
-              <a:buChar char="○"/>
-            </a:pPr>
-            <a:r>
-              <a:rPr lang="en"/>
-              <a:t>“</a:t>
-            </a:r>
-            <a:r>
-              <a:rPr lang="en"/>
-              <a:t>d</a:t>
-            </a:r>
-            <a:r>
-              <a:rPr lang="en"/>
-              <a:t>omain” configuration vs. MHT internal knowledge reference(s)</a:t>
-            </a:r>
-            <a:endParaRPr/>
-          </a:p>
-          <a:p>
-            <a:pPr indent="-342900" lvl="0" marL="457200" rtl="0" algn="l">
-              <a:spcBef>
-                <a:spcPts val="1000"/>
-              </a:spcBef>
-              <a:spcAft>
-                <a:spcPts val="0"/>
-              </a:spcAft>
-              <a:buSzPts val="1800"/>
-              <a:buChar char="●"/>
-            </a:pPr>
-            <a:r>
-              <a:rPr lang="en"/>
-              <a:t>Analytical Data Products</a:t>
-            </a:r>
-            <a:endParaRPr/>
-          </a:p>
-          <a:p>
-            <a:pPr indent="-317500" lvl="1" marL="914400" rtl="0" algn="l">
-              <a:spcBef>
-                <a:spcPts val="0"/>
-              </a:spcBef>
-              <a:spcAft>
-                <a:spcPts val="0"/>
-              </a:spcAft>
-              <a:buSzPts val="1400"/>
-              <a:buChar char="○"/>
-            </a:pPr>
-            <a:r>
-              <a:rPr lang="en"/>
-              <a:t>Switch Events - Refine prompt; more quality measures/tests</a:t>
-            </a:r>
-            <a:endParaRPr/>
-          </a:p>
-          <a:p>
-            <a:pPr indent="-317500" lvl="1" marL="914400" rtl="0" algn="l">
-              <a:spcBef>
-                <a:spcPts val="0"/>
-              </a:spcBef>
-              <a:spcAft>
-                <a:spcPts val="0"/>
-              </a:spcAft>
-              <a:buSzPts val="1400"/>
-              <a:buChar char="○"/>
-            </a:pPr>
-            <a:r>
-              <a:rPr lang="en"/>
-              <a:t>Enrichment - </a:t>
-            </a:r>
-            <a:r>
-              <a:rPr lang="en"/>
-              <a:t>Try to extract additional output</a:t>
-            </a:r>
-            <a:r>
-              <a:rPr lang="en"/>
-              <a:t>: </a:t>
-            </a:r>
-            <a:endParaRPr/>
-          </a:p>
-          <a:p>
-            <a:pPr indent="-317500" lvl="2" marL="1371600" rtl="0" algn="l">
-              <a:spcBef>
-                <a:spcPts val="0"/>
-              </a:spcBef>
-              <a:spcAft>
-                <a:spcPts val="0"/>
-              </a:spcAft>
-              <a:buSzPts val="1400"/>
-              <a:buChar char="■"/>
-            </a:pPr>
-            <a:r>
-              <a:rPr lang="en"/>
-              <a:t>Efficacy </a:t>
-            </a:r>
-            <a:endParaRPr/>
-          </a:p>
-          <a:p>
-            <a:pPr indent="-317500" lvl="2" marL="1371600" rtl="0" algn="l">
-              <a:spcBef>
-                <a:spcPts val="0"/>
-              </a:spcBef>
-              <a:spcAft>
-                <a:spcPts val="0"/>
-              </a:spcAft>
-              <a:buSzPts val="1400"/>
-              <a:buChar char="■"/>
-            </a:pPr>
-            <a:r>
-              <a:rPr lang="en"/>
-              <a:t>Dosage</a:t>
-            </a:r>
-            <a:endParaRPr/>
-          </a:p>
-          <a:p>
-            <a:pPr indent="-317500" lvl="1" marL="914400" rtl="0" algn="l">
-              <a:spcBef>
-                <a:spcPts val="0"/>
-              </a:spcBef>
-              <a:spcAft>
-                <a:spcPts val="0"/>
-              </a:spcAft>
-              <a:buSzPts val="1400"/>
-              <a:buChar char="○"/>
-            </a:pPr>
-            <a:r>
-              <a:rPr lang="en"/>
-              <a:t>Ontology mappings</a:t>
+              <a:t>Patient Community switch treatments?</a:t>
             </a:r>
             <a:endParaRPr/>
           </a:p>
         </p:txBody>
       </p:sp>
+      <p:pic>
+        <p:nvPicPr>
+          <p:cNvPr id="182" name="Google Shape;182;p30"/>
+          <p:cNvPicPr preferRelativeResize="0"/>
+          <p:nvPr/>
+        </p:nvPicPr>
+        <p:blipFill>
+          <a:blip r:embed="rId3">
+            <a:alphaModFix/>
+          </a:blip>
+          <a:stretch>
+            <a:fillRect/>
+          </a:stretch>
+        </p:blipFill>
+        <p:spPr>
+          <a:xfrm>
+            <a:off x="1916475" y="1333400"/>
+            <a:ext cx="5311060" cy="3505299"/>
+          </a:xfrm>
+          <a:prstGeom prst="rect">
+            <a:avLst/>
+          </a:prstGeom>
+          <a:noFill/>
+          <a:ln cap="flat" cmpd="sng" w="9525">
+            <a:solidFill>
+              <a:schemeClr val="dk2"/>
+            </a:solidFill>
+            <a:prstDash val="solid"/>
+            <a:round/>
+            <a:headEnd len="sm" w="sm" type="none"/>
+            <a:tailEnd len="sm" w="sm" type="none"/>
+          </a:ln>
+        </p:spPr>
+      </p:pic>
     </p:spTree>
   </p:cSld>
   <p:clrMapOvr>
@@ -10541,7 +10687,7 @@
         </p:nvSpPr>
         <p:spPr>
           <a:xfrm>
-            <a:off x="311700" y="445025"/>
+            <a:off x="311700" y="137300"/>
             <a:ext cx="8520600" cy="707400"/>
           </a:xfrm>
           <a:prstGeom prst="rect">
@@ -10565,7 +10711,7 @@
             </a:pPr>
             <a:r>
               <a:rPr lang="en"/>
-              <a:t>Q &amp; A</a:t>
+              <a:t>Insights and Findings</a:t>
             </a:r>
             <a:endParaRPr/>
           </a:p>
@@ -10581,8 +10727,8 @@
         </p:nvSpPr>
         <p:spPr>
           <a:xfrm>
-            <a:off x="311700" y="1266325"/>
-            <a:ext cx="8520600" cy="3302700"/>
+            <a:off x="311700" y="844700"/>
+            <a:ext cx="8520600" cy="488700"/>
           </a:xfrm>
           <a:prstGeom prst="rect">
             <a:avLst/>
@@ -10590,7 +10736,7 @@
         </p:spPr>
         <p:txBody>
           <a:bodyPr anchorCtr="0" anchor="t" bIns="91425" lIns="91425" spcFirstLastPara="1" rIns="91425" wrap="square" tIns="91425">
-            <a:normAutofit/>
+            <a:noAutofit/>
           </a:bodyPr>
           <a:lstStyle/>
           <a:p>
@@ -10599,23 +10745,177 @@
                 <a:spcPts val="0"/>
               </a:spcBef>
               <a:spcAft>
+                <a:spcPts val="0"/>
+              </a:spcAft>
+              <a:buNone/>
+            </a:pPr>
+            <a:r>
+              <a:rPr b="1" lang="en"/>
+              <a:t>Guided Review Questions</a:t>
+            </a:r>
+            <a:endParaRPr b="1"/>
+          </a:p>
+          <a:p>
+            <a:pPr indent="0" lvl="0" marL="0" rtl="0" algn="l">
+              <a:spcBef>
                 <a:spcPts val="1200"/>
-              </a:spcAft>
-              <a:buNone/>
-            </a:pPr>
-            <a:r>
-              <a:rPr lang="en"/>
-              <a:t>Thank you for your time! What </a:t>
-            </a:r>
-            <a:r>
-              <a:rPr lang="en"/>
-              <a:t>questions</a:t>
-            </a:r>
-            <a:r>
-              <a:rPr lang="en"/>
-              <a:t> do we have?</a:t>
+              </a:spcBef>
+              <a:spcAft>
+                <a:spcPts val="1200"/>
+              </a:spcAft>
+              <a:buNone/>
+            </a:pPr>
+            <a:r>
+              <a:t/>
             </a:r>
             <a:endParaRPr/>
+          </a:p>
+        </p:txBody>
+      </p:sp>
+      <p:sp>
+        <p:nvSpPr>
+          <p:cNvPr id="189" name="Google Shape;189;p31"/>
+          <p:cNvSpPr txBox="1"/>
+          <p:nvPr>
+            <p:ph idx="1" type="body"/>
+          </p:nvPr>
+        </p:nvSpPr>
+        <p:spPr>
+          <a:xfrm>
+            <a:off x="289700" y="1472950"/>
+            <a:ext cx="8484900" cy="3331800"/>
+          </a:xfrm>
+          <a:prstGeom prst="rect">
+            <a:avLst/>
+          </a:prstGeom>
+          <a:ln>
+            <a:noFill/>
+          </a:ln>
+        </p:spPr>
+        <p:txBody>
+          <a:bodyPr anchorCtr="0" anchor="t" bIns="91425" lIns="91425" spcFirstLastPara="1" rIns="91425" wrap="square" tIns="91425">
+            <a:noAutofit/>
+          </a:bodyPr>
+          <a:lstStyle/>
+          <a:p>
+            <a:pPr indent="0" lvl="0" marL="0" rtl="0" algn="l">
+              <a:spcBef>
+                <a:spcPts val="0"/>
+              </a:spcBef>
+              <a:spcAft>
+                <a:spcPts val="0"/>
+              </a:spcAft>
+              <a:buNone/>
+            </a:pPr>
+            <a:r>
+              <a:rPr b="1" lang="en" sz="1500"/>
+              <a:t>(?)</a:t>
+            </a:r>
+            <a:r>
+              <a:rPr lang="en" sz="1500"/>
+              <a:t> </a:t>
+            </a:r>
+            <a:r>
+              <a:rPr b="1" lang="en" sz="1500"/>
+              <a:t>Who is the Climara patient in the community?</a:t>
+            </a:r>
+            <a:endParaRPr b="1" sz="1500"/>
+          </a:p>
+          <a:p>
+            <a:pPr indent="0" lvl="0" marL="457200" rtl="0" algn="l">
+              <a:spcBef>
+                <a:spcPts val="1000"/>
+              </a:spcBef>
+              <a:spcAft>
+                <a:spcPts val="0"/>
+              </a:spcAft>
+              <a:buNone/>
+            </a:pPr>
+            <a:r>
+              <a:rPr lang="en" sz="1500"/>
+              <a:t>⇒ North American, European and Australian women of various ages, working across multiple industries</a:t>
+            </a:r>
+            <a:endParaRPr sz="1500"/>
+          </a:p>
+          <a:p>
+            <a:pPr indent="0" lvl="0" marL="0" rtl="0" algn="l">
+              <a:spcBef>
+                <a:spcPts val="1000"/>
+              </a:spcBef>
+              <a:spcAft>
+                <a:spcPts val="0"/>
+              </a:spcAft>
+              <a:buNone/>
+            </a:pPr>
+            <a:r>
+              <a:rPr b="1" lang="en" sz="1500"/>
+              <a:t>(?)</a:t>
+            </a:r>
+            <a:r>
+              <a:rPr lang="en" sz="1500"/>
+              <a:t> </a:t>
+            </a:r>
+            <a:r>
+              <a:rPr b="1" lang="en" sz="1500"/>
+              <a:t>What is the Climara patient experience in the community?</a:t>
+            </a:r>
+            <a:endParaRPr b="1" sz="1500"/>
+          </a:p>
+          <a:p>
+            <a:pPr indent="0" lvl="0" marL="457200" rtl="0" algn="l">
+              <a:spcBef>
+                <a:spcPts val="1000"/>
+              </a:spcBef>
+              <a:spcAft>
+                <a:spcPts val="0"/>
+              </a:spcAft>
+              <a:buNone/>
+            </a:pPr>
+            <a:r>
+              <a:rPr lang="en" sz="1500"/>
+              <a:t>⇒ Mostly positive and neutral, with brain fog and irritability surfacing as most often as problematic symptoms</a:t>
+            </a:r>
+            <a:endParaRPr sz="1500"/>
+          </a:p>
+          <a:p>
+            <a:pPr indent="0" lvl="0" marL="0" rtl="0" algn="l">
+              <a:spcBef>
+                <a:spcPts val="1000"/>
+              </a:spcBef>
+              <a:spcAft>
+                <a:spcPts val="0"/>
+              </a:spcAft>
+              <a:buNone/>
+            </a:pPr>
+            <a:r>
+              <a:rPr b="1" lang="en" sz="1500"/>
+              <a:t>(?)</a:t>
+            </a:r>
+            <a:r>
+              <a:rPr lang="en" sz="1500"/>
+              <a:t> </a:t>
+            </a:r>
+            <a:r>
+              <a:rPr b="1" lang="en" sz="1500"/>
+              <a:t>What other treatments are members using?</a:t>
+            </a:r>
+            <a:endParaRPr b="1" sz="1500"/>
+          </a:p>
+          <a:p>
+            <a:pPr indent="0" lvl="0" marL="457200" rtl="0" algn="l">
+              <a:spcBef>
+                <a:spcPts val="1000"/>
+              </a:spcBef>
+              <a:spcAft>
+                <a:spcPts val="1000"/>
+              </a:spcAft>
+              <a:buNone/>
+            </a:pPr>
+            <a:r>
+              <a:rPr lang="en" sz="1500"/>
+              <a:t>⇒ Multiple supplements and targeted treatments to manage the menopause, with multiple brands and types of treatments being identified</a:t>
+            </a:r>
+            <a:endParaRPr sz="1500"/>
           </a:p>
         </p:txBody>
       </p:sp>
@@ -10823,7 +11123,7 @@
   <p:cSld>
     <p:spTree>
       <p:nvGrpSpPr>
-        <p:cNvPr id="192" name="Shape 192"/>
+        <p:cNvPr id="193" name="Shape 193"/>
         <p:cNvGrpSpPr/>
         <p:nvPr/>
       </p:nvGrpSpPr>
@@ -10837,7 +11137,7 @@
       </p:grpSpPr>
       <p:sp>
         <p:nvSpPr>
-          <p:cNvPr id="193" name="Google Shape;193;p32"/>
+          <p:cNvPr id="194" name="Google Shape;194;p32"/>
           <p:cNvSpPr txBox="1"/>
           <p:nvPr>
             <p:ph type="title"/>
@@ -10869,7 +11169,251 @@
             </a:pPr>
             <a:r>
               <a:rPr lang="en"/>
-              <a:t>APPENDIX</a:t>
+              <a:t>Additional Considerations &amp; Next Steps</a:t>
+            </a:r>
+            <a:endParaRPr/>
+          </a:p>
+        </p:txBody>
+      </p:sp>
+      <p:sp>
+        <p:nvSpPr>
+          <p:cNvPr id="195" name="Google Shape;195;p32"/>
+          <p:cNvSpPr txBox="1"/>
+          <p:nvPr>
+            <p:ph idx="1" type="body"/>
+          </p:nvPr>
+        </p:nvSpPr>
+        <p:spPr>
+          <a:xfrm>
+            <a:off x="311700" y="1152425"/>
+            <a:ext cx="8520600" cy="3786300"/>
+          </a:xfrm>
+          <a:prstGeom prst="rect">
+            <a:avLst/>
+          </a:prstGeom>
+        </p:spPr>
+        <p:txBody>
+          <a:bodyPr anchorCtr="0" anchor="t" bIns="91425" lIns="91425" spcFirstLastPara="1" rIns="91425" wrap="square" tIns="91425">
+            <a:normAutofit lnSpcReduction="10000"/>
+          </a:bodyPr>
+          <a:lstStyle/>
+          <a:p>
+            <a:pPr indent="-342900" lvl="0" marL="457200" rtl="0" algn="l">
+              <a:spcBef>
+                <a:spcPts val="0"/>
+              </a:spcBef>
+              <a:spcAft>
+                <a:spcPts val="0"/>
+              </a:spcAft>
+              <a:buSzPts val="1800"/>
+              <a:buChar char="●"/>
+            </a:pPr>
+            <a:r>
+              <a:rPr lang="en"/>
+              <a:t>Scaling for Production</a:t>
+            </a:r>
+            <a:endParaRPr/>
+          </a:p>
+          <a:p>
+            <a:pPr indent="-317500" lvl="1" marL="914400" rtl="0" algn="l">
+              <a:spcBef>
+                <a:spcPts val="0"/>
+              </a:spcBef>
+              <a:spcAft>
+                <a:spcPts val="0"/>
+              </a:spcAft>
+              <a:buSzPts val="1400"/>
+              <a:buChar char="○"/>
+            </a:pPr>
+            <a:r>
+              <a:rPr lang="en"/>
+              <a:t>Keep as LLM/agent-based → vLLM on cloud compute ⇒ 37 million posts for &lt; ~$5,000, ~3-8 days</a:t>
+            </a:r>
+            <a:endParaRPr/>
+          </a:p>
+          <a:p>
+            <a:pPr indent="-342900" lvl="0" marL="457200" rtl="0" algn="l">
+              <a:spcBef>
+                <a:spcPts val="1000"/>
+              </a:spcBef>
+              <a:spcAft>
+                <a:spcPts val="0"/>
+              </a:spcAft>
+              <a:buSzPts val="1800"/>
+              <a:buChar char="●"/>
+            </a:pPr>
+            <a:r>
+              <a:rPr lang="en"/>
+              <a:t>Validation</a:t>
+            </a:r>
+            <a:endParaRPr/>
+          </a:p>
+          <a:p>
+            <a:pPr indent="-317500" lvl="1" marL="914400" rtl="0" algn="l">
+              <a:spcBef>
+                <a:spcPts val="0"/>
+              </a:spcBef>
+              <a:spcAft>
+                <a:spcPts val="0"/>
+              </a:spcAft>
+              <a:buSzPts val="1400"/>
+              <a:buChar char="○"/>
+            </a:pPr>
+            <a:r>
+              <a:rPr lang="en"/>
+              <a:t>More human review if given more time</a:t>
+            </a:r>
+            <a:endParaRPr/>
+          </a:p>
+          <a:p>
+            <a:pPr indent="-317500" lvl="1" marL="914400" rtl="0" algn="l">
+              <a:spcBef>
+                <a:spcPts val="0"/>
+              </a:spcBef>
+              <a:spcAft>
+                <a:spcPts val="0"/>
+              </a:spcAft>
+              <a:buSzPts val="1400"/>
+              <a:buChar char="○"/>
+            </a:pPr>
+            <a:r>
+              <a:rPr lang="en"/>
+              <a:t>“lexicon” configuration vs. MHT Medical Ontology Reference database</a:t>
+            </a:r>
+            <a:endParaRPr/>
+          </a:p>
+          <a:p>
+            <a:pPr indent="-317500" lvl="1" marL="914400" rtl="0" algn="l">
+              <a:spcBef>
+                <a:spcPts val="0"/>
+              </a:spcBef>
+              <a:spcAft>
+                <a:spcPts val="0"/>
+              </a:spcAft>
+              <a:buSzPts val="1400"/>
+              <a:buChar char="○"/>
+            </a:pPr>
+            <a:r>
+              <a:rPr lang="en"/>
+              <a:t>“</a:t>
+            </a:r>
+            <a:r>
+              <a:rPr lang="en"/>
+              <a:t>d</a:t>
+            </a:r>
+            <a:r>
+              <a:rPr lang="en"/>
+              <a:t>omain” configuration vs. MHT internal knowledge reference(s)</a:t>
+            </a:r>
+            <a:endParaRPr/>
+          </a:p>
+          <a:p>
+            <a:pPr indent="-342900" lvl="0" marL="457200" rtl="0" algn="l">
+              <a:spcBef>
+                <a:spcPts val="1000"/>
+              </a:spcBef>
+              <a:spcAft>
+                <a:spcPts val="0"/>
+              </a:spcAft>
+              <a:buSzPts val="1800"/>
+              <a:buChar char="●"/>
+            </a:pPr>
+            <a:r>
+              <a:rPr lang="en"/>
+              <a:t>Analytical Data Products</a:t>
+            </a:r>
+            <a:endParaRPr/>
+          </a:p>
+          <a:p>
+            <a:pPr indent="-317500" lvl="1" marL="914400" rtl="0" algn="l">
+              <a:spcBef>
+                <a:spcPts val="0"/>
+              </a:spcBef>
+              <a:spcAft>
+                <a:spcPts val="0"/>
+              </a:spcAft>
+              <a:buSzPts val="1400"/>
+              <a:buChar char="○"/>
+            </a:pPr>
+            <a:r>
+              <a:rPr lang="en"/>
+              <a:t>Switch Events - Refine prompt; more quality measures/tests</a:t>
+            </a:r>
+            <a:endParaRPr/>
+          </a:p>
+          <a:p>
+            <a:pPr indent="-317500" lvl="1" marL="914400" rtl="0" algn="l">
+              <a:spcBef>
+                <a:spcPts val="0"/>
+              </a:spcBef>
+              <a:spcAft>
+                <a:spcPts val="0"/>
+              </a:spcAft>
+              <a:buSzPts val="1400"/>
+              <a:buChar char="○"/>
+            </a:pPr>
+            <a:r>
+              <a:rPr lang="en"/>
+              <a:t>Enrichment - </a:t>
+            </a:r>
+            <a:r>
+              <a:rPr lang="en"/>
+              <a:t>Try to extract additional output</a:t>
+            </a:r>
+            <a:r>
+              <a:rPr lang="en"/>
+              <a:t>: </a:t>
+            </a:r>
+            <a:endParaRPr/>
+          </a:p>
+          <a:p>
+            <a:pPr indent="-317500" lvl="2" marL="1371600" rtl="0" algn="l">
+              <a:spcBef>
+                <a:spcPts val="0"/>
+              </a:spcBef>
+              <a:spcAft>
+                <a:spcPts val="0"/>
+              </a:spcAft>
+              <a:buSzPts val="1400"/>
+              <a:buChar char="■"/>
+            </a:pPr>
+            <a:r>
+              <a:rPr lang="en"/>
+              <a:t>Efficacy </a:t>
+            </a:r>
+            <a:endParaRPr/>
+          </a:p>
+          <a:p>
+            <a:pPr indent="-317500" lvl="2" marL="1371600" rtl="0" algn="l">
+              <a:spcBef>
+                <a:spcPts val="0"/>
+              </a:spcBef>
+              <a:spcAft>
+                <a:spcPts val="0"/>
+              </a:spcAft>
+              <a:buSzPts val="1400"/>
+              <a:buChar char="■"/>
+            </a:pPr>
+            <a:r>
+              <a:rPr lang="en"/>
+              <a:t>Dosage</a:t>
+            </a:r>
+            <a:endParaRPr/>
+          </a:p>
+          <a:p>
+            <a:pPr indent="-317500" lvl="1" marL="914400" rtl="0" algn="l">
+              <a:spcBef>
+                <a:spcPts val="0"/>
+              </a:spcBef>
+              <a:spcAft>
+                <a:spcPts val="0"/>
+              </a:spcAft>
+              <a:buSzPts val="1400"/>
+              <a:buChar char="○"/>
+            </a:pPr>
+            <a:r>
+              <a:rPr lang="en"/>
+              <a:t>Ontology mappings</a:t>
             </a:r>
             <a:endParaRPr/>
           </a:p>
@@ -10888,7 +11432,7 @@
   <p:cSld>
     <p:spTree>
       <p:nvGrpSpPr>
-        <p:cNvPr id="197" name="Shape 197"/>
+        <p:cNvPr id="199" name="Shape 199"/>
         <p:cNvGrpSpPr/>
         <p:nvPr/>
       </p:nvGrpSpPr>
@@ -10902,7 +11446,7 @@
       </p:grpSpPr>
       <p:sp>
         <p:nvSpPr>
-          <p:cNvPr id="198" name="Google Shape;198;p33"/>
+          <p:cNvPr id="200" name="Google Shape;200;p33"/>
           <p:cNvSpPr txBox="1"/>
           <p:nvPr>
             <p:ph type="title"/>
@@ -10934,7 +11478,7 @@
             </a:pPr>
             <a:r>
               <a:rPr lang="en"/>
-              <a:t>Sentiment - Member Comments</a:t>
+              <a:t>Q &amp; A</a:t>
             </a:r>
             <a:endParaRPr/>
           </a:p>
@@ -10942,26 +11486,24 @@
       </p:sp>
       <p:sp>
         <p:nvSpPr>
-          <p:cNvPr id="199" name="Google Shape;199;p33"/>
+          <p:cNvPr id="201" name="Google Shape;201;p33"/>
           <p:cNvSpPr txBox="1"/>
-          <p:nvPr/>
+          <p:nvPr>
+            <p:ph idx="1" type="body"/>
+          </p:nvPr>
         </p:nvSpPr>
         <p:spPr>
           <a:xfrm>
-            <a:off x="0" y="1062400"/>
-            <a:ext cx="9078000" cy="4032900"/>
+            <a:off x="311700" y="1266325"/>
+            <a:ext cx="8520600" cy="3302700"/>
           </a:xfrm>
           <a:prstGeom prst="rect">
             <a:avLst/>
           </a:prstGeom>
-          <a:noFill/>
-          <a:ln>
-            <a:noFill/>
-          </a:ln>
         </p:spPr>
         <p:txBody>
           <a:bodyPr anchorCtr="0" anchor="t" bIns="91425" lIns="91425" spcFirstLastPara="1" rIns="91425" wrap="square" tIns="91425">
-            <a:spAutoFit/>
+            <a:normAutofit/>
           </a:bodyPr>
           <a:lstStyle/>
           <a:p>
@@ -10970,757 +11512,23 @@
                 <a:spcPts val="0"/>
               </a:spcBef>
               <a:spcAft>
-                <a:spcPts val="0"/>
-              </a:spcAft>
-              <a:buNone/>
-            </a:pPr>
-            <a:r>
-              <a:rPr lang="en" sz="1000">
-                <a:highlight>
-                  <a:srgbClr val="FFFFFF"/>
-                </a:highlight>
-                <a:latin typeface="Courier New"/>
-                <a:ea typeface="Courier New"/>
-                <a:cs typeface="Courier New"/>
-                <a:sym typeface="Courier New"/>
-              </a:rPr>
-              <a:t>=== POSITIVE ===</a:t>
-            </a:r>
-            <a:endParaRPr sz="1000">
-              <a:highlight>
-                <a:srgbClr val="FFFFFF"/>
-              </a:highlight>
-              <a:latin typeface="Courier New"/>
-              <a:ea typeface="Courier New"/>
-              <a:cs typeface="Courier New"/>
-              <a:sym typeface="Courier New"/>
-            </a:endParaRPr>
-          </a:p>
-          <a:p>
-            <a:pPr indent="0" lvl="0" marL="0" rtl="0" algn="l">
-              <a:spcBef>
-                <a:spcPts val="0"/>
-              </a:spcBef>
-              <a:spcAft>
-                <a:spcPts val="0"/>
-              </a:spcAft>
-              <a:buNone/>
-            </a:pPr>
-            <a:r>
-              <a:rPr lang="en" sz="1000">
-                <a:highlight>
-                  <a:srgbClr val="FFFFFF"/>
-                </a:highlight>
-                <a:latin typeface="Courier New"/>
-                <a:ea typeface="Courier New"/>
-                <a:cs typeface="Courier New"/>
-                <a:sym typeface="Courier New"/>
-              </a:rPr>
-              <a:t>  · …I'm not going to offer anything except — yes. This is grief and it's real and it deserves</a:t>
-            </a:r>
-            <a:endParaRPr sz="1000">
-              <a:highlight>
-                <a:srgbClr val="FFFFFF"/>
-              </a:highlight>
-              <a:latin typeface="Courier New"/>
-              <a:ea typeface="Courier New"/>
-              <a:cs typeface="Courier New"/>
-              <a:sym typeface="Courier New"/>
-            </a:endParaRPr>
-          </a:p>
-          <a:p>
-            <a:pPr indent="0" lvl="0" marL="0" rtl="0" algn="l">
-              <a:spcBef>
-                <a:spcPts val="0"/>
-              </a:spcBef>
-              <a:spcAft>
-                <a:spcPts val="0"/>
-              </a:spcAft>
-              <a:buNone/>
-            </a:pPr>
-            <a:r>
-              <a:rPr lang="en" sz="1000">
-                <a:highlight>
-                  <a:srgbClr val="FFFFFF"/>
-                </a:highlight>
-                <a:latin typeface="Courier New"/>
-                <a:ea typeface="Courier New"/>
-                <a:cs typeface="Courier New"/>
-                <a:sym typeface="Courier New"/>
-              </a:rPr>
-              <a:t>    to be called what it is. I'm on the Climara patch now and it's helped the rage a bit but it</a:t>
-            </a:r>
-            <a:endParaRPr sz="1000">
-              <a:highlight>
-                <a:srgbClr val="FFFFFF"/>
-              </a:highlight>
-              <a:latin typeface="Courier New"/>
-              <a:ea typeface="Courier New"/>
-              <a:cs typeface="Courier New"/>
-              <a:sym typeface="Courier New"/>
-            </a:endParaRPr>
-          </a:p>
-          <a:p>
-            <a:pPr indent="0" lvl="0" marL="0" rtl="0" algn="l">
-              <a:spcBef>
-                <a:spcPts val="0"/>
-              </a:spcBef>
-              <a:spcAft>
-                <a:spcPts val="0"/>
-              </a:spcAft>
-              <a:buNone/>
-            </a:pPr>
-            <a:r>
-              <a:rPr lang="en" sz="1000">
-                <a:highlight>
-                  <a:srgbClr val="FFFFFF"/>
-                </a:highlight>
-                <a:latin typeface="Courier New"/>
-                <a:ea typeface="Courier New"/>
-                <a:cs typeface="Courier New"/>
-                <a:sym typeface="Courier New"/>
-              </a:rPr>
-              <a:t>    hasn't fixed the feeling of being a stranger to myself, so I know that part isn't just…</a:t>
-            </a:r>
-            <a:endParaRPr sz="1000">
-              <a:highlight>
-                <a:srgbClr val="FFFFFF"/>
-              </a:highlight>
-              <a:latin typeface="Courier New"/>
-              <a:ea typeface="Courier New"/>
-              <a:cs typeface="Courier New"/>
-              <a:sym typeface="Courier New"/>
-            </a:endParaRPr>
-          </a:p>
-          <a:p>
-            <a:pPr indent="0" lvl="0" marL="0" rtl="0" algn="l">
-              <a:spcBef>
-                <a:spcPts val="0"/>
-              </a:spcBef>
-              <a:spcAft>
-                <a:spcPts val="0"/>
-              </a:spcAft>
-              <a:buNone/>
-            </a:pPr>
-            <a:r>
-              <a:t/>
-            </a:r>
-            <a:endParaRPr sz="1000">
-              <a:highlight>
-                <a:srgbClr val="FFFFFF"/>
-              </a:highlight>
-              <a:latin typeface="Courier New"/>
-              <a:ea typeface="Courier New"/>
-              <a:cs typeface="Courier New"/>
-              <a:sym typeface="Courier New"/>
-            </a:endParaRPr>
-          </a:p>
-          <a:p>
-            <a:pPr indent="0" lvl="0" marL="0" rtl="0" algn="l">
-              <a:spcBef>
-                <a:spcPts val="0"/>
-              </a:spcBef>
-              <a:spcAft>
-                <a:spcPts val="0"/>
-              </a:spcAft>
-              <a:buNone/>
-            </a:pPr>
-            <a:r>
-              <a:rPr lang="en" sz="1000">
-                <a:highlight>
-                  <a:srgbClr val="FFFFFF"/>
-                </a:highlight>
-                <a:latin typeface="Courier New"/>
-                <a:ea typeface="Courier New"/>
-                <a:cs typeface="Courier New"/>
-                <a:sym typeface="Courier New"/>
-              </a:rPr>
-              <a:t>  · I made exactly this transition about two years ago — Vagifem plus added Climara patch, and</a:t>
-            </a:r>
-            <a:endParaRPr sz="1000">
-              <a:highlight>
-                <a:srgbClr val="FFFFFF"/>
-              </a:highlight>
-              <a:latin typeface="Courier New"/>
-              <a:ea typeface="Courier New"/>
-              <a:cs typeface="Courier New"/>
-              <a:sym typeface="Courier New"/>
-            </a:endParaRPr>
-          </a:p>
-          <a:p>
-            <a:pPr indent="0" lvl="0" marL="0" rtl="0" algn="l">
-              <a:spcBef>
-                <a:spcPts val="0"/>
-              </a:spcBef>
-              <a:spcAft>
-                <a:spcPts val="0"/>
-              </a:spcAft>
-              <a:buNone/>
-            </a:pPr>
-            <a:r>
-              <a:rPr lang="en" sz="1000">
-                <a:highlight>
-                  <a:srgbClr val="FFFFFF"/>
-                </a:highlight>
-                <a:latin typeface="Courier New"/>
-                <a:ea typeface="Courier New"/>
-                <a:cs typeface="Courier New"/>
-                <a:sym typeface="Courier New"/>
-              </a:rPr>
-              <a:t>    then Prometrium. First month: breast tenderness yes, quite noticeable, lasted roughly six</a:t>
-            </a:r>
-            <a:endParaRPr sz="1000">
-              <a:highlight>
-                <a:srgbClr val="FFFFFF"/>
-              </a:highlight>
-              <a:latin typeface="Courier New"/>
-              <a:ea typeface="Courier New"/>
-              <a:cs typeface="Courier New"/>
-              <a:sym typeface="Courier New"/>
-            </a:endParaRPr>
-          </a:p>
-          <a:p>
-            <a:pPr indent="0" lvl="0" marL="0" rtl="0" algn="l">
-              <a:spcBef>
-                <a:spcPts val="0"/>
-              </a:spcBef>
-              <a:spcAft>
-                <a:spcPts val="0"/>
-              </a:spcAft>
-              <a:buNone/>
-            </a:pPr>
-            <a:r>
-              <a:rPr lang="en" sz="1000">
-                <a:highlight>
-                  <a:srgbClr val="FFFFFF"/>
-                </a:highlight>
-                <a:latin typeface="Courier New"/>
-                <a:ea typeface="Courier New"/>
-                <a:cs typeface="Courier New"/>
-                <a:sym typeface="Courier New"/>
-              </a:rPr>
-              <a:t>    weeks for me. Bloating was a…</a:t>
-            </a:r>
-            <a:endParaRPr sz="1000">
-              <a:highlight>
-                <a:srgbClr val="FFFFFF"/>
-              </a:highlight>
-              <a:latin typeface="Courier New"/>
-              <a:ea typeface="Courier New"/>
-              <a:cs typeface="Courier New"/>
-              <a:sym typeface="Courier New"/>
-            </a:endParaRPr>
-          </a:p>
-          <a:p>
-            <a:pPr indent="0" lvl="0" marL="0" rtl="0" algn="l">
-              <a:spcBef>
-                <a:spcPts val="0"/>
-              </a:spcBef>
-              <a:spcAft>
-                <a:spcPts val="0"/>
-              </a:spcAft>
-              <a:buNone/>
-            </a:pPr>
-            <a:r>
-              <a:t/>
-            </a:r>
-            <a:endParaRPr sz="1000">
-              <a:highlight>
-                <a:srgbClr val="FFFFFF"/>
-              </a:highlight>
-              <a:latin typeface="Courier New"/>
-              <a:ea typeface="Courier New"/>
-              <a:cs typeface="Courier New"/>
-              <a:sym typeface="Courier New"/>
-            </a:endParaRPr>
-          </a:p>
-          <a:p>
-            <a:pPr indent="0" lvl="0" marL="0" rtl="0" algn="l">
-              <a:spcBef>
-                <a:spcPts val="0"/>
-              </a:spcBef>
-              <a:spcAft>
-                <a:spcPts val="0"/>
-              </a:spcAft>
-              <a:buNone/>
-            </a:pPr>
-            <a:r>
-              <a:rPr lang="en" sz="1000">
-                <a:highlight>
-                  <a:srgbClr val="FFFFFF"/>
-                </a:highlight>
-                <a:latin typeface="Courier New"/>
-                <a:ea typeface="Courier New"/>
-                <a:cs typeface="Courier New"/>
-                <a:sym typeface="Courier New"/>
-              </a:rPr>
-              <a:t>  · …me. Also did the iron supplementing cause any stomach issues? I'm already anxious about</a:t>
-            </a:r>
-            <a:endParaRPr sz="1000">
-              <a:highlight>
-                <a:srgbClr val="FFFFFF"/>
-              </a:highlight>
-              <a:latin typeface="Courier New"/>
-              <a:ea typeface="Courier New"/>
-              <a:cs typeface="Courier New"/>
-              <a:sym typeface="Courier New"/>
-            </a:endParaRPr>
-          </a:p>
-          <a:p>
-            <a:pPr indent="0" lvl="0" marL="0" rtl="0" algn="l">
-              <a:spcBef>
-                <a:spcPts val="0"/>
-              </a:spcBef>
-              <a:spcAft>
-                <a:spcPts val="0"/>
-              </a:spcAft>
-              <a:buNone/>
-            </a:pPr>
-            <a:r>
-              <a:rPr lang="en" sz="1000">
-                <a:highlight>
-                  <a:srgbClr val="FFFFFF"/>
-                </a:highlight>
-                <a:latin typeface="Courier New"/>
-                <a:ea typeface="Courier New"/>
-                <a:cs typeface="Courier New"/>
-                <a:sym typeface="Courier New"/>
-              </a:rPr>
-              <a:t>    adding anything new on top of the Climara. Really glad you found something that works</a:t>
-            </a:r>
-            <a:endParaRPr sz="1000">
-              <a:highlight>
-                <a:srgbClr val="FFFFFF"/>
-              </a:highlight>
-              <a:latin typeface="Courier New"/>
-              <a:ea typeface="Courier New"/>
-              <a:cs typeface="Courier New"/>
-              <a:sym typeface="Courier New"/>
-            </a:endParaRPr>
-          </a:p>
-          <a:p>
-            <a:pPr indent="0" lvl="0" marL="0" rtl="0" algn="l">
-              <a:spcBef>
-                <a:spcPts val="0"/>
-              </a:spcBef>
-              <a:spcAft>
-                <a:spcPts val="0"/>
-              </a:spcAft>
-              <a:buNone/>
-            </a:pPr>
-            <a:r>
-              <a:rPr lang="en" sz="1000">
-                <a:highlight>
-                  <a:srgbClr val="FFFFFF"/>
-                </a:highlight>
-                <a:latin typeface="Courier New"/>
-                <a:ea typeface="Courier New"/>
-                <a:cs typeface="Courier New"/>
-                <a:sym typeface="Courier New"/>
-              </a:rPr>
-              <a:t>    though, 1-2 nights vs 5-6 is massive.</a:t>
-            </a:r>
-            <a:endParaRPr sz="1000">
-              <a:highlight>
-                <a:srgbClr val="FFFFFF"/>
-              </a:highlight>
-              <a:latin typeface="Courier New"/>
-              <a:ea typeface="Courier New"/>
-              <a:cs typeface="Courier New"/>
-              <a:sym typeface="Courier New"/>
-            </a:endParaRPr>
-          </a:p>
-          <a:p>
-            <a:pPr indent="0" lvl="0" marL="0" rtl="0" algn="l">
-              <a:spcBef>
-                <a:spcPts val="0"/>
-              </a:spcBef>
-              <a:spcAft>
-                <a:spcPts val="0"/>
-              </a:spcAft>
-              <a:buNone/>
-            </a:pPr>
-            <a:r>
-              <a:t/>
-            </a:r>
-            <a:endParaRPr sz="1000">
-              <a:highlight>
-                <a:srgbClr val="FFFFFF"/>
-              </a:highlight>
-              <a:latin typeface="Courier New"/>
-              <a:ea typeface="Courier New"/>
-              <a:cs typeface="Courier New"/>
-              <a:sym typeface="Courier New"/>
-            </a:endParaRPr>
-          </a:p>
-          <a:p>
-            <a:pPr indent="0" lvl="0" marL="0" rtl="0" algn="l">
-              <a:spcBef>
-                <a:spcPts val="0"/>
-              </a:spcBef>
-              <a:spcAft>
-                <a:spcPts val="0"/>
-              </a:spcAft>
-              <a:buNone/>
-            </a:pPr>
-            <a:r>
-              <a:rPr lang="en" sz="1000">
-                <a:highlight>
-                  <a:srgbClr val="FFFFFF"/>
-                </a:highlight>
-                <a:latin typeface="Courier New"/>
-                <a:ea typeface="Courier New"/>
-                <a:cs typeface="Courier New"/>
-                <a:sym typeface="Courier New"/>
-              </a:rPr>
-              <a:t>=== NEGATIVE ===</a:t>
-            </a:r>
-            <a:endParaRPr sz="1000">
-              <a:highlight>
-                <a:srgbClr val="FFFFFF"/>
-              </a:highlight>
-              <a:latin typeface="Courier New"/>
-              <a:ea typeface="Courier New"/>
-              <a:cs typeface="Courier New"/>
-              <a:sym typeface="Courier New"/>
-            </a:endParaRPr>
-          </a:p>
-          <a:p>
-            <a:pPr indent="0" lvl="0" marL="0" rtl="0" algn="l">
-              <a:spcBef>
-                <a:spcPts val="0"/>
-              </a:spcBef>
-              <a:spcAft>
-                <a:spcPts val="0"/>
-              </a:spcAft>
-              <a:buNone/>
-            </a:pPr>
-            <a:r>
-              <a:rPr lang="en" sz="1000">
-                <a:highlight>
-                  <a:srgbClr val="FFFFFF"/>
-                </a:highlight>
-                <a:latin typeface="Courier New"/>
-                <a:ea typeface="Courier New"/>
-                <a:cs typeface="Courier New"/>
-                <a:sym typeface="Courier New"/>
-              </a:rPr>
-              <a:t>  · temple hair loss getting worse even on the patch — anyone else?? okay so i've been on the</a:t>
-            </a:r>
-            <a:endParaRPr sz="1000">
-              <a:highlight>
-                <a:srgbClr val="FFFFFF"/>
-              </a:highlight>
-              <a:latin typeface="Courier New"/>
-              <a:ea typeface="Courier New"/>
-              <a:cs typeface="Courier New"/>
-              <a:sym typeface="Courier New"/>
-            </a:endParaRPr>
-          </a:p>
-          <a:p>
-            <a:pPr indent="0" lvl="0" marL="0" rtl="0" algn="l">
-              <a:spcBef>
-                <a:spcPts val="0"/>
-              </a:spcBef>
-              <a:spcAft>
-                <a:spcPts val="0"/>
-              </a:spcAft>
-              <a:buNone/>
-            </a:pPr>
-            <a:r>
-              <a:rPr lang="en" sz="1000">
-                <a:highlight>
-                  <a:srgbClr val="FFFFFF"/>
-                </a:highlight>
-                <a:latin typeface="Courier New"/>
-                <a:ea typeface="Courier New"/>
-                <a:cs typeface="Courier New"/>
-                <a:sym typeface="Courier New"/>
-              </a:rPr>
-              <a:t>    Climara patch for almost 8 months now and i genuinely thought it would help slow down the</a:t>
-            </a:r>
-            <a:endParaRPr sz="1000">
-              <a:highlight>
-                <a:srgbClr val="FFFFFF"/>
-              </a:highlight>
-              <a:latin typeface="Courier New"/>
-              <a:ea typeface="Courier New"/>
-              <a:cs typeface="Courier New"/>
-              <a:sym typeface="Courier New"/>
-            </a:endParaRPr>
-          </a:p>
-          <a:p>
-            <a:pPr indent="0" lvl="0" marL="0" rtl="0" algn="l">
-              <a:spcBef>
-                <a:spcPts val="0"/>
-              </a:spcBef>
-              <a:spcAft>
-                <a:spcPts val="0"/>
-              </a:spcAft>
-              <a:buNone/>
-            </a:pPr>
-            <a:r>
-              <a:rPr lang="en" sz="1000">
-                <a:highlight>
-                  <a:srgbClr val="FFFFFF"/>
-                </a:highlight>
-                <a:latin typeface="Courier New"/>
-                <a:ea typeface="Courier New"/>
-                <a:cs typeface="Courier New"/>
-                <a:sym typeface="Courier New"/>
-              </a:rPr>
-              <a:t>    hair loss at my temples but honestly?? it seems like…</a:t>
-            </a:r>
-            <a:endParaRPr sz="1000">
-              <a:highlight>
-                <a:srgbClr val="FFFFFF"/>
-              </a:highlight>
-              <a:latin typeface="Courier New"/>
-              <a:ea typeface="Courier New"/>
-              <a:cs typeface="Courier New"/>
-              <a:sym typeface="Courier New"/>
-            </a:endParaRPr>
-          </a:p>
-          <a:p>
-            <a:pPr indent="0" lvl="0" marL="0" rtl="0" algn="l">
-              <a:spcBef>
-                <a:spcPts val="0"/>
-              </a:spcBef>
-              <a:spcAft>
-                <a:spcPts val="0"/>
-              </a:spcAft>
-              <a:buNone/>
-            </a:pPr>
-            <a:r>
-              <a:t/>
-            </a:r>
-            <a:endParaRPr sz="1000">
-              <a:highlight>
-                <a:srgbClr val="FFFFFF"/>
-              </a:highlight>
-              <a:latin typeface="Courier New"/>
-              <a:ea typeface="Courier New"/>
-              <a:cs typeface="Courier New"/>
-              <a:sym typeface="Courier New"/>
-            </a:endParaRPr>
-          </a:p>
-          <a:p>
-            <a:pPr indent="0" lvl="0" marL="0" rtl="0" algn="l">
-              <a:spcBef>
-                <a:spcPts val="0"/>
-              </a:spcBef>
-              <a:spcAft>
-                <a:spcPts val="0"/>
-              </a:spcAft>
-              <a:buNone/>
-            </a:pPr>
-            <a:r>
-              <a:rPr lang="en" sz="1000">
-                <a:highlight>
-                  <a:srgbClr val="FFFFFF"/>
-                </a:highlight>
-                <a:latin typeface="Courier New"/>
-                <a:ea typeface="Courier New"/>
-                <a:cs typeface="Courier New"/>
-                <a:sym typeface="Courier New"/>
-              </a:rPr>
-              <a:t>  · …exhausting, especially doing detailed design work through daily headaches 💛 I stopped</a:t>
-            </a:r>
-            <a:endParaRPr sz="1000">
-              <a:highlight>
-                <a:srgbClr val="FFFFFF"/>
-              </a:highlight>
-              <a:latin typeface="Courier New"/>
-              <a:ea typeface="Courier New"/>
-              <a:cs typeface="Courier New"/>
-              <a:sym typeface="Courier New"/>
-            </a:endParaRPr>
-          </a:p>
-          <a:p>
-            <a:pPr indent="0" lvl="0" marL="0" rtl="0" algn="l">
-              <a:spcBef>
-                <a:spcPts val="0"/>
-              </a:spcBef>
-              <a:spcAft>
-                <a:spcPts val="0"/>
-              </a:spcAft>
-              <a:buNone/>
-            </a:pPr>
-            <a:r>
-              <a:rPr lang="en" sz="1000">
-                <a:highlight>
-                  <a:srgbClr val="FFFFFF"/>
-                </a:highlight>
-                <a:latin typeface="Courier New"/>
-                <a:ea typeface="Courier New"/>
-                <a:cs typeface="Courier New"/>
-                <a:sym typeface="Courier New"/>
-              </a:rPr>
-              <a:t>    briefly about two years before starting my Climara patch and honestly the muscle aches were</a:t>
-            </a:r>
-            <a:endParaRPr sz="1000">
-              <a:highlight>
-                <a:srgbClr val="FFFFFF"/>
-              </a:highlight>
-              <a:latin typeface="Courier New"/>
-              <a:ea typeface="Courier New"/>
-              <a:cs typeface="Courier New"/>
-              <a:sym typeface="Courier New"/>
-            </a:endParaRPr>
-          </a:p>
-          <a:p>
-            <a:pPr indent="0" lvl="0" marL="0" rtl="0" algn="l">
-              <a:spcBef>
-                <a:spcPts val="0"/>
-              </a:spcBef>
-              <a:spcAft>
-                <a:spcPts val="0"/>
-              </a:spcAft>
-              <a:buNone/>
-            </a:pPr>
-            <a:r>
-              <a:rPr lang="en" sz="1000">
-                <a:highlight>
-                  <a:srgbClr val="FFFFFF"/>
-                </a:highlight>
-                <a:latin typeface="Courier New"/>
-                <a:ea typeface="Courier New"/>
-                <a:cs typeface="Courier New"/>
-                <a:sym typeface="Courier New"/>
-              </a:rPr>
-              <a:t>    the thing that surprised me most — I didn't even realize HRT had been helping with them</a:t>
-            </a:r>
-            <a:endParaRPr sz="1000">
-              <a:highlight>
-                <a:srgbClr val="FFFFFF"/>
-              </a:highlight>
-              <a:latin typeface="Courier New"/>
-              <a:ea typeface="Courier New"/>
-              <a:cs typeface="Courier New"/>
-              <a:sym typeface="Courier New"/>
-            </a:endParaRPr>
-          </a:p>
-          <a:p>
-            <a:pPr indent="0" lvl="0" marL="0" rtl="0" algn="l">
-              <a:spcBef>
-                <a:spcPts val="0"/>
-              </a:spcBef>
-              <a:spcAft>
-                <a:spcPts val="0"/>
-              </a:spcAft>
-              <a:buNone/>
-            </a:pPr>
-            <a:r>
-              <a:rPr lang="en" sz="1000">
-                <a:highlight>
-                  <a:srgbClr val="FFFFFF"/>
-                </a:highlight>
-                <a:latin typeface="Courier New"/>
-                <a:ea typeface="Courier New"/>
-                <a:cs typeface="Courier New"/>
-                <a:sym typeface="Courier New"/>
-              </a:rPr>
-              <a:t>    until…</a:t>
-            </a:r>
-            <a:endParaRPr sz="1000">
-              <a:highlight>
-                <a:srgbClr val="FFFFFF"/>
-              </a:highlight>
-              <a:latin typeface="Courier New"/>
-              <a:ea typeface="Courier New"/>
-              <a:cs typeface="Courier New"/>
-              <a:sym typeface="Courier New"/>
-            </a:endParaRPr>
-          </a:p>
-          <a:p>
-            <a:pPr indent="0" lvl="0" marL="0" rtl="0" algn="l">
-              <a:spcBef>
-                <a:spcPts val="0"/>
-              </a:spcBef>
-              <a:spcAft>
-                <a:spcPts val="0"/>
-              </a:spcAft>
-              <a:buNone/>
-            </a:pPr>
-            <a:r>
-              <a:t/>
-            </a:r>
-            <a:endParaRPr sz="1000">
-              <a:highlight>
-                <a:srgbClr val="FFFFFF"/>
-              </a:highlight>
-              <a:latin typeface="Courier New"/>
-              <a:ea typeface="Courier New"/>
-              <a:cs typeface="Courier New"/>
-              <a:sym typeface="Courier New"/>
-            </a:endParaRPr>
-          </a:p>
-          <a:p>
-            <a:pPr indent="0" lvl="0" marL="0" rtl="0" algn="l">
-              <a:spcBef>
-                <a:spcPts val="0"/>
-              </a:spcBef>
-              <a:spcAft>
-                <a:spcPts val="0"/>
-              </a:spcAft>
-              <a:buNone/>
-            </a:pPr>
-            <a:r>
-              <a:rPr lang="en" sz="1000">
-                <a:highlight>
-                  <a:srgbClr val="FFFFFF"/>
-                </a:highlight>
-                <a:latin typeface="Courier New"/>
-                <a:ea typeface="Courier New"/>
-                <a:cs typeface="Courier New"/>
-                <a:sym typeface="Courier New"/>
-              </a:rPr>
-              <a:t>  · …good evidence for meibomian gland dysfunction. I'm filing this away because my allergies</a:t>
-            </a:r>
-            <a:endParaRPr sz="1000">
-              <a:highlight>
-                <a:srgbClr val="FFFFFF"/>
-              </a:highlight>
-              <a:latin typeface="Courier New"/>
-              <a:ea typeface="Courier New"/>
-              <a:cs typeface="Courier New"/>
-              <a:sym typeface="Courier New"/>
-            </a:endParaRPr>
-          </a:p>
-          <a:p>
-            <a:pPr indent="0" lvl="0" marL="0" rtl="0" algn="l">
-              <a:lnSpc>
-                <a:spcPct val="130770"/>
-              </a:lnSpc>
-              <a:spcBef>
-                <a:spcPts val="0"/>
-              </a:spcBef>
-              <a:spcAft>
-                <a:spcPts val="0"/>
-              </a:spcAft>
-              <a:buNone/>
-            </a:pPr>
-            <a:r>
-              <a:rPr lang="en" sz="1000">
-                <a:highlight>
-                  <a:srgbClr val="FFFFFF"/>
-                </a:highlight>
-                <a:latin typeface="Courier New"/>
-                <a:ea typeface="Courier New"/>
-                <a:cs typeface="Courier New"/>
-                <a:sym typeface="Courier New"/>
-              </a:rPr>
-              <a:t>    have been flaring since starting the Climara patch and my eyes are part of it.</a:t>
-            </a:r>
-            <a:endParaRPr sz="1000">
-              <a:highlight>
-                <a:srgbClr val="FFFFFF"/>
-              </a:highlight>
-              <a:latin typeface="Courier New"/>
-              <a:ea typeface="Courier New"/>
-              <a:cs typeface="Courier New"/>
-              <a:sym typeface="Courier New"/>
-            </a:endParaRPr>
+                <a:spcPts val="1200"/>
+              </a:spcAft>
+              <a:buNone/>
+            </a:pPr>
+            <a:r>
+              <a:rPr lang="en"/>
+              <a:t>Thank you for your time! What </a:t>
+            </a:r>
+            <a:r>
+              <a:rPr lang="en"/>
+              <a:t>questions</a:t>
+            </a:r>
+            <a:r>
+              <a:rPr lang="en"/>
+              <a:t> do we have?</a:t>
+            </a:r>
+            <a:endParaRPr/>
           </a:p>
         </p:txBody>
       </p:sp>
@@ -11737,7 +11545,7 @@
   <p:cSld>
     <p:spTree>
       <p:nvGrpSpPr>
-        <p:cNvPr id="203" name="Shape 203"/>
+        <p:cNvPr id="205" name="Shape 205"/>
         <p:cNvGrpSpPr/>
         <p:nvPr/>
       </p:nvGrpSpPr>
@@ -11751,7 +11559,7 @@
       </p:grpSpPr>
       <p:sp>
         <p:nvSpPr>
-          <p:cNvPr id="204" name="Google Shape;204;p34"/>
+          <p:cNvPr id="206" name="Google Shape;206;p34"/>
           <p:cNvSpPr txBox="1"/>
           <p:nvPr>
             <p:ph type="title"/>
@@ -11783,719 +11591,9 @@
             </a:pPr>
             <a:r>
               <a:rPr lang="en"/>
-              <a:t>Switch Events - Member Comments</a:t>
+              <a:t>APPENDIX</a:t>
             </a:r>
             <a:endParaRPr/>
-          </a:p>
-        </p:txBody>
-      </p:sp>
-      <p:sp>
-        <p:nvSpPr>
-          <p:cNvPr id="205" name="Google Shape;205;p34"/>
-          <p:cNvSpPr txBox="1"/>
-          <p:nvPr/>
-        </p:nvSpPr>
-        <p:spPr>
-          <a:xfrm>
-            <a:off x="0" y="1062400"/>
-            <a:ext cx="9078000" cy="3961800"/>
-          </a:xfrm>
-          <a:prstGeom prst="rect">
-            <a:avLst/>
-          </a:prstGeom>
-          <a:noFill/>
-          <a:ln>
-            <a:noFill/>
-          </a:ln>
-        </p:spPr>
-        <p:txBody>
-          <a:bodyPr anchorCtr="0" anchor="t" bIns="91425" lIns="91425" spcFirstLastPara="1" rIns="91425" wrap="square" tIns="91425">
-            <a:spAutoFit/>
-          </a:bodyPr>
-          <a:lstStyle/>
-          <a:p>
-            <a:pPr indent="0" lvl="0" marL="0" rtl="0" algn="l">
-              <a:lnSpc>
-                <a:spcPct val="130770"/>
-              </a:lnSpc>
-              <a:spcBef>
-                <a:spcPts val="0"/>
-              </a:spcBef>
-              <a:spcAft>
-                <a:spcPts val="0"/>
-              </a:spcAft>
-              <a:buNone/>
-            </a:pPr>
-            <a:r>
-              <a:rPr lang="en" sz="1000">
-                <a:highlight>
-                  <a:srgbClr val="FFFFFF"/>
-                </a:highlight>
-                <a:latin typeface="Courier New"/>
-                <a:ea typeface="Courier New"/>
-                <a:cs typeface="Courier New"/>
-                <a:sym typeface="Courier New"/>
-              </a:rPr>
-              <a:t>22 of 338 switch events met the selection criteria; showing 5</a:t>
-            </a:r>
-            <a:endParaRPr sz="1000">
-              <a:highlight>
-                <a:srgbClr val="FFFFFF"/>
-              </a:highlight>
-              <a:latin typeface="Courier New"/>
-              <a:ea typeface="Courier New"/>
-              <a:cs typeface="Courier New"/>
-              <a:sym typeface="Courier New"/>
-            </a:endParaRPr>
-          </a:p>
-          <a:p>
-            <a:pPr indent="0" lvl="0" marL="0" rtl="0" algn="l">
-              <a:lnSpc>
-                <a:spcPct val="130770"/>
-              </a:lnSpc>
-              <a:spcBef>
-                <a:spcPts val="0"/>
-              </a:spcBef>
-              <a:spcAft>
-                <a:spcPts val="0"/>
-              </a:spcAft>
-              <a:buNone/>
-            </a:pPr>
-            <a:r>
-              <a:t/>
-            </a:r>
-            <a:endParaRPr sz="1000">
-              <a:highlight>
-                <a:srgbClr val="FFFFFF"/>
-              </a:highlight>
-              <a:latin typeface="Courier New"/>
-              <a:ea typeface="Courier New"/>
-              <a:cs typeface="Courier New"/>
-              <a:sym typeface="Courier New"/>
-            </a:endParaRPr>
-          </a:p>
-          <a:p>
-            <a:pPr indent="0" lvl="0" marL="0" rtl="0" algn="l">
-              <a:lnSpc>
-                <a:spcPct val="130770"/>
-              </a:lnSpc>
-              <a:spcBef>
-                <a:spcPts val="0"/>
-              </a:spcBef>
-              <a:spcAft>
-                <a:spcPts val="0"/>
-              </a:spcAft>
-              <a:buNone/>
-            </a:pPr>
-            <a:r>
-              <a:rPr lang="en" sz="1000">
-                <a:highlight>
-                  <a:srgbClr val="FFFFFF"/>
-                </a:highlight>
-                <a:latin typeface="Courier New"/>
-                <a:ea typeface="Courier New"/>
-                <a:cs typeface="Courier New"/>
-                <a:sym typeface="Courier New"/>
-              </a:rPr>
-              <a:t>SELECTION CRITERIA: Must carry a first-person movement construction, both endpoints must resolve to named products, and the surrounding text must not attribute the move to someone else</a:t>
-            </a:r>
-            <a:endParaRPr sz="1000">
-              <a:highlight>
-                <a:srgbClr val="FFFFFF"/>
-              </a:highlight>
-              <a:latin typeface="Courier New"/>
-              <a:ea typeface="Courier New"/>
-              <a:cs typeface="Courier New"/>
-              <a:sym typeface="Courier New"/>
-            </a:endParaRPr>
-          </a:p>
-          <a:p>
-            <a:pPr indent="0" lvl="0" marL="0" rtl="0" algn="l">
-              <a:lnSpc>
-                <a:spcPct val="130770"/>
-              </a:lnSpc>
-              <a:spcBef>
-                <a:spcPts val="0"/>
-              </a:spcBef>
-              <a:spcAft>
-                <a:spcPts val="0"/>
-              </a:spcAft>
-              <a:buNone/>
-            </a:pPr>
-            <a:r>
-              <a:t/>
-            </a:r>
-            <a:endParaRPr sz="1000">
-              <a:highlight>
-                <a:srgbClr val="FFFFFF"/>
-              </a:highlight>
-              <a:latin typeface="Courier New"/>
-              <a:ea typeface="Courier New"/>
-              <a:cs typeface="Courier New"/>
-              <a:sym typeface="Courier New"/>
-            </a:endParaRPr>
-          </a:p>
-          <a:p>
-            <a:pPr indent="0" lvl="0" marL="0" rtl="0" algn="l">
-              <a:lnSpc>
-                <a:spcPct val="130770"/>
-              </a:lnSpc>
-              <a:spcBef>
-                <a:spcPts val="0"/>
-              </a:spcBef>
-              <a:spcAft>
-                <a:spcPts val="0"/>
-              </a:spcAft>
-              <a:buNone/>
-            </a:pPr>
-            <a:r>
-              <a:rPr lang="en" sz="1000">
-                <a:highlight>
-                  <a:srgbClr val="FFFFFF"/>
-                </a:highlight>
-                <a:latin typeface="Courier New"/>
-                <a:ea typeface="Courier New"/>
-                <a:cs typeface="Courier New"/>
-                <a:sym typeface="Courier New"/>
-              </a:rPr>
-              <a:t>  </a:t>
-            </a:r>
-            <a:r>
-              <a:rPr b="1" lang="en" sz="1000">
-                <a:highlight>
-                  <a:srgbClr val="FFFFFF"/>
-                </a:highlight>
-                <a:latin typeface="Courier New"/>
-                <a:ea typeface="Courier New"/>
-                <a:cs typeface="Courier New"/>
-                <a:sym typeface="Courier New"/>
-              </a:rPr>
-              <a:t>vagifem  →  imvexxy  </a:t>
-            </a:r>
-            <a:r>
-              <a:rPr lang="en" sz="1000">
-                <a:highlight>
-                  <a:srgbClr val="FFFFFF"/>
-                </a:highlight>
-                <a:latin typeface="Courier New"/>
-                <a:ea typeface="Courier New"/>
-                <a:cs typeface="Courier New"/>
-                <a:sym typeface="Courier New"/>
-              </a:rPr>
-              <a:t> [applicator faff]</a:t>
-            </a:r>
-            <a:endParaRPr sz="1000">
-              <a:highlight>
-                <a:srgbClr val="FFFFFF"/>
-              </a:highlight>
-              <a:latin typeface="Courier New"/>
-              <a:ea typeface="Courier New"/>
-              <a:cs typeface="Courier New"/>
-              <a:sym typeface="Courier New"/>
-            </a:endParaRPr>
-          </a:p>
-          <a:p>
-            <a:pPr indent="0" lvl="0" marL="0" rtl="0" algn="l">
-              <a:lnSpc>
-                <a:spcPct val="130770"/>
-              </a:lnSpc>
-              <a:spcBef>
-                <a:spcPts val="0"/>
-              </a:spcBef>
-              <a:spcAft>
-                <a:spcPts val="0"/>
-              </a:spcAft>
-              <a:buNone/>
-            </a:pPr>
-            <a:r>
-              <a:rPr lang="en" sz="1000">
-                <a:highlight>
-                  <a:srgbClr val="FFFFFF"/>
-                </a:highlight>
-                <a:latin typeface="Courier New"/>
-                <a:ea typeface="Courier New"/>
-                <a:cs typeface="Courier New"/>
-                <a:sym typeface="Courier New"/>
-              </a:rPr>
-              <a:t>    “Switched from Vagifem to Imvexxy a while back mostly because of applicator faff tbh”</a:t>
-            </a:r>
-            <a:endParaRPr sz="1000">
-              <a:highlight>
-                <a:srgbClr val="FFFFFF"/>
-              </a:highlight>
-              <a:latin typeface="Courier New"/>
-              <a:ea typeface="Courier New"/>
-              <a:cs typeface="Courier New"/>
-              <a:sym typeface="Courier New"/>
-            </a:endParaRPr>
-          </a:p>
-          <a:p>
-            <a:pPr indent="0" lvl="0" marL="0" rtl="0" algn="l">
-              <a:lnSpc>
-                <a:spcPct val="130770"/>
-              </a:lnSpc>
-              <a:spcBef>
-                <a:spcPts val="0"/>
-              </a:spcBef>
-              <a:spcAft>
-                <a:spcPts val="0"/>
-              </a:spcAft>
-              <a:buNone/>
-            </a:pPr>
-            <a:r>
-              <a:t/>
-            </a:r>
-            <a:endParaRPr sz="1000">
-              <a:highlight>
-                <a:srgbClr val="FFFFFF"/>
-              </a:highlight>
-              <a:latin typeface="Courier New"/>
-              <a:ea typeface="Courier New"/>
-              <a:cs typeface="Courier New"/>
-              <a:sym typeface="Courier New"/>
-            </a:endParaRPr>
-          </a:p>
-          <a:p>
-            <a:pPr indent="0" lvl="0" marL="0" rtl="0" algn="l">
-              <a:lnSpc>
-                <a:spcPct val="130770"/>
-              </a:lnSpc>
-              <a:spcBef>
-                <a:spcPts val="0"/>
-              </a:spcBef>
-              <a:spcAft>
-                <a:spcPts val="0"/>
-              </a:spcAft>
-              <a:buNone/>
-            </a:pPr>
-            <a:r>
-              <a:rPr lang="en" sz="1000">
-                <a:highlight>
-                  <a:srgbClr val="FFFFFF"/>
-                </a:highlight>
-                <a:latin typeface="Courier New"/>
-                <a:ea typeface="Courier New"/>
-                <a:cs typeface="Courier New"/>
-                <a:sym typeface="Courier New"/>
-              </a:rPr>
-              <a:t>  </a:t>
-            </a:r>
-            <a:r>
-              <a:rPr b="1" lang="en" sz="1000">
-                <a:highlight>
-                  <a:srgbClr val="FFFFFF"/>
-                </a:highlight>
-                <a:latin typeface="Courier New"/>
-                <a:ea typeface="Courier New"/>
-                <a:cs typeface="Courier New"/>
-                <a:sym typeface="Courier New"/>
-              </a:rPr>
-              <a:t>activelle  →  climara  </a:t>
-            </a:r>
-            <a:r>
-              <a:rPr lang="en" sz="1000">
-                <a:highlight>
-                  <a:srgbClr val="FFFFFF"/>
-                </a:highlight>
-                <a:latin typeface="Courier New"/>
-                <a:ea typeface="Courier New"/>
-                <a:cs typeface="Courier New"/>
-                <a:sym typeface="Courier New"/>
-              </a:rPr>
-              <a:t> [reduce first-pass hepatic effects]</a:t>
-            </a:r>
-            <a:endParaRPr sz="1000">
-              <a:highlight>
-                <a:srgbClr val="FFFFFF"/>
-              </a:highlight>
-              <a:latin typeface="Courier New"/>
-              <a:ea typeface="Courier New"/>
-              <a:cs typeface="Courier New"/>
-              <a:sym typeface="Courier New"/>
-            </a:endParaRPr>
-          </a:p>
-          <a:p>
-            <a:pPr indent="0" lvl="0" marL="0" rtl="0" algn="l">
-              <a:lnSpc>
-                <a:spcPct val="130770"/>
-              </a:lnSpc>
-              <a:spcBef>
-                <a:spcPts val="0"/>
-              </a:spcBef>
-              <a:spcAft>
-                <a:spcPts val="0"/>
-              </a:spcAft>
-              <a:buNone/>
-            </a:pPr>
-            <a:r>
-              <a:rPr lang="en" sz="1000">
-                <a:highlight>
-                  <a:srgbClr val="FFFFFF"/>
-                </a:highlight>
-                <a:latin typeface="Courier New"/>
-                <a:ea typeface="Courier New"/>
-                <a:cs typeface="Courier New"/>
-                <a:sym typeface="Courier New"/>
-              </a:rPr>
-              <a:t>    “switching from oral to transdermal estrogen”</a:t>
-            </a:r>
-            <a:endParaRPr sz="1000">
-              <a:highlight>
-                <a:srgbClr val="FFFFFF"/>
-              </a:highlight>
-              <a:latin typeface="Courier New"/>
-              <a:ea typeface="Courier New"/>
-              <a:cs typeface="Courier New"/>
-              <a:sym typeface="Courier New"/>
-            </a:endParaRPr>
-          </a:p>
-          <a:p>
-            <a:pPr indent="0" lvl="0" marL="0" rtl="0" algn="l">
-              <a:lnSpc>
-                <a:spcPct val="130770"/>
-              </a:lnSpc>
-              <a:spcBef>
-                <a:spcPts val="0"/>
-              </a:spcBef>
-              <a:spcAft>
-                <a:spcPts val="0"/>
-              </a:spcAft>
-              <a:buNone/>
-            </a:pPr>
-            <a:r>
-              <a:t/>
-            </a:r>
-            <a:endParaRPr sz="1000">
-              <a:highlight>
-                <a:srgbClr val="FFFFFF"/>
-              </a:highlight>
-              <a:latin typeface="Courier New"/>
-              <a:ea typeface="Courier New"/>
-              <a:cs typeface="Courier New"/>
-              <a:sym typeface="Courier New"/>
-            </a:endParaRPr>
-          </a:p>
-          <a:p>
-            <a:pPr indent="0" lvl="0" marL="0" rtl="0" algn="l">
-              <a:lnSpc>
-                <a:spcPct val="130770"/>
-              </a:lnSpc>
-              <a:spcBef>
-                <a:spcPts val="0"/>
-              </a:spcBef>
-              <a:spcAft>
-                <a:spcPts val="0"/>
-              </a:spcAft>
-              <a:buNone/>
-            </a:pPr>
-            <a:r>
-              <a:rPr lang="en" sz="1000">
-                <a:highlight>
-                  <a:srgbClr val="FFFFFF"/>
-                </a:highlight>
-                <a:latin typeface="Courier New"/>
-                <a:ea typeface="Courier New"/>
-                <a:cs typeface="Courier New"/>
-                <a:sym typeface="Courier New"/>
-              </a:rPr>
-              <a:t>  </a:t>
-            </a:r>
-            <a:r>
-              <a:rPr b="1" lang="en" sz="1000">
-                <a:highlight>
-                  <a:srgbClr val="FFFFFF"/>
-                </a:highlight>
-                <a:latin typeface="Courier New"/>
-                <a:ea typeface="Courier New"/>
-                <a:cs typeface="Courier New"/>
-                <a:sym typeface="Courier New"/>
-              </a:rPr>
-              <a:t>estradot  →  estradiol gel generic </a:t>
-            </a:r>
-            <a:r>
-              <a:rPr lang="en" sz="1000">
-                <a:highlight>
-                  <a:srgbClr val="FFFFFF"/>
-                </a:highlight>
-                <a:latin typeface="Courier New"/>
-                <a:ea typeface="Courier New"/>
-                <a:cs typeface="Courier New"/>
-                <a:sym typeface="Courier New"/>
-              </a:rPr>
-              <a:t>  [thinking transdermal might be gentler]</a:t>
-            </a:r>
-            <a:endParaRPr sz="1000">
-              <a:highlight>
-                <a:srgbClr val="FFFFFF"/>
-              </a:highlight>
-              <a:latin typeface="Courier New"/>
-              <a:ea typeface="Courier New"/>
-              <a:cs typeface="Courier New"/>
-              <a:sym typeface="Courier New"/>
-            </a:endParaRPr>
-          </a:p>
-          <a:p>
-            <a:pPr indent="0" lvl="0" marL="0" rtl="0" algn="l">
-              <a:lnSpc>
-                <a:spcPct val="130770"/>
-              </a:lnSpc>
-              <a:spcBef>
-                <a:spcPts val="0"/>
-              </a:spcBef>
-              <a:spcAft>
-                <a:spcPts val="0"/>
-              </a:spcAft>
-              <a:buNone/>
-            </a:pPr>
-            <a:r>
-              <a:rPr lang="en" sz="1000">
-                <a:highlight>
-                  <a:srgbClr val="FFFFFF"/>
-                </a:highlight>
-                <a:latin typeface="Courier New"/>
-                <a:ea typeface="Courier New"/>
-                <a:cs typeface="Courier New"/>
-                <a:sym typeface="Courier New"/>
-              </a:rPr>
-              <a:t>    “Switched to estrogen gel thinking transdermal might be gentler.”</a:t>
-            </a:r>
-            <a:endParaRPr sz="1000">
-              <a:highlight>
-                <a:srgbClr val="FFFFFF"/>
-              </a:highlight>
-              <a:latin typeface="Courier New"/>
-              <a:ea typeface="Courier New"/>
-              <a:cs typeface="Courier New"/>
-              <a:sym typeface="Courier New"/>
-            </a:endParaRPr>
-          </a:p>
-          <a:p>
-            <a:pPr indent="0" lvl="0" marL="0" rtl="0" algn="l">
-              <a:lnSpc>
-                <a:spcPct val="130770"/>
-              </a:lnSpc>
-              <a:spcBef>
-                <a:spcPts val="0"/>
-              </a:spcBef>
-              <a:spcAft>
-                <a:spcPts val="0"/>
-              </a:spcAft>
-              <a:buNone/>
-            </a:pPr>
-            <a:r>
-              <a:t/>
-            </a:r>
-            <a:endParaRPr sz="1000">
-              <a:highlight>
-                <a:srgbClr val="FFFFFF"/>
-              </a:highlight>
-              <a:latin typeface="Courier New"/>
-              <a:ea typeface="Courier New"/>
-              <a:cs typeface="Courier New"/>
-              <a:sym typeface="Courier New"/>
-            </a:endParaRPr>
-          </a:p>
-          <a:p>
-            <a:pPr indent="0" lvl="0" marL="0" rtl="0" algn="l">
-              <a:lnSpc>
-                <a:spcPct val="130770"/>
-              </a:lnSpc>
-              <a:spcBef>
-                <a:spcPts val="0"/>
-              </a:spcBef>
-              <a:spcAft>
-                <a:spcPts val="0"/>
-              </a:spcAft>
-              <a:buNone/>
-            </a:pPr>
-            <a:r>
-              <a:rPr lang="en" sz="1000">
-                <a:highlight>
-                  <a:srgbClr val="FFFFFF"/>
-                </a:highlight>
-                <a:latin typeface="Courier New"/>
-                <a:ea typeface="Courier New"/>
-                <a:cs typeface="Courier New"/>
-                <a:sym typeface="Courier New"/>
-              </a:rPr>
-              <a:t> </a:t>
-            </a:r>
-            <a:r>
-              <a:rPr b="1" lang="en" sz="1000">
-                <a:highlight>
-                  <a:srgbClr val="FFFFFF"/>
-                </a:highlight>
-                <a:latin typeface="Courier New"/>
-                <a:ea typeface="Courier New"/>
-                <a:cs typeface="Courier New"/>
-                <a:sym typeface="Courier New"/>
-              </a:rPr>
-              <a:t> prometrium  →  mirena</a:t>
-            </a:r>
-            <a:endParaRPr b="1" sz="1000">
-              <a:highlight>
-                <a:srgbClr val="FFFFFF"/>
-              </a:highlight>
-              <a:latin typeface="Courier New"/>
-              <a:ea typeface="Courier New"/>
-              <a:cs typeface="Courier New"/>
-              <a:sym typeface="Courier New"/>
-            </a:endParaRPr>
-          </a:p>
-          <a:p>
-            <a:pPr indent="0" lvl="0" marL="0" rtl="0" algn="l">
-              <a:lnSpc>
-                <a:spcPct val="130770"/>
-              </a:lnSpc>
-              <a:spcBef>
-                <a:spcPts val="0"/>
-              </a:spcBef>
-              <a:spcAft>
-                <a:spcPts val="0"/>
-              </a:spcAft>
-              <a:buNone/>
-            </a:pPr>
-            <a:r>
-              <a:rPr lang="en" sz="1000">
-                <a:highlight>
-                  <a:srgbClr val="FFFFFF"/>
-                </a:highlight>
-                <a:latin typeface="Courier New"/>
-                <a:ea typeface="Courier New"/>
-                <a:cs typeface="Courier New"/>
-                <a:sym typeface="Courier New"/>
-              </a:rPr>
-              <a:t>    “switching to a Mirena IUD for the progestogen component”</a:t>
-            </a:r>
-            <a:endParaRPr sz="1000">
-              <a:highlight>
-                <a:srgbClr val="FFFFFF"/>
-              </a:highlight>
-              <a:latin typeface="Courier New"/>
-              <a:ea typeface="Courier New"/>
-              <a:cs typeface="Courier New"/>
-              <a:sym typeface="Courier New"/>
-            </a:endParaRPr>
-          </a:p>
-          <a:p>
-            <a:pPr indent="0" lvl="0" marL="0" rtl="0" algn="l">
-              <a:lnSpc>
-                <a:spcPct val="130770"/>
-              </a:lnSpc>
-              <a:spcBef>
-                <a:spcPts val="0"/>
-              </a:spcBef>
-              <a:spcAft>
-                <a:spcPts val="0"/>
-              </a:spcAft>
-              <a:buNone/>
-            </a:pPr>
-            <a:r>
-              <a:t/>
-            </a:r>
-            <a:endParaRPr sz="1000">
-              <a:highlight>
-                <a:srgbClr val="FFFFFF"/>
-              </a:highlight>
-              <a:latin typeface="Courier New"/>
-              <a:ea typeface="Courier New"/>
-              <a:cs typeface="Courier New"/>
-              <a:sym typeface="Courier New"/>
-            </a:endParaRPr>
-          </a:p>
-          <a:p>
-            <a:pPr indent="0" lvl="0" marL="0" rtl="0" algn="l">
-              <a:lnSpc>
-                <a:spcPct val="130770"/>
-              </a:lnSpc>
-              <a:spcBef>
-                <a:spcPts val="0"/>
-              </a:spcBef>
-              <a:spcAft>
-                <a:spcPts val="0"/>
-              </a:spcAft>
-              <a:buNone/>
-            </a:pPr>
-            <a:r>
-              <a:rPr lang="en" sz="1000">
-                <a:highlight>
-                  <a:srgbClr val="FFFFFF"/>
-                </a:highlight>
-                <a:latin typeface="Courier New"/>
-                <a:ea typeface="Courier New"/>
-                <a:cs typeface="Courier New"/>
-                <a:sym typeface="Courier New"/>
-              </a:rPr>
-              <a:t>  </a:t>
-            </a:r>
-            <a:r>
-              <a:rPr b="1" lang="en" sz="1000">
-                <a:highlight>
-                  <a:srgbClr val="FFFFFF"/>
-                </a:highlight>
-                <a:latin typeface="Courier New"/>
-                <a:ea typeface="Courier New"/>
-                <a:cs typeface="Courier New"/>
-                <a:sym typeface="Courier New"/>
-              </a:rPr>
-              <a:t>vagifem  →  intrarosa  </a:t>
-            </a:r>
-            <a:r>
-              <a:rPr lang="en" sz="1000">
-                <a:highlight>
-                  <a:srgbClr val="FFFFFF"/>
-                </a:highlight>
-                <a:latin typeface="Courier New"/>
-                <a:ea typeface="Courier New"/>
-                <a:cs typeface="Courier New"/>
-                <a:sym typeface="Courier New"/>
-              </a:rPr>
-              <a:t> [anecdotally the urgency did settle a bit more]</a:t>
-            </a:r>
-            <a:endParaRPr sz="1000">
-              <a:highlight>
-                <a:srgbClr val="FFFFFF"/>
-              </a:highlight>
-              <a:latin typeface="Courier New"/>
-              <a:ea typeface="Courier New"/>
-              <a:cs typeface="Courier New"/>
-              <a:sym typeface="Courier New"/>
-            </a:endParaRPr>
-          </a:p>
-          <a:p>
-            <a:pPr indent="0" lvl="0" marL="0" rtl="0" algn="l">
-              <a:lnSpc>
-                <a:spcPct val="130770"/>
-              </a:lnSpc>
-              <a:spcBef>
-                <a:spcPts val="0"/>
-              </a:spcBef>
-              <a:spcAft>
-                <a:spcPts val="0"/>
-              </a:spcAft>
-              <a:buNone/>
-            </a:pPr>
-            <a:r>
-              <a:rPr lang="en" sz="1000">
-                <a:highlight>
-                  <a:srgbClr val="FFFFFF"/>
-                </a:highlight>
-                <a:latin typeface="Courier New"/>
-                <a:ea typeface="Courier New"/>
-                <a:cs typeface="Courier New"/>
-                <a:sym typeface="Courier New"/>
-              </a:rPr>
-              <a:t>    “Switched to Intrarosa when my compounding clinic suggested it”</a:t>
-            </a:r>
-            <a:endParaRPr sz="1000">
-              <a:highlight>
-                <a:srgbClr val="FFFFFF"/>
-              </a:highlight>
-              <a:latin typeface="Courier New"/>
-              <a:ea typeface="Courier New"/>
-              <a:cs typeface="Courier New"/>
-              <a:sym typeface="Courier New"/>
-            </a:endParaRPr>
           </a:p>
         </p:txBody>
       </p:sp>
@@ -12512,7 +11610,7 @@
   <p:cSld>
     <p:spTree>
       <p:nvGrpSpPr>
-        <p:cNvPr id="209" name="Shape 209"/>
+        <p:cNvPr id="210" name="Shape 210"/>
         <p:cNvGrpSpPr/>
         <p:nvPr/>
       </p:nvGrpSpPr>
@@ -12526,7 +11624,7 @@
       </p:grpSpPr>
       <p:sp>
         <p:nvSpPr>
-          <p:cNvPr id="210" name="Google Shape;210;p35"/>
+          <p:cNvPr id="211" name="Google Shape;211;p35"/>
           <p:cNvSpPr txBox="1"/>
           <p:nvPr>
             <p:ph type="title"/>
@@ -12558,7 +11656,7 @@
             </a:pPr>
             <a:r>
               <a:rPr lang="en"/>
-              <a:t>User “switch event” - Reason Text Mapping</a:t>
+              <a:t>Sentiment - Member Comments</a:t>
             </a:r>
             <a:endParaRPr/>
           </a:p>
@@ -12566,14 +11664,14 @@
       </p:sp>
       <p:sp>
         <p:nvSpPr>
-          <p:cNvPr id="211" name="Google Shape;211;p35"/>
+          <p:cNvPr id="212" name="Google Shape;212;p35"/>
           <p:cNvSpPr txBox="1"/>
           <p:nvPr/>
         </p:nvSpPr>
         <p:spPr>
           <a:xfrm>
-            <a:off x="62250" y="937850"/>
-            <a:ext cx="9019500" cy="3894300"/>
+            <a:off x="0" y="1062400"/>
+            <a:ext cx="9078000" cy="4032900"/>
           </a:xfrm>
           <a:prstGeom prst="rect">
             <a:avLst/>
@@ -12599,23 +11697,25 @@
               <a:buNone/>
             </a:pPr>
             <a:r>
-              <a:rPr lang="en" sz="1200">
-                <a:solidFill>
-                  <a:srgbClr val="00E0DC"/>
-                </a:solidFill>
+              <a:rPr lang="en" sz="1000">
                 <a:highlight>
-                  <a:srgbClr val="EFEFEF"/>
+                  <a:srgbClr val="FFFFFF"/>
                 </a:highlight>
+                <a:latin typeface="Courier New"/>
+                <a:ea typeface="Courier New"/>
+                <a:cs typeface="Courier New"/>
+                <a:sym typeface="Courier New"/>
               </a:rPr>
-              <a:t># The stated reasons, in members' own words. `reason` is free text with no</a:t>
-            </a:r>
-            <a:endParaRPr sz="1200">
-              <a:solidFill>
-                <a:srgbClr val="00E0DC"/>
-              </a:solidFill>
+              <a:t>=== POSITIVE ===</a:t>
+            </a:r>
+            <a:endParaRPr sz="1000">
               <a:highlight>
-                <a:srgbClr val="EFEFEF"/>
+                <a:srgbClr val="FFFFFF"/>
               </a:highlight>
+              <a:latin typeface="Courier New"/>
+              <a:ea typeface="Courier New"/>
+              <a:cs typeface="Courier New"/>
+              <a:sym typeface="Courier New"/>
             </a:endParaRPr>
           </a:p>
           <a:p>
@@ -12629,23 +11729,25 @@
               <a:buNone/>
             </a:pPr>
             <a:r>
-              <a:rPr lang="en" sz="1200">
-                <a:solidFill>
-                  <a:srgbClr val="00E0DC"/>
-                </a:solidFill>
+              <a:rPr lang="en" sz="1000">
                 <a:highlight>
-                  <a:srgbClr val="EFEFEF"/>
+                  <a:srgbClr val="FFFFFF"/>
                 </a:highlight>
+                <a:latin typeface="Courier New"/>
+                <a:ea typeface="Courier New"/>
+                <a:cs typeface="Courier New"/>
+                <a:sym typeface="Courier New"/>
               </a:rPr>
-              <a:t># canonical form - `adhesion issues` (47) and `adhesive issues` (6) are separate</a:t>
-            </a:r>
-            <a:endParaRPr sz="1200">
-              <a:solidFill>
-                <a:srgbClr val="00E0DC"/>
-              </a:solidFill>
+              <a:t>  · …I'm not going to offer anything except — yes. This is grief and it's real and it deserves</a:t>
+            </a:r>
+            <a:endParaRPr sz="1000">
               <a:highlight>
-                <a:srgbClr val="EFEFEF"/>
+                <a:srgbClr val="FFFFFF"/>
               </a:highlight>
+              <a:latin typeface="Courier New"/>
+              <a:ea typeface="Courier New"/>
+              <a:cs typeface="Courier New"/>
+              <a:sym typeface="Courier New"/>
             </a:endParaRPr>
           </a:p>
           <a:p>
@@ -12659,23 +11761,25 @@
               <a:buNone/>
             </a:pPr>
             <a:r>
-              <a:rPr lang="en" sz="1200">
-                <a:solidFill>
-                  <a:srgbClr val="00E0DC"/>
-                </a:solidFill>
+              <a:rPr lang="en" sz="1000">
                 <a:highlight>
-                  <a:srgbClr val="EFEFEF"/>
+                  <a:srgbClr val="FFFFFF"/>
                 </a:highlight>
+                <a:latin typeface="Courier New"/>
+                <a:ea typeface="Courier New"/>
+                <a:cs typeface="Courier New"/>
+                <a:sym typeface="Courier New"/>
               </a:rPr>
-              <a:t># strings - so it is bucketed by regex rather than grouped. The patterns were</a:t>
-            </a:r>
-            <a:endParaRPr sz="1200">
-              <a:solidFill>
-                <a:srgbClr val="00E0DC"/>
-              </a:solidFill>
+              <a:t>    to be called what it is. I'm on the Climara patch now and it's helped the rage a bit but it</a:t>
+            </a:r>
+            <a:endParaRPr sz="1000">
               <a:highlight>
-                <a:srgbClr val="EFEFEF"/>
+                <a:srgbClr val="FFFFFF"/>
               </a:highlight>
+              <a:latin typeface="Courier New"/>
+              <a:ea typeface="Courier New"/>
+              <a:cs typeface="Courier New"/>
+              <a:sym typeface="Courier New"/>
             </a:endParaRPr>
           </a:p>
           <a:p>
@@ -12689,23 +11793,25 @@
               <a:buNone/>
             </a:pPr>
             <a:r>
-              <a:rPr lang="en" sz="1200">
-                <a:solidFill>
-                  <a:srgbClr val="00E0DC"/>
-                </a:solidFill>
+              <a:rPr lang="en" sz="1000">
                 <a:highlight>
-                  <a:srgbClr val="EFEFEF"/>
+                  <a:srgbClr val="FFFFFF"/>
                 </a:highlight>
+                <a:latin typeface="Courier New"/>
+                <a:ea typeface="Courier New"/>
+                <a:cs typeface="Courier New"/>
+                <a:sym typeface="Courier New"/>
               </a:rPr>
-              <a:t># widened against the actual unmatched values: efficacy is written as "breaking</a:t>
-            </a:r>
-            <a:endParaRPr sz="1200">
-              <a:solidFill>
-                <a:srgbClr val="00E0DC"/>
-              </a:solidFill>
+              <a:t>    hasn't fixed the feeling of being a stranger to myself, so I know that part isn't just…</a:t>
+            </a:r>
+            <a:endParaRPr sz="1000">
               <a:highlight>
-                <a:srgbClr val="EFEFEF"/>
+                <a:srgbClr val="FFFFFF"/>
               </a:highlight>
+              <a:latin typeface="Courier New"/>
+              <a:ea typeface="Courier New"/>
+              <a:cs typeface="Courier New"/>
+              <a:sym typeface="Courier New"/>
             </a:endParaRPr>
           </a:p>
           <a:p>
@@ -12719,23 +11825,48 @@
               <a:buNone/>
             </a:pPr>
             <a:r>
-              <a:rPr lang="en" sz="1200">
-                <a:solidFill>
-                  <a:srgbClr val="00E0DC"/>
-                </a:solidFill>
+              <a:t/>
+            </a:r>
+            <a:endParaRPr sz="1000">
+              <a:highlight>
+                <a:srgbClr val="FFFFFF"/>
+              </a:highlight>
+              <a:latin typeface="Courier New"/>
+              <a:ea typeface="Courier New"/>
+              <a:cs typeface="Courier New"/>
+              <a:sym typeface="Courier New"/>
+            </a:endParaRPr>
+          </a:p>
+          <a:p>
+            <a:pPr indent="0" lvl="0" marL="0" rtl="0" algn="l">
+              <a:spcBef>
+                <a:spcPts val="0"/>
+              </a:spcBef>
+              <a:spcAft>
+                <a:spcPts val="0"/>
+              </a:spcAft>
+              <a:buNone/>
+            </a:pPr>
+            <a:r>
+              <a:rPr lang="en" sz="1000">
                 <a:highlight>
-                  <a:srgbClr val="EFEFEF"/>
+                  <a:srgbClr val="FFFFFF"/>
                 </a:highlight>
+                <a:latin typeface="Courier New"/>
+                <a:ea typeface="Courier New"/>
+                <a:cs typeface="Courier New"/>
+                <a:sym typeface="Courier New"/>
               </a:rPr>
-              <a:t># through", "not responding" and "wasn't resolving", never as "not working".</a:t>
-            </a:r>
-            <a:endParaRPr sz="1200">
-              <a:solidFill>
-                <a:srgbClr val="00E0DC"/>
-              </a:solidFill>
+              <a:t>  · I made exactly this transition about two years ago — Vagifem plus added Climara patch, and</a:t>
+            </a:r>
+            <a:endParaRPr sz="1000">
               <a:highlight>
-                <a:srgbClr val="EFEFEF"/>
+                <a:srgbClr val="FFFFFF"/>
               </a:highlight>
+              <a:latin typeface="Courier New"/>
+              <a:ea typeface="Courier New"/>
+              <a:cs typeface="Courier New"/>
+              <a:sym typeface="Courier New"/>
             </a:endParaRPr>
           </a:p>
           <a:p>
@@ -12749,15 +11880,80 @@
               <a:buNone/>
             </a:pPr>
             <a:r>
+              <a:rPr lang="en" sz="1000">
+                <a:highlight>
+                  <a:srgbClr val="FFFFFF"/>
+                </a:highlight>
+                <a:latin typeface="Courier New"/>
+                <a:ea typeface="Courier New"/>
+                <a:cs typeface="Courier New"/>
+                <a:sym typeface="Courier New"/>
+              </a:rPr>
+              <a:t>    then Prometrium. First month: breast tenderness yes, quite noticeable, lasted roughly six</a:t>
+            </a:r>
+            <a:endParaRPr sz="1000">
+              <a:highlight>
+                <a:srgbClr val="FFFFFF"/>
+              </a:highlight>
+              <a:latin typeface="Courier New"/>
+              <a:ea typeface="Courier New"/>
+              <a:cs typeface="Courier New"/>
+              <a:sym typeface="Courier New"/>
+            </a:endParaRPr>
+          </a:p>
+          <a:p>
+            <a:pPr indent="0" lvl="0" marL="0" rtl="0" algn="l">
+              <a:spcBef>
+                <a:spcPts val="0"/>
+              </a:spcBef>
+              <a:spcAft>
+                <a:spcPts val="0"/>
+              </a:spcAft>
+              <a:buNone/>
+            </a:pPr>
+            <a:r>
+              <a:rPr lang="en" sz="1000">
+                <a:highlight>
+                  <a:srgbClr val="FFFFFF"/>
+                </a:highlight>
+                <a:latin typeface="Courier New"/>
+                <a:ea typeface="Courier New"/>
+                <a:cs typeface="Courier New"/>
+                <a:sym typeface="Courier New"/>
+              </a:rPr>
+              <a:t>    weeks for me. Bloating was a…</a:t>
+            </a:r>
+            <a:endParaRPr sz="1000">
+              <a:highlight>
+                <a:srgbClr val="FFFFFF"/>
+              </a:highlight>
+              <a:latin typeface="Courier New"/>
+              <a:ea typeface="Courier New"/>
+              <a:cs typeface="Courier New"/>
+              <a:sym typeface="Courier New"/>
+            </a:endParaRPr>
+          </a:p>
+          <a:p>
+            <a:pPr indent="0" lvl="0" marL="0" rtl="0" algn="l">
+              <a:spcBef>
+                <a:spcPts val="0"/>
+              </a:spcBef>
+              <a:spcAft>
+                <a:spcPts val="0"/>
+              </a:spcAft>
+              <a:buNone/>
+            </a:pPr>
+            <a:r>
               <a:t/>
             </a:r>
-            <a:endParaRPr sz="1200">
-              <a:solidFill>
-                <a:srgbClr val="00E0DC"/>
-              </a:solidFill>
+            <a:endParaRPr sz="1000">
               <a:highlight>
-                <a:srgbClr val="EFEFEF"/>
+                <a:srgbClr val="FFFFFF"/>
               </a:highlight>
+              <a:latin typeface="Courier New"/>
+              <a:ea typeface="Courier New"/>
+              <a:cs typeface="Courier New"/>
+              <a:sym typeface="Courier New"/>
             </a:endParaRPr>
           </a:p>
           <a:p>
@@ -12771,21 +11967,25 @@
               <a:buNone/>
             </a:pPr>
             <a:r>
-              <a:rPr lang="en" sz="1300"/>
-              <a:t>BUCKETS = </a:t>
-            </a:r>
-            <a:r>
-              <a:rPr lang="en" sz="1300">
-                <a:solidFill>
-                  <a:srgbClr val="CCCCCC"/>
-                </a:solidFill>
+              <a:rPr lang="en" sz="1000">
+                <a:highlight>
+                  <a:srgbClr val="FFFFFF"/>
+                </a:highlight>
+                <a:latin typeface="Courier New"/>
+                <a:ea typeface="Courier New"/>
+                <a:cs typeface="Courier New"/>
+                <a:sym typeface="Courier New"/>
               </a:rPr>
-              <a:t>{</a:t>
-            </a:r>
-            <a:endParaRPr sz="1300">
-              <a:solidFill>
-                <a:srgbClr val="CCCCCC"/>
-              </a:solidFill>
+              <a:t>  · …me. Also did the iron supplementing cause any stomach issues? I'm already anxious about</a:t>
+            </a:r>
+            <a:endParaRPr sz="1000">
+              <a:highlight>
+                <a:srgbClr val="FFFFFF"/>
+              </a:highlight>
+              <a:latin typeface="Courier New"/>
+              <a:ea typeface="Courier New"/>
+              <a:cs typeface="Courier New"/>
+              <a:sym typeface="Courier New"/>
             </a:endParaRPr>
           </a:p>
           <a:p>
@@ -12799,33 +11999,57 @@
               <a:buNone/>
             </a:pPr>
             <a:r>
-              <a:rPr lang="en" sz="1300"/>
-              <a:t>   </a:t>
-            </a:r>
-            <a:r>
-              <a:rPr lang="en" sz="1300">
-                <a:solidFill>
-                  <a:srgbClr val="CC0000"/>
-                </a:solidFill>
+              <a:rPr lang="en" sz="1000">
+                <a:highlight>
+                  <a:srgbClr val="FFFFFF"/>
+                </a:highlight>
+                <a:latin typeface="Courier New"/>
+                <a:ea typeface="Courier New"/>
+                <a:cs typeface="Courier New"/>
+                <a:sym typeface="Courier New"/>
               </a:rPr>
-              <a:t> 'side effects</a:t>
-            </a:r>
-            <a:r>
-              <a:rPr lang="en" sz="1300"/>
-              <a:t>': (</a:t>
-            </a:r>
-            <a:r>
-              <a:rPr lang="en" sz="1300">
-                <a:solidFill>
-                  <a:srgbClr val="CC0000"/>
-                </a:solidFill>
+              <a:t>    adding anything new on top of the Climara. Really glad you found something that works</a:t>
+            </a:r>
+            <a:endParaRPr sz="1000">
+              <a:highlight>
+                <a:srgbClr val="FFFFFF"/>
+              </a:highlight>
+              <a:latin typeface="Courier New"/>
+              <a:ea typeface="Courier New"/>
+              <a:cs typeface="Courier New"/>
+              <a:sym typeface="Courier New"/>
+            </a:endParaRPr>
+          </a:p>
+          <a:p>
+            <a:pPr indent="0" lvl="0" marL="0" rtl="0" algn="l">
+              <a:spcBef>
+                <a:spcPts val="0"/>
+              </a:spcBef>
+              <a:spcAft>
+                <a:spcPts val="0"/>
+              </a:spcAft>
+              <a:buNone/>
+            </a:pPr>
+            <a:r>
+              <a:rPr lang="en" sz="1000">
+                <a:highlight>
+                  <a:srgbClr val="FFFFFF"/>
+                </a:highlight>
+                <a:latin typeface="Courier New"/>
+                <a:ea typeface="Courier New"/>
+                <a:cs typeface="Courier New"/>
+                <a:sym typeface="Courier New"/>
               </a:rPr>
-              <a:t>r'tender|bleed|migraine|headache|nausea|bloat|irritat|rash|mood'</a:t>
-            </a:r>
-            <a:endParaRPr sz="1300">
-              <a:solidFill>
-                <a:srgbClr val="CC0000"/>
-              </a:solidFill>
+              <a:t>    though, 1-2 nights vs 5-6 is massive.</a:t>
+            </a:r>
+            <a:endParaRPr sz="1000">
+              <a:highlight>
+                <a:srgbClr val="FFFFFF"/>
+              </a:highlight>
+              <a:latin typeface="Courier New"/>
+              <a:ea typeface="Courier New"/>
+              <a:cs typeface="Courier New"/>
+              <a:sym typeface="Courier New"/>
             </a:endParaRPr>
           </a:p>
           <a:p>
@@ -12839,18 +12063,49 @@
               <a:buNone/>
             </a:pPr>
             <a:r>
-              <a:rPr lang="en" sz="1300">
-                <a:solidFill>
-                  <a:srgbClr val="CC0000"/>
-                </a:solidFill>
+              <a:t/>
+            </a:r>
+            <a:endParaRPr sz="1000">
+              <a:highlight>
+                <a:srgbClr val="FFFFFF"/>
+              </a:highlight>
+              <a:latin typeface="Courier New"/>
+              <a:ea typeface="Courier New"/>
+              <a:cs typeface="Courier New"/>
+              <a:sym typeface="Courier New"/>
+            </a:endParaRPr>
+          </a:p>
+          <a:p>
+            <a:pPr indent="0" lvl="0" marL="0" rtl="0" algn="l">
+              <a:spcBef>
+                <a:spcPts val="0"/>
+              </a:spcBef>
+              <a:spcAft>
+                <a:spcPts val="0"/>
+              </a:spcAft>
+              <a:buNone/>
+            </a:pPr>
+            <a:r>
+              <a:rPr lang="en" sz="1000">
+                <a:highlight>
+                  <a:srgbClr val="FFFFFF"/>
+                </a:highlight>
+                <a:latin typeface="Courier New"/>
+                <a:ea typeface="Courier New"/>
+                <a:cs typeface="Courier New"/>
+                <a:sym typeface="Courier New"/>
               </a:rPr>
-              <a:t>                     r'|adverse|side effect|ache|hair</a:t>
-            </a:r>
-            <a:r>
-              <a:rPr lang="en" sz="1300"/>
-              <a:t>'),</a:t>
-            </a:r>
-            <a:endParaRPr sz="1300"/>
+              <a:t>=== NEGATIVE ===</a:t>
+            </a:r>
+            <a:endParaRPr sz="1000">
+              <a:highlight>
+                <a:srgbClr val="FFFFFF"/>
+              </a:highlight>
+              <a:latin typeface="Courier New"/>
+              <a:ea typeface="Courier New"/>
+              <a:cs typeface="Courier New"/>
+              <a:sym typeface="Courier New"/>
+            </a:endParaRPr>
           </a:p>
           <a:p>
             <a:pPr indent="0" lvl="0" marL="0" rtl="0" algn="l">
@@ -12863,34 +12118,58 @@
               <a:buNone/>
             </a:pPr>
             <a:r>
-              <a:rPr lang="en" sz="1300"/>
-              <a:t>    </a:t>
-            </a:r>
-            <a:r>
-              <a:rPr lang="en" sz="1300">
-                <a:solidFill>
-                  <a:srgbClr val="CC0000"/>
-                </a:solidFill>
+              <a:rPr lang="en" sz="1000">
+                <a:highlight>
+                  <a:srgbClr val="FFFFFF"/>
+                </a:highlight>
+                <a:latin typeface="Courier New"/>
+                <a:ea typeface="Courier New"/>
+                <a:cs typeface="Courier New"/>
+                <a:sym typeface="Courier New"/>
               </a:rPr>
-              <a:t>'adhesion / it fell off'</a:t>
-            </a:r>
-            <a:r>
-              <a:rPr lang="en" sz="1300"/>
-              <a:t>:</a:t>
-            </a:r>
-            <a:r>
-              <a:rPr lang="en" sz="1300">
-                <a:solidFill>
-                  <a:srgbClr val="CC0000"/>
-                </a:solidFill>
+              <a:t>  · temple hair loss getting worse even on the patch — anyone else?? okay so i've been on the</a:t>
+            </a:r>
+            <a:endParaRPr sz="1000">
+              <a:highlight>
+                <a:srgbClr val="FFFFFF"/>
+              </a:highlight>
+              <a:latin typeface="Courier New"/>
+              <a:ea typeface="Courier New"/>
+              <a:cs typeface="Courier New"/>
+              <a:sym typeface="Courier New"/>
+            </a:endParaRPr>
+          </a:p>
+          <a:p>
+            <a:pPr indent="0" lvl="0" marL="0" rtl="0" algn="l">
+              <a:spcBef>
+                <a:spcPts val="0"/>
+              </a:spcBef>
+              <a:spcAft>
+                <a:spcPts val="0"/>
+              </a:spcAft>
+              <a:buNone/>
+            </a:pPr>
+            <a:r>
+              <a:rPr lang="en" sz="1000">
+                <a:highlight>
+                  <a:srgbClr val="FFFFFF"/>
+                </a:highlight>
+                <a:latin typeface="Courier New"/>
+                <a:ea typeface="Courier New"/>
+                <a:cs typeface="Courier New"/>
+                <a:sym typeface="Courier New"/>
               </a:rPr>
-              <a:t> r'adhes|stick|peel|fall|fell off|came off|applicator'</a:t>
-            </a:r>
-            <a:r>
-              <a:rPr lang="en" sz="1300"/>
-              <a:t>,</a:t>
-            </a:r>
-            <a:endParaRPr sz="1300"/>
+              <a:t>    Climara patch for almost 8 months now and i genuinely thought it would help slow down the</a:t>
+            </a:r>
+            <a:endParaRPr sz="1000">
+              <a:highlight>
+                <a:srgbClr val="FFFFFF"/>
+              </a:highlight>
+              <a:latin typeface="Courier New"/>
+              <a:ea typeface="Courier New"/>
+              <a:cs typeface="Courier New"/>
+              <a:sym typeface="Courier New"/>
+            </a:endParaRPr>
           </a:p>
           <a:p>
             <a:pPr indent="0" lvl="0" marL="0" rtl="0" algn="l">
@@ -12903,33 +12182,80 @@
               <a:buNone/>
             </a:pPr>
             <a:r>
-              <a:rPr lang="en" sz="1300"/>
-              <a:t>   </a:t>
-            </a:r>
-            <a:r>
-              <a:rPr lang="en" sz="1300">
-                <a:solidFill>
-                  <a:srgbClr val="CC0000"/>
-                </a:solidFill>
+              <a:rPr lang="en" sz="1000">
+                <a:highlight>
+                  <a:srgbClr val="FFFFFF"/>
+                </a:highlight>
+                <a:latin typeface="Courier New"/>
+                <a:ea typeface="Courier New"/>
+                <a:cs typeface="Courier New"/>
+                <a:sym typeface="Courier New"/>
               </a:rPr>
-              <a:t> 'dose / absorption / route'</a:t>
-            </a:r>
-            <a:r>
-              <a:rPr lang="en" sz="1300"/>
-              <a:t>: (</a:t>
-            </a:r>
-            <a:r>
-              <a:rPr lang="en" sz="1300">
-                <a:solidFill>
-                  <a:srgbClr val="CC0000"/>
-                </a:solidFill>
+              <a:t>    hair loss at my temples but honestly?? it seems like…</a:t>
+            </a:r>
+            <a:endParaRPr sz="1000">
+              <a:highlight>
+                <a:srgbClr val="FFFFFF"/>
+              </a:highlight>
+              <a:latin typeface="Courier New"/>
+              <a:ea typeface="Courier New"/>
+              <a:cs typeface="Courier New"/>
+              <a:sym typeface="Courier New"/>
+            </a:endParaRPr>
+          </a:p>
+          <a:p>
+            <a:pPr indent="0" lvl="0" marL="0" rtl="0" algn="l">
+              <a:spcBef>
+                <a:spcPts val="0"/>
+              </a:spcBef>
+              <a:spcAft>
+                <a:spcPts val="0"/>
+              </a:spcAft>
+              <a:buNone/>
+            </a:pPr>
+            <a:r>
+              <a:t/>
+            </a:r>
+            <a:endParaRPr sz="1000">
+              <a:highlight>
+                <a:srgbClr val="FFFFFF"/>
+              </a:highlight>
+              <a:latin typeface="Courier New"/>
+              <a:ea typeface="Courier New"/>
+              <a:cs typeface="Courier New"/>
+              <a:sym typeface="Courier New"/>
+            </a:endParaRPr>
+          </a:p>
+          <a:p>
+            <a:pPr indent="0" lvl="0" marL="0" rtl="0" algn="l">
+              <a:spcBef>
+                <a:spcPts val="0"/>
+              </a:spcBef>
+              <a:spcAft>
+                <a:spcPts val="0"/>
+              </a:spcAft>
+              <a:buNone/>
+            </a:pPr>
+            <a:r>
+              <a:rPr lang="en" sz="1000">
+                <a:highlight>
+                  <a:srgbClr val="FFFFFF"/>
+                </a:highlight>
+                <a:latin typeface="Courier New"/>
+                <a:ea typeface="Courier New"/>
+                <a:cs typeface="Courier New"/>
+                <a:sym typeface="Courier New"/>
               </a:rPr>
-              <a:t>r'dose|absor|level|consistenc|strength|titrat|route'</a:t>
-            </a:r>
-            <a:endParaRPr sz="1300">
-              <a:solidFill>
-                <a:srgbClr val="CC0000"/>
-              </a:solidFill>
+              <a:t>  · …exhausting, especially doing detailed design work through daily headaches 💛 I stopped</a:t>
+            </a:r>
+            <a:endParaRPr sz="1000">
+              <a:highlight>
+                <a:srgbClr val="FFFFFF"/>
+              </a:highlight>
+              <a:latin typeface="Courier New"/>
+              <a:ea typeface="Courier New"/>
+              <a:cs typeface="Courier New"/>
+              <a:sym typeface="Courier New"/>
             </a:endParaRPr>
           </a:p>
           <a:p>
@@ -12943,18 +12269,26 @@
               <a:buNone/>
             </a:pPr>
             <a:r>
-              <a:rPr lang="en" sz="1300">
-                <a:solidFill>
-                  <a:srgbClr val="CC0000"/>
-                </a:solidFill>
+              <a:rPr lang="en" sz="1000">
+                <a:highlight>
+                  <a:srgbClr val="FFFFFF"/>
+                </a:highlight>
+                <a:latin typeface="Courier New"/>
+                <a:ea typeface="Courier New"/>
+                <a:cs typeface="Courier New"/>
+                <a:sym typeface="Courier New"/>
               </a:rPr>
-              <a:t>                                  r'|transdermal|systemic|peak|trough|hepatic'</a:t>
-            </a:r>
-            <a:r>
-              <a:rPr lang="en" sz="1300"/>
-              <a:t>),</a:t>
-            </a:r>
-            <a:endParaRPr sz="1300"/>
+              <a:t>    briefly about two years before starting my Climara patch and honestly the muscle aches were</a:t>
+            </a:r>
+            <a:endParaRPr sz="1000">
+              <a:highlight>
+                <a:srgbClr val="FFFFFF"/>
+              </a:highlight>
+              <a:latin typeface="Courier New"/>
+              <a:ea typeface="Courier New"/>
+              <a:cs typeface="Courier New"/>
+              <a:sym typeface="Courier New"/>
+            </a:endParaRPr>
           </a:p>
           <a:p>
             <a:pPr indent="0" lvl="0" marL="0" rtl="0" algn="l">
@@ -12967,34 +12301,58 @@
               <a:buNone/>
             </a:pPr>
             <a:r>
-              <a:rPr lang="en" sz="1300"/>
-              <a:t>   </a:t>
-            </a:r>
-            <a:r>
-              <a:rPr lang="en" sz="1300">
-                <a:solidFill>
-                  <a:srgbClr val="CC0000"/>
-                </a:solidFill>
+              <a:rPr lang="en" sz="1000">
+                <a:highlight>
+                  <a:srgbClr val="FFFFFF"/>
+                </a:highlight>
+                <a:latin typeface="Courier New"/>
+                <a:ea typeface="Courier New"/>
+                <a:cs typeface="Courier New"/>
+                <a:sym typeface="Courier New"/>
               </a:rPr>
-              <a:t> 'clinician advice'</a:t>
-            </a:r>
-            <a:r>
-              <a:rPr lang="en" sz="1300"/>
-              <a:t>: </a:t>
-            </a:r>
-            <a:r>
-              <a:rPr lang="en" sz="1300">
-                <a:solidFill>
-                  <a:srgbClr val="CC0000"/>
-                </a:solidFill>
+              <a:t>    the thing that surprised me most — I didn't even realize HRT had been helping with them</a:t>
+            </a:r>
+            <a:endParaRPr sz="1000">
+              <a:highlight>
+                <a:srgbClr val="FFFFFF"/>
+              </a:highlight>
+              <a:latin typeface="Courier New"/>
+              <a:ea typeface="Courier New"/>
+              <a:cs typeface="Courier New"/>
+              <a:sym typeface="Courier New"/>
+            </a:endParaRPr>
+          </a:p>
+          <a:p>
+            <a:pPr indent="0" lvl="0" marL="0" rtl="0" algn="l">
+              <a:spcBef>
+                <a:spcPts val="0"/>
+              </a:spcBef>
+              <a:spcAft>
+                <a:spcPts val="0"/>
+              </a:spcAft>
+              <a:buNone/>
+            </a:pPr>
+            <a:r>
+              <a:rPr lang="en" sz="1000">
+                <a:highlight>
+                  <a:srgbClr val="FFFFFF"/>
+                </a:highlight>
+                <a:latin typeface="Courier New"/>
+                <a:ea typeface="Courier New"/>
+                <a:cs typeface="Courier New"/>
+                <a:sym typeface="Courier New"/>
               </a:rPr>
-              <a:t>r'doctor|gp|specialist|consultant|provider|nams|advice'</a:t>
-            </a:r>
-            <a:r>
-              <a:rPr lang="en" sz="1300"/>
-              <a:t>,</a:t>
-            </a:r>
-            <a:endParaRPr sz="1300"/>
+              <a:t>    until…</a:t>
+            </a:r>
+            <a:endParaRPr sz="1000">
+              <a:highlight>
+                <a:srgbClr val="FFFFFF"/>
+              </a:highlight>
+              <a:latin typeface="Courier New"/>
+              <a:ea typeface="Courier New"/>
+              <a:cs typeface="Courier New"/>
+              <a:sym typeface="Courier New"/>
+            </a:endParaRPr>
           </a:p>
           <a:p>
             <a:pPr indent="0" lvl="0" marL="0" rtl="0" algn="l">
@@ -13007,166 +12365,84 @@
               <a:buNone/>
             </a:pPr>
             <a:r>
-              <a:rPr lang="en" sz="1300"/>
-              <a:t>   </a:t>
-            </a:r>
-            <a:r>
-              <a:rPr lang="en" sz="1300">
-                <a:solidFill>
-                  <a:srgbClr val="CC0000"/>
-                </a:solidFill>
+              <a:t/>
+            </a:r>
+            <a:endParaRPr sz="1000">
+              <a:highlight>
+                <a:srgbClr val="FFFFFF"/>
+              </a:highlight>
+              <a:latin typeface="Courier New"/>
+              <a:ea typeface="Courier New"/>
+              <a:cs typeface="Courier New"/>
+              <a:sym typeface="Courier New"/>
+            </a:endParaRPr>
+          </a:p>
+          <a:p>
+            <a:pPr indent="0" lvl="0" marL="0" rtl="0" algn="l">
+              <a:spcBef>
+                <a:spcPts val="0"/>
+              </a:spcBef>
+              <a:spcAft>
+                <a:spcPts val="0"/>
+              </a:spcAft>
+              <a:buNone/>
+            </a:pPr>
+            <a:r>
+              <a:rPr lang="en" sz="1000">
+                <a:highlight>
+                  <a:srgbClr val="FFFFFF"/>
+                </a:highlight>
+                <a:latin typeface="Courier New"/>
+                <a:ea typeface="Courier New"/>
+                <a:cs typeface="Courier New"/>
+                <a:sym typeface="Courier New"/>
               </a:rPr>
-              <a:t> 'cost / access</a:t>
-            </a:r>
-            <a:r>
-              <a:rPr lang="en" sz="1300"/>
-              <a:t>': </a:t>
-            </a:r>
-            <a:r>
-              <a:rPr lang="en" sz="1300">
-                <a:solidFill>
-                  <a:srgbClr val="CC0000"/>
-                </a:solidFill>
+              <a:t>  · …good evidence for meibomian gland dysfunction. I'm filing this away because my allergies</a:t>
+            </a:r>
+            <a:endParaRPr sz="1000">
+              <a:highlight>
+                <a:srgbClr val="FFFFFF"/>
+              </a:highlight>
+              <a:latin typeface="Courier New"/>
+              <a:ea typeface="Courier New"/>
+              <a:cs typeface="Courier New"/>
+              <a:sym typeface="Courier New"/>
+            </a:endParaRPr>
+          </a:p>
+          <a:p>
+            <a:pPr indent="0" lvl="0" marL="0" rtl="0" algn="l">
+              <a:lnSpc>
+                <a:spcPct val="130770"/>
+              </a:lnSpc>
+              <a:spcBef>
+                <a:spcPts val="0"/>
+              </a:spcBef>
+              <a:spcAft>
+                <a:spcPts val="0"/>
+              </a:spcAft>
+              <a:buNone/>
+            </a:pPr>
+            <a:r>
+              <a:rPr lang="en" sz="1000">
+                <a:highlight>
+                  <a:srgbClr val="FFFFFF"/>
+                </a:highlight>
+                <a:latin typeface="Courier New"/>
+                <a:ea typeface="Courier New"/>
+                <a:cs typeface="Courier New"/>
+                <a:sym typeface="Courier New"/>
               </a:rPr>
-              <a:t>r'cost|price|insur|cover|afford|supply|shortage</a:t>
-            </a:r>
-            <a:r>
-              <a:rPr lang="en" sz="1300"/>
-              <a:t>',</a:t>
-            </a:r>
-            <a:endParaRPr sz="1300"/>
-          </a:p>
-          <a:p>
-            <a:pPr indent="0" lvl="0" marL="0" rtl="0" algn="l">
-              <a:spcBef>
-                <a:spcPts val="0"/>
-              </a:spcBef>
-              <a:spcAft>
-                <a:spcPts val="0"/>
-              </a:spcAft>
-              <a:buNone/>
-            </a:pPr>
-            <a:r>
-              <a:rPr lang="en" sz="1300"/>
-              <a:t>    </a:t>
-            </a:r>
-            <a:r>
-              <a:rPr lang="en" sz="1300">
-                <a:solidFill>
-                  <a:srgbClr val="CC0000"/>
-                </a:solidFill>
-              </a:rPr>
-              <a:t>'symptoms not controlled'</a:t>
-            </a:r>
-            <a:r>
-              <a:rPr lang="en" sz="1300"/>
-              <a:t>: (</a:t>
-            </a:r>
-            <a:r>
-              <a:rPr lang="en" sz="1300">
-                <a:solidFill>
-                  <a:srgbClr val="CC0000"/>
-                </a:solidFill>
-              </a:rPr>
-              <a:t>r'not work|didn.t work|wasn.t work|no relief|ineffect'</a:t>
-            </a:r>
-            <a:endParaRPr sz="1300">
-              <a:solidFill>
-                <a:srgbClr val="CC0000"/>
-              </a:solidFill>
+              <a:t>    have been flaring since starting the Climara patch and my eyes are part of it.</a:t>
+            </a:r>
+            <a:endParaRPr sz="1000">
+              <a:highlight>
+                <a:srgbClr val="FFFFFF"/>
+              </a:highlight>
+              <a:latin typeface="Courier New"/>
+              <a:ea typeface="Courier New"/>
+              <a:cs typeface="Courier New"/>
+              <a:sym typeface="Courier New"/>
             </a:endParaRPr>
-          </a:p>
-          <a:p>
-            <a:pPr indent="0" lvl="0" marL="0" rtl="0" algn="l">
-              <a:spcBef>
-                <a:spcPts val="0"/>
-              </a:spcBef>
-              <a:spcAft>
-                <a:spcPts val="0"/>
-              </a:spcAft>
-              <a:buNone/>
-            </a:pPr>
-            <a:r>
-              <a:rPr lang="en" sz="1300">
-                <a:solidFill>
-                  <a:srgbClr val="CC0000"/>
-                </a:solidFill>
-              </a:rPr>
-              <a:t>                                r'|stopped work|nothing|breaking through|not respond'</a:t>
-            </a:r>
-            <a:endParaRPr sz="1300">
-              <a:solidFill>
-                <a:srgbClr val="CC0000"/>
-              </a:solidFill>
-            </a:endParaRPr>
-          </a:p>
-          <a:p>
-            <a:pPr indent="0" lvl="0" marL="0" rtl="0" algn="l">
-              <a:spcBef>
-                <a:spcPts val="0"/>
-              </a:spcBef>
-              <a:spcAft>
-                <a:spcPts val="0"/>
-              </a:spcAft>
-              <a:buNone/>
-            </a:pPr>
-            <a:r>
-              <a:rPr lang="en" sz="1300">
-                <a:solidFill>
-                  <a:srgbClr val="CC0000"/>
-                </a:solidFill>
-              </a:rPr>
-              <a:t>                                r'|wasn.t respond|weren.t resolv|wasn.t resolv|got worse'</a:t>
-            </a:r>
-            <a:endParaRPr sz="1300">
-              <a:solidFill>
-                <a:srgbClr val="CC0000"/>
-              </a:solidFill>
-            </a:endParaRPr>
-          </a:p>
-          <a:p>
-            <a:pPr indent="0" lvl="0" marL="0" rtl="0" algn="l">
-              <a:spcBef>
-                <a:spcPts val="0"/>
-              </a:spcBef>
-              <a:spcAft>
-                <a:spcPts val="0"/>
-              </a:spcAft>
-              <a:buNone/>
-            </a:pPr>
-            <a:r>
-              <a:rPr lang="en" sz="1300">
-                <a:solidFill>
-                  <a:srgbClr val="CC0000"/>
-                </a:solidFill>
-              </a:rPr>
-              <a:t>                                r'|unsustainable|wasn.t right'</a:t>
-            </a:r>
-            <a:r>
-              <a:rPr lang="en" sz="1300"/>
-              <a:t>),</a:t>
-            </a:r>
-            <a:endParaRPr sz="1300"/>
-          </a:p>
-          <a:p>
-            <a:pPr indent="0" lvl="0" marL="0" rtl="0" algn="l">
-              <a:spcBef>
-                <a:spcPts val="0"/>
-              </a:spcBef>
-              <a:spcAft>
-                <a:spcPts val="0"/>
-              </a:spcAft>
-              <a:buNone/>
-            </a:pPr>
-            <a:r>
-              <a:rPr lang="en" sz="1300">
-                <a:solidFill>
-                  <a:srgbClr val="B7B7B7"/>
-                </a:solidFill>
-              </a:rPr>
-              <a:t>}</a:t>
-            </a:r>
-            <a:endParaRPr sz="1300"/>
           </a:p>
         </p:txBody>
       </p:sp>
@@ -13183,7 +12459,7 @@
   <p:cSld>
     <p:spTree>
       <p:nvGrpSpPr>
-        <p:cNvPr id="215" name="Shape 215"/>
+        <p:cNvPr id="216" name="Shape 216"/>
         <p:cNvGrpSpPr/>
         <p:nvPr/>
       </p:nvGrpSpPr>
@@ -13197,7 +12473,7 @@
       </p:grpSpPr>
       <p:sp>
         <p:nvSpPr>
-          <p:cNvPr id="216" name="Google Shape;216;p36"/>
+          <p:cNvPr id="217" name="Google Shape;217;p36"/>
           <p:cNvSpPr txBox="1"/>
           <p:nvPr>
             <p:ph type="title"/>
@@ -13205,7 +12481,7 @@
         </p:nvSpPr>
         <p:spPr>
           <a:xfrm>
-            <a:off x="311700" y="137300"/>
+            <a:off x="311700" y="445025"/>
             <a:ext cx="8520600" cy="707400"/>
           </a:xfrm>
           <a:prstGeom prst="rect">
@@ -13229,7 +12505,7 @@
             </a:pPr>
             <a:r>
               <a:rPr lang="en"/>
-              <a:t>Insights and Findings</a:t>
+              <a:t>Switch Events - Member Comments</a:t>
             </a:r>
             <a:endParaRPr/>
           </a:p>
@@ -13237,63 +12513,14 @@
       </p:sp>
       <p:sp>
         <p:nvSpPr>
-          <p:cNvPr id="217" name="Google Shape;217;p36"/>
+          <p:cNvPr id="218" name="Google Shape;218;p36"/>
           <p:cNvSpPr txBox="1"/>
-          <p:nvPr>
-            <p:ph idx="1" type="body"/>
-          </p:nvPr>
+          <p:nvPr/>
         </p:nvSpPr>
         <p:spPr>
           <a:xfrm>
-            <a:off x="311700" y="844700"/>
-            <a:ext cx="8520600" cy="488700"/>
-          </a:xfrm>
-          <a:prstGeom prst="rect">
-            <a:avLst/>
-          </a:prstGeom>
-        </p:spPr>
-        <p:txBody>
-          <a:bodyPr anchorCtr="0" anchor="t" bIns="91425" lIns="91425" spcFirstLastPara="1" rIns="91425" wrap="square" tIns="91425">
-            <a:noAutofit/>
-          </a:bodyPr>
-          <a:lstStyle/>
-          <a:p>
-            <a:pPr indent="-342900" lvl="0" marL="457200" rtl="0" algn="l">
-              <a:spcBef>
-                <a:spcPts val="0"/>
-              </a:spcBef>
-              <a:spcAft>
-                <a:spcPts val="0"/>
-              </a:spcAft>
-              <a:buSzPts val="1800"/>
-              <a:buChar char="●"/>
-            </a:pPr>
-            <a:r>
-              <a:rPr lang="en"/>
-              <a:t>Who is the MHT Menopause Patient Community?</a:t>
-            </a:r>
-            <a:endParaRPr/>
-          </a:p>
-        </p:txBody>
-      </p:sp>
-      <p:pic>
-        <p:nvPicPr>
-          <p:cNvPr id="218" name="Google Shape;218;p36"/>
-          <p:cNvPicPr preferRelativeResize="0"/>
-          <p:nvPr/>
-        </p:nvPicPr>
-        <p:blipFill>
-          <a:blip r:embed="rId3">
-            <a:alphaModFix/>
-          </a:blip>
-          <a:stretch>
-            <a:fillRect/>
-          </a:stretch>
-        </p:blipFill>
-        <p:spPr>
-          <a:xfrm>
-            <a:off x="152400" y="1485800"/>
-            <a:ext cx="8839197" cy="3029027"/>
+            <a:off x="0" y="1062400"/>
+            <a:ext cx="9078000" cy="3961800"/>
           </a:xfrm>
           <a:prstGeom prst="rect">
             <a:avLst/>
@@ -13303,7 +12530,697 @@
             <a:noFill/>
           </a:ln>
         </p:spPr>
-      </p:pic>
+        <p:txBody>
+          <a:bodyPr anchorCtr="0" anchor="t" bIns="91425" lIns="91425" spcFirstLastPara="1" rIns="91425" wrap="square" tIns="91425">
+            <a:spAutoFit/>
+          </a:bodyPr>
+          <a:lstStyle/>
+          <a:p>
+            <a:pPr indent="0" lvl="0" marL="0" rtl="0" algn="l">
+              <a:lnSpc>
+                <a:spcPct val="130770"/>
+              </a:lnSpc>
+              <a:spcBef>
+                <a:spcPts val="0"/>
+              </a:spcBef>
+              <a:spcAft>
+                <a:spcPts val="0"/>
+              </a:spcAft>
+              <a:buNone/>
+            </a:pPr>
+            <a:r>
+              <a:rPr lang="en" sz="1000">
+                <a:highlight>
+                  <a:srgbClr val="FFFFFF"/>
+                </a:highlight>
+                <a:latin typeface="Courier New"/>
+                <a:ea typeface="Courier New"/>
+                <a:cs typeface="Courier New"/>
+                <a:sym typeface="Courier New"/>
+              </a:rPr>
+              <a:t>22 of 338 switch events met the selection criteria; showing 5</a:t>
+            </a:r>
+            <a:endParaRPr sz="1000">
+              <a:highlight>
+                <a:srgbClr val="FFFFFF"/>
+              </a:highlight>
+              <a:latin typeface="Courier New"/>
+              <a:ea typeface="Courier New"/>
+              <a:cs typeface="Courier New"/>
+              <a:sym typeface="Courier New"/>
+            </a:endParaRPr>
+          </a:p>
+          <a:p>
+            <a:pPr indent="0" lvl="0" marL="0" rtl="0" algn="l">
+              <a:lnSpc>
+                <a:spcPct val="130770"/>
+              </a:lnSpc>
+              <a:spcBef>
+                <a:spcPts val="0"/>
+              </a:spcBef>
+              <a:spcAft>
+                <a:spcPts val="0"/>
+              </a:spcAft>
+              <a:buNone/>
+            </a:pPr>
+            <a:r>
+              <a:t/>
+            </a:r>
+            <a:endParaRPr sz="1000">
+              <a:highlight>
+                <a:srgbClr val="FFFFFF"/>
+              </a:highlight>
+              <a:latin typeface="Courier New"/>
+              <a:ea typeface="Courier New"/>
+              <a:cs typeface="Courier New"/>
+              <a:sym typeface="Courier New"/>
+            </a:endParaRPr>
+          </a:p>
+          <a:p>
+            <a:pPr indent="0" lvl="0" marL="0" rtl="0" algn="l">
+              <a:lnSpc>
+                <a:spcPct val="130770"/>
+              </a:lnSpc>
+              <a:spcBef>
+                <a:spcPts val="0"/>
+              </a:spcBef>
+              <a:spcAft>
+                <a:spcPts val="0"/>
+              </a:spcAft>
+              <a:buNone/>
+            </a:pPr>
+            <a:r>
+              <a:rPr lang="en" sz="1000">
+                <a:highlight>
+                  <a:srgbClr val="FFFFFF"/>
+                </a:highlight>
+                <a:latin typeface="Courier New"/>
+                <a:ea typeface="Courier New"/>
+                <a:cs typeface="Courier New"/>
+                <a:sym typeface="Courier New"/>
+              </a:rPr>
+              <a:t>SELECTION CRITERIA: Must carry a first-person movement construction, both endpoints must resolve to named products, and the surrounding text must not attribute the move to someone else</a:t>
+            </a:r>
+            <a:endParaRPr sz="1000">
+              <a:highlight>
+                <a:srgbClr val="FFFFFF"/>
+              </a:highlight>
+              <a:latin typeface="Courier New"/>
+              <a:ea typeface="Courier New"/>
+              <a:cs typeface="Courier New"/>
+              <a:sym typeface="Courier New"/>
+            </a:endParaRPr>
+          </a:p>
+          <a:p>
+            <a:pPr indent="0" lvl="0" marL="0" rtl="0" algn="l">
+              <a:lnSpc>
+                <a:spcPct val="130770"/>
+              </a:lnSpc>
+              <a:spcBef>
+                <a:spcPts val="0"/>
+              </a:spcBef>
+              <a:spcAft>
+                <a:spcPts val="0"/>
+              </a:spcAft>
+              <a:buNone/>
+            </a:pPr>
+            <a:r>
+              <a:t/>
+            </a:r>
+            <a:endParaRPr sz="1000">
+              <a:highlight>
+                <a:srgbClr val="FFFFFF"/>
+              </a:highlight>
+              <a:latin typeface="Courier New"/>
+              <a:ea typeface="Courier New"/>
+              <a:cs typeface="Courier New"/>
+              <a:sym typeface="Courier New"/>
+            </a:endParaRPr>
+          </a:p>
+          <a:p>
+            <a:pPr indent="0" lvl="0" marL="0" rtl="0" algn="l">
+              <a:lnSpc>
+                <a:spcPct val="130770"/>
+              </a:lnSpc>
+              <a:spcBef>
+                <a:spcPts val="0"/>
+              </a:spcBef>
+              <a:spcAft>
+                <a:spcPts val="0"/>
+              </a:spcAft>
+              <a:buNone/>
+            </a:pPr>
+            <a:r>
+              <a:rPr lang="en" sz="1000">
+                <a:highlight>
+                  <a:srgbClr val="FFFFFF"/>
+                </a:highlight>
+                <a:latin typeface="Courier New"/>
+                <a:ea typeface="Courier New"/>
+                <a:cs typeface="Courier New"/>
+                <a:sym typeface="Courier New"/>
+              </a:rPr>
+              <a:t>  </a:t>
+            </a:r>
+            <a:r>
+              <a:rPr b="1" lang="en" sz="1000">
+                <a:highlight>
+                  <a:srgbClr val="FFFFFF"/>
+                </a:highlight>
+                <a:latin typeface="Courier New"/>
+                <a:ea typeface="Courier New"/>
+                <a:cs typeface="Courier New"/>
+                <a:sym typeface="Courier New"/>
+              </a:rPr>
+              <a:t>vagifem  →  imvexxy  </a:t>
+            </a:r>
+            <a:r>
+              <a:rPr lang="en" sz="1000">
+                <a:highlight>
+                  <a:srgbClr val="FFFFFF"/>
+                </a:highlight>
+                <a:latin typeface="Courier New"/>
+                <a:ea typeface="Courier New"/>
+                <a:cs typeface="Courier New"/>
+                <a:sym typeface="Courier New"/>
+              </a:rPr>
+              <a:t> [applicator faff]</a:t>
+            </a:r>
+            <a:endParaRPr sz="1000">
+              <a:highlight>
+                <a:srgbClr val="FFFFFF"/>
+              </a:highlight>
+              <a:latin typeface="Courier New"/>
+              <a:ea typeface="Courier New"/>
+              <a:cs typeface="Courier New"/>
+              <a:sym typeface="Courier New"/>
+            </a:endParaRPr>
+          </a:p>
+          <a:p>
+            <a:pPr indent="0" lvl="0" marL="0" rtl="0" algn="l">
+              <a:lnSpc>
+                <a:spcPct val="130770"/>
+              </a:lnSpc>
+              <a:spcBef>
+                <a:spcPts val="0"/>
+              </a:spcBef>
+              <a:spcAft>
+                <a:spcPts val="0"/>
+              </a:spcAft>
+              <a:buNone/>
+            </a:pPr>
+            <a:r>
+              <a:rPr lang="en" sz="1000">
+                <a:highlight>
+                  <a:srgbClr val="FFFFFF"/>
+                </a:highlight>
+                <a:latin typeface="Courier New"/>
+                <a:ea typeface="Courier New"/>
+                <a:cs typeface="Courier New"/>
+                <a:sym typeface="Courier New"/>
+              </a:rPr>
+              <a:t>    “Switched from Vagifem to Imvexxy a while back mostly because of applicator faff tbh”</a:t>
+            </a:r>
+            <a:endParaRPr sz="1000">
+              <a:highlight>
+                <a:srgbClr val="FFFFFF"/>
+              </a:highlight>
+              <a:latin typeface="Courier New"/>
+              <a:ea typeface="Courier New"/>
+              <a:cs typeface="Courier New"/>
+              <a:sym typeface="Courier New"/>
+            </a:endParaRPr>
+          </a:p>
+          <a:p>
+            <a:pPr indent="0" lvl="0" marL="0" rtl="0" algn="l">
+              <a:lnSpc>
+                <a:spcPct val="130770"/>
+              </a:lnSpc>
+              <a:spcBef>
+                <a:spcPts val="0"/>
+              </a:spcBef>
+              <a:spcAft>
+                <a:spcPts val="0"/>
+              </a:spcAft>
+              <a:buNone/>
+            </a:pPr>
+            <a:r>
+              <a:t/>
+            </a:r>
+            <a:endParaRPr sz="1000">
+              <a:highlight>
+                <a:srgbClr val="FFFFFF"/>
+              </a:highlight>
+              <a:latin typeface="Courier New"/>
+              <a:ea typeface="Courier New"/>
+              <a:cs typeface="Courier New"/>
+              <a:sym typeface="Courier New"/>
+            </a:endParaRPr>
+          </a:p>
+          <a:p>
+            <a:pPr indent="0" lvl="0" marL="0" rtl="0" algn="l">
+              <a:lnSpc>
+                <a:spcPct val="130770"/>
+              </a:lnSpc>
+              <a:spcBef>
+                <a:spcPts val="0"/>
+              </a:spcBef>
+              <a:spcAft>
+                <a:spcPts val="0"/>
+              </a:spcAft>
+              <a:buNone/>
+            </a:pPr>
+            <a:r>
+              <a:rPr lang="en" sz="1000">
+                <a:highlight>
+                  <a:srgbClr val="FFFFFF"/>
+                </a:highlight>
+                <a:latin typeface="Courier New"/>
+                <a:ea typeface="Courier New"/>
+                <a:cs typeface="Courier New"/>
+                <a:sym typeface="Courier New"/>
+              </a:rPr>
+              <a:t>  </a:t>
+            </a:r>
+            <a:r>
+              <a:rPr b="1" lang="en" sz="1000">
+                <a:highlight>
+                  <a:srgbClr val="FFFFFF"/>
+                </a:highlight>
+                <a:latin typeface="Courier New"/>
+                <a:ea typeface="Courier New"/>
+                <a:cs typeface="Courier New"/>
+                <a:sym typeface="Courier New"/>
+              </a:rPr>
+              <a:t>activelle  →  climara  </a:t>
+            </a:r>
+            <a:r>
+              <a:rPr lang="en" sz="1000">
+                <a:highlight>
+                  <a:srgbClr val="FFFFFF"/>
+                </a:highlight>
+                <a:latin typeface="Courier New"/>
+                <a:ea typeface="Courier New"/>
+                <a:cs typeface="Courier New"/>
+                <a:sym typeface="Courier New"/>
+              </a:rPr>
+              <a:t> [reduce first-pass hepatic effects]</a:t>
+            </a:r>
+            <a:endParaRPr sz="1000">
+              <a:highlight>
+                <a:srgbClr val="FFFFFF"/>
+              </a:highlight>
+              <a:latin typeface="Courier New"/>
+              <a:ea typeface="Courier New"/>
+              <a:cs typeface="Courier New"/>
+              <a:sym typeface="Courier New"/>
+            </a:endParaRPr>
+          </a:p>
+          <a:p>
+            <a:pPr indent="0" lvl="0" marL="0" rtl="0" algn="l">
+              <a:lnSpc>
+                <a:spcPct val="130770"/>
+              </a:lnSpc>
+              <a:spcBef>
+                <a:spcPts val="0"/>
+              </a:spcBef>
+              <a:spcAft>
+                <a:spcPts val="0"/>
+              </a:spcAft>
+              <a:buNone/>
+            </a:pPr>
+            <a:r>
+              <a:rPr lang="en" sz="1000">
+                <a:highlight>
+                  <a:srgbClr val="FFFFFF"/>
+                </a:highlight>
+                <a:latin typeface="Courier New"/>
+                <a:ea typeface="Courier New"/>
+                <a:cs typeface="Courier New"/>
+                <a:sym typeface="Courier New"/>
+              </a:rPr>
+              <a:t>    “switching from oral to transdermal estrogen”</a:t>
+            </a:r>
+            <a:endParaRPr sz="1000">
+              <a:highlight>
+                <a:srgbClr val="FFFFFF"/>
+              </a:highlight>
+              <a:latin typeface="Courier New"/>
+              <a:ea typeface="Courier New"/>
+              <a:cs typeface="Courier New"/>
+              <a:sym typeface="Courier New"/>
+            </a:endParaRPr>
+          </a:p>
+          <a:p>
+            <a:pPr indent="0" lvl="0" marL="0" rtl="0" algn="l">
+              <a:lnSpc>
+                <a:spcPct val="130770"/>
+              </a:lnSpc>
+              <a:spcBef>
+                <a:spcPts val="0"/>
+              </a:spcBef>
+              <a:spcAft>
+                <a:spcPts val="0"/>
+              </a:spcAft>
+              <a:buNone/>
+            </a:pPr>
+            <a:r>
+              <a:t/>
+            </a:r>
+            <a:endParaRPr sz="1000">
+              <a:highlight>
+                <a:srgbClr val="FFFFFF"/>
+              </a:highlight>
+              <a:latin typeface="Courier New"/>
+              <a:ea typeface="Courier New"/>
+              <a:cs typeface="Courier New"/>
+              <a:sym typeface="Courier New"/>
+            </a:endParaRPr>
+          </a:p>
+          <a:p>
+            <a:pPr indent="0" lvl="0" marL="0" rtl="0" algn="l">
+              <a:lnSpc>
+                <a:spcPct val="130770"/>
+              </a:lnSpc>
+              <a:spcBef>
+                <a:spcPts val="0"/>
+              </a:spcBef>
+              <a:spcAft>
+                <a:spcPts val="0"/>
+              </a:spcAft>
+              <a:buNone/>
+            </a:pPr>
+            <a:r>
+              <a:rPr lang="en" sz="1000">
+                <a:highlight>
+                  <a:srgbClr val="FFFFFF"/>
+                </a:highlight>
+                <a:latin typeface="Courier New"/>
+                <a:ea typeface="Courier New"/>
+                <a:cs typeface="Courier New"/>
+                <a:sym typeface="Courier New"/>
+              </a:rPr>
+              <a:t>  </a:t>
+            </a:r>
+            <a:r>
+              <a:rPr b="1" lang="en" sz="1000">
+                <a:highlight>
+                  <a:srgbClr val="FFFFFF"/>
+                </a:highlight>
+                <a:latin typeface="Courier New"/>
+                <a:ea typeface="Courier New"/>
+                <a:cs typeface="Courier New"/>
+                <a:sym typeface="Courier New"/>
+              </a:rPr>
+              <a:t>estradot  →  estradiol gel generic </a:t>
+            </a:r>
+            <a:r>
+              <a:rPr lang="en" sz="1000">
+                <a:highlight>
+                  <a:srgbClr val="FFFFFF"/>
+                </a:highlight>
+                <a:latin typeface="Courier New"/>
+                <a:ea typeface="Courier New"/>
+                <a:cs typeface="Courier New"/>
+                <a:sym typeface="Courier New"/>
+              </a:rPr>
+              <a:t>  [thinking transdermal might be gentler]</a:t>
+            </a:r>
+            <a:endParaRPr sz="1000">
+              <a:highlight>
+                <a:srgbClr val="FFFFFF"/>
+              </a:highlight>
+              <a:latin typeface="Courier New"/>
+              <a:ea typeface="Courier New"/>
+              <a:cs typeface="Courier New"/>
+              <a:sym typeface="Courier New"/>
+            </a:endParaRPr>
+          </a:p>
+          <a:p>
+            <a:pPr indent="0" lvl="0" marL="0" rtl="0" algn="l">
+              <a:lnSpc>
+                <a:spcPct val="130770"/>
+              </a:lnSpc>
+              <a:spcBef>
+                <a:spcPts val="0"/>
+              </a:spcBef>
+              <a:spcAft>
+                <a:spcPts val="0"/>
+              </a:spcAft>
+              <a:buNone/>
+            </a:pPr>
+            <a:r>
+              <a:rPr lang="en" sz="1000">
+                <a:highlight>
+                  <a:srgbClr val="FFFFFF"/>
+                </a:highlight>
+                <a:latin typeface="Courier New"/>
+                <a:ea typeface="Courier New"/>
+                <a:cs typeface="Courier New"/>
+                <a:sym typeface="Courier New"/>
+              </a:rPr>
+              <a:t>    “Switched to estrogen gel thinking transdermal might be gentler.”</a:t>
+            </a:r>
+            <a:endParaRPr sz="1000">
+              <a:highlight>
+                <a:srgbClr val="FFFFFF"/>
+              </a:highlight>
+              <a:latin typeface="Courier New"/>
+              <a:ea typeface="Courier New"/>
+              <a:cs typeface="Courier New"/>
+              <a:sym typeface="Courier New"/>
+            </a:endParaRPr>
+          </a:p>
+          <a:p>
+            <a:pPr indent="0" lvl="0" marL="0" rtl="0" algn="l">
+              <a:lnSpc>
+                <a:spcPct val="130770"/>
+              </a:lnSpc>
+              <a:spcBef>
+                <a:spcPts val="0"/>
+              </a:spcBef>
+              <a:spcAft>
+                <a:spcPts val="0"/>
+              </a:spcAft>
+              <a:buNone/>
+            </a:pPr>
+            <a:r>
+              <a:t/>
+            </a:r>
+            <a:endParaRPr sz="1000">
+              <a:highlight>
+                <a:srgbClr val="FFFFFF"/>
+              </a:highlight>
+              <a:latin typeface="Courier New"/>
+              <a:ea typeface="Courier New"/>
+              <a:cs typeface="Courier New"/>
+              <a:sym typeface="Courier New"/>
+            </a:endParaRPr>
+          </a:p>
+          <a:p>
+            <a:pPr indent="0" lvl="0" marL="0" rtl="0" algn="l">
+              <a:lnSpc>
+                <a:spcPct val="130770"/>
+              </a:lnSpc>
+              <a:spcBef>
+                <a:spcPts val="0"/>
+              </a:spcBef>
+              <a:spcAft>
+                <a:spcPts val="0"/>
+              </a:spcAft>
+              <a:buNone/>
+            </a:pPr>
+            <a:r>
+              <a:rPr lang="en" sz="1000">
+                <a:highlight>
+                  <a:srgbClr val="FFFFFF"/>
+                </a:highlight>
+                <a:latin typeface="Courier New"/>
+                <a:ea typeface="Courier New"/>
+                <a:cs typeface="Courier New"/>
+                <a:sym typeface="Courier New"/>
+              </a:rPr>
+              <a:t> </a:t>
+            </a:r>
+            <a:r>
+              <a:rPr b="1" lang="en" sz="1000">
+                <a:highlight>
+                  <a:srgbClr val="FFFFFF"/>
+                </a:highlight>
+                <a:latin typeface="Courier New"/>
+                <a:ea typeface="Courier New"/>
+                <a:cs typeface="Courier New"/>
+                <a:sym typeface="Courier New"/>
+              </a:rPr>
+              <a:t> prometrium  →  mirena</a:t>
+            </a:r>
+            <a:endParaRPr b="1" sz="1000">
+              <a:highlight>
+                <a:srgbClr val="FFFFFF"/>
+              </a:highlight>
+              <a:latin typeface="Courier New"/>
+              <a:ea typeface="Courier New"/>
+              <a:cs typeface="Courier New"/>
+              <a:sym typeface="Courier New"/>
+            </a:endParaRPr>
+          </a:p>
+          <a:p>
+            <a:pPr indent="0" lvl="0" marL="0" rtl="0" algn="l">
+              <a:lnSpc>
+                <a:spcPct val="130770"/>
+              </a:lnSpc>
+              <a:spcBef>
+                <a:spcPts val="0"/>
+              </a:spcBef>
+              <a:spcAft>
+                <a:spcPts val="0"/>
+              </a:spcAft>
+              <a:buNone/>
+            </a:pPr>
+            <a:r>
+              <a:rPr lang="en" sz="1000">
+                <a:highlight>
+                  <a:srgbClr val="FFFFFF"/>
+                </a:highlight>
+                <a:latin typeface="Courier New"/>
+                <a:ea typeface="Courier New"/>
+                <a:cs typeface="Courier New"/>
+                <a:sym typeface="Courier New"/>
+              </a:rPr>
+              <a:t>    “switching to a Mirena IUD for the progestogen component”</a:t>
+            </a:r>
+            <a:endParaRPr sz="1000">
+              <a:highlight>
+                <a:srgbClr val="FFFFFF"/>
+              </a:highlight>
+              <a:latin typeface="Courier New"/>
+              <a:ea typeface="Courier New"/>
+              <a:cs typeface="Courier New"/>
+              <a:sym typeface="Courier New"/>
+            </a:endParaRPr>
+          </a:p>
+          <a:p>
+            <a:pPr indent="0" lvl="0" marL="0" rtl="0" algn="l">
+              <a:lnSpc>
+                <a:spcPct val="130770"/>
+              </a:lnSpc>
+              <a:spcBef>
+                <a:spcPts val="0"/>
+              </a:spcBef>
+              <a:spcAft>
+                <a:spcPts val="0"/>
+              </a:spcAft>
+              <a:buNone/>
+            </a:pPr>
+            <a:r>
+              <a:t/>
+            </a:r>
+            <a:endParaRPr sz="1000">
+              <a:highlight>
+                <a:srgbClr val="FFFFFF"/>
+              </a:highlight>
+              <a:latin typeface="Courier New"/>
+              <a:ea typeface="Courier New"/>
+              <a:cs typeface="Courier New"/>
+              <a:sym typeface="Courier New"/>
+            </a:endParaRPr>
+          </a:p>
+          <a:p>
+            <a:pPr indent="0" lvl="0" marL="0" rtl="0" algn="l">
+              <a:lnSpc>
+                <a:spcPct val="130770"/>
+              </a:lnSpc>
+              <a:spcBef>
+                <a:spcPts val="0"/>
+              </a:spcBef>
+              <a:spcAft>
+                <a:spcPts val="0"/>
+              </a:spcAft>
+              <a:buNone/>
+            </a:pPr>
+            <a:r>
+              <a:rPr lang="en" sz="1000">
+                <a:highlight>
+                  <a:srgbClr val="FFFFFF"/>
+                </a:highlight>
+                <a:latin typeface="Courier New"/>
+                <a:ea typeface="Courier New"/>
+                <a:cs typeface="Courier New"/>
+                <a:sym typeface="Courier New"/>
+              </a:rPr>
+              <a:t>  </a:t>
+            </a:r>
+            <a:r>
+              <a:rPr b="1" lang="en" sz="1000">
+                <a:highlight>
+                  <a:srgbClr val="FFFFFF"/>
+                </a:highlight>
+                <a:latin typeface="Courier New"/>
+                <a:ea typeface="Courier New"/>
+                <a:cs typeface="Courier New"/>
+                <a:sym typeface="Courier New"/>
+              </a:rPr>
+              <a:t>vagifem  →  intrarosa  </a:t>
+            </a:r>
+            <a:r>
+              <a:rPr lang="en" sz="1000">
+                <a:highlight>
+                  <a:srgbClr val="FFFFFF"/>
+                </a:highlight>
+                <a:latin typeface="Courier New"/>
+                <a:ea typeface="Courier New"/>
+                <a:cs typeface="Courier New"/>
+                <a:sym typeface="Courier New"/>
+              </a:rPr>
+              <a:t> [anecdotally the urgency did settle a bit more]</a:t>
+            </a:r>
+            <a:endParaRPr sz="1000">
+              <a:highlight>
+                <a:srgbClr val="FFFFFF"/>
+              </a:highlight>
+              <a:latin typeface="Courier New"/>
+              <a:ea typeface="Courier New"/>
+              <a:cs typeface="Courier New"/>
+              <a:sym typeface="Courier New"/>
+            </a:endParaRPr>
+          </a:p>
+          <a:p>
+            <a:pPr indent="0" lvl="0" marL="0" rtl="0" algn="l">
+              <a:lnSpc>
+                <a:spcPct val="130770"/>
+              </a:lnSpc>
+              <a:spcBef>
+                <a:spcPts val="0"/>
+              </a:spcBef>
+              <a:spcAft>
+                <a:spcPts val="0"/>
+              </a:spcAft>
+              <a:buNone/>
+            </a:pPr>
+            <a:r>
+              <a:rPr lang="en" sz="1000">
+                <a:highlight>
+                  <a:srgbClr val="FFFFFF"/>
+                </a:highlight>
+                <a:latin typeface="Courier New"/>
+                <a:ea typeface="Courier New"/>
+                <a:cs typeface="Courier New"/>
+                <a:sym typeface="Courier New"/>
+              </a:rPr>
+              <a:t>    “Switched to Intrarosa when my compounding clinic suggested it”</a:t>
+            </a:r>
+            <a:endParaRPr sz="1000">
+              <a:highlight>
+                <a:srgbClr val="FFFFFF"/>
+              </a:highlight>
+              <a:latin typeface="Courier New"/>
+              <a:ea typeface="Courier New"/>
+              <a:cs typeface="Courier New"/>
+              <a:sym typeface="Courier New"/>
+            </a:endParaRPr>
+          </a:p>
+        </p:txBody>
+      </p:sp>
     </p:spTree>
   </p:cSld>
   <p:clrMapOvr>
@@ -13339,7 +13256,7 @@
         </p:nvSpPr>
         <p:spPr>
           <a:xfrm>
-            <a:off x="311700" y="137300"/>
+            <a:off x="311700" y="445025"/>
             <a:ext cx="8520600" cy="707400"/>
           </a:xfrm>
           <a:prstGeom prst="rect">
@@ -13363,7 +13280,7 @@
             </a:pPr>
             <a:r>
               <a:rPr lang="en"/>
-              <a:t>Insights and Findings</a:t>
+              <a:t>User “switch event” - Reason Text Mapping</a:t>
             </a:r>
             <a:endParaRPr/>
           </a:p>
@@ -13373,61 +13290,12 @@
         <p:nvSpPr>
           <p:cNvPr id="224" name="Google Shape;224;p37"/>
           <p:cNvSpPr txBox="1"/>
-          <p:nvPr>
-            <p:ph idx="1" type="body"/>
-          </p:nvPr>
+          <p:nvPr/>
         </p:nvSpPr>
         <p:spPr>
           <a:xfrm>
-            <a:off x="311700" y="844700"/>
-            <a:ext cx="8520600" cy="488700"/>
-          </a:xfrm>
-          <a:prstGeom prst="rect">
-            <a:avLst/>
-          </a:prstGeom>
-        </p:spPr>
-        <p:txBody>
-          <a:bodyPr anchorCtr="0" anchor="t" bIns="91425" lIns="91425" spcFirstLastPara="1" rIns="91425" wrap="square" tIns="91425">
-            <a:noAutofit/>
-          </a:bodyPr>
-          <a:lstStyle/>
-          <a:p>
-            <a:pPr indent="-342900" lvl="0" marL="457200" rtl="0" algn="l">
-              <a:spcBef>
-                <a:spcPts val="0"/>
-              </a:spcBef>
-              <a:spcAft>
-                <a:spcPts val="0"/>
-              </a:spcAft>
-              <a:buSzPts val="1800"/>
-              <a:buChar char="●"/>
-            </a:pPr>
-            <a:r>
-              <a:rPr lang="en"/>
-              <a:t>Who is the MHT Menopause Patient Community?</a:t>
-            </a:r>
-            <a:endParaRPr/>
-          </a:p>
-        </p:txBody>
-      </p:sp>
-      <p:pic>
-        <p:nvPicPr>
-          <p:cNvPr id="225" name="Google Shape;225;p37"/>
-          <p:cNvPicPr preferRelativeResize="0"/>
-          <p:nvPr/>
-        </p:nvPicPr>
-        <p:blipFill>
-          <a:blip r:embed="rId3">
-            <a:alphaModFix/>
-          </a:blip>
-          <a:stretch>
-            <a:fillRect/>
-          </a:stretch>
-        </p:blipFill>
-        <p:spPr>
-          <a:xfrm>
-            <a:off x="152400" y="1485800"/>
-            <a:ext cx="8839200" cy="2952293"/>
+            <a:off x="62250" y="937850"/>
+            <a:ext cx="9019500" cy="3894300"/>
           </a:xfrm>
           <a:prstGeom prst="rect">
             <a:avLst/>
@@ -13437,7 +13305,593 @@
             <a:noFill/>
           </a:ln>
         </p:spPr>
-      </p:pic>
+        <p:txBody>
+          <a:bodyPr anchorCtr="0" anchor="t" bIns="91425" lIns="91425" spcFirstLastPara="1" rIns="91425" wrap="square" tIns="91425">
+            <a:spAutoFit/>
+          </a:bodyPr>
+          <a:lstStyle/>
+          <a:p>
+            <a:pPr indent="0" lvl="0" marL="0" rtl="0" algn="l">
+              <a:spcBef>
+                <a:spcPts val="0"/>
+              </a:spcBef>
+              <a:spcAft>
+                <a:spcPts val="0"/>
+              </a:spcAft>
+              <a:buNone/>
+            </a:pPr>
+            <a:r>
+              <a:rPr lang="en" sz="1200">
+                <a:solidFill>
+                  <a:srgbClr val="00E0DC"/>
+                </a:solidFill>
+                <a:highlight>
+                  <a:srgbClr val="EFEFEF"/>
+                </a:highlight>
+              </a:rPr>
+              <a:t># The stated reasons, in members' own words. `reason` is free text with no</a:t>
+            </a:r>
+            <a:endParaRPr sz="1200">
+              <a:solidFill>
+                <a:srgbClr val="00E0DC"/>
+              </a:solidFill>
+              <a:highlight>
+                <a:srgbClr val="EFEFEF"/>
+              </a:highlight>
+            </a:endParaRPr>
+          </a:p>
+          <a:p>
+            <a:pPr indent="0" lvl="0" marL="0" rtl="0" algn="l">
+              <a:spcBef>
+                <a:spcPts val="0"/>
+              </a:spcBef>
+              <a:spcAft>
+                <a:spcPts val="0"/>
+              </a:spcAft>
+              <a:buNone/>
+            </a:pPr>
+            <a:r>
+              <a:rPr lang="en" sz="1200">
+                <a:solidFill>
+                  <a:srgbClr val="00E0DC"/>
+                </a:solidFill>
+                <a:highlight>
+                  <a:srgbClr val="EFEFEF"/>
+                </a:highlight>
+              </a:rPr>
+              <a:t># canonical form - `adhesion issues` (47) and `adhesive issues` (6) are separate</a:t>
+            </a:r>
+            <a:endParaRPr sz="1200">
+              <a:solidFill>
+                <a:srgbClr val="00E0DC"/>
+              </a:solidFill>
+              <a:highlight>
+                <a:srgbClr val="EFEFEF"/>
+              </a:highlight>
+            </a:endParaRPr>
+          </a:p>
+          <a:p>
+            <a:pPr indent="0" lvl="0" marL="0" rtl="0" algn="l">
+              <a:spcBef>
+                <a:spcPts val="0"/>
+              </a:spcBef>
+              <a:spcAft>
+                <a:spcPts val="0"/>
+              </a:spcAft>
+              <a:buNone/>
+            </a:pPr>
+            <a:r>
+              <a:rPr lang="en" sz="1200">
+                <a:solidFill>
+                  <a:srgbClr val="00E0DC"/>
+                </a:solidFill>
+                <a:highlight>
+                  <a:srgbClr val="EFEFEF"/>
+                </a:highlight>
+              </a:rPr>
+              <a:t># strings - so it is bucketed by regex rather than grouped. The patterns were</a:t>
+            </a:r>
+            <a:endParaRPr sz="1200">
+              <a:solidFill>
+                <a:srgbClr val="00E0DC"/>
+              </a:solidFill>
+              <a:highlight>
+                <a:srgbClr val="EFEFEF"/>
+              </a:highlight>
+            </a:endParaRPr>
+          </a:p>
+          <a:p>
+            <a:pPr indent="0" lvl="0" marL="0" rtl="0" algn="l">
+              <a:spcBef>
+                <a:spcPts val="0"/>
+              </a:spcBef>
+              <a:spcAft>
+                <a:spcPts val="0"/>
+              </a:spcAft>
+              <a:buNone/>
+            </a:pPr>
+            <a:r>
+              <a:rPr lang="en" sz="1200">
+                <a:solidFill>
+                  <a:srgbClr val="00E0DC"/>
+                </a:solidFill>
+                <a:highlight>
+                  <a:srgbClr val="EFEFEF"/>
+                </a:highlight>
+              </a:rPr>
+              <a:t># widened against the actual unmatched values: efficacy is written as "breaking</a:t>
+            </a:r>
+            <a:endParaRPr sz="1200">
+              <a:solidFill>
+                <a:srgbClr val="00E0DC"/>
+              </a:solidFill>
+              <a:highlight>
+                <a:srgbClr val="EFEFEF"/>
+              </a:highlight>
+            </a:endParaRPr>
+          </a:p>
+          <a:p>
+            <a:pPr indent="0" lvl="0" marL="0" rtl="0" algn="l">
+              <a:spcBef>
+                <a:spcPts val="0"/>
+              </a:spcBef>
+              <a:spcAft>
+                <a:spcPts val="0"/>
+              </a:spcAft>
+              <a:buNone/>
+            </a:pPr>
+            <a:r>
+              <a:rPr lang="en" sz="1200">
+                <a:solidFill>
+                  <a:srgbClr val="00E0DC"/>
+                </a:solidFill>
+                <a:highlight>
+                  <a:srgbClr val="EFEFEF"/>
+                </a:highlight>
+              </a:rPr>
+              <a:t># through", "not responding" and "wasn't resolving", never as "not working".</a:t>
+            </a:r>
+            <a:endParaRPr sz="1200">
+              <a:solidFill>
+                <a:srgbClr val="00E0DC"/>
+              </a:solidFill>
+              <a:highlight>
+                <a:srgbClr val="EFEFEF"/>
+              </a:highlight>
+            </a:endParaRPr>
+          </a:p>
+          <a:p>
+            <a:pPr indent="0" lvl="0" marL="0" rtl="0" algn="l">
+              <a:spcBef>
+                <a:spcPts val="0"/>
+              </a:spcBef>
+              <a:spcAft>
+                <a:spcPts val="0"/>
+              </a:spcAft>
+              <a:buNone/>
+            </a:pPr>
+            <a:r>
+              <a:t/>
+            </a:r>
+            <a:endParaRPr sz="1200">
+              <a:solidFill>
+                <a:srgbClr val="00E0DC"/>
+              </a:solidFill>
+              <a:highlight>
+                <a:srgbClr val="EFEFEF"/>
+              </a:highlight>
+            </a:endParaRPr>
+          </a:p>
+          <a:p>
+            <a:pPr indent="0" lvl="0" marL="0" rtl="0" algn="l">
+              <a:spcBef>
+                <a:spcPts val="0"/>
+              </a:spcBef>
+              <a:spcAft>
+                <a:spcPts val="0"/>
+              </a:spcAft>
+              <a:buNone/>
+            </a:pPr>
+            <a:r>
+              <a:rPr lang="en" sz="1300"/>
+              <a:t>BUCKETS = </a:t>
+            </a:r>
+            <a:r>
+              <a:rPr lang="en" sz="1300">
+                <a:solidFill>
+                  <a:srgbClr val="CCCCCC"/>
+                </a:solidFill>
+              </a:rPr>
+              <a:t>{</a:t>
+            </a:r>
+            <a:endParaRPr sz="1300">
+              <a:solidFill>
+                <a:srgbClr val="CCCCCC"/>
+              </a:solidFill>
+            </a:endParaRPr>
+          </a:p>
+          <a:p>
+            <a:pPr indent="0" lvl="0" marL="0" rtl="0" algn="l">
+              <a:spcBef>
+                <a:spcPts val="0"/>
+              </a:spcBef>
+              <a:spcAft>
+                <a:spcPts val="0"/>
+              </a:spcAft>
+              <a:buNone/>
+            </a:pPr>
+            <a:r>
+              <a:rPr lang="en" sz="1300"/>
+              <a:t>   </a:t>
+            </a:r>
+            <a:r>
+              <a:rPr lang="en" sz="1300">
+                <a:solidFill>
+                  <a:srgbClr val="CC0000"/>
+                </a:solidFill>
+              </a:rPr>
+              <a:t> 'side effects</a:t>
+            </a:r>
+            <a:r>
+              <a:rPr lang="en" sz="1300"/>
+              <a:t>': (</a:t>
+            </a:r>
+            <a:r>
+              <a:rPr lang="en" sz="1300">
+                <a:solidFill>
+                  <a:srgbClr val="CC0000"/>
+                </a:solidFill>
+              </a:rPr>
+              <a:t>r'tender|bleed|migraine|headache|nausea|bloat|irritat|rash|mood'</a:t>
+            </a:r>
+            <a:endParaRPr sz="1300">
+              <a:solidFill>
+                <a:srgbClr val="CC0000"/>
+              </a:solidFill>
+            </a:endParaRPr>
+          </a:p>
+          <a:p>
+            <a:pPr indent="0" lvl="0" marL="0" rtl="0" algn="l">
+              <a:spcBef>
+                <a:spcPts val="0"/>
+              </a:spcBef>
+              <a:spcAft>
+                <a:spcPts val="0"/>
+              </a:spcAft>
+              <a:buNone/>
+            </a:pPr>
+            <a:r>
+              <a:rPr lang="en" sz="1300">
+                <a:solidFill>
+                  <a:srgbClr val="CC0000"/>
+                </a:solidFill>
+              </a:rPr>
+              <a:t>                     r'|adverse|side effect|ache|hair</a:t>
+            </a:r>
+            <a:r>
+              <a:rPr lang="en" sz="1300"/>
+              <a:t>'),</a:t>
+            </a:r>
+            <a:endParaRPr sz="1300"/>
+          </a:p>
+          <a:p>
+            <a:pPr indent="0" lvl="0" marL="0" rtl="0" algn="l">
+              <a:spcBef>
+                <a:spcPts val="0"/>
+              </a:spcBef>
+              <a:spcAft>
+                <a:spcPts val="0"/>
+              </a:spcAft>
+              <a:buNone/>
+            </a:pPr>
+            <a:r>
+              <a:rPr lang="en" sz="1300"/>
+              <a:t>    </a:t>
+            </a:r>
+            <a:r>
+              <a:rPr lang="en" sz="1300">
+                <a:solidFill>
+                  <a:srgbClr val="CC0000"/>
+                </a:solidFill>
+              </a:rPr>
+              <a:t>'adhesion / it fell off'</a:t>
+            </a:r>
+            <a:r>
+              <a:rPr lang="en" sz="1300"/>
+              <a:t>:</a:t>
+            </a:r>
+            <a:r>
+              <a:rPr lang="en" sz="1300">
+                <a:solidFill>
+                  <a:srgbClr val="CC0000"/>
+                </a:solidFill>
+              </a:rPr>
+              <a:t> r'adhes|stick|peel|fall|fell off|came off|applicator'</a:t>
+            </a:r>
+            <a:r>
+              <a:rPr lang="en" sz="1300"/>
+              <a:t>,</a:t>
+            </a:r>
+            <a:endParaRPr sz="1300"/>
+          </a:p>
+          <a:p>
+            <a:pPr indent="0" lvl="0" marL="0" rtl="0" algn="l">
+              <a:spcBef>
+                <a:spcPts val="0"/>
+              </a:spcBef>
+              <a:spcAft>
+                <a:spcPts val="0"/>
+              </a:spcAft>
+              <a:buNone/>
+            </a:pPr>
+            <a:r>
+              <a:rPr lang="en" sz="1300"/>
+              <a:t>   </a:t>
+            </a:r>
+            <a:r>
+              <a:rPr lang="en" sz="1300">
+                <a:solidFill>
+                  <a:srgbClr val="CC0000"/>
+                </a:solidFill>
+              </a:rPr>
+              <a:t> 'dose / absorption / route'</a:t>
+            </a:r>
+            <a:r>
+              <a:rPr lang="en" sz="1300"/>
+              <a:t>: (</a:t>
+            </a:r>
+            <a:r>
+              <a:rPr lang="en" sz="1300">
+                <a:solidFill>
+                  <a:srgbClr val="CC0000"/>
+                </a:solidFill>
+              </a:rPr>
+              <a:t>r'dose|absor|level|consistenc|strength|titrat|route'</a:t>
+            </a:r>
+            <a:endParaRPr sz="1300">
+              <a:solidFill>
+                <a:srgbClr val="CC0000"/>
+              </a:solidFill>
+            </a:endParaRPr>
+          </a:p>
+          <a:p>
+            <a:pPr indent="0" lvl="0" marL="0" rtl="0" algn="l">
+              <a:spcBef>
+                <a:spcPts val="0"/>
+              </a:spcBef>
+              <a:spcAft>
+                <a:spcPts val="0"/>
+              </a:spcAft>
+              <a:buNone/>
+            </a:pPr>
+            <a:r>
+              <a:rPr lang="en" sz="1300">
+                <a:solidFill>
+                  <a:srgbClr val="CC0000"/>
+                </a:solidFill>
+              </a:rPr>
+              <a:t>                                  r'|transdermal|systemic|peak|trough|hepatic'</a:t>
+            </a:r>
+            <a:r>
+              <a:rPr lang="en" sz="1300"/>
+              <a:t>),</a:t>
+            </a:r>
+            <a:endParaRPr sz="1300"/>
+          </a:p>
+          <a:p>
+            <a:pPr indent="0" lvl="0" marL="0" rtl="0" algn="l">
+              <a:spcBef>
+                <a:spcPts val="0"/>
+              </a:spcBef>
+              <a:spcAft>
+                <a:spcPts val="0"/>
+              </a:spcAft>
+              <a:buNone/>
+            </a:pPr>
+            <a:r>
+              <a:rPr lang="en" sz="1300"/>
+              <a:t>   </a:t>
+            </a:r>
+            <a:r>
+              <a:rPr lang="en" sz="1300">
+                <a:solidFill>
+                  <a:srgbClr val="CC0000"/>
+                </a:solidFill>
+              </a:rPr>
+              <a:t> 'clinician advice'</a:t>
+            </a:r>
+            <a:r>
+              <a:rPr lang="en" sz="1300"/>
+              <a:t>: </a:t>
+            </a:r>
+            <a:r>
+              <a:rPr lang="en" sz="1300">
+                <a:solidFill>
+                  <a:srgbClr val="CC0000"/>
+                </a:solidFill>
+              </a:rPr>
+              <a:t>r'doctor|gp|specialist|consultant|provider|nams|advice'</a:t>
+            </a:r>
+            <a:r>
+              <a:rPr lang="en" sz="1300"/>
+              <a:t>,</a:t>
+            </a:r>
+            <a:endParaRPr sz="1300"/>
+          </a:p>
+          <a:p>
+            <a:pPr indent="0" lvl="0" marL="0" rtl="0" algn="l">
+              <a:spcBef>
+                <a:spcPts val="0"/>
+              </a:spcBef>
+              <a:spcAft>
+                <a:spcPts val="0"/>
+              </a:spcAft>
+              <a:buNone/>
+            </a:pPr>
+            <a:r>
+              <a:rPr lang="en" sz="1300"/>
+              <a:t>   </a:t>
+            </a:r>
+            <a:r>
+              <a:rPr lang="en" sz="1300">
+                <a:solidFill>
+                  <a:srgbClr val="CC0000"/>
+                </a:solidFill>
+              </a:rPr>
+              <a:t> 'cost / access</a:t>
+            </a:r>
+            <a:r>
+              <a:rPr lang="en" sz="1300"/>
+              <a:t>': </a:t>
+            </a:r>
+            <a:r>
+              <a:rPr lang="en" sz="1300">
+                <a:solidFill>
+                  <a:srgbClr val="CC0000"/>
+                </a:solidFill>
+              </a:rPr>
+              <a:t>r'cost|price|insur|cover|afford|supply|shortage</a:t>
+            </a:r>
+            <a:r>
+              <a:rPr lang="en" sz="1300"/>
+              <a:t>',</a:t>
+            </a:r>
+            <a:endParaRPr sz="1300"/>
+          </a:p>
+          <a:p>
+            <a:pPr indent="0" lvl="0" marL="0" rtl="0" algn="l">
+              <a:spcBef>
+                <a:spcPts val="0"/>
+              </a:spcBef>
+              <a:spcAft>
+                <a:spcPts val="0"/>
+              </a:spcAft>
+              <a:buNone/>
+            </a:pPr>
+            <a:r>
+              <a:rPr lang="en" sz="1300"/>
+              <a:t>    </a:t>
+            </a:r>
+            <a:r>
+              <a:rPr lang="en" sz="1300">
+                <a:solidFill>
+                  <a:srgbClr val="CC0000"/>
+                </a:solidFill>
+              </a:rPr>
+              <a:t>'symptoms not controlled'</a:t>
+            </a:r>
+            <a:r>
+              <a:rPr lang="en" sz="1300"/>
+              <a:t>: (</a:t>
+            </a:r>
+            <a:r>
+              <a:rPr lang="en" sz="1300">
+                <a:solidFill>
+                  <a:srgbClr val="CC0000"/>
+                </a:solidFill>
+              </a:rPr>
+              <a:t>r'not work|didn.t work|wasn.t work|no relief|ineffect'</a:t>
+            </a:r>
+            <a:endParaRPr sz="1300">
+              <a:solidFill>
+                <a:srgbClr val="CC0000"/>
+              </a:solidFill>
+            </a:endParaRPr>
+          </a:p>
+          <a:p>
+            <a:pPr indent="0" lvl="0" marL="0" rtl="0" algn="l">
+              <a:spcBef>
+                <a:spcPts val="0"/>
+              </a:spcBef>
+              <a:spcAft>
+                <a:spcPts val="0"/>
+              </a:spcAft>
+              <a:buNone/>
+            </a:pPr>
+            <a:r>
+              <a:rPr lang="en" sz="1300">
+                <a:solidFill>
+                  <a:srgbClr val="CC0000"/>
+                </a:solidFill>
+              </a:rPr>
+              <a:t>                                r'|stopped work|nothing|breaking through|not respond'</a:t>
+            </a:r>
+            <a:endParaRPr sz="1300">
+              <a:solidFill>
+                <a:srgbClr val="CC0000"/>
+              </a:solidFill>
+            </a:endParaRPr>
+          </a:p>
+          <a:p>
+            <a:pPr indent="0" lvl="0" marL="0" rtl="0" algn="l">
+              <a:spcBef>
+                <a:spcPts val="0"/>
+              </a:spcBef>
+              <a:spcAft>
+                <a:spcPts val="0"/>
+              </a:spcAft>
+              <a:buNone/>
+            </a:pPr>
+            <a:r>
+              <a:rPr lang="en" sz="1300">
+                <a:solidFill>
+                  <a:srgbClr val="CC0000"/>
+                </a:solidFill>
+              </a:rPr>
+              <a:t>                                r'|wasn.t respond|weren.t resolv|wasn.t resolv|got worse'</a:t>
+            </a:r>
+            <a:endParaRPr sz="1300">
+              <a:solidFill>
+                <a:srgbClr val="CC0000"/>
+              </a:solidFill>
+            </a:endParaRPr>
+          </a:p>
+          <a:p>
+            <a:pPr indent="0" lvl="0" marL="0" rtl="0" algn="l">
+              <a:spcBef>
+                <a:spcPts val="0"/>
+              </a:spcBef>
+              <a:spcAft>
+                <a:spcPts val="0"/>
+              </a:spcAft>
+              <a:buNone/>
+            </a:pPr>
+            <a:r>
+              <a:rPr lang="en" sz="1300">
+                <a:solidFill>
+                  <a:srgbClr val="CC0000"/>
+                </a:solidFill>
+              </a:rPr>
+              <a:t>                                r'|unsustainable|wasn.t right'</a:t>
+            </a:r>
+            <a:r>
+              <a:rPr lang="en" sz="1300"/>
+              <a:t>),</a:t>
+            </a:r>
+            <a:endParaRPr sz="1300"/>
+          </a:p>
+          <a:p>
+            <a:pPr indent="0" lvl="0" marL="0" rtl="0" algn="l">
+              <a:spcBef>
+                <a:spcPts val="0"/>
+              </a:spcBef>
+              <a:spcAft>
+                <a:spcPts val="0"/>
+              </a:spcAft>
+              <a:buNone/>
+            </a:pPr>
+            <a:r>
+              <a:rPr lang="en" sz="1300">
+                <a:solidFill>
+                  <a:srgbClr val="B7B7B7"/>
+                </a:solidFill>
+              </a:rPr>
+              <a:t>}</a:t>
+            </a:r>
+            <a:endParaRPr sz="1300"/>
+          </a:p>
+        </p:txBody>
+      </p:sp>
     </p:spTree>
   </p:cSld>
   <p:clrMapOvr>
@@ -13451,7 +13905,7 @@
   <p:cSld>
     <p:spTree>
       <p:nvGrpSpPr>
-        <p:cNvPr id="229" name="Shape 229"/>
+        <p:cNvPr id="228" name="Shape 228"/>
         <p:cNvGrpSpPr/>
         <p:nvPr/>
       </p:nvGrpSpPr>
@@ -13463,9 +13917,90 @@
           <a:chExt cx="0" cy="0"/>
         </a:xfrm>
       </p:grpSpPr>
+      <p:sp>
+        <p:nvSpPr>
+          <p:cNvPr id="229" name="Google Shape;229;p38"/>
+          <p:cNvSpPr txBox="1"/>
+          <p:nvPr>
+            <p:ph type="title"/>
+          </p:nvPr>
+        </p:nvSpPr>
+        <p:spPr>
+          <a:xfrm>
+            <a:off x="311700" y="137300"/>
+            <a:ext cx="8520600" cy="707400"/>
+          </a:xfrm>
+          <a:prstGeom prst="rect">
+            <a:avLst/>
+          </a:prstGeom>
+        </p:spPr>
+        <p:txBody>
+          <a:bodyPr anchorCtr="0" anchor="t" bIns="91425" lIns="91425" spcFirstLastPara="1" rIns="91425" wrap="square" tIns="91425">
+            <a:normAutofit fontScale="90000"/>
+          </a:bodyPr>
+          <a:lstStyle/>
+          <a:p>
+            <a:pPr indent="0" lvl="0" marL="0" rtl="0" algn="l">
+              <a:spcBef>
+                <a:spcPts val="0"/>
+              </a:spcBef>
+              <a:spcAft>
+                <a:spcPts val="0"/>
+              </a:spcAft>
+              <a:buNone/>
+            </a:pPr>
+            <a:r>
+              <a:rPr lang="en"/>
+              <a:t>Insights and Findings</a:t>
+            </a:r>
+            <a:endParaRPr/>
+          </a:p>
+        </p:txBody>
+      </p:sp>
+      <p:sp>
+        <p:nvSpPr>
+          <p:cNvPr id="230" name="Google Shape;230;p38"/>
+          <p:cNvSpPr txBox="1"/>
+          <p:nvPr>
+            <p:ph idx="1" type="body"/>
+          </p:nvPr>
+        </p:nvSpPr>
+        <p:spPr>
+          <a:xfrm>
+            <a:off x="311700" y="844700"/>
+            <a:ext cx="8520600" cy="488700"/>
+          </a:xfrm>
+          <a:prstGeom prst="rect">
+            <a:avLst/>
+          </a:prstGeom>
+        </p:spPr>
+        <p:txBody>
+          <a:bodyPr anchorCtr="0" anchor="t" bIns="91425" lIns="91425" spcFirstLastPara="1" rIns="91425" wrap="square" tIns="91425">
+            <a:noAutofit/>
+          </a:bodyPr>
+          <a:lstStyle/>
+          <a:p>
+            <a:pPr indent="-342900" lvl="0" marL="457200" rtl="0" algn="l">
+              <a:spcBef>
+                <a:spcPts val="0"/>
+              </a:spcBef>
+              <a:spcAft>
+                <a:spcPts val="0"/>
+              </a:spcAft>
+              <a:buSzPts val="1800"/>
+              <a:buChar char="●"/>
+            </a:pPr>
+            <a:r>
+              <a:rPr lang="en"/>
+              <a:t>Who is the MHT Menopause Patient Community?</a:t>
+            </a:r>
+            <a:endParaRPr/>
+          </a:p>
+        </p:txBody>
+      </p:sp>
       <p:pic>
         <p:nvPicPr>
-          <p:cNvPr id="230" name="Google Shape;230;p38" title="accuracy.png"/>
+          <p:cNvPr id="231" name="Google Shape;231;p38"/>
           <p:cNvPicPr preferRelativeResize="0"/>
           <p:nvPr/>
         </p:nvPicPr>
@@ -13479,21 +14014,15 @@
         </p:blipFill>
         <p:spPr>
           <a:xfrm>
-            <a:off x="888113" y="152400"/>
-            <a:ext cx="7367772" cy="4838698"/>
+            <a:off x="152400" y="1485800"/>
+            <a:ext cx="8839197" cy="3029027"/>
           </a:xfrm>
           <a:prstGeom prst="rect">
             <a:avLst/>
           </a:prstGeom>
           <a:noFill/>
-          <a:ln cap="flat" cmpd="sng" w="9525">
-            <a:solidFill>
-              <a:schemeClr val="dk2"/>
-            </a:solidFill>
-            <a:prstDash val="solid"/>
-            <a:round/>
-            <a:headEnd len="sm" w="sm" type="none"/>
-            <a:tailEnd len="sm" w="sm" type="none"/>
+          <a:ln>
+            <a:noFill/>
           </a:ln>
         </p:spPr>
       </p:pic>
@@ -13510,7 +14039,7 @@
   <p:cSld>
     <p:spTree>
       <p:nvGrpSpPr>
-        <p:cNvPr id="234" name="Shape 234"/>
+        <p:cNvPr id="235" name="Shape 235"/>
         <p:cNvGrpSpPr/>
         <p:nvPr/>
       </p:nvGrpSpPr>
@@ -13522,9 +14051,90 @@
           <a:chExt cx="0" cy="0"/>
         </a:xfrm>
       </p:grpSpPr>
+      <p:sp>
+        <p:nvSpPr>
+          <p:cNvPr id="236" name="Google Shape;236;p39"/>
+          <p:cNvSpPr txBox="1"/>
+          <p:nvPr>
+            <p:ph type="title"/>
+          </p:nvPr>
+        </p:nvSpPr>
+        <p:spPr>
+          <a:xfrm>
+            <a:off x="311700" y="137300"/>
+            <a:ext cx="8520600" cy="707400"/>
+          </a:xfrm>
+          <a:prstGeom prst="rect">
+            <a:avLst/>
+          </a:prstGeom>
+        </p:spPr>
+        <p:txBody>
+          <a:bodyPr anchorCtr="0" anchor="t" bIns="91425" lIns="91425" spcFirstLastPara="1" rIns="91425" wrap="square" tIns="91425">
+            <a:normAutofit fontScale="90000"/>
+          </a:bodyPr>
+          <a:lstStyle/>
+          <a:p>
+            <a:pPr indent="0" lvl="0" marL="0" rtl="0" algn="l">
+              <a:spcBef>
+                <a:spcPts val="0"/>
+              </a:spcBef>
+              <a:spcAft>
+                <a:spcPts val="0"/>
+              </a:spcAft>
+              <a:buNone/>
+            </a:pPr>
+            <a:r>
+              <a:rPr lang="en"/>
+              <a:t>Insights and Findings</a:t>
+            </a:r>
+            <a:endParaRPr/>
+          </a:p>
+        </p:txBody>
+      </p:sp>
+      <p:sp>
+        <p:nvSpPr>
+          <p:cNvPr id="237" name="Google Shape;237;p39"/>
+          <p:cNvSpPr txBox="1"/>
+          <p:nvPr>
+            <p:ph idx="1" type="body"/>
+          </p:nvPr>
+        </p:nvSpPr>
+        <p:spPr>
+          <a:xfrm>
+            <a:off x="311700" y="844700"/>
+            <a:ext cx="8520600" cy="488700"/>
+          </a:xfrm>
+          <a:prstGeom prst="rect">
+            <a:avLst/>
+          </a:prstGeom>
+        </p:spPr>
+        <p:txBody>
+          <a:bodyPr anchorCtr="0" anchor="t" bIns="91425" lIns="91425" spcFirstLastPara="1" rIns="91425" wrap="square" tIns="91425">
+            <a:noAutofit/>
+          </a:bodyPr>
+          <a:lstStyle/>
+          <a:p>
+            <a:pPr indent="-342900" lvl="0" marL="457200" rtl="0" algn="l">
+              <a:spcBef>
+                <a:spcPts val="0"/>
+              </a:spcBef>
+              <a:spcAft>
+                <a:spcPts val="0"/>
+              </a:spcAft>
+              <a:buSzPts val="1800"/>
+              <a:buChar char="●"/>
+            </a:pPr>
+            <a:r>
+              <a:rPr lang="en"/>
+              <a:t>Who is the MHT Menopause Patient Community?</a:t>
+            </a:r>
+            <a:endParaRPr/>
+          </a:p>
+        </p:txBody>
+      </p:sp>
       <p:pic>
         <p:nvPicPr>
-          <p:cNvPr id="235" name="Google Shape;235;p39" title="Screenshot 2026-09-23 at 4.16.53 PM.png"/>
+          <p:cNvPr id="238" name="Google Shape;238;p39"/>
           <p:cNvPicPr preferRelativeResize="0"/>
           <p:nvPr/>
         </p:nvPicPr>
@@ -13538,8 +14148,8 @@
         </p:blipFill>
         <p:spPr>
           <a:xfrm>
-            <a:off x="152400" y="152400"/>
-            <a:ext cx="4573830" cy="4838699"/>
+            <a:off x="152400" y="1485800"/>
+            <a:ext cx="8839200" cy="2952293"/>
           </a:xfrm>
           <a:prstGeom prst="rect">
             <a:avLst/>
@@ -13563,7 +14173,7 @@
   <p:cSld>
     <p:spTree>
       <p:nvGrpSpPr>
-        <p:cNvPr id="239" name="Shape 239"/>
+        <p:cNvPr id="242" name="Shape 242"/>
         <p:cNvGrpSpPr/>
         <p:nvPr/>
       </p:nvGrpSpPr>
@@ -13575,49 +14185,9 @@
           <a:chExt cx="0" cy="0"/>
         </a:xfrm>
       </p:grpSpPr>
-      <p:sp>
-        <p:nvSpPr>
-          <p:cNvPr id="240" name="Google Shape;240;p40"/>
-          <p:cNvSpPr txBox="1"/>
-          <p:nvPr>
-            <p:ph type="title"/>
-          </p:nvPr>
-        </p:nvSpPr>
-        <p:spPr>
-          <a:xfrm>
-            <a:off x="311700" y="137300"/>
-            <a:ext cx="8520600" cy="707400"/>
-          </a:xfrm>
-          <a:prstGeom prst="rect">
-            <a:avLst/>
-          </a:prstGeom>
-        </p:spPr>
-        <p:txBody>
-          <a:bodyPr anchorCtr="0" anchor="t" bIns="91425" lIns="91425" spcFirstLastPara="1" rIns="91425" wrap="square" tIns="91425">
-            <a:normAutofit fontScale="90000"/>
-          </a:bodyPr>
-          <a:lstStyle/>
-          <a:p>
-            <a:pPr indent="0" lvl="0" marL="0" rtl="0" algn="l">
-              <a:spcBef>
-                <a:spcPts val="0"/>
-              </a:spcBef>
-              <a:spcAft>
-                <a:spcPts val="0"/>
-              </a:spcAft>
-              <a:buNone/>
-            </a:pPr>
-            <a:r>
-              <a:rPr lang="en"/>
-              <a:t>Insights and Findings</a:t>
-            </a:r>
-            <a:endParaRPr/>
-          </a:p>
-        </p:txBody>
-      </p:sp>
       <p:pic>
         <p:nvPicPr>
-          <p:cNvPr id="241" name="Google Shape;241;p40"/>
+          <p:cNvPr id="243" name="Google Shape;243;p40" title="accuracy.png"/>
           <p:cNvPicPr preferRelativeResize="0"/>
           <p:nvPr/>
         </p:nvPicPr>
@@ -13631,8 +14201,8 @@
         </p:blipFill>
         <p:spPr>
           <a:xfrm>
-            <a:off x="1391400" y="734400"/>
-            <a:ext cx="6402624" cy="4306525"/>
+            <a:off x="888113" y="152400"/>
+            <a:ext cx="7367772" cy="4838698"/>
           </a:xfrm>
           <a:prstGeom prst="rect">
             <a:avLst/>
@@ -13646,6 +14216,59 @@
             <a:round/>
             <a:headEnd len="sm" w="sm" type="none"/>
             <a:tailEnd len="sm" w="sm" type="none"/>
+          </a:ln>
+        </p:spPr>
+      </p:pic>
+    </p:spTree>
+  </p:cSld>
+  <p:clrMapOvr>
+    <a:masterClrMapping/>
+  </p:clrMapOvr>
+</p:sld>
+</file>
+
+<file path=ppt/slides/slide29.xml><?xml version="1.0" encoding="utf-8"?>
+<p:sld xmlns:a="http://schemas.openxmlformats.org/drawingml/2006/main" xmlns:r="http://schemas.openxmlformats.org/officeDocument/2006/relationships" xmlns:mc="http://schemas.openxmlformats.org/markup-compatibility/2006" xmlns:mv="urn:schemas-microsoft-com:mac:vml" xmlns:p="http://schemas.openxmlformats.org/presentationml/2006/main" xmlns:c="http://schemas.openxmlformats.org/drawingml/2006/chart" xmlns:dgm="http://schemas.openxmlformats.org/drawingml/2006/diagram" xmlns:o="urn:schemas-microsoft-com:office:office" xmlns:v="urn:schemas-microsoft-com:vml" xmlns:pvml="urn:schemas-microsoft-com:office:powerpoint" xmlns:com="http://schemas.openxmlformats.org/drawingml/2006/compatibility" xmlns:p14="http://schemas.microsoft.com/office/powerpoint/2010/main" xmlns:p15="http://schemas.microsoft.com/office/powerpoint/2012/main" xmlns:ahyp="http://schemas.microsoft.com/office/drawing/2018/hyperlinkcolor">
+  <p:cSld>
+    <p:spTree>
+      <p:nvGrpSpPr>
+        <p:cNvPr id="247" name="Shape 247"/>
+        <p:cNvGrpSpPr/>
+        <p:nvPr/>
+      </p:nvGrpSpPr>
+      <p:grpSpPr>
+        <a:xfrm>
+          <a:off x="0" y="0"/>
+          <a:ext cx="0" cy="0"/>
+          <a:chOff x="0" y="0"/>
+          <a:chExt cx="0" cy="0"/>
+        </a:xfrm>
+      </p:grpSpPr>
+      <p:pic>
+        <p:nvPicPr>
+          <p:cNvPr id="248" name="Google Shape;248;p41" title="architecture.png"/>
+          <p:cNvPicPr preferRelativeResize="0"/>
+          <p:nvPr/>
+        </p:nvPicPr>
+        <p:blipFill>
+          <a:blip r:embed="rId3">
+            <a:alphaModFix/>
+          </a:blip>
+          <a:stretch>
+            <a:fillRect/>
+          </a:stretch>
+        </p:blipFill>
+        <p:spPr>
+          <a:xfrm>
+            <a:off x="719075" y="41375"/>
+            <a:ext cx="7536799" cy="4949724"/>
+          </a:xfrm>
+          <a:prstGeom prst="rect">
+            <a:avLst/>
+          </a:prstGeom>
+          <a:noFill/>
+          <a:ln>
+            <a:noFill/>
           </a:ln>
         </p:spPr>
       </p:pic>
@@ -13894,6 +14517,158 @@
           </a:p>
         </p:txBody>
       </p:sp>
+    </p:spTree>
+  </p:cSld>
+  <p:clrMapOvr>
+    <a:masterClrMapping/>
+  </p:clrMapOvr>
+</p:sld>
+</file>
+
+<file path=ppt/slides/slide30.xml><?xml version="1.0" encoding="utf-8"?>
+<p:sld xmlns:a="http://schemas.openxmlformats.org/drawingml/2006/main" xmlns:r="http://schemas.openxmlformats.org/officeDocument/2006/relationships" xmlns:mc="http://schemas.openxmlformats.org/markup-compatibility/2006" xmlns:mv="urn:schemas-microsoft-com:mac:vml" xmlns:p="http://schemas.openxmlformats.org/presentationml/2006/main" xmlns:c="http://schemas.openxmlformats.org/drawingml/2006/chart" xmlns:dgm="http://schemas.openxmlformats.org/drawingml/2006/diagram" xmlns:o="urn:schemas-microsoft-com:office:office" xmlns:v="urn:schemas-microsoft-com:vml" xmlns:pvml="urn:schemas-microsoft-com:office:powerpoint" xmlns:com="http://schemas.openxmlformats.org/drawingml/2006/compatibility" xmlns:p14="http://schemas.microsoft.com/office/powerpoint/2010/main" xmlns:p15="http://schemas.microsoft.com/office/powerpoint/2012/main" xmlns:ahyp="http://schemas.microsoft.com/office/drawing/2018/hyperlinkcolor">
+  <p:cSld>
+    <p:spTree>
+      <p:nvGrpSpPr>
+        <p:cNvPr id="252" name="Shape 252"/>
+        <p:cNvGrpSpPr/>
+        <p:nvPr/>
+      </p:nvGrpSpPr>
+      <p:grpSpPr>
+        <a:xfrm>
+          <a:off x="0" y="0"/>
+          <a:ext cx="0" cy="0"/>
+          <a:chOff x="0" y="0"/>
+          <a:chExt cx="0" cy="0"/>
+        </a:xfrm>
+      </p:grpSpPr>
+      <p:pic>
+        <p:nvPicPr>
+          <p:cNvPr id="253" name="Google Shape;253;p42" title="Screenshot 2026-09-23 at 4.16.53 PM.png"/>
+          <p:cNvPicPr preferRelativeResize="0"/>
+          <p:nvPr/>
+        </p:nvPicPr>
+        <p:blipFill>
+          <a:blip r:embed="rId3">
+            <a:alphaModFix/>
+          </a:blip>
+          <a:stretch>
+            <a:fillRect/>
+          </a:stretch>
+        </p:blipFill>
+        <p:spPr>
+          <a:xfrm>
+            <a:off x="152400" y="152400"/>
+            <a:ext cx="4573830" cy="4838699"/>
+          </a:xfrm>
+          <a:prstGeom prst="rect">
+            <a:avLst/>
+          </a:prstGeom>
+          <a:noFill/>
+          <a:ln>
+            <a:noFill/>
+          </a:ln>
+        </p:spPr>
+      </p:pic>
+    </p:spTree>
+  </p:cSld>
+  <p:clrMapOvr>
+    <a:masterClrMapping/>
+  </p:clrMapOvr>
+</p:sld>
+</file>
+
+<file path=ppt/slides/slide31.xml><?xml version="1.0" encoding="utf-8"?>
+<p:sld xmlns:a="http://schemas.openxmlformats.org/drawingml/2006/main" xmlns:r="http://schemas.openxmlformats.org/officeDocument/2006/relationships" xmlns:mc="http://schemas.openxmlformats.org/markup-compatibility/2006" xmlns:mv="urn:schemas-microsoft-com:mac:vml" xmlns:p="http://schemas.openxmlformats.org/presentationml/2006/main" xmlns:c="http://schemas.openxmlformats.org/drawingml/2006/chart" xmlns:dgm="http://schemas.openxmlformats.org/drawingml/2006/diagram" xmlns:o="urn:schemas-microsoft-com:office:office" xmlns:v="urn:schemas-microsoft-com:vml" xmlns:pvml="urn:schemas-microsoft-com:office:powerpoint" xmlns:com="http://schemas.openxmlformats.org/drawingml/2006/compatibility" xmlns:p14="http://schemas.microsoft.com/office/powerpoint/2010/main" xmlns:p15="http://schemas.microsoft.com/office/powerpoint/2012/main" xmlns:ahyp="http://schemas.microsoft.com/office/drawing/2018/hyperlinkcolor">
+  <p:cSld>
+    <p:spTree>
+      <p:nvGrpSpPr>
+        <p:cNvPr id="257" name="Shape 257"/>
+        <p:cNvGrpSpPr/>
+        <p:nvPr/>
+      </p:nvGrpSpPr>
+      <p:grpSpPr>
+        <a:xfrm>
+          <a:off x="0" y="0"/>
+          <a:ext cx="0" cy="0"/>
+          <a:chOff x="0" y="0"/>
+          <a:chExt cx="0" cy="0"/>
+        </a:xfrm>
+      </p:grpSpPr>
+      <p:sp>
+        <p:nvSpPr>
+          <p:cNvPr id="258" name="Google Shape;258;p43"/>
+          <p:cNvSpPr txBox="1"/>
+          <p:nvPr>
+            <p:ph type="title"/>
+          </p:nvPr>
+        </p:nvSpPr>
+        <p:spPr>
+          <a:xfrm>
+            <a:off x="311700" y="137300"/>
+            <a:ext cx="8520600" cy="707400"/>
+          </a:xfrm>
+          <a:prstGeom prst="rect">
+            <a:avLst/>
+          </a:prstGeom>
+        </p:spPr>
+        <p:txBody>
+          <a:bodyPr anchorCtr="0" anchor="t" bIns="91425" lIns="91425" spcFirstLastPara="1" rIns="91425" wrap="square" tIns="91425">
+            <a:normAutofit fontScale="90000"/>
+          </a:bodyPr>
+          <a:lstStyle/>
+          <a:p>
+            <a:pPr indent="0" lvl="0" marL="0" rtl="0" algn="l">
+              <a:spcBef>
+                <a:spcPts val="0"/>
+              </a:spcBef>
+              <a:spcAft>
+                <a:spcPts val="0"/>
+              </a:spcAft>
+              <a:buNone/>
+            </a:pPr>
+            <a:r>
+              <a:rPr lang="en"/>
+              <a:t>Insights and Findings</a:t>
+            </a:r>
+            <a:endParaRPr/>
+          </a:p>
+        </p:txBody>
+      </p:sp>
+      <p:pic>
+        <p:nvPicPr>
+          <p:cNvPr id="259" name="Google Shape;259;p43"/>
+          <p:cNvPicPr preferRelativeResize="0"/>
+          <p:nvPr/>
+        </p:nvPicPr>
+        <p:blipFill>
+          <a:blip r:embed="rId3">
+            <a:alphaModFix/>
+          </a:blip>
+          <a:stretch>
+            <a:fillRect/>
+          </a:stretch>
+        </p:blipFill>
+        <p:spPr>
+          <a:xfrm>
+            <a:off x="1391400" y="734400"/>
+            <a:ext cx="6402624" cy="4306525"/>
+          </a:xfrm>
+          <a:prstGeom prst="rect">
+            <a:avLst/>
+          </a:prstGeom>
+          <a:noFill/>
+          <a:ln cap="flat" cmpd="sng" w="9525">
+            <a:solidFill>
+              <a:schemeClr val="dk2"/>
+            </a:solidFill>
+            <a:prstDash val="solid"/>
+            <a:round/>
+            <a:headEnd len="sm" w="sm" type="none"/>
+            <a:tailEnd len="sm" w="sm" type="none"/>
+          </a:ln>
+        </p:spPr>
+      </p:pic>
     </p:spTree>
   </p:cSld>
   <p:clrMapOvr>
@@ -14155,7 +14930,7 @@
             </a:pPr>
             <a:r>
               <a:rPr lang="en"/>
-              <a:t>Performance Overview</a:t>
+              <a:t>Performance Review</a:t>
             </a:r>
             <a:endParaRPr/>
           </a:p>
@@ -14191,13 +14966,13 @@
           <p:cNvPr id="95" name="Google Shape;95;p18"/>
           <p:cNvSpPr txBox="1"/>
           <p:nvPr>
-            <p:ph idx="1" type="body"/>
+            <p:ph type="title"/>
           </p:nvPr>
         </p:nvSpPr>
         <p:spPr>
           <a:xfrm>
-            <a:off x="289700" y="453975"/>
-            <a:ext cx="2989200" cy="401700"/>
+            <a:off x="311700" y="247200"/>
+            <a:ext cx="8520600" cy="626100"/>
           </a:xfrm>
           <a:prstGeom prst="rect">
             <a:avLst/>
@@ -14205,7 +14980,7 @@
         </p:spPr>
         <p:txBody>
           <a:bodyPr anchorCtr="0" anchor="t" bIns="91425" lIns="91425" spcFirstLastPara="1" rIns="91425" wrap="square" tIns="91425">
-            <a:noAutofit/>
+            <a:normAutofit fontScale="90000"/>
           </a:bodyPr>
           <a:lstStyle/>
           <a:p>
@@ -14214,153 +14989,21 @@
                 <a:spcPts val="0"/>
               </a:spcBef>
               <a:spcAft>
-                <a:spcPts val="1200"/>
-              </a:spcAft>
-              <a:buNone/>
-            </a:pPr>
-            <a:r>
-              <a:rPr b="1" lang="en"/>
-              <a:t>Guided Review Questions</a:t>
-            </a:r>
-            <a:endParaRPr b="1"/>
-          </a:p>
-        </p:txBody>
-      </p:sp>
-      <p:sp>
-        <p:nvSpPr>
-          <p:cNvPr id="96" name="Google Shape;96;p18"/>
-          <p:cNvSpPr txBox="1"/>
-          <p:nvPr>
-            <p:ph idx="1" type="body"/>
-          </p:nvPr>
-        </p:nvSpPr>
-        <p:spPr>
-          <a:xfrm>
-            <a:off x="289700" y="898725"/>
-            <a:ext cx="2989200" cy="3790800"/>
-          </a:xfrm>
-          <a:prstGeom prst="rect">
-            <a:avLst/>
-          </a:prstGeom>
-          <a:ln>
-            <a:noFill/>
-          </a:ln>
-        </p:spPr>
-        <p:txBody>
-          <a:bodyPr anchorCtr="0" anchor="t" bIns="91425" lIns="91425" spcFirstLastPara="1" rIns="91425" wrap="square" tIns="91425">
-            <a:noAutofit/>
-          </a:bodyPr>
-          <a:lstStyle/>
-          <a:p>
-            <a:pPr indent="0" lvl="0" marL="0" rtl="0" algn="l">
-              <a:spcBef>
-                <a:spcPts val="0"/>
-              </a:spcBef>
-              <a:spcAft>
-                <a:spcPts val="0"/>
-              </a:spcAft>
-              <a:buNone/>
-            </a:pPr>
-            <a:r>
-              <a:t/>
-            </a:r>
-            <a:endParaRPr b="1" sz="1500"/>
-          </a:p>
-          <a:p>
-            <a:pPr indent="0" lvl="0" marL="0" rtl="0" algn="l">
-              <a:spcBef>
-                <a:spcPts val="1000"/>
-              </a:spcBef>
-              <a:spcAft>
-                <a:spcPts val="0"/>
-              </a:spcAft>
-              <a:buNone/>
-            </a:pPr>
-            <a:r>
-              <a:rPr b="1" lang="en" sz="1500"/>
-              <a:t>(?)</a:t>
-            </a:r>
-            <a:r>
-              <a:rPr lang="en" sz="1500"/>
-              <a:t> Who is the Climara patient in the community?</a:t>
-            </a:r>
-            <a:endParaRPr sz="1500"/>
-          </a:p>
-          <a:p>
-            <a:pPr indent="0" lvl="0" marL="0" rtl="0" algn="l">
-              <a:spcBef>
-                <a:spcPts val="1000"/>
-              </a:spcBef>
-              <a:spcAft>
-                <a:spcPts val="0"/>
-              </a:spcAft>
-              <a:buNone/>
-            </a:pPr>
-            <a:r>
-              <a:t/>
-            </a:r>
-            <a:endParaRPr sz="1500"/>
-          </a:p>
-          <a:p>
-            <a:pPr indent="0" lvl="0" marL="0" rtl="0" algn="l">
-              <a:spcBef>
-                <a:spcPts val="1200"/>
-              </a:spcBef>
-              <a:spcAft>
-                <a:spcPts val="0"/>
-              </a:spcAft>
-              <a:buNone/>
-            </a:pPr>
-            <a:r>
-              <a:rPr b="1" lang="en" sz="1500"/>
-              <a:t>(?)</a:t>
-            </a:r>
-            <a:r>
-              <a:rPr lang="en" sz="1500"/>
-              <a:t> How are community members feeling about Climara?</a:t>
-            </a:r>
-            <a:endParaRPr sz="1500"/>
-          </a:p>
-          <a:p>
-            <a:pPr indent="0" lvl="0" marL="0" rtl="0" algn="l">
-              <a:spcBef>
-                <a:spcPts val="1200"/>
-              </a:spcBef>
-              <a:spcAft>
-                <a:spcPts val="0"/>
-              </a:spcAft>
-              <a:buNone/>
-            </a:pPr>
-            <a:r>
-              <a:t/>
-            </a:r>
-            <a:endParaRPr sz="1500"/>
-          </a:p>
-          <a:p>
-            <a:pPr indent="0" lvl="0" marL="0" rtl="0" algn="l">
-              <a:spcBef>
-                <a:spcPts val="1000"/>
-              </a:spcBef>
-              <a:spcAft>
-                <a:spcPts val="0"/>
-              </a:spcAft>
-              <a:buNone/>
-            </a:pPr>
-            <a:r>
-              <a:rPr b="1" lang="en" sz="1500"/>
-              <a:t>(?)</a:t>
-            </a:r>
-            <a:r>
-              <a:rPr lang="en" sz="1500"/>
-              <a:t> What other treatments are members using?</a:t>
-            </a:r>
-            <a:endParaRPr sz="1500"/>
+                <a:spcPts val="0"/>
+              </a:spcAft>
+              <a:buNone/>
+            </a:pPr>
+            <a:r>
+              <a:rPr lang="en"/>
+              <a:t>Performance Review</a:t>
+            </a:r>
+            <a:endParaRPr/>
           </a:p>
         </p:txBody>
       </p:sp>
       <p:pic>
         <p:nvPicPr>
-          <p:cNvPr id="97" name="Google Shape;97;p18" title="measured-table.png"/>
+          <p:cNvPr id="96" name="Google Shape;96;p18" title="measured-table.png"/>
           <p:cNvPicPr preferRelativeResize="0"/>
           <p:nvPr/>
         </p:nvPicPr>
@@ -14373,7 +15016,7 @@
         </p:blipFill>
         <p:spPr>
           <a:xfrm>
-            <a:off x="3202275" y="550175"/>
+            <a:off x="1654538" y="843675"/>
             <a:ext cx="5834926" cy="4139351"/>
           </a:xfrm>
           <a:prstGeom prst="rect">
@@ -14404,7 +15047,7 @@
   <p:cSld>
     <p:spTree>
       <p:nvGrpSpPr>
-        <p:cNvPr id="101" name="Shape 101"/>
+        <p:cNvPr id="100" name="Shape 100"/>
         <p:cNvGrpSpPr/>
         <p:nvPr/>
       </p:nvGrpSpPr>
@@ -14418,7 +15061,7 @@
       </p:grpSpPr>
       <p:sp>
         <p:nvSpPr>
-          <p:cNvPr id="102" name="Google Shape;102;p19"/>
+          <p:cNvPr id="101" name="Google Shape;101;p19"/>
           <p:cNvSpPr txBox="1"/>
           <p:nvPr>
             <p:ph type="title"/>
@@ -14451,6 +15094,61 @@
             <a:r>
               <a:rPr lang="en"/>
               <a:t>Insights and Findings</a:t>
+            </a:r>
+            <a:endParaRPr/>
+          </a:p>
+        </p:txBody>
+      </p:sp>
+      <p:sp>
+        <p:nvSpPr>
+          <p:cNvPr id="102" name="Google Shape;102;p19"/>
+          <p:cNvSpPr txBox="1"/>
+          <p:nvPr>
+            <p:ph idx="1" type="body"/>
+          </p:nvPr>
+        </p:nvSpPr>
+        <p:spPr>
+          <a:xfrm>
+            <a:off x="311700" y="844700"/>
+            <a:ext cx="8520600" cy="488700"/>
+          </a:xfrm>
+          <a:prstGeom prst="rect">
+            <a:avLst/>
+          </a:prstGeom>
+        </p:spPr>
+        <p:txBody>
+          <a:bodyPr anchorCtr="0" anchor="t" bIns="91425" lIns="91425" spcFirstLastPara="1" rIns="91425" wrap="square" tIns="91425">
+            <a:noAutofit/>
+          </a:bodyPr>
+          <a:lstStyle/>
+          <a:p>
+            <a:pPr indent="0" lvl="0" marL="0" rtl="0" algn="l">
+              <a:spcBef>
+                <a:spcPts val="0"/>
+              </a:spcBef>
+              <a:spcAft>
+                <a:spcPts val="0"/>
+              </a:spcAft>
+              <a:buNone/>
+            </a:pPr>
+            <a:r>
+              <a:rPr b="1" lang="en"/>
+              <a:t>Guided Review Questions</a:t>
+            </a:r>
+            <a:endParaRPr b="1"/>
+          </a:p>
+          <a:p>
+            <a:pPr indent="0" lvl="0" marL="0" rtl="0" algn="l">
+              <a:spcBef>
+                <a:spcPts val="1200"/>
+              </a:spcBef>
+              <a:spcAft>
+                <a:spcPts val="1200"/>
+              </a:spcAft>
+              <a:buNone/>
+            </a:pPr>
+            <a:r>
+              <a:t/>
             </a:r>
             <a:endParaRPr/>
           </a:p>
@@ -14466,12 +15164,15 @@
         </p:nvSpPr>
         <p:spPr>
           <a:xfrm>
-            <a:off x="311700" y="844700"/>
-            <a:ext cx="8520600" cy="488700"/>
+            <a:off x="289700" y="1472950"/>
+            <a:ext cx="8484900" cy="3331800"/>
           </a:xfrm>
           <a:prstGeom prst="rect">
             <a:avLst/>
           </a:prstGeom>
+          <a:ln>
+            <a:noFill/>
+          </a:ln>
         </p:spPr>
         <p:txBody>
           <a:bodyPr anchorCtr="0" anchor="t" bIns="91425" lIns="91425" spcFirstLastPara="1" rIns="91425" wrap="square" tIns="91425">
@@ -14479,6 +15180,220 @@
           </a:bodyPr>
           <a:lstStyle/>
           <a:p>
+            <a:pPr indent="0" lvl="0" marL="0" rtl="0" algn="l">
+              <a:spcBef>
+                <a:spcPts val="0"/>
+              </a:spcBef>
+              <a:spcAft>
+                <a:spcPts val="0"/>
+              </a:spcAft>
+              <a:buNone/>
+            </a:pPr>
+            <a:r>
+              <a:rPr b="1" lang="en" sz="1500"/>
+              <a:t>(?)</a:t>
+            </a:r>
+            <a:r>
+              <a:rPr lang="en" sz="1500"/>
+              <a:t> Who is the Climara patient in the community?</a:t>
+            </a:r>
+            <a:endParaRPr sz="1500"/>
+          </a:p>
+          <a:p>
+            <a:pPr indent="0" lvl="0" marL="0" rtl="0" algn="l">
+              <a:spcBef>
+                <a:spcPts val="1000"/>
+              </a:spcBef>
+              <a:spcAft>
+                <a:spcPts val="0"/>
+              </a:spcAft>
+              <a:buNone/>
+            </a:pPr>
+            <a:r>
+              <a:t/>
+            </a:r>
+            <a:endParaRPr sz="1500"/>
+          </a:p>
+          <a:p>
+            <a:pPr indent="0" lvl="0" marL="0" rtl="0" algn="l">
+              <a:spcBef>
+                <a:spcPts val="1000"/>
+              </a:spcBef>
+              <a:spcAft>
+                <a:spcPts val="0"/>
+              </a:spcAft>
+              <a:buNone/>
+            </a:pPr>
+            <a:r>
+              <a:rPr b="1" lang="en" sz="1500"/>
+              <a:t>(?)</a:t>
+            </a:r>
+            <a:r>
+              <a:rPr lang="en" sz="1500"/>
+              <a:t> What is the Climara patient experience in the community?</a:t>
+            </a:r>
+            <a:endParaRPr sz="1500"/>
+          </a:p>
+          <a:p>
+            <a:pPr indent="0" lvl="0" marL="0" rtl="0" algn="l">
+              <a:spcBef>
+                <a:spcPts val="1000"/>
+              </a:spcBef>
+              <a:spcAft>
+                <a:spcPts val="0"/>
+              </a:spcAft>
+              <a:buNone/>
+            </a:pPr>
+            <a:r>
+              <a:t/>
+            </a:r>
+            <a:endParaRPr sz="1500"/>
+          </a:p>
+          <a:p>
+            <a:pPr indent="0" lvl="0" marL="0" rtl="0" algn="l">
+              <a:spcBef>
+                <a:spcPts val="1200"/>
+              </a:spcBef>
+              <a:spcAft>
+                <a:spcPts val="0"/>
+              </a:spcAft>
+              <a:buNone/>
+            </a:pPr>
+            <a:r>
+              <a:rPr b="1" lang="en" sz="1500"/>
+              <a:t>(?)</a:t>
+            </a:r>
+            <a:r>
+              <a:rPr lang="en" sz="1500"/>
+              <a:t> How are community members feeling about Climara?</a:t>
+            </a:r>
+            <a:endParaRPr sz="1500"/>
+          </a:p>
+          <a:p>
+            <a:pPr indent="0" lvl="0" marL="0" rtl="0" algn="l">
+              <a:spcBef>
+                <a:spcPts val="1200"/>
+              </a:spcBef>
+              <a:spcAft>
+                <a:spcPts val="0"/>
+              </a:spcAft>
+              <a:buNone/>
+            </a:pPr>
+            <a:r>
+              <a:t/>
+            </a:r>
+            <a:endParaRPr sz="1500"/>
+          </a:p>
+          <a:p>
+            <a:pPr indent="0" lvl="0" marL="0" rtl="0" algn="l">
+              <a:spcBef>
+                <a:spcPts val="1000"/>
+              </a:spcBef>
+              <a:spcAft>
+                <a:spcPts val="0"/>
+              </a:spcAft>
+              <a:buNone/>
+            </a:pPr>
+            <a:r>
+              <a:rPr b="1" lang="en" sz="1500"/>
+              <a:t>(?)</a:t>
+            </a:r>
+            <a:r>
+              <a:rPr lang="en" sz="1500"/>
+              <a:t> What other treatments are members using?</a:t>
+            </a:r>
+            <a:endParaRPr sz="1500"/>
+          </a:p>
+        </p:txBody>
+      </p:sp>
+    </p:spTree>
+  </p:cSld>
+  <p:clrMapOvr>
+    <a:masterClrMapping/>
+  </p:clrMapOvr>
+</p:sld>
+</file>
+
+<file path=ppt/slides/slide8.xml><?xml version="1.0" encoding="utf-8"?>
+<p:sld xmlns:a="http://schemas.openxmlformats.org/drawingml/2006/main" xmlns:r="http://schemas.openxmlformats.org/officeDocument/2006/relationships" xmlns:mc="http://schemas.openxmlformats.org/markup-compatibility/2006" xmlns:mv="urn:schemas-microsoft-com:mac:vml" xmlns:p="http://schemas.openxmlformats.org/presentationml/2006/main" xmlns:c="http://schemas.openxmlformats.org/drawingml/2006/chart" xmlns:dgm="http://schemas.openxmlformats.org/drawingml/2006/diagram" xmlns:o="urn:schemas-microsoft-com:office:office" xmlns:v="urn:schemas-microsoft-com:vml" xmlns:pvml="urn:schemas-microsoft-com:office:powerpoint" xmlns:com="http://schemas.openxmlformats.org/drawingml/2006/compatibility" xmlns:p14="http://schemas.microsoft.com/office/powerpoint/2010/main" xmlns:p15="http://schemas.microsoft.com/office/powerpoint/2012/main" xmlns:ahyp="http://schemas.microsoft.com/office/drawing/2018/hyperlinkcolor">
+  <p:cSld>
+    <p:spTree>
+      <p:nvGrpSpPr>
+        <p:cNvPr id="107" name="Shape 107"/>
+        <p:cNvGrpSpPr/>
+        <p:nvPr/>
+      </p:nvGrpSpPr>
+      <p:grpSpPr>
+        <a:xfrm>
+          <a:off x="0" y="0"/>
+          <a:ext cx="0" cy="0"/>
+          <a:chOff x="0" y="0"/>
+          <a:chExt cx="0" cy="0"/>
+        </a:xfrm>
+      </p:grpSpPr>
+      <p:sp>
+        <p:nvSpPr>
+          <p:cNvPr id="108" name="Google Shape;108;p20"/>
+          <p:cNvSpPr txBox="1"/>
+          <p:nvPr>
+            <p:ph type="title"/>
+          </p:nvPr>
+        </p:nvSpPr>
+        <p:spPr>
+          <a:xfrm>
+            <a:off x="311700" y="137300"/>
+            <a:ext cx="8520600" cy="707400"/>
+          </a:xfrm>
+          <a:prstGeom prst="rect">
+            <a:avLst/>
+          </a:prstGeom>
+        </p:spPr>
+        <p:txBody>
+          <a:bodyPr anchorCtr="0" anchor="t" bIns="91425" lIns="91425" spcFirstLastPara="1" rIns="91425" wrap="square" tIns="91425">
+            <a:normAutofit fontScale="90000"/>
+          </a:bodyPr>
+          <a:lstStyle/>
+          <a:p>
+            <a:pPr indent="0" lvl="0" marL="0" rtl="0" algn="l">
+              <a:spcBef>
+                <a:spcPts val="0"/>
+              </a:spcBef>
+              <a:spcAft>
+                <a:spcPts val="0"/>
+              </a:spcAft>
+              <a:buNone/>
+            </a:pPr>
+            <a:r>
+              <a:rPr lang="en"/>
+              <a:t>Insights and Findings</a:t>
+            </a:r>
+            <a:endParaRPr/>
+          </a:p>
+        </p:txBody>
+      </p:sp>
+      <p:sp>
+        <p:nvSpPr>
+          <p:cNvPr id="109" name="Google Shape;109;p20"/>
+          <p:cNvSpPr txBox="1"/>
+          <p:nvPr>
+            <p:ph idx="1" type="body"/>
+          </p:nvPr>
+        </p:nvSpPr>
+        <p:spPr>
+          <a:xfrm>
+            <a:off x="311700" y="844700"/>
+            <a:ext cx="8520600" cy="488700"/>
+          </a:xfrm>
+          <a:prstGeom prst="rect">
+            <a:avLst/>
+          </a:prstGeom>
+        </p:spPr>
+        <p:txBody>
+          <a:bodyPr anchorCtr="0" anchor="t" bIns="91425" lIns="91425" spcFirstLastPara="1" rIns="91425" wrap="square" tIns="91425">
+            <a:noAutofit/>
+          </a:bodyPr>
+          <a:lstStyle/>
+          <a:p>
             <a:pPr indent="-342900" lvl="0" marL="457200" rtl="0" algn="l">
               <a:spcBef>
                 <a:spcPts val="0"/>
@@ -14499,7 +15414,7 @@
       </p:sp>
       <p:pic>
         <p:nvPicPr>
-          <p:cNvPr id="104" name="Google Shape;104;p19" title="Screenshot 2026-09-23 at 11.38.00 AM.png"/>
+          <p:cNvPr id="110" name="Google Shape;110;p20" title="Screenshot 2026-09-23 at 11.38.00 AM.png"/>
           <p:cNvPicPr preferRelativeResize="0"/>
           <p:nvPr/>
         </p:nvPicPr>
@@ -14533,7 +15448,7 @@
       </p:pic>
       <p:pic>
         <p:nvPicPr>
-          <p:cNvPr id="105" name="Google Shape;105;p19" title="Screenshot 2026-09-23 at 11.41.46 AM.png"/>
+          <p:cNvPr id="111" name="Google Shape;111;p20" title="Screenshot 2026-09-23 at 11.41.46 AM.png"/>
           <p:cNvPicPr preferRelativeResize="0"/>
           <p:nvPr/>
         </p:nvPicPr>
@@ -14549,146 +15464,6 @@
           <a:xfrm>
             <a:off x="5612425" y="1292287"/>
             <a:ext cx="2754925" cy="3537875"/>
-          </a:xfrm>
-          <a:prstGeom prst="rect">
-            <a:avLst/>
-          </a:prstGeom>
-          <a:noFill/>
-          <a:ln cap="flat" cmpd="sng" w="9525">
-            <a:solidFill>
-              <a:schemeClr val="dk2"/>
-            </a:solidFill>
-            <a:prstDash val="solid"/>
-            <a:round/>
-            <a:headEnd len="sm" w="sm" type="none"/>
-            <a:tailEnd len="sm" w="sm" type="none"/>
-          </a:ln>
-        </p:spPr>
-      </p:pic>
-    </p:spTree>
-  </p:cSld>
-  <p:clrMapOvr>
-    <a:masterClrMapping/>
-  </p:clrMapOvr>
-</p:sld>
-</file>
-
-<file path=ppt/slides/slide8.xml><?xml version="1.0" encoding="utf-8"?>
-<p:sld xmlns:a="http://schemas.openxmlformats.org/drawingml/2006/main" xmlns:r="http://schemas.openxmlformats.org/officeDocument/2006/relationships" xmlns:mc="http://schemas.openxmlformats.org/markup-compatibility/2006" xmlns:mv="urn:schemas-microsoft-com:mac:vml" xmlns:p="http://schemas.openxmlformats.org/presentationml/2006/main" xmlns:c="http://schemas.openxmlformats.org/drawingml/2006/chart" xmlns:dgm="http://schemas.openxmlformats.org/drawingml/2006/diagram" xmlns:o="urn:schemas-microsoft-com:office:office" xmlns:v="urn:schemas-microsoft-com:vml" xmlns:pvml="urn:schemas-microsoft-com:office:powerpoint" xmlns:com="http://schemas.openxmlformats.org/drawingml/2006/compatibility" xmlns:p14="http://schemas.microsoft.com/office/powerpoint/2010/main" xmlns:p15="http://schemas.microsoft.com/office/powerpoint/2012/main" xmlns:ahyp="http://schemas.microsoft.com/office/drawing/2018/hyperlinkcolor">
-  <p:cSld>
-    <p:spTree>
-      <p:nvGrpSpPr>
-        <p:cNvPr id="109" name="Shape 109"/>
-        <p:cNvGrpSpPr/>
-        <p:nvPr/>
-      </p:nvGrpSpPr>
-      <p:grpSpPr>
-        <a:xfrm>
-          <a:off x="0" y="0"/>
-          <a:ext cx="0" cy="0"/>
-          <a:chOff x="0" y="0"/>
-          <a:chExt cx="0" cy="0"/>
-        </a:xfrm>
-      </p:grpSpPr>
-      <p:sp>
-        <p:nvSpPr>
-          <p:cNvPr id="110" name="Google Shape;110;p20"/>
-          <p:cNvSpPr txBox="1"/>
-          <p:nvPr>
-            <p:ph type="title"/>
-          </p:nvPr>
-        </p:nvSpPr>
-        <p:spPr>
-          <a:xfrm>
-            <a:off x="311700" y="137300"/>
-            <a:ext cx="8520600" cy="707400"/>
-          </a:xfrm>
-          <a:prstGeom prst="rect">
-            <a:avLst/>
-          </a:prstGeom>
-        </p:spPr>
-        <p:txBody>
-          <a:bodyPr anchorCtr="0" anchor="t" bIns="91425" lIns="91425" spcFirstLastPara="1" rIns="91425" wrap="square" tIns="91425">
-            <a:normAutofit fontScale="90000"/>
-          </a:bodyPr>
-          <a:lstStyle/>
-          <a:p>
-            <a:pPr indent="0" lvl="0" marL="0" rtl="0" algn="l">
-              <a:spcBef>
-                <a:spcPts val="0"/>
-              </a:spcBef>
-              <a:spcAft>
-                <a:spcPts val="0"/>
-              </a:spcAft>
-              <a:buNone/>
-            </a:pPr>
-            <a:r>
-              <a:rPr lang="en"/>
-              <a:t>Insights and Findings</a:t>
-            </a:r>
-            <a:endParaRPr/>
-          </a:p>
-        </p:txBody>
-      </p:sp>
-      <p:sp>
-        <p:nvSpPr>
-          <p:cNvPr id="111" name="Google Shape;111;p20"/>
-          <p:cNvSpPr txBox="1"/>
-          <p:nvPr>
-            <p:ph idx="1" type="body"/>
-          </p:nvPr>
-        </p:nvSpPr>
-        <p:spPr>
-          <a:xfrm>
-            <a:off x="311700" y="844700"/>
-            <a:ext cx="8520600" cy="488700"/>
-          </a:xfrm>
-          <a:prstGeom prst="rect">
-            <a:avLst/>
-          </a:prstGeom>
-        </p:spPr>
-        <p:txBody>
-          <a:bodyPr anchorCtr="0" anchor="t" bIns="91425" lIns="91425" spcFirstLastPara="1" rIns="91425" wrap="square" tIns="91425">
-            <a:noAutofit/>
-          </a:bodyPr>
-          <a:lstStyle/>
-          <a:p>
-            <a:pPr indent="-342900" lvl="0" marL="457200" rtl="0" algn="l">
-              <a:spcBef>
-                <a:spcPts val="0"/>
-              </a:spcBef>
-              <a:spcAft>
-                <a:spcPts val="0"/>
-              </a:spcAft>
-              <a:buSzPts val="1800"/>
-              <a:buChar char="●"/>
-            </a:pPr>
-            <a:r>
-              <a:rPr lang="en"/>
-              <a:t>Who is the MHT Menopause Patient Community?</a:t>
-            </a:r>
-            <a:endParaRPr/>
-          </a:p>
-        </p:txBody>
-      </p:sp>
-      <p:pic>
-        <p:nvPicPr>
-          <p:cNvPr id="112" name="Google Shape;112;p20" title="mht-m-comm-tx.png"/>
-          <p:cNvPicPr preferRelativeResize="0"/>
-          <p:nvPr/>
-        </p:nvPicPr>
-        <p:blipFill>
-          <a:blip r:embed="rId3">
-            <a:alphaModFix/>
-          </a:blip>
-          <a:stretch>
-            <a:fillRect/>
-          </a:stretch>
-        </p:blipFill>
-        <p:spPr>
-          <a:xfrm>
-            <a:off x="152400" y="1485800"/>
-            <a:ext cx="8839200" cy="2952293"/>
           </a:xfrm>
           <a:prstGeom prst="rect">
             <a:avLst/>
@@ -14718,7 +15493,7 @@
   <p:cSld>
     <p:spTree>
       <p:nvGrpSpPr>
-        <p:cNvPr id="116" name="Shape 116"/>
+        <p:cNvPr id="115" name="Shape 115"/>
         <p:cNvGrpSpPr/>
         <p:nvPr/>
       </p:nvGrpSpPr>
@@ -14732,7 +15507,7 @@
       </p:grpSpPr>
       <p:sp>
         <p:nvSpPr>
-          <p:cNvPr id="117" name="Google Shape;117;p21"/>
+          <p:cNvPr id="116" name="Google Shape;116;p21"/>
           <p:cNvSpPr txBox="1"/>
           <p:nvPr>
             <p:ph type="title"/>
@@ -14772,7 +15547,7 @@
       </p:sp>
       <p:sp>
         <p:nvSpPr>
-          <p:cNvPr id="118" name="Google Shape;118;p21"/>
+          <p:cNvPr id="117" name="Google Shape;117;p21"/>
           <p:cNvSpPr txBox="1"/>
           <p:nvPr>
             <p:ph idx="1" type="body"/>
@@ -14809,26 +15584,11 @@
             </a:r>
             <a:endParaRPr/>
           </a:p>
-          <a:p>
-            <a:pPr indent="0" lvl="0" marL="457200" rtl="0" algn="l">
-              <a:spcBef>
-                <a:spcPts val="1200"/>
-              </a:spcBef>
-              <a:spcAft>
-                <a:spcPts val="1200"/>
-              </a:spcAft>
-              <a:buNone/>
-            </a:pPr>
-            <a:r>
-              <a:t/>
-            </a:r>
-            <a:endParaRPr/>
-          </a:p>
         </p:txBody>
       </p:sp>
       <p:pic>
         <p:nvPicPr>
-          <p:cNvPr id="119" name="Google Shape;119;p21"/>
+          <p:cNvPr id="118" name="Google Shape;118;p21" title="mht-m-comm-tx.png"/>
           <p:cNvPicPr preferRelativeResize="0"/>
           <p:nvPr/>
         </p:nvPicPr>
@@ -14843,7 +15603,7 @@
         <p:spPr>
           <a:xfrm>
             <a:off x="152400" y="1485800"/>
-            <a:ext cx="8839203" cy="3062545"/>
+            <a:ext cx="8839200" cy="2952293"/>
           </a:xfrm>
           <a:prstGeom prst="rect">
             <a:avLst/>
